--- a/braze-analysis/deck/v6/marketing/DECK_marketing.pptx
+++ b/braze-analysis/deck/v6/marketing/DECK_marketing.pptx
@@ -17,9 +17,10 @@
     <p:sldId id="265" r:id="rId11"/>
     <p:sldId id="266" r:id="rId12"/>
     <p:sldId id="267" r:id="rId13"/>
+    <p:sldId id="268" r:id="rId14"/>
   </p:sldIdLst>
   <p:notesMasterIdLst>
-    <p:notesMasterId r:id="rId14"/>
+    <p:notesMasterId r:id="rId15"/>
   </p:notesMasterIdLst>
   <p:sldSz cx="12192000" cy="6858000"/>
   <p:notesSz cx="6858000" cy="12192000"/>
@@ -118,7 +119,7 @@
   <p:extLst>
     <p:ext uri="{521415D9-36F7-43E2-AB2F-B90AF26B5E84}">
       <p14:sectionLst xmlns:p14="http://schemas.microsoft.com/office/powerpoint/2010/main">
-        <p14:section name="Inicio" id="{a5c43540-35d7-73ce-757f-7b5fb0ebce84}">
+        <p14:section name="Inicio" id="{10d54e60-fa37-03ee-8f16-65a60b84a059}">
           <p14:sldIdLst>
             <p14:sldId id="256"/>
             <p14:sldId id="257"/>
@@ -132,6 +133,7 @@
             <p14:sldId id="265"/>
             <p14:sldId id="266"/>
             <p14:sldId id="267"/>
+            <p14:sldId id="268"/>
           </p14:sldIdLst>
         </p14:section>
       </p14:sectionLst>
@@ -826,6 +828,94 @@
             <a:fld id="{F7021451-1387-4CA6-816F-3879F97B5CBC}" type="slidenum">
               <a:rPr lang="en-US"/>
               <a:t>12</a:t>
+            </a:fld>
+            <a:endParaRPr lang="en-US"/>
+          </a:p>
+        </p:txBody>
+      </p:sp>
+    </p:spTree>
+    <p:extLst>
+      <p:ext uri="{BB962C8B-B14F-4D97-AF65-F5344CB8AC3E}">
+        <p14:creationId xmlns:p14="http://schemas.microsoft.com/office/powerpoint/2010/main" val="1024086991"/>
+      </p:ext>
+    </p:extLst>
+  </p:cSld>
+  <p:clrMapOvr>
+    <a:masterClrMapping/>
+  </p:clrMapOvr>
+</p:notes>
+</file>
+
+<file path=ppt/notesSlides/notesSlide13.xml><?xml version="1.0" encoding="utf-8"?>
+<p:notes xmlns:a="http://schemas.openxmlformats.org/drawingml/2006/main" xmlns:r="http://schemas.openxmlformats.org/officeDocument/2006/relationships" xmlns:p="http://schemas.openxmlformats.org/presentationml/2006/main">
+  <p:cSld>
+    <p:spTree>
+      <p:nvGrpSpPr>
+        <p:cNvPr id="1" name=""/>
+        <p:cNvGrpSpPr/>
+        <p:nvPr/>
+      </p:nvGrpSpPr>
+      <p:grpSpPr>
+        <a:xfrm>
+          <a:off x="0" y="0"/>
+          <a:ext cx="0" cy="0"/>
+          <a:chOff x="0" y="0"/>
+          <a:chExt cx="0" cy="0"/>
+        </a:xfrm>
+      </p:grpSpPr>
+      <p:sp>
+        <p:nvSpPr>
+          <p:cNvPr id="2" name="Slide Image Placeholder 1"/>
+          <p:cNvSpPr>
+            <a:spLocks noGrp="1" noRot="1" noChangeAspect="1"/>
+          </p:cNvSpPr>
+          <p:nvPr>
+            <p:ph type="sldImg"/>
+          </p:nvPr>
+        </p:nvSpPr>
+        <p:spPr/>
+      </p:sp>
+      <p:sp>
+        <p:nvSpPr>
+          <p:cNvPr id="3" name="Notes Placeholder 2"/>
+          <p:cNvSpPr>
+            <a:spLocks noGrp="1"/>
+          </p:cNvSpPr>
+          <p:nvPr>
+            <p:ph type="body" idx="1"/>
+          </p:nvPr>
+        </p:nvSpPr>
+        <p:spPr/>
+        <p:txBody>
+          <a:bodyPr/>
+          <a:lstStyle/>
+          <a:p>
+            <a:r>
+              <a:rPr lang="en-US" dirty="0"/>
+              <a:t/>
+            </a:r>
+            <a:endParaRPr lang="en-US" dirty="0"/>
+          </a:p>
+        </p:txBody>
+      </p:sp>
+      <p:sp>
+        <p:nvSpPr>
+          <p:cNvPr id="4" name="Slide Number Placeholder 3"/>
+          <p:cNvSpPr>
+            <a:spLocks noGrp="1"/>
+          </p:cNvSpPr>
+          <p:nvPr>
+            <p:ph type="sldNum" sz="quarter" idx="10"/>
+          </p:nvPr>
+        </p:nvSpPr>
+        <p:spPr/>
+        <p:txBody>
+          <a:bodyPr/>
+          <a:lstStyle/>
+          <a:p>
+            <a:fld id="{F7021451-1387-4CA6-816F-3879F97B5CBC}" type="slidenum">
+              <a:rPr lang="en-US"/>
+              <a:t>13</a:t>
             </a:fld>
             <a:endParaRPr lang="en-US"/>
           </a:p>
@@ -4220,7 +4310,7 @@
         <p:spPr>
           <a:xfrm>
             <a:off x="511956" y="390033"/>
-            <a:ext cx="11521105" cy="661609"/>
+            <a:ext cx="11521105" cy="330805"/>
           </a:xfrm>
           <a:prstGeom prst="rect">
             <a:avLst/>
@@ -4247,7 +4337,7 @@
                 <a:ea typeface="Inter" pitchFamily="34" charset="-122"/>
                 <a:cs typeface="Inter" pitchFamily="34" charset="-120"/>
               </a:rPr>
-              <a:t>Qué lo explica: escribimos por lo que queremos vender, cada equipo por su cuenta y sin medir</a:t>
+              <a:t>Braze no tiene dueño ni reglas comunes, y se nota en ocho datos de la cuenta</a:t>
             </a:r>
             <a:endParaRPr lang="en-US" sz="2210" dirty="0"/>
           </a:p>
@@ -4261,320 +4351,8 @@
         </p:nvSpPr>
         <p:spPr>
           <a:xfrm>
-            <a:off x="511956" y="1161358"/>
-            <a:ext cx="3527477" cy="1398573"/>
-          </a:xfrm>
-          <a:prstGeom prst="rect">
-            <a:avLst/>
-          </a:prstGeom>
-          <a:solidFill>
-            <a:srgbClr val="F4F6F9"/>
-          </a:solidFill>
-          <a:ln/>
-        </p:spPr>
-      </p:sp>
-      <p:sp>
-        <p:nvSpPr>
-          <p:cNvPr id="4" name="Text 2"/>
-          <p:cNvSpPr txBox="1"/>
-          <p:nvPr/>
-        </p:nvSpPr>
-        <p:spPr>
-          <a:xfrm>
-            <a:off x="694765" y="1356374"/>
-            <a:ext cx="3275003" cy="512107"/>
-          </a:xfrm>
-          <a:prstGeom prst="rect">
-            <a:avLst/>
-          </a:prstGeom>
-          <a:noFill/>
-          <a:ln/>
-        </p:spPr>
-        <p:txBody>
-          <a:bodyPr wrap="square" lIns="0" tIns="0" rIns="0" bIns="0" rtlCol="0" anchor="t"/>
-          <a:lstStyle/>
-          <a:p>
-            <a:pPr algn="l" indent="0" marL="0">
-              <a:lnSpc>
-                <a:spcPct val="83000"/>
-              </a:lnSpc>
-              <a:buNone/>
-            </a:pPr>
-            <a:r>
-              <a:rPr lang="en-US" sz="4030" b="1" spc="-80" kern="0" dirty="0">
-                <a:solidFill>
-                  <a:srgbClr val="0B1220"/>
-                </a:solidFill>
-                <a:latin typeface="Inter" pitchFamily="34" charset="0"/>
-                <a:ea typeface="Inter" pitchFamily="34" charset="-122"/>
-                <a:cs typeface="Inter" pitchFamily="34" charset="-120"/>
-              </a:rPr>
-              <a:t>73 %</a:t>
-            </a:r>
-            <a:endParaRPr lang="en-US" sz="4030" dirty="0"/>
-          </a:p>
-        </p:txBody>
-      </p:sp>
-      <p:sp>
-        <p:nvSpPr>
-          <p:cNvPr id="5" name="Text 3"/>
-          <p:cNvSpPr txBox="1"/>
-          <p:nvPr/>
-        </p:nvSpPr>
-        <p:spPr>
-          <a:xfrm>
-            <a:off x="694765" y="1953782"/>
-            <a:ext cx="3275003" cy="411132"/>
-          </a:xfrm>
-          <a:prstGeom prst="rect">
-            <a:avLst/>
-          </a:prstGeom>
-          <a:noFill/>
-          <a:ln/>
-        </p:spPr>
-        <p:txBody>
-          <a:bodyPr wrap="square" lIns="0" tIns="0" rIns="0" bIns="0" rtlCol="0" anchor="t"/>
-          <a:lstStyle/>
-          <a:p>
-            <a:pPr algn="l" indent="0" marL="0">
-              <a:lnSpc>
-                <a:spcPct val="112000"/>
-              </a:lnSpc>
-              <a:buNone/>
-            </a:pPr>
-            <a:r>
-              <a:rPr lang="en-US" sz="1200" dirty="0">
-                <a:solidFill>
-                  <a:srgbClr val="0B1220"/>
-                </a:solidFill>
-                <a:latin typeface="Inter" pitchFamily="34" charset="0"/>
-                <a:ea typeface="Inter" pitchFamily="34" charset="-122"/>
-                <a:cs typeface="Inter" pitchFamily="34" charset="-120"/>
-              </a:rPr>
-              <a:t>de las personas no respondió a nada en nueve meses</a:t>
-            </a:r>
-            <a:endParaRPr lang="en-US" sz="1200" dirty="0"/>
-          </a:p>
-        </p:txBody>
-      </p:sp>
-      <p:sp>
-        <p:nvSpPr>
-          <p:cNvPr id="6" name="Shape 4"/>
-          <p:cNvSpPr/>
-          <p:nvPr/>
-        </p:nvSpPr>
-        <p:spPr>
-          <a:xfrm>
-            <a:off x="4331958" y="1161358"/>
-            <a:ext cx="3527628" cy="1398573"/>
-          </a:xfrm>
-          <a:prstGeom prst="rect">
-            <a:avLst/>
-          </a:prstGeom>
-          <a:solidFill>
-            <a:srgbClr val="F4F6F9"/>
-          </a:solidFill>
-          <a:ln/>
-        </p:spPr>
-      </p:sp>
-      <p:sp>
-        <p:nvSpPr>
-          <p:cNvPr id="7" name="Text 5"/>
-          <p:cNvSpPr txBox="1"/>
-          <p:nvPr/>
-        </p:nvSpPr>
-        <p:spPr>
-          <a:xfrm>
-            <a:off x="4514767" y="1356374"/>
-            <a:ext cx="3275158" cy="512107"/>
-          </a:xfrm>
-          <a:prstGeom prst="rect">
-            <a:avLst/>
-          </a:prstGeom>
-          <a:noFill/>
-          <a:ln/>
-        </p:spPr>
-        <p:txBody>
-          <a:bodyPr wrap="square" lIns="0" tIns="0" rIns="0" bIns="0" rtlCol="0" anchor="t"/>
-          <a:lstStyle/>
-          <a:p>
-            <a:pPr algn="l" indent="0" marL="0">
-              <a:lnSpc>
-                <a:spcPct val="83000"/>
-              </a:lnSpc>
-              <a:buNone/>
-            </a:pPr>
-            <a:r>
-              <a:rPr lang="en-US" sz="4030" b="1" spc="-80" kern="0" dirty="0">
-                <a:solidFill>
-                  <a:srgbClr val="0B1220"/>
-                </a:solidFill>
-                <a:latin typeface="Inter" pitchFamily="34" charset="0"/>
-                <a:ea typeface="Inter" pitchFamily="34" charset="-122"/>
-                <a:cs typeface="Inter" pitchFamily="34" charset="-120"/>
-              </a:rPr>
-              <a:t>2.3 M</a:t>
-            </a:r>
-            <a:endParaRPr lang="en-US" sz="4030" dirty="0"/>
-          </a:p>
-        </p:txBody>
-      </p:sp>
-      <p:sp>
-        <p:nvSpPr>
-          <p:cNvPr id="8" name="Text 6"/>
-          <p:cNvSpPr txBox="1"/>
-          <p:nvPr/>
-        </p:nvSpPr>
-        <p:spPr>
-          <a:xfrm>
-            <a:off x="4514767" y="1953782"/>
-            <a:ext cx="3275158" cy="411132"/>
-          </a:xfrm>
-          <a:prstGeom prst="rect">
-            <a:avLst/>
-          </a:prstGeom>
-          <a:noFill/>
-          <a:ln/>
-        </p:spPr>
-        <p:txBody>
-          <a:bodyPr wrap="square" lIns="0" tIns="0" rIns="0" bIns="0" rtlCol="0" anchor="t"/>
-          <a:lstStyle/>
-          <a:p>
-            <a:pPr algn="l" indent="0" marL="0">
-              <a:lnSpc>
-                <a:spcPct val="112000"/>
-              </a:lnSpc>
-              <a:buNone/>
-            </a:pPr>
-            <a:r>
-              <a:rPr lang="en-US" sz="1200" dirty="0">
-                <a:solidFill>
-                  <a:srgbClr val="0B1220"/>
-                </a:solidFill>
-                <a:latin typeface="Inter" pitchFamily="34" charset="0"/>
-                <a:ea typeface="Inter" pitchFamily="34" charset="-122"/>
-                <a:cs typeface="Inter" pitchFamily="34" charset="-120"/>
-              </a:rPr>
-              <a:t>personas al mes con tres o más campañas el mismo día</a:t>
-            </a:r>
-            <a:endParaRPr lang="en-US" sz="1200" dirty="0"/>
-          </a:p>
-        </p:txBody>
-      </p:sp>
-      <p:sp>
-        <p:nvSpPr>
-          <p:cNvPr id="9" name="Shape 7"/>
-          <p:cNvSpPr/>
-          <p:nvPr/>
-        </p:nvSpPr>
-        <p:spPr>
-          <a:xfrm>
-            <a:off x="8152111" y="1161358"/>
-            <a:ext cx="3527477" cy="1398573"/>
-          </a:xfrm>
-          <a:prstGeom prst="rect">
-            <a:avLst/>
-          </a:prstGeom>
-          <a:solidFill>
-            <a:srgbClr val="E8EEFC"/>
-          </a:solidFill>
-          <a:ln/>
-        </p:spPr>
-      </p:sp>
-      <p:sp>
-        <p:nvSpPr>
-          <p:cNvPr id="10" name="Text 8"/>
-          <p:cNvSpPr txBox="1"/>
-          <p:nvPr/>
-        </p:nvSpPr>
-        <p:spPr>
-          <a:xfrm>
-            <a:off x="8334920" y="1356374"/>
-            <a:ext cx="3275003" cy="512107"/>
-          </a:xfrm>
-          <a:prstGeom prst="rect">
-            <a:avLst/>
-          </a:prstGeom>
-          <a:noFill/>
-          <a:ln/>
-        </p:spPr>
-        <p:txBody>
-          <a:bodyPr wrap="square" lIns="0" tIns="0" rIns="0" bIns="0" rtlCol="0" anchor="t"/>
-          <a:lstStyle/>
-          <a:p>
-            <a:pPr algn="l" indent="0" marL="0">
-              <a:lnSpc>
-                <a:spcPct val="83000"/>
-              </a:lnSpc>
-              <a:buNone/>
-            </a:pPr>
-            <a:r>
-              <a:rPr lang="en-US" sz="4030" b="1" spc="-80" kern="0" dirty="0">
-                <a:solidFill>
-                  <a:srgbClr val="1F4FD8"/>
-                </a:solidFill>
-                <a:latin typeface="Inter" pitchFamily="34" charset="0"/>
-                <a:ea typeface="Inter" pitchFamily="34" charset="-122"/>
-                <a:cs typeface="Inter" pitchFamily="34" charset="-120"/>
-              </a:rPr>
-              <a:t>1 de 3,228</a:t>
-            </a:r>
-            <a:endParaRPr lang="en-US" sz="4030" dirty="0"/>
-          </a:p>
-        </p:txBody>
-      </p:sp>
-      <p:sp>
-        <p:nvSpPr>
-          <p:cNvPr id="11" name="Text 9"/>
-          <p:cNvSpPr txBox="1"/>
-          <p:nvPr/>
-        </p:nvSpPr>
-        <p:spPr>
-          <a:xfrm>
-            <a:off x="8334920" y="1953782"/>
-            <a:ext cx="3275003" cy="205566"/>
-          </a:xfrm>
-          <a:prstGeom prst="rect">
-            <a:avLst/>
-          </a:prstGeom>
-          <a:noFill/>
-          <a:ln/>
-        </p:spPr>
-        <p:txBody>
-          <a:bodyPr wrap="square" lIns="0" tIns="0" rIns="0" bIns="0" rtlCol="0" anchor="t"/>
-          <a:lstStyle/>
-          <a:p>
-            <a:pPr algn="l" indent="0" marL="0">
-              <a:lnSpc>
-                <a:spcPct val="112000"/>
-              </a:lnSpc>
-              <a:buNone/>
-            </a:pPr>
-            <a:r>
-              <a:rPr lang="en-US" sz="1200" dirty="0">
-                <a:solidFill>
-                  <a:srgbClr val="0B1220"/>
-                </a:solidFill>
-                <a:latin typeface="Inter" pitchFamily="34" charset="0"/>
-                <a:ea typeface="Inter" pitchFamily="34" charset="-122"/>
-                <a:cs typeface="Inter" pitchFamily="34" charset="-120"/>
-              </a:rPr>
-              <a:t>Canvas tiene un grupo de control real</a:t>
-            </a:r>
-            <a:endParaRPr lang="en-US" sz="1200" dirty="0"/>
-          </a:p>
-        </p:txBody>
-      </p:sp>
-      <p:sp>
-        <p:nvSpPr>
-          <p:cNvPr id="12" name="Shape 10"/>
-          <p:cNvSpPr/>
-          <p:nvPr/>
-        </p:nvSpPr>
-        <p:spPr>
-          <a:xfrm>
-            <a:off x="511956" y="2784184"/>
-            <a:ext cx="3527477" cy="0"/>
+            <a:off x="511956" y="835376"/>
+            <a:ext cx="11167783" cy="0"/>
           </a:xfrm>
           <a:prstGeom prst="line">
             <a:avLst/>
@@ -4590,135 +4368,14 @@
       </p:sp>
       <p:sp>
         <p:nvSpPr>
-          <p:cNvPr id="13" name="Shape 11"/>
+          <p:cNvPr id="4" name="Shape 2"/>
           <p:cNvSpPr/>
           <p:nvPr/>
         </p:nvSpPr>
         <p:spPr>
           <a:xfrm>
-            <a:off x="511956" y="2922987"/>
-            <a:ext cx="231639" cy="231639"/>
-          </a:xfrm>
-          <a:prstGeom prst="ellipse">
-            <a:avLst/>
-          </a:prstGeom>
-          <a:solidFill>
-            <a:srgbClr val="E8EEFC"/>
-          </a:solidFill>
-          <a:ln/>
-        </p:spPr>
-      </p:sp>
-      <p:sp>
-        <p:nvSpPr>
-          <p:cNvPr id="14" name="Text 12"/>
-          <p:cNvSpPr txBox="1"/>
-          <p:nvPr/>
-        </p:nvSpPr>
-        <p:spPr>
-          <a:xfrm>
-            <a:off x="511956" y="2922987"/>
-            <a:ext cx="256876" cy="231639"/>
-          </a:xfrm>
-          <a:prstGeom prst="rect">
-            <a:avLst/>
-          </a:prstGeom>
-          <a:noFill/>
-          <a:ln/>
-        </p:spPr>
-        <p:txBody>
-          <a:bodyPr wrap="square" lIns="0" tIns="0" rIns="0" bIns="0" rtlCol="0" anchor="ctr"/>
-          <a:lstStyle/>
-          <a:p>
-            <a:pPr algn="ctr" indent="0" marL="0">
-              <a:lnSpc>
-                <a:spcPct val="112000"/>
-              </a:lnSpc>
-              <a:buNone/>
-            </a:pPr>
-            <a:r>
-              <a:rPr lang="en-US" sz="960" b="1" dirty="0">
-                <a:solidFill>
-                  <a:srgbClr val="1F4FD8"/>
-                </a:solidFill>
-                <a:latin typeface="Inter" pitchFamily="34" charset="0"/>
-                <a:ea typeface="Inter" pitchFamily="34" charset="-122"/>
-                <a:cs typeface="Inter" pitchFamily="34" charset="-120"/>
-              </a:rPr>
-              <a:t>1</a:t>
-            </a:r>
-            <a:endParaRPr lang="en-US" sz="960" dirty="0"/>
-          </a:p>
-        </p:txBody>
-      </p:sp>
-      <p:sp>
-        <p:nvSpPr>
-          <p:cNvPr id="15" name="Text 13"/>
-          <p:cNvSpPr txBox="1"/>
-          <p:nvPr/>
-        </p:nvSpPr>
-        <p:spPr>
-          <a:xfrm>
-            <a:off x="853310" y="2922987"/>
-            <a:ext cx="3299995" cy="1109213"/>
-          </a:xfrm>
-          <a:prstGeom prst="rect">
-            <a:avLst/>
-          </a:prstGeom>
-          <a:noFill/>
-          <a:ln/>
-        </p:spPr>
-        <p:txBody>
-          <a:bodyPr wrap="square" lIns="0" tIns="0" rIns="0" bIns="0" rtlCol="0" anchor="t"/>
-          <a:lstStyle/>
-          <a:p>
-            <a:pPr algn="l" indent="0" marL="0">
-              <a:lnSpc>
-                <a:spcPct val="116000"/>
-              </a:lnSpc>
-              <a:buNone/>
-            </a:pPr>
-            <a:r>
-              <a:rPr lang="en-US" sz="1250" b="1" dirty="0">
-                <a:solidFill>
-                  <a:srgbClr val="0B1220"/>
-                </a:solidFill>
-                <a:latin typeface="Inter" pitchFamily="34" charset="0"/>
-                <a:ea typeface="Inter" pitchFamily="34" charset="-122"/>
-                <a:cs typeface="Inter" pitchFamily="34" charset="-120"/>
-              </a:rPr>
-              <a:t>Escribimos por lo que queremos vender.</a:t>
-            </a:r>
-            <a:pPr algn="l" indent="0" marL="0">
-              <a:lnSpc>
-                <a:spcPct val="116000"/>
-              </a:lnSpc>
-              <a:buNone/>
-            </a:pPr>
-            <a:r>
-              <a:rPr lang="en-US" sz="1250" dirty="0">
-                <a:solidFill>
-                  <a:srgbClr val="0B1220"/>
-                </a:solidFill>
-                <a:latin typeface="Inter" pitchFamily="34" charset="0"/>
-                <a:ea typeface="Inter" pitchFamily="34" charset="-122"/>
-                <a:cs typeface="Inter" pitchFamily="34" charset="-120"/>
-              </a:rPr>
-              <a:t> Las promociones salen a listas por etapa, no por lo que la persona hizo, y le seguimos escribiendo a quien no responde.</a:t>
-            </a:r>
-            <a:endParaRPr lang="en-US" sz="1250" dirty="0"/>
-          </a:p>
-        </p:txBody>
-      </p:sp>
-      <p:sp>
-        <p:nvSpPr>
-          <p:cNvPr id="16" name="Shape 14"/>
-          <p:cNvSpPr/>
-          <p:nvPr/>
-        </p:nvSpPr>
-        <p:spPr>
-          <a:xfrm>
-            <a:off x="4331958" y="2784184"/>
-            <a:ext cx="3527628" cy="0"/>
+            <a:off x="511956" y="1467446"/>
+            <a:ext cx="11167783" cy="0"/>
           </a:xfrm>
           <a:prstGeom prst="line">
             <a:avLst/>
@@ -4734,16 +4391,1460 @@
       </p:sp>
       <p:sp>
         <p:nvSpPr>
-          <p:cNvPr id="17" name="Shape 15"/>
+          <p:cNvPr id="5" name="Text 3"/>
+          <p:cNvSpPr txBox="1"/>
+          <p:nvPr/>
+        </p:nvSpPr>
+        <p:spPr>
+          <a:xfrm>
+            <a:off x="511956" y="925499"/>
+            <a:ext cx="3718649" cy="129760"/>
+          </a:xfrm>
+          <a:prstGeom prst="rect">
+            <a:avLst/>
+          </a:prstGeom>
+          <a:noFill/>
+          <a:ln/>
+        </p:spPr>
+        <p:txBody>
+          <a:bodyPr wrap="square" lIns="0" tIns="0" rIns="0" bIns="0" rtlCol="0" anchor="t"/>
+          <a:lstStyle/>
+          <a:p>
+            <a:pPr algn="l" indent="0" marL="0">
+              <a:lnSpc>
+                <a:spcPct val="107000"/>
+              </a:lnSpc>
+              <a:buNone/>
+            </a:pPr>
+            <a:r>
+              <a:rPr lang="en-US" sz="790" b="1" spc="80" kern="0" dirty="0">
+                <a:solidFill>
+                  <a:srgbClr val="6B7484"/>
+                </a:solidFill>
+                <a:latin typeface="Inter" pitchFamily="34" charset="0"/>
+                <a:ea typeface="Inter" pitchFamily="34" charset="-122"/>
+                <a:cs typeface="Inter" pitchFamily="34" charset="-120"/>
+              </a:rPr>
+              <a:t>QUÉ SE MANDA</a:t>
+            </a:r>
+            <a:endParaRPr lang="en-US" sz="790" dirty="0"/>
+          </a:p>
+        </p:txBody>
+      </p:sp>
+      <p:sp>
+        <p:nvSpPr>
+          <p:cNvPr id="6" name="Text 4"/>
+          <p:cNvSpPr txBox="1"/>
+          <p:nvPr/>
+        </p:nvSpPr>
+        <p:spPr>
+          <a:xfrm>
+            <a:off x="511956" y="1079523"/>
+            <a:ext cx="3039830" cy="293580"/>
+          </a:xfrm>
+          <a:prstGeom prst="rect">
+            <a:avLst/>
+          </a:prstGeom>
+          <a:noFill/>
+          <a:ln/>
+        </p:spPr>
+        <p:txBody>
+          <a:bodyPr wrap="square" lIns="0" tIns="0" rIns="0" bIns="0" rtlCol="0" anchor="t"/>
+          <a:lstStyle/>
+          <a:p>
+            <a:pPr algn="l" indent="0" marL="0">
+              <a:lnSpc>
+                <a:spcPct val="107000"/>
+              </a:lnSpc>
+              <a:buNone/>
+            </a:pPr>
+            <a:r>
+              <a:rPr lang="en-US" sz="900" dirty="0">
+                <a:solidFill>
+                  <a:srgbClr val="3B4556"/>
+                </a:solidFill>
+                <a:latin typeface="Inter" pitchFamily="34" charset="0"/>
+                <a:ea typeface="Inter" pitchFamily="34" charset="-122"/>
+                <a:cs typeface="Inter" pitchFamily="34" charset="-120"/>
+              </a:rPr>
+              <a:t>Todo lo que vive en Braze: campañas, Canvas, listas y configuración.</a:t>
+            </a:r>
+            <a:endParaRPr lang="en-US" sz="900" dirty="0"/>
+          </a:p>
+        </p:txBody>
+      </p:sp>
+      <p:sp>
+        <p:nvSpPr>
+          <p:cNvPr id="7" name="Text 5"/>
+          <p:cNvSpPr txBox="1"/>
+          <p:nvPr/>
+        </p:nvSpPr>
+        <p:spPr>
+          <a:xfrm>
+            <a:off x="4299556" y="925499"/>
+            <a:ext cx="3718649" cy="129760"/>
+          </a:xfrm>
+          <a:prstGeom prst="rect">
+            <a:avLst/>
+          </a:prstGeom>
+          <a:noFill/>
+          <a:ln/>
+        </p:spPr>
+        <p:txBody>
+          <a:bodyPr wrap="square" lIns="0" tIns="0" rIns="0" bIns="0" rtlCol="0" anchor="t"/>
+          <a:lstStyle/>
+          <a:p>
+            <a:pPr algn="l" indent="0" marL="0">
+              <a:lnSpc>
+                <a:spcPct val="107000"/>
+              </a:lnSpc>
+              <a:buNone/>
+            </a:pPr>
+            <a:r>
+              <a:rPr lang="en-US" sz="790" b="1" spc="80" kern="0" dirty="0">
+                <a:solidFill>
+                  <a:srgbClr val="6B7484"/>
+                </a:solidFill>
+                <a:latin typeface="Inter" pitchFamily="34" charset="0"/>
+                <a:ea typeface="Inter" pitchFamily="34" charset="-122"/>
+                <a:cs typeface="Inter" pitchFamily="34" charset="-120"/>
+              </a:rPr>
+              <a:t>QUIÉN</a:t>
+            </a:r>
+            <a:endParaRPr lang="en-US" sz="790" dirty="0"/>
+          </a:p>
+        </p:txBody>
+      </p:sp>
+      <p:sp>
+        <p:nvSpPr>
+          <p:cNvPr id="8" name="Text 6"/>
+          <p:cNvSpPr txBox="1"/>
+          <p:nvPr/>
+        </p:nvSpPr>
+        <p:spPr>
+          <a:xfrm>
+            <a:off x="4299556" y="1079523"/>
+            <a:ext cx="3256841" cy="144680"/>
+          </a:xfrm>
+          <a:prstGeom prst="rect">
+            <a:avLst/>
+          </a:prstGeom>
+          <a:noFill/>
+          <a:ln/>
+        </p:spPr>
+        <p:txBody>
+          <a:bodyPr wrap="square" lIns="0" tIns="0" rIns="0" bIns="0" rtlCol="0" anchor="t"/>
+          <a:lstStyle/>
+          <a:p>
+            <a:pPr algn="l" indent="0" marL="0">
+              <a:lnSpc>
+                <a:spcPct val="107000"/>
+              </a:lnSpc>
+              <a:buNone/>
+            </a:pPr>
+            <a:r>
+              <a:rPr lang="en-US" sz="900" dirty="0">
+                <a:solidFill>
+                  <a:srgbClr val="3B4556"/>
+                </a:solidFill>
+                <a:latin typeface="Inter" pitchFamily="34" charset="0"/>
+                <a:ea typeface="Inter" pitchFamily="34" charset="-122"/>
+                <a:cs typeface="Inter" pitchFamily="34" charset="-120"/>
+              </a:rPr>
+              <a:t>Todos los equipos; nadie es dueño de la cuenta completa.</a:t>
+            </a:r>
+            <a:endParaRPr lang="en-US" sz="900" dirty="0"/>
+          </a:p>
+        </p:txBody>
+      </p:sp>
+      <p:sp>
+        <p:nvSpPr>
+          <p:cNvPr id="9" name="Text 7"/>
+          <p:cNvSpPr txBox="1"/>
+          <p:nvPr/>
+        </p:nvSpPr>
+        <p:spPr>
+          <a:xfrm>
+            <a:off x="8087156" y="925499"/>
+            <a:ext cx="3718649" cy="129760"/>
+          </a:xfrm>
+          <a:prstGeom prst="rect">
+            <a:avLst/>
+          </a:prstGeom>
+          <a:noFill/>
+          <a:ln/>
+        </p:spPr>
+        <p:txBody>
+          <a:bodyPr wrap="square" lIns="0" tIns="0" rIns="0" bIns="0" rtlCol="0" anchor="t"/>
+          <a:lstStyle/>
+          <a:p>
+            <a:pPr algn="l" indent="0" marL="0">
+              <a:lnSpc>
+                <a:spcPct val="107000"/>
+              </a:lnSpc>
+              <a:buNone/>
+            </a:pPr>
+            <a:r>
+              <a:rPr lang="en-US" sz="790" b="1" spc="80" kern="0" dirty="0">
+                <a:solidFill>
+                  <a:srgbClr val="6B7484"/>
+                </a:solidFill>
+                <a:latin typeface="Inter" pitchFamily="34" charset="0"/>
+                <a:ea typeface="Inter" pitchFamily="34" charset="-122"/>
+                <a:cs typeface="Inter" pitchFamily="34" charset="-120"/>
+              </a:rPr>
+              <a:t>A QUIÉN</a:t>
+            </a:r>
+            <a:endParaRPr lang="en-US" sz="790" dirty="0"/>
+          </a:p>
+        </p:txBody>
+      </p:sp>
+      <p:sp>
+        <p:nvSpPr>
+          <p:cNvPr id="10" name="Text 8"/>
+          <p:cNvSpPr txBox="1"/>
+          <p:nvPr/>
+        </p:nvSpPr>
+        <p:spPr>
+          <a:xfrm>
+            <a:off x="8087156" y="1079523"/>
+            <a:ext cx="2931791" cy="144680"/>
+          </a:xfrm>
+          <a:prstGeom prst="rect">
+            <a:avLst/>
+          </a:prstGeom>
+          <a:noFill/>
+          <a:ln/>
+        </p:spPr>
+        <p:txBody>
+          <a:bodyPr wrap="square" lIns="0" tIns="0" rIns="0" bIns="0" rtlCol="0" anchor="t"/>
+          <a:lstStyle/>
+          <a:p>
+            <a:pPr algn="l" indent="0" marL="0">
+              <a:lnSpc>
+                <a:spcPct val="107000"/>
+              </a:lnSpc>
+              <a:buNone/>
+            </a:pPr>
+            <a:r>
+              <a:rPr lang="en-US" sz="900" dirty="0">
+                <a:solidFill>
+                  <a:srgbClr val="3B4556"/>
+                </a:solidFill>
+                <a:latin typeface="Inter" pitchFamily="34" charset="0"/>
+                <a:ea typeface="Inter" pitchFamily="34" charset="-122"/>
+                <a:cs typeface="Inter" pitchFamily="34" charset="-120"/>
+              </a:rPr>
+              <a:t>Toda la base, incluidos bloqueados y dados de baja.</a:t>
+            </a:r>
+            <a:endParaRPr lang="en-US" sz="900" dirty="0"/>
+          </a:p>
+        </p:txBody>
+      </p:sp>
+      <p:sp>
+        <p:nvSpPr>
+          <p:cNvPr id="11" name="Shape 9"/>
           <p:cNvSpPr/>
           <p:nvPr/>
         </p:nvSpPr>
         <p:spPr>
           <a:xfrm>
-            <a:off x="4331958" y="2922987"/>
-            <a:ext cx="231639" cy="231639"/>
-          </a:xfrm>
-          <a:prstGeom prst="ellipse">
+            <a:off x="511956" y="1591630"/>
+            <a:ext cx="2609061" cy="0"/>
+          </a:xfrm>
+          <a:prstGeom prst="line">
+            <a:avLst/>
+          </a:prstGeom>
+          <a:noFill/>
+          <a:ln w="19291">
+            <a:solidFill>
+              <a:srgbClr val="0B1220"/>
+            </a:solidFill>
+            <a:prstDash val="solid"/>
+          </a:ln>
+        </p:spPr>
+      </p:sp>
+      <p:sp>
+        <p:nvSpPr>
+          <p:cNvPr id="12" name="Text 10"/>
+          <p:cNvSpPr txBox="1"/>
+          <p:nvPr/>
+        </p:nvSpPr>
+        <p:spPr>
+          <a:xfrm>
+            <a:off x="511956" y="1710991"/>
+            <a:ext cx="2705621" cy="134884"/>
+          </a:xfrm>
+          <a:prstGeom prst="rect">
+            <a:avLst/>
+          </a:prstGeom>
+          <a:noFill/>
+          <a:ln/>
+        </p:spPr>
+        <p:txBody>
+          <a:bodyPr wrap="square" lIns="0" tIns="0" rIns="0" bIns="0" rtlCol="0" anchor="t"/>
+          <a:lstStyle/>
+          <a:p>
+            <a:pPr algn="l" indent="0" marL="0">
+              <a:lnSpc>
+                <a:spcPct val="112000"/>
+              </a:lnSpc>
+              <a:buNone/>
+            </a:pPr>
+            <a:r>
+              <a:rPr lang="en-US" sz="790" b="1" spc="80" kern="0" dirty="0">
+                <a:solidFill>
+                  <a:srgbClr val="6B7484"/>
+                </a:solidFill>
+                <a:latin typeface="Inter" pitchFamily="34" charset="0"/>
+                <a:ea typeface="Inter" pitchFamily="34" charset="-122"/>
+                <a:cs typeface="Inter" pitchFamily="34" charset="-120"/>
+              </a:rPr>
+              <a:t>ORDEN</a:t>
+            </a:r>
+            <a:endParaRPr lang="en-US" sz="790" dirty="0"/>
+          </a:p>
+        </p:txBody>
+      </p:sp>
+      <p:sp>
+        <p:nvSpPr>
+          <p:cNvPr id="13" name="Text 11"/>
+          <p:cNvSpPr txBox="1"/>
+          <p:nvPr/>
+        </p:nvSpPr>
+        <p:spPr>
+          <a:xfrm>
+            <a:off x="511956" y="1900733"/>
+            <a:ext cx="2705621" cy="390184"/>
+          </a:xfrm>
+          <a:prstGeom prst="rect">
+            <a:avLst/>
+          </a:prstGeom>
+          <a:noFill/>
+          <a:ln/>
+        </p:spPr>
+        <p:txBody>
+          <a:bodyPr wrap="square" lIns="0" tIns="0" rIns="0" bIns="0" rtlCol="0" anchor="t"/>
+          <a:lstStyle/>
+          <a:p>
+            <a:pPr algn="l" indent="0" marL="0">
+              <a:lnSpc>
+                <a:spcPct val="83000"/>
+              </a:lnSpc>
+              <a:buNone/>
+            </a:pPr>
+            <a:r>
+              <a:rPr lang="en-US" sz="3070" b="1" spc="-60" kern="0" dirty="0">
+                <a:solidFill>
+                  <a:srgbClr val="0B1220"/>
+                </a:solidFill>
+                <a:latin typeface="Inter" pitchFamily="34" charset="0"/>
+                <a:ea typeface="Inter" pitchFamily="34" charset="-122"/>
+                <a:cs typeface="Inter" pitchFamily="34" charset="-120"/>
+              </a:rPr>
+              <a:t>6,144</a:t>
+            </a:r>
+            <a:endParaRPr lang="en-US" sz="3070" dirty="0"/>
+          </a:p>
+        </p:txBody>
+      </p:sp>
+      <p:sp>
+        <p:nvSpPr>
+          <p:cNvPr id="14" name="Text 12"/>
+          <p:cNvSpPr txBox="1"/>
+          <p:nvPr/>
+        </p:nvSpPr>
+        <p:spPr>
+          <a:xfrm>
+            <a:off x="511956" y="2345774"/>
+            <a:ext cx="2705621" cy="378278"/>
+          </a:xfrm>
+          <a:prstGeom prst="rect">
+            <a:avLst/>
+          </a:prstGeom>
+          <a:noFill/>
+          <a:ln/>
+        </p:spPr>
+        <p:txBody>
+          <a:bodyPr wrap="square" lIns="0" tIns="0" rIns="0" bIns="0" rtlCol="0" anchor="t"/>
+          <a:lstStyle/>
+          <a:p>
+            <a:pPr algn="l" indent="0" marL="0">
+              <a:lnSpc>
+                <a:spcPct val="112000"/>
+              </a:lnSpc>
+              <a:buNone/>
+            </a:pPr>
+            <a:r>
+              <a:rPr lang="en-US" sz="1100" dirty="0">
+                <a:solidFill>
+                  <a:srgbClr val="3B4556"/>
+                </a:solidFill>
+                <a:latin typeface="Inter" pitchFamily="34" charset="0"/>
+                <a:ea typeface="Inter" pitchFamily="34" charset="-122"/>
+                <a:cs typeface="Inter" pitchFamily="34" charset="-120"/>
+              </a:rPr>
+              <a:t>comunicaciones guardadas; en septiembre solo 341 mandaron algo</a:t>
+            </a:r>
+            <a:endParaRPr lang="en-US" sz="1100" dirty="0"/>
+          </a:p>
+        </p:txBody>
+      </p:sp>
+      <p:sp>
+        <p:nvSpPr>
+          <p:cNvPr id="15" name="Shape 13"/>
+          <p:cNvSpPr/>
+          <p:nvPr/>
+        </p:nvSpPr>
+        <p:spPr>
+          <a:xfrm>
+            <a:off x="3364713" y="1591630"/>
+            <a:ext cx="2609212" cy="0"/>
+          </a:xfrm>
+          <a:prstGeom prst="line">
+            <a:avLst/>
+          </a:prstGeom>
+          <a:noFill/>
+          <a:ln w="19291">
+            <a:solidFill>
+              <a:srgbClr val="0B1220"/>
+            </a:solidFill>
+            <a:prstDash val="solid"/>
+          </a:ln>
+        </p:spPr>
+      </p:sp>
+      <p:sp>
+        <p:nvSpPr>
+          <p:cNvPr id="16" name="Text 14"/>
+          <p:cNvSpPr txBox="1"/>
+          <p:nvPr/>
+        </p:nvSpPr>
+        <p:spPr>
+          <a:xfrm>
+            <a:off x="3364713" y="1710991"/>
+            <a:ext cx="2705776" cy="134884"/>
+          </a:xfrm>
+          <a:prstGeom prst="rect">
+            <a:avLst/>
+          </a:prstGeom>
+          <a:noFill/>
+          <a:ln/>
+        </p:spPr>
+        <p:txBody>
+          <a:bodyPr wrap="square" lIns="0" tIns="0" rIns="0" bIns="0" rtlCol="0" anchor="t"/>
+          <a:lstStyle/>
+          <a:p>
+            <a:pPr algn="l" indent="0" marL="0">
+              <a:lnSpc>
+                <a:spcPct val="112000"/>
+              </a:lnSpc>
+              <a:buNone/>
+            </a:pPr>
+            <a:r>
+              <a:rPr lang="en-US" sz="790" b="1" spc="80" kern="0" dirty="0">
+                <a:solidFill>
+                  <a:srgbClr val="6B7484"/>
+                </a:solidFill>
+                <a:latin typeface="Inter" pitchFamily="34" charset="0"/>
+                <a:ea typeface="Inter" pitchFamily="34" charset="-122"/>
+                <a:cs typeface="Inter" pitchFamily="34" charset="-120"/>
+              </a:rPr>
+              <a:t>ORDEN</a:t>
+            </a:r>
+            <a:endParaRPr lang="en-US" sz="790" dirty="0"/>
+          </a:p>
+        </p:txBody>
+      </p:sp>
+      <p:sp>
+        <p:nvSpPr>
+          <p:cNvPr id="17" name="Text 15"/>
+          <p:cNvSpPr txBox="1"/>
+          <p:nvPr/>
+        </p:nvSpPr>
+        <p:spPr>
+          <a:xfrm>
+            <a:off x="3364713" y="1900733"/>
+            <a:ext cx="2705776" cy="390184"/>
+          </a:xfrm>
+          <a:prstGeom prst="rect">
+            <a:avLst/>
+          </a:prstGeom>
+          <a:noFill/>
+          <a:ln/>
+        </p:spPr>
+        <p:txBody>
+          <a:bodyPr wrap="square" lIns="0" tIns="0" rIns="0" bIns="0" rtlCol="0" anchor="t"/>
+          <a:lstStyle/>
+          <a:p>
+            <a:pPr algn="l" indent="0" marL="0">
+              <a:lnSpc>
+                <a:spcPct val="83000"/>
+              </a:lnSpc>
+              <a:buNone/>
+            </a:pPr>
+            <a:r>
+              <a:rPr lang="en-US" sz="3070" b="1" spc="-60" kern="0" dirty="0">
+                <a:solidFill>
+                  <a:srgbClr val="0B1220"/>
+                </a:solidFill>
+                <a:latin typeface="Inter" pitchFamily="34" charset="0"/>
+                <a:ea typeface="Inter" pitchFamily="34" charset="-122"/>
+                <a:cs typeface="Inter" pitchFamily="34" charset="-120"/>
+              </a:rPr>
+              <a:t>229</a:t>
+            </a:r>
+            <a:endParaRPr lang="en-US" sz="3070" dirty="0"/>
+          </a:p>
+        </p:txBody>
+      </p:sp>
+      <p:sp>
+        <p:nvSpPr>
+          <p:cNvPr id="18" name="Text 16"/>
+          <p:cNvSpPr txBox="1"/>
+          <p:nvPr/>
+        </p:nvSpPr>
+        <p:spPr>
+          <a:xfrm>
+            <a:off x="3364713" y="2345774"/>
+            <a:ext cx="2705776" cy="378278"/>
+          </a:xfrm>
+          <a:prstGeom prst="rect">
+            <a:avLst/>
+          </a:prstGeom>
+          <a:noFill/>
+          <a:ln/>
+        </p:spPr>
+        <p:txBody>
+          <a:bodyPr wrap="square" lIns="0" tIns="0" rIns="0" bIns="0" rtlCol="0" anchor="t"/>
+          <a:lstStyle/>
+          <a:p>
+            <a:pPr algn="l" indent="0" marL="0">
+              <a:lnSpc>
+                <a:spcPct val="112000"/>
+              </a:lnSpc>
+              <a:buNone/>
+            </a:pPr>
+            <a:r>
+              <a:rPr lang="en-US" sz="1100" dirty="0">
+                <a:solidFill>
+                  <a:srgbClr val="3B4556"/>
+                </a:solidFill>
+                <a:latin typeface="Inter" pitchFamily="34" charset="0"/>
+                <a:ea typeface="Inter" pitchFamily="34" charset="-122"/>
+                <a:cs typeface="Inter" pitchFamily="34" charset="-120"/>
+              </a:rPr>
+              <a:t>marcadas como archivadas siguieron enviando en septiembre</a:t>
+            </a:r>
+            <a:endParaRPr lang="en-US" sz="1100" dirty="0"/>
+          </a:p>
+        </p:txBody>
+      </p:sp>
+      <p:sp>
+        <p:nvSpPr>
+          <p:cNvPr id="19" name="Shape 17"/>
+          <p:cNvSpPr/>
+          <p:nvPr/>
+        </p:nvSpPr>
+        <p:spPr>
+          <a:xfrm>
+            <a:off x="6217620" y="1591630"/>
+            <a:ext cx="2609212" cy="0"/>
+          </a:xfrm>
+          <a:prstGeom prst="line">
+            <a:avLst/>
+          </a:prstGeom>
+          <a:noFill/>
+          <a:ln w="19291">
+            <a:solidFill>
+              <a:srgbClr val="0B1220"/>
+            </a:solidFill>
+            <a:prstDash val="solid"/>
+          </a:ln>
+        </p:spPr>
+      </p:sp>
+      <p:sp>
+        <p:nvSpPr>
+          <p:cNvPr id="20" name="Text 18"/>
+          <p:cNvSpPr txBox="1"/>
+          <p:nvPr/>
+        </p:nvSpPr>
+        <p:spPr>
+          <a:xfrm>
+            <a:off x="6217620" y="1710991"/>
+            <a:ext cx="2705776" cy="134884"/>
+          </a:xfrm>
+          <a:prstGeom prst="rect">
+            <a:avLst/>
+          </a:prstGeom>
+          <a:noFill/>
+          <a:ln/>
+        </p:spPr>
+        <p:txBody>
+          <a:bodyPr wrap="square" lIns="0" tIns="0" rIns="0" bIns="0" rtlCol="0" anchor="t"/>
+          <a:lstStyle/>
+          <a:p>
+            <a:pPr algn="l" indent="0" marL="0">
+              <a:lnSpc>
+                <a:spcPct val="112000"/>
+              </a:lnSpc>
+              <a:buNone/>
+            </a:pPr>
+            <a:r>
+              <a:rPr lang="en-US" sz="790" b="1" spc="80" kern="0" dirty="0">
+                <a:solidFill>
+                  <a:srgbClr val="6B7484"/>
+                </a:solidFill>
+                <a:latin typeface="Inter" pitchFamily="34" charset="0"/>
+                <a:ea typeface="Inter" pitchFamily="34" charset="-122"/>
+                <a:cs typeface="Inter" pitchFamily="34" charset="-120"/>
+              </a:rPr>
+              <a:t>DUEÑO</a:t>
+            </a:r>
+            <a:endParaRPr lang="en-US" sz="790" dirty="0"/>
+          </a:p>
+        </p:txBody>
+      </p:sp>
+      <p:sp>
+        <p:nvSpPr>
+          <p:cNvPr id="21" name="Text 19"/>
+          <p:cNvSpPr txBox="1"/>
+          <p:nvPr/>
+        </p:nvSpPr>
+        <p:spPr>
+          <a:xfrm>
+            <a:off x="6217620" y="1900733"/>
+            <a:ext cx="2705776" cy="390184"/>
+          </a:xfrm>
+          <a:prstGeom prst="rect">
+            <a:avLst/>
+          </a:prstGeom>
+          <a:noFill/>
+          <a:ln/>
+        </p:spPr>
+        <p:txBody>
+          <a:bodyPr wrap="square" lIns="0" tIns="0" rIns="0" bIns="0" rtlCol="0" anchor="t"/>
+          <a:lstStyle/>
+          <a:p>
+            <a:pPr algn="l" indent="0" marL="0">
+              <a:lnSpc>
+                <a:spcPct val="83000"/>
+              </a:lnSpc>
+              <a:buNone/>
+            </a:pPr>
+            <a:r>
+              <a:rPr lang="en-US" sz="3070" b="1" spc="-60" kern="0" dirty="0">
+                <a:solidFill>
+                  <a:srgbClr val="0B1220"/>
+                </a:solidFill>
+                <a:latin typeface="Inter" pitchFamily="34" charset="0"/>
+                <a:ea typeface="Inter" pitchFamily="34" charset="-122"/>
+                <a:cs typeface="Inter" pitchFamily="34" charset="-120"/>
+              </a:rPr>
+              <a:t>748</a:t>
+            </a:r>
+            <a:endParaRPr lang="en-US" sz="3070" dirty="0"/>
+          </a:p>
+        </p:txBody>
+      </p:sp>
+      <p:sp>
+        <p:nvSpPr>
+          <p:cNvPr id="22" name="Text 20"/>
+          <p:cNvSpPr txBox="1"/>
+          <p:nvPr/>
+        </p:nvSpPr>
+        <p:spPr>
+          <a:xfrm>
+            <a:off x="6217620" y="2345774"/>
+            <a:ext cx="2705776" cy="567417"/>
+          </a:xfrm>
+          <a:prstGeom prst="rect">
+            <a:avLst/>
+          </a:prstGeom>
+          <a:noFill/>
+          <a:ln/>
+        </p:spPr>
+        <p:txBody>
+          <a:bodyPr wrap="square" lIns="0" tIns="0" rIns="0" bIns="0" rtlCol="0" anchor="t"/>
+          <a:lstStyle/>
+          <a:p>
+            <a:pPr algn="l" indent="0" marL="0">
+              <a:lnSpc>
+                <a:spcPct val="112000"/>
+              </a:lnSpc>
+              <a:buNone/>
+            </a:pPr>
+            <a:r>
+              <a:rPr lang="en-US" sz="1100" dirty="0">
+                <a:solidFill>
+                  <a:srgbClr val="3B4556"/>
+                </a:solidFill>
+                <a:latin typeface="Inter" pitchFamily="34" charset="0"/>
+                <a:ea typeface="Inter" pitchFamily="34" charset="-122"/>
+                <a:cs typeface="Inter" pitchFamily="34" charset="-120"/>
+              </a:rPr>
+              <a:t>comunicaciones sin equipo ni ticket; 210 de ellas mandaron 85 M mensajes en 2026</a:t>
+            </a:r>
+            <a:endParaRPr lang="en-US" sz="1100" dirty="0"/>
+          </a:p>
+        </p:txBody>
+      </p:sp>
+      <p:sp>
+        <p:nvSpPr>
+          <p:cNvPr id="23" name="Shape 21"/>
+          <p:cNvSpPr/>
+          <p:nvPr/>
+        </p:nvSpPr>
+        <p:spPr>
+          <a:xfrm>
+            <a:off x="9070527" y="1591630"/>
+            <a:ext cx="2609212" cy="0"/>
+          </a:xfrm>
+          <a:prstGeom prst="line">
+            <a:avLst/>
+          </a:prstGeom>
+          <a:noFill/>
+          <a:ln w="19291">
+            <a:solidFill>
+              <a:srgbClr val="0B1220"/>
+            </a:solidFill>
+            <a:prstDash val="solid"/>
+          </a:ln>
+        </p:spPr>
+      </p:sp>
+      <p:sp>
+        <p:nvSpPr>
+          <p:cNvPr id="24" name="Text 22"/>
+          <p:cNvSpPr txBox="1"/>
+          <p:nvPr/>
+        </p:nvSpPr>
+        <p:spPr>
+          <a:xfrm>
+            <a:off x="9070527" y="1710991"/>
+            <a:ext cx="2705776" cy="134884"/>
+          </a:xfrm>
+          <a:prstGeom prst="rect">
+            <a:avLst/>
+          </a:prstGeom>
+          <a:noFill/>
+          <a:ln/>
+        </p:spPr>
+        <p:txBody>
+          <a:bodyPr wrap="square" lIns="0" tIns="0" rIns="0" bIns="0" rtlCol="0" anchor="t"/>
+          <a:lstStyle/>
+          <a:p>
+            <a:pPr algn="l" indent="0" marL="0">
+              <a:lnSpc>
+                <a:spcPct val="112000"/>
+              </a:lnSpc>
+              <a:buNone/>
+            </a:pPr>
+            <a:r>
+              <a:rPr lang="en-US" sz="790" b="1" spc="80" kern="0" dirty="0">
+                <a:solidFill>
+                  <a:srgbClr val="6B7484"/>
+                </a:solidFill>
+                <a:latin typeface="Inter" pitchFamily="34" charset="0"/>
+                <a:ea typeface="Inter" pitchFamily="34" charset="-122"/>
+                <a:cs typeface="Inter" pitchFamily="34" charset="-120"/>
+              </a:rPr>
+              <a:t>DUEÑO</a:t>
+            </a:r>
+            <a:endParaRPr lang="en-US" sz="790" dirty="0"/>
+          </a:p>
+        </p:txBody>
+      </p:sp>
+      <p:sp>
+        <p:nvSpPr>
+          <p:cNvPr id="25" name="Text 23"/>
+          <p:cNvSpPr txBox="1"/>
+          <p:nvPr/>
+        </p:nvSpPr>
+        <p:spPr>
+          <a:xfrm>
+            <a:off x="9070527" y="1900733"/>
+            <a:ext cx="2705776" cy="390184"/>
+          </a:xfrm>
+          <a:prstGeom prst="rect">
+            <a:avLst/>
+          </a:prstGeom>
+          <a:noFill/>
+          <a:ln/>
+        </p:spPr>
+        <p:txBody>
+          <a:bodyPr wrap="square" lIns="0" tIns="0" rIns="0" bIns="0" rtlCol="0" anchor="t"/>
+          <a:lstStyle/>
+          <a:p>
+            <a:pPr algn="l" indent="0" marL="0">
+              <a:lnSpc>
+                <a:spcPct val="83000"/>
+              </a:lnSpc>
+              <a:buNone/>
+            </a:pPr>
+            <a:r>
+              <a:rPr lang="en-US" sz="3070" b="1" spc="-60" kern="0" dirty="0">
+                <a:solidFill>
+                  <a:srgbClr val="0B1220"/>
+                </a:solidFill>
+                <a:latin typeface="Inter" pitchFamily="34" charset="0"/>
+                <a:ea typeface="Inter" pitchFamily="34" charset="-122"/>
+                <a:cs typeface="Inter" pitchFamily="34" charset="-120"/>
+              </a:rPr>
+              <a:t>74</a:t>
+            </a:r>
+            <a:endParaRPr lang="en-US" sz="3070" dirty="0"/>
+          </a:p>
+        </p:txBody>
+      </p:sp>
+      <p:sp>
+        <p:nvSpPr>
+          <p:cNvPr id="26" name="Text 24"/>
+          <p:cNvSpPr txBox="1"/>
+          <p:nvPr/>
+        </p:nvSpPr>
+        <p:spPr>
+          <a:xfrm>
+            <a:off x="9070527" y="2345774"/>
+            <a:ext cx="2705776" cy="567417"/>
+          </a:xfrm>
+          <a:prstGeom prst="rect">
+            <a:avLst/>
+          </a:prstGeom>
+          <a:noFill/>
+          <a:ln/>
+        </p:spPr>
+        <p:txBody>
+          <a:bodyPr wrap="square" lIns="0" tIns="0" rIns="0" bIns="0" rtlCol="0" anchor="t"/>
+          <a:lstStyle/>
+          <a:p>
+            <a:pPr algn="l" indent="0" marL="0">
+              <a:lnSpc>
+                <a:spcPct val="112000"/>
+              </a:lnSpc>
+              <a:buNone/>
+            </a:pPr>
+            <a:r>
+              <a:rPr lang="en-US" sz="1100" dirty="0">
+                <a:solidFill>
+                  <a:srgbClr val="3B4556"/>
+                </a:solidFill>
+                <a:latin typeface="Inter" pitchFamily="34" charset="0"/>
+                <a:ea typeface="Inter" pitchFamily="34" charset="-122"/>
+                <a:cs typeface="Inter" pitchFamily="34" charset="-120"/>
+              </a:rPr>
+              <a:t>campañas se copiaron cinco o más veces en vez de medirse: 667 versiones</a:t>
+            </a:r>
+            <a:endParaRPr lang="en-US" sz="1100" dirty="0"/>
+          </a:p>
+        </p:txBody>
+      </p:sp>
+      <p:sp>
+        <p:nvSpPr>
+          <p:cNvPr id="27" name="Shape 25"/>
+          <p:cNvSpPr/>
+          <p:nvPr/>
+        </p:nvSpPr>
+        <p:spPr>
+          <a:xfrm>
+            <a:off x="511956" y="3190946"/>
+            <a:ext cx="2609061" cy="0"/>
+          </a:xfrm>
+          <a:prstGeom prst="line">
+            <a:avLst/>
+          </a:prstGeom>
+          <a:noFill/>
+          <a:ln w="19291">
+            <a:solidFill>
+              <a:srgbClr val="0B1220"/>
+            </a:solidFill>
+            <a:prstDash val="solid"/>
+          </a:ln>
+        </p:spPr>
+      </p:sp>
+      <p:sp>
+        <p:nvSpPr>
+          <p:cNvPr id="28" name="Text 26"/>
+          <p:cNvSpPr txBox="1"/>
+          <p:nvPr/>
+        </p:nvSpPr>
+        <p:spPr>
+          <a:xfrm>
+            <a:off x="511956" y="3310307"/>
+            <a:ext cx="2705621" cy="134884"/>
+          </a:xfrm>
+          <a:prstGeom prst="rect">
+            <a:avLst/>
+          </a:prstGeom>
+          <a:noFill/>
+          <a:ln/>
+        </p:spPr>
+        <p:txBody>
+          <a:bodyPr wrap="square" lIns="0" tIns="0" rIns="0" bIns="0" rtlCol="0" anchor="t"/>
+          <a:lstStyle/>
+          <a:p>
+            <a:pPr algn="l" indent="0" marL="0">
+              <a:lnSpc>
+                <a:spcPct val="112000"/>
+              </a:lnSpc>
+              <a:buNone/>
+            </a:pPr>
+            <a:r>
+              <a:rPr lang="en-US" sz="790" b="1" spc="80" kern="0" dirty="0">
+                <a:solidFill>
+                  <a:srgbClr val="6B7484"/>
+                </a:solidFill>
+                <a:latin typeface="Inter" pitchFamily="34" charset="0"/>
+                <a:ea typeface="Inter" pitchFamily="34" charset="-122"/>
+                <a:cs typeface="Inter" pitchFamily="34" charset="-120"/>
+              </a:rPr>
+              <a:t>REGLAS</a:t>
+            </a:r>
+            <a:endParaRPr lang="en-US" sz="790" dirty="0"/>
+          </a:p>
+        </p:txBody>
+      </p:sp>
+      <p:sp>
+        <p:nvSpPr>
+          <p:cNvPr id="29" name="Text 27"/>
+          <p:cNvSpPr txBox="1"/>
+          <p:nvPr/>
+        </p:nvSpPr>
+        <p:spPr>
+          <a:xfrm>
+            <a:off x="511956" y="3500049"/>
+            <a:ext cx="2705621" cy="390184"/>
+          </a:xfrm>
+          <a:prstGeom prst="rect">
+            <a:avLst/>
+          </a:prstGeom>
+          <a:noFill/>
+          <a:ln/>
+        </p:spPr>
+        <p:txBody>
+          <a:bodyPr wrap="square" lIns="0" tIns="0" rIns="0" bIns="0" rtlCol="0" anchor="t"/>
+          <a:lstStyle/>
+          <a:p>
+            <a:pPr algn="l" indent="0" marL="0">
+              <a:lnSpc>
+                <a:spcPct val="83000"/>
+              </a:lnSpc>
+              <a:buNone/>
+            </a:pPr>
+            <a:r>
+              <a:rPr lang="en-US" sz="3070" b="1" spc="-60" kern="0" dirty="0">
+                <a:solidFill>
+                  <a:srgbClr val="1F4FD8"/>
+                </a:solidFill>
+                <a:latin typeface="Inter" pitchFamily="34" charset="0"/>
+                <a:ea typeface="Inter" pitchFamily="34" charset="-122"/>
+                <a:cs typeface="Inter" pitchFamily="34" charset="-120"/>
+              </a:rPr>
+              <a:t>43 M</a:t>
+            </a:r>
+            <a:endParaRPr lang="en-US" sz="3070" dirty="0"/>
+          </a:p>
+        </p:txBody>
+      </p:sp>
+      <p:sp>
+        <p:nvSpPr>
+          <p:cNvPr id="30" name="Text 28"/>
+          <p:cNvSpPr txBox="1"/>
+          <p:nvPr/>
+        </p:nvSpPr>
+        <p:spPr>
+          <a:xfrm>
+            <a:off x="511956" y="3945090"/>
+            <a:ext cx="2705621" cy="378278"/>
+          </a:xfrm>
+          <a:prstGeom prst="rect">
+            <a:avLst/>
+          </a:prstGeom>
+          <a:noFill/>
+          <a:ln/>
+        </p:spPr>
+        <p:txBody>
+          <a:bodyPr wrap="square" lIns="0" tIns="0" rIns="0" bIns="0" rtlCol="0" anchor="t"/>
+          <a:lstStyle/>
+          <a:p>
+            <a:pPr algn="l" indent="0" marL="0">
+              <a:lnSpc>
+                <a:spcPct val="112000"/>
+              </a:lnSpc>
+              <a:buNone/>
+            </a:pPr>
+            <a:r>
+              <a:rPr lang="en-US" sz="1100" dirty="0">
+                <a:solidFill>
+                  <a:srgbClr val="3B4556"/>
+                </a:solidFill>
+                <a:latin typeface="Inter" pitchFamily="34" charset="0"/>
+                <a:ea typeface="Inter" pitchFamily="34" charset="-122"/>
+                <a:cs typeface="Inter" pitchFamily="34" charset="-120"/>
+              </a:rPr>
+              <a:t>promociones a personas con KPay congelado</a:t>
+            </a:r>
+            <a:endParaRPr lang="en-US" sz="1100" dirty="0"/>
+          </a:p>
+        </p:txBody>
+      </p:sp>
+      <p:sp>
+        <p:nvSpPr>
+          <p:cNvPr id="31" name="Shape 29"/>
+          <p:cNvSpPr/>
+          <p:nvPr/>
+        </p:nvSpPr>
+        <p:spPr>
+          <a:xfrm>
+            <a:off x="3364713" y="3190946"/>
+            <a:ext cx="2609212" cy="0"/>
+          </a:xfrm>
+          <a:prstGeom prst="line">
+            <a:avLst/>
+          </a:prstGeom>
+          <a:noFill/>
+          <a:ln w="19291">
+            <a:solidFill>
+              <a:srgbClr val="0B1220"/>
+            </a:solidFill>
+            <a:prstDash val="solid"/>
+          </a:ln>
+        </p:spPr>
+      </p:sp>
+      <p:sp>
+        <p:nvSpPr>
+          <p:cNvPr id="32" name="Text 30"/>
+          <p:cNvSpPr txBox="1"/>
+          <p:nvPr/>
+        </p:nvSpPr>
+        <p:spPr>
+          <a:xfrm>
+            <a:off x="3364713" y="3310307"/>
+            <a:ext cx="2705776" cy="134884"/>
+          </a:xfrm>
+          <a:prstGeom prst="rect">
+            <a:avLst/>
+          </a:prstGeom>
+          <a:noFill/>
+          <a:ln/>
+        </p:spPr>
+        <p:txBody>
+          <a:bodyPr wrap="square" lIns="0" tIns="0" rIns="0" bIns="0" rtlCol="0" anchor="t"/>
+          <a:lstStyle/>
+          <a:p>
+            <a:pPr algn="l" indent="0" marL="0">
+              <a:lnSpc>
+                <a:spcPct val="112000"/>
+              </a:lnSpc>
+              <a:buNone/>
+            </a:pPr>
+            <a:r>
+              <a:rPr lang="en-US" sz="790" b="1" spc="80" kern="0" dirty="0">
+                <a:solidFill>
+                  <a:srgbClr val="6B7484"/>
+                </a:solidFill>
+                <a:latin typeface="Inter" pitchFamily="34" charset="0"/>
+                <a:ea typeface="Inter" pitchFamily="34" charset="-122"/>
+                <a:cs typeface="Inter" pitchFamily="34" charset="-120"/>
+              </a:rPr>
+              <a:t>REGLAS</a:t>
+            </a:r>
+            <a:endParaRPr lang="en-US" sz="790" dirty="0"/>
+          </a:p>
+        </p:txBody>
+      </p:sp>
+      <p:sp>
+        <p:nvSpPr>
+          <p:cNvPr id="33" name="Text 31"/>
+          <p:cNvSpPr txBox="1"/>
+          <p:nvPr/>
+        </p:nvSpPr>
+        <p:spPr>
+          <a:xfrm>
+            <a:off x="3364713" y="3500049"/>
+            <a:ext cx="2705776" cy="390184"/>
+          </a:xfrm>
+          <a:prstGeom prst="rect">
+            <a:avLst/>
+          </a:prstGeom>
+          <a:noFill/>
+          <a:ln/>
+        </p:spPr>
+        <p:txBody>
+          <a:bodyPr wrap="square" lIns="0" tIns="0" rIns="0" bIns="0" rtlCol="0" anchor="t"/>
+          <a:lstStyle/>
+          <a:p>
+            <a:pPr algn="l" indent="0" marL="0">
+              <a:lnSpc>
+                <a:spcPct val="83000"/>
+              </a:lnSpc>
+              <a:buNone/>
+            </a:pPr>
+            <a:r>
+              <a:rPr lang="en-US" sz="3070" b="1" spc="-60" kern="0" dirty="0">
+                <a:solidFill>
+                  <a:srgbClr val="1F4FD8"/>
+                </a:solidFill>
+                <a:latin typeface="Inter" pitchFamily="34" charset="0"/>
+                <a:ea typeface="Inter" pitchFamily="34" charset="-122"/>
+                <a:cs typeface="Inter" pitchFamily="34" charset="-120"/>
+              </a:rPr>
+              <a:t>9.8 M</a:t>
+            </a:r>
+            <a:endParaRPr lang="en-US" sz="3070" dirty="0"/>
+          </a:p>
+        </p:txBody>
+      </p:sp>
+      <p:sp>
+        <p:nvSpPr>
+          <p:cNvPr id="34" name="Text 32"/>
+          <p:cNvSpPr txBox="1"/>
+          <p:nvPr/>
+        </p:nvSpPr>
+        <p:spPr>
+          <a:xfrm>
+            <a:off x="3364713" y="3945090"/>
+            <a:ext cx="2705776" cy="378278"/>
+          </a:xfrm>
+          <a:prstGeom prst="rect">
+            <a:avLst/>
+          </a:prstGeom>
+          <a:noFill/>
+          <a:ln/>
+        </p:spPr>
+        <p:txBody>
+          <a:bodyPr wrap="square" lIns="0" tIns="0" rIns="0" bIns="0" rtlCol="0" anchor="t"/>
+          <a:lstStyle/>
+          <a:p>
+            <a:pPr algn="l" indent="0" marL="0">
+              <a:lnSpc>
+                <a:spcPct val="112000"/>
+              </a:lnSpc>
+              <a:buNone/>
+            </a:pPr>
+            <a:r>
+              <a:rPr lang="en-US" sz="1100" dirty="0">
+                <a:solidFill>
+                  <a:srgbClr val="3B4556"/>
+                </a:solidFill>
+                <a:latin typeface="Inter" pitchFamily="34" charset="0"/>
+                <a:ea typeface="Inter" pitchFamily="34" charset="-122"/>
+                <a:cs typeface="Inter" pitchFamily="34" charset="-120"/>
+              </a:rPr>
+              <a:t>WhatsApp a personas marcadas como baja</a:t>
+            </a:r>
+            <a:endParaRPr lang="en-US" sz="1100" dirty="0"/>
+          </a:p>
+        </p:txBody>
+      </p:sp>
+      <p:sp>
+        <p:nvSpPr>
+          <p:cNvPr id="35" name="Shape 33"/>
+          <p:cNvSpPr/>
+          <p:nvPr/>
+        </p:nvSpPr>
+        <p:spPr>
+          <a:xfrm>
+            <a:off x="6217620" y="3190946"/>
+            <a:ext cx="2609212" cy="0"/>
+          </a:xfrm>
+          <a:prstGeom prst="line">
+            <a:avLst/>
+          </a:prstGeom>
+          <a:noFill/>
+          <a:ln w="19291">
+            <a:solidFill>
+              <a:srgbClr val="0B1220"/>
+            </a:solidFill>
+            <a:prstDash val="solid"/>
+          </a:ln>
+        </p:spPr>
+      </p:sp>
+      <p:sp>
+        <p:nvSpPr>
+          <p:cNvPr id="36" name="Text 34"/>
+          <p:cNvSpPr txBox="1"/>
+          <p:nvPr/>
+        </p:nvSpPr>
+        <p:spPr>
+          <a:xfrm>
+            <a:off x="6217620" y="3310307"/>
+            <a:ext cx="2705776" cy="134884"/>
+          </a:xfrm>
+          <a:prstGeom prst="rect">
+            <a:avLst/>
+          </a:prstGeom>
+          <a:noFill/>
+          <a:ln/>
+        </p:spPr>
+        <p:txBody>
+          <a:bodyPr wrap="square" lIns="0" tIns="0" rIns="0" bIns="0" rtlCol="0" anchor="t"/>
+          <a:lstStyle/>
+          <a:p>
+            <a:pPr algn="l" indent="0" marL="0">
+              <a:lnSpc>
+                <a:spcPct val="112000"/>
+              </a:lnSpc>
+              <a:buNone/>
+            </a:pPr>
+            <a:r>
+              <a:rPr lang="en-US" sz="790" b="1" spc="80" kern="0" dirty="0">
+                <a:solidFill>
+                  <a:srgbClr val="6B7484"/>
+                </a:solidFill>
+                <a:latin typeface="Inter" pitchFamily="34" charset="0"/>
+                <a:ea typeface="Inter" pitchFamily="34" charset="-122"/>
+                <a:cs typeface="Inter" pitchFamily="34" charset="-120"/>
+              </a:rPr>
+              <a:t>REGLAS</a:t>
+            </a:r>
+            <a:endParaRPr lang="en-US" sz="790" dirty="0"/>
+          </a:p>
+        </p:txBody>
+      </p:sp>
+      <p:sp>
+        <p:nvSpPr>
+          <p:cNvPr id="37" name="Text 35"/>
+          <p:cNvSpPr txBox="1"/>
+          <p:nvPr/>
+        </p:nvSpPr>
+        <p:spPr>
+          <a:xfrm>
+            <a:off x="6217620" y="3500049"/>
+            <a:ext cx="2705776" cy="390184"/>
+          </a:xfrm>
+          <a:prstGeom prst="rect">
+            <a:avLst/>
+          </a:prstGeom>
+          <a:noFill/>
+          <a:ln/>
+        </p:spPr>
+        <p:txBody>
+          <a:bodyPr wrap="square" lIns="0" tIns="0" rIns="0" bIns="0" rtlCol="0" anchor="t"/>
+          <a:lstStyle/>
+          <a:p>
+            <a:pPr algn="l" indent="0" marL="0">
+              <a:lnSpc>
+                <a:spcPct val="83000"/>
+              </a:lnSpc>
+              <a:buNone/>
+            </a:pPr>
+            <a:r>
+              <a:rPr lang="en-US" sz="3070" b="1" spc="-60" kern="0" dirty="0">
+                <a:solidFill>
+                  <a:srgbClr val="1F4FD8"/>
+                </a:solidFill>
+                <a:latin typeface="Inter" pitchFamily="34" charset="0"/>
+                <a:ea typeface="Inter" pitchFamily="34" charset="-122"/>
+                <a:cs typeface="Inter" pitchFamily="34" charset="-120"/>
+              </a:rPr>
+              <a:t>9.9 M</a:t>
+            </a:r>
+            <a:endParaRPr lang="en-US" sz="3070" dirty="0"/>
+          </a:p>
+        </p:txBody>
+      </p:sp>
+      <p:sp>
+        <p:nvSpPr>
+          <p:cNvPr id="38" name="Text 36"/>
+          <p:cNvSpPr txBox="1"/>
+          <p:nvPr/>
+        </p:nvSpPr>
+        <p:spPr>
+          <a:xfrm>
+            <a:off x="6217620" y="3945090"/>
+            <a:ext cx="2705776" cy="378278"/>
+          </a:xfrm>
+          <a:prstGeom prst="rect">
+            <a:avLst/>
+          </a:prstGeom>
+          <a:noFill/>
+          <a:ln/>
+        </p:spPr>
+        <p:txBody>
+          <a:bodyPr wrap="square" lIns="0" tIns="0" rIns="0" bIns="0" rtlCol="0" anchor="t"/>
+          <a:lstStyle/>
+          <a:p>
+            <a:pPr algn="l" indent="0" marL="0">
+              <a:lnSpc>
+                <a:spcPct val="112000"/>
+              </a:lnSpc>
+              <a:buNone/>
+            </a:pPr>
+            <a:r>
+              <a:rPr lang="en-US" sz="1100" dirty="0">
+                <a:solidFill>
+                  <a:srgbClr val="3B4556"/>
+                </a:solidFill>
+                <a:latin typeface="Inter" pitchFamily="34" charset="0"/>
+                <a:ea typeface="Inter" pitchFamily="34" charset="-122"/>
+                <a:cs typeface="Inter" pitchFamily="34" charset="-120"/>
+              </a:rPr>
+              <a:t>veces una persona recibió la misma campaña dos veces el mismo día</a:t>
+            </a:r>
+            <a:endParaRPr lang="en-US" sz="1100" dirty="0"/>
+          </a:p>
+        </p:txBody>
+      </p:sp>
+      <p:sp>
+        <p:nvSpPr>
+          <p:cNvPr id="39" name="Shape 37"/>
+          <p:cNvSpPr/>
+          <p:nvPr/>
+        </p:nvSpPr>
+        <p:spPr>
+          <a:xfrm>
+            <a:off x="9070527" y="3190946"/>
+            <a:ext cx="2609212" cy="0"/>
+          </a:xfrm>
+          <a:prstGeom prst="line">
+            <a:avLst/>
+          </a:prstGeom>
+          <a:noFill/>
+          <a:ln w="19291">
+            <a:solidFill>
+              <a:srgbClr val="0B1220"/>
+            </a:solidFill>
+            <a:prstDash val="solid"/>
+          </a:ln>
+        </p:spPr>
+      </p:sp>
+      <p:sp>
+        <p:nvSpPr>
+          <p:cNvPr id="40" name="Text 38"/>
+          <p:cNvSpPr txBox="1"/>
+          <p:nvPr/>
+        </p:nvSpPr>
+        <p:spPr>
+          <a:xfrm>
+            <a:off x="9070527" y="3310307"/>
+            <a:ext cx="2705776" cy="134884"/>
+          </a:xfrm>
+          <a:prstGeom prst="rect">
+            <a:avLst/>
+          </a:prstGeom>
+          <a:noFill/>
+          <a:ln/>
+        </p:spPr>
+        <p:txBody>
+          <a:bodyPr wrap="square" lIns="0" tIns="0" rIns="0" bIns="0" rtlCol="0" anchor="t"/>
+          <a:lstStyle/>
+          <a:p>
+            <a:pPr algn="l" indent="0" marL="0">
+              <a:lnSpc>
+                <a:spcPct val="112000"/>
+              </a:lnSpc>
+              <a:buNone/>
+            </a:pPr>
+            <a:r>
+              <a:rPr lang="en-US" sz="790" b="1" spc="80" kern="0" dirty="0">
+                <a:solidFill>
+                  <a:srgbClr val="6B7484"/>
+                </a:solidFill>
+                <a:latin typeface="Inter" pitchFamily="34" charset="0"/>
+                <a:ea typeface="Inter" pitchFamily="34" charset="-122"/>
+                <a:cs typeface="Inter" pitchFamily="34" charset="-120"/>
+              </a:rPr>
+              <a:t>MEDICIÓN</a:t>
+            </a:r>
+            <a:endParaRPr lang="en-US" sz="790" dirty="0"/>
+          </a:p>
+        </p:txBody>
+      </p:sp>
+      <p:sp>
+        <p:nvSpPr>
+          <p:cNvPr id="41" name="Text 39"/>
+          <p:cNvSpPr txBox="1"/>
+          <p:nvPr/>
+        </p:nvSpPr>
+        <p:spPr>
+          <a:xfrm>
+            <a:off x="9070527" y="3500049"/>
+            <a:ext cx="2705776" cy="390184"/>
+          </a:xfrm>
+          <a:prstGeom prst="rect">
+            <a:avLst/>
+          </a:prstGeom>
+          <a:noFill/>
+          <a:ln/>
+        </p:spPr>
+        <p:txBody>
+          <a:bodyPr wrap="square" lIns="0" tIns="0" rIns="0" bIns="0" rtlCol="0" anchor="t"/>
+          <a:lstStyle/>
+          <a:p>
+            <a:pPr algn="l" indent="0" marL="0">
+              <a:lnSpc>
+                <a:spcPct val="83000"/>
+              </a:lnSpc>
+              <a:buNone/>
+            </a:pPr>
+            <a:r>
+              <a:rPr lang="en-US" sz="3070" b="1" spc="-60" kern="0" dirty="0">
+                <a:solidFill>
+                  <a:srgbClr val="1F4FD8"/>
+                </a:solidFill>
+                <a:latin typeface="Inter" pitchFamily="34" charset="0"/>
+                <a:ea typeface="Inter" pitchFamily="34" charset="-122"/>
+                <a:cs typeface="Inter" pitchFamily="34" charset="-120"/>
+              </a:rPr>
+              <a:t>1 de 3,228</a:t>
+            </a:r>
+            <a:endParaRPr lang="en-US" sz="3070" dirty="0"/>
+          </a:p>
+        </p:txBody>
+      </p:sp>
+      <p:sp>
+        <p:nvSpPr>
+          <p:cNvPr id="42" name="Text 40"/>
+          <p:cNvSpPr txBox="1"/>
+          <p:nvPr/>
+        </p:nvSpPr>
+        <p:spPr>
+          <a:xfrm>
+            <a:off x="9070527" y="3945090"/>
+            <a:ext cx="2705776" cy="567417"/>
+          </a:xfrm>
+          <a:prstGeom prst="rect">
+            <a:avLst/>
+          </a:prstGeom>
+          <a:noFill/>
+          <a:ln/>
+        </p:spPr>
+        <p:txBody>
+          <a:bodyPr wrap="square" lIns="0" tIns="0" rIns="0" bIns="0" rtlCol="0" anchor="t"/>
+          <a:lstStyle/>
+          <a:p>
+            <a:pPr algn="l" indent="0" marL="0">
+              <a:lnSpc>
+                <a:spcPct val="112000"/>
+              </a:lnSpc>
+              <a:buNone/>
+            </a:pPr>
+            <a:r>
+              <a:rPr lang="en-US" sz="1100" dirty="0">
+                <a:solidFill>
+                  <a:srgbClr val="3B4556"/>
+                </a:solidFill>
+                <a:latin typeface="Inter" pitchFamily="34" charset="0"/>
+                <a:ea typeface="Inter" pitchFamily="34" charset="-122"/>
+                <a:cs typeface="Inter" pitchFamily="34" charset="-120"/>
+              </a:rPr>
+              <a:t>Canvas tiene grupo de control real; solo el correo registra bajas por campaña</a:t>
+            </a:r>
+            <a:endParaRPr lang="en-US" sz="1100" dirty="0"/>
+          </a:p>
+        </p:txBody>
+      </p:sp>
+      <p:sp>
+        <p:nvSpPr>
+          <p:cNvPr id="43" name="Shape 41"/>
+          <p:cNvSpPr/>
+          <p:nvPr/>
+        </p:nvSpPr>
+        <p:spPr>
+          <a:xfrm>
+            <a:off x="511956" y="5992160"/>
+            <a:ext cx="11167783" cy="352808"/>
+          </a:xfrm>
+          <a:prstGeom prst="rect">
             <a:avLst/>
           </a:prstGeom>
           <a:solidFill>
@@ -4754,33 +5855,503 @@
       </p:sp>
       <p:sp>
         <p:nvSpPr>
-          <p:cNvPr id="18" name="Text 16"/>
-          <p:cNvSpPr txBox="1"/>
-          <p:nvPr/>
-        </p:nvSpPr>
-        <p:spPr>
-          <a:xfrm>
-            <a:off x="4331958" y="2922987"/>
-            <a:ext cx="256876" cy="231639"/>
-          </a:xfrm>
-          <a:prstGeom prst="rect">
-            <a:avLst/>
-          </a:prstGeom>
-          <a:noFill/>
-          <a:ln/>
-        </p:spPr>
-        <p:txBody>
-          <a:bodyPr wrap="square" lIns="0" tIns="0" rIns="0" bIns="0" rtlCol="0" anchor="ctr"/>
-          <a:lstStyle/>
-          <a:p>
-            <a:pPr algn="ctr" indent="0" marL="0">
+          <p:cNvPr id="44" name="Text 42"/>
+          <p:cNvSpPr txBox="1"/>
+          <p:nvPr/>
+        </p:nvSpPr>
+        <p:spPr>
+          <a:xfrm>
+            <a:off x="670350" y="6116043"/>
+            <a:ext cx="616853" cy="134733"/>
+          </a:xfrm>
+          <a:prstGeom prst="rect">
+            <a:avLst/>
+          </a:prstGeom>
+          <a:noFill/>
+          <a:ln/>
+        </p:spPr>
+        <p:txBody>
+          <a:bodyPr wrap="square" lIns="0" tIns="0" rIns="0" bIns="0" rtlCol="0" anchor="t"/>
+          <a:lstStyle/>
+          <a:p>
+            <a:pPr algn="l" indent="0" marL="0">
+              <a:lnSpc>
+                <a:spcPct val="107000"/>
+              </a:lnSpc>
+              <a:buNone/>
+            </a:pPr>
+            <a:r>
+              <a:rPr lang="en-US" sz="820" b="1" spc="100" kern="0" dirty="0">
+                <a:solidFill>
+                  <a:srgbClr val="1F4FD8"/>
+                </a:solidFill>
+                <a:latin typeface="Inter" pitchFamily="34" charset="0"/>
+                <a:ea typeface="Inter" pitchFamily="34" charset="-122"/>
+                <a:cs typeface="Inter" pitchFamily="34" charset="-120"/>
+              </a:rPr>
+              <a:t>SO WHAT</a:t>
+            </a:r>
+            <a:endParaRPr lang="en-US" sz="820" dirty="0"/>
+          </a:p>
+        </p:txBody>
+      </p:sp>
+      <p:sp>
+        <p:nvSpPr>
+          <p:cNvPr id="45" name="Text 43"/>
+          <p:cNvSpPr txBox="1"/>
+          <p:nvPr/>
+        </p:nvSpPr>
+        <p:spPr>
+          <a:xfrm>
+            <a:off x="1409876" y="6077461"/>
+            <a:ext cx="6359879" cy="182206"/>
+          </a:xfrm>
+          <a:prstGeom prst="rect">
+            <a:avLst/>
+          </a:prstGeom>
+          <a:noFill/>
+          <a:ln/>
+        </p:spPr>
+        <p:txBody>
+          <a:bodyPr wrap="square" lIns="0" tIns="0" rIns="0" bIns="0" rtlCol="0" anchor="t"/>
+          <a:lstStyle/>
+          <a:p>
+            <a:pPr algn="l" indent="0" marL="0">
+              <a:lnSpc>
+                <a:spcPct val="107000"/>
+              </a:lnSpc>
+              <a:buNone/>
+            </a:pPr>
+            <a:r>
+              <a:rPr lang="en-US" sz="1100" dirty="0">
+                <a:solidFill>
+                  <a:srgbClr val="0B1220"/>
+                </a:solidFill>
+                <a:latin typeface="Inter" pitchFamily="34" charset="0"/>
+                <a:ea typeface="Inter" pitchFamily="34" charset="-122"/>
+                <a:cs typeface="Inter" pitchFamily="34" charset="-120"/>
+              </a:rPr>
+              <a:t>No es una campaña mala: es una cuenta sin dueño, sin reglas comunes y sin forma de medir.</a:t>
+            </a:r>
+            <a:endParaRPr lang="en-US" sz="1100" dirty="0"/>
+          </a:p>
+        </p:txBody>
+      </p:sp>
+      <p:sp>
+        <p:nvSpPr>
+          <p:cNvPr id="46" name="Text 44"/>
+          <p:cNvSpPr txBox="1"/>
+          <p:nvPr/>
+        </p:nvSpPr>
+        <p:spPr>
+          <a:xfrm>
+            <a:off x="511956" y="6454684"/>
+            <a:ext cx="8526262" cy="135035"/>
+          </a:xfrm>
+          <a:prstGeom prst="rect">
+            <a:avLst/>
+          </a:prstGeom>
+          <a:noFill/>
+          <a:ln/>
+        </p:spPr>
+        <p:txBody>
+          <a:bodyPr wrap="square" lIns="0" tIns="0" rIns="0" bIns="0" rtlCol="0" anchor="t"/>
+          <a:lstStyle/>
+          <a:p>
+            <a:pPr algn="l" indent="0" marL="0">
+              <a:lnSpc>
+                <a:spcPct val="99000"/>
+              </a:lnSpc>
+              <a:buNone/>
+            </a:pPr>
+            <a:r>
+              <a:rPr lang="en-US" sz="840" dirty="0">
+                <a:solidFill>
+                  <a:srgbClr val="6B7484"/>
+                </a:solidFill>
+                <a:latin typeface="Inter" pitchFamily="34" charset="0"/>
+                <a:ea typeface="Inter" pitchFamily="34" charset="-122"/>
+                <a:cs typeface="Inter" pitchFamily="34" charset="-120"/>
+              </a:rPr>
+              <a:t>Fuente: Braze, catálogo de campañas y Canvas, envíos por comunicación (E1, E2), bloqueados (E7a, Sheets v4), grupos de control (E13), enero a septiembre 2026.</a:t>
+            </a:r>
+            <a:endParaRPr lang="en-US" sz="840" dirty="0"/>
+          </a:p>
+        </p:txBody>
+      </p:sp>
+      <p:sp>
+        <p:nvSpPr>
+          <p:cNvPr id="47" name="Text 45"/>
+          <p:cNvSpPr txBox="1"/>
+          <p:nvPr/>
+        </p:nvSpPr>
+        <p:spPr>
+          <a:xfrm>
+            <a:off x="11570777" y="6454684"/>
+            <a:ext cx="130519" cy="135035"/>
+          </a:xfrm>
+          <a:prstGeom prst="rect">
+            <a:avLst/>
+          </a:prstGeom>
+          <a:noFill/>
+          <a:ln/>
+        </p:spPr>
+        <p:txBody>
+          <a:bodyPr wrap="square" lIns="0" tIns="0" rIns="0" bIns="0" rtlCol="0" anchor="t"/>
+          <a:lstStyle/>
+          <a:p>
+            <a:pPr algn="l" indent="0" marL="0">
+              <a:lnSpc>
+                <a:spcPct val="99000"/>
+              </a:lnSpc>
+              <a:buNone/>
+            </a:pPr>
+            <a:r>
+              <a:rPr lang="en-US" sz="840" dirty="0">
+                <a:solidFill>
+                  <a:srgbClr val="6B7484"/>
+                </a:solidFill>
+                <a:latin typeface="Inter" pitchFamily="34" charset="0"/>
+                <a:ea typeface="Inter" pitchFamily="34" charset="-122"/>
+                <a:cs typeface="Inter" pitchFamily="34" charset="-120"/>
+              </a:rPr>
+              <a:t>12</a:t>
+            </a:r>
+            <a:endParaRPr lang="en-US" sz="840" dirty="0"/>
+          </a:p>
+        </p:txBody>
+      </p:sp>
+    </p:spTree>
+  </p:cSld>
+  <p:clrMapOvr>
+    <a:masterClrMapping/>
+  </p:clrMapOvr>
+</p:sld>
+</file>
+
+<file path=ppt/slides/slide13.xml><?xml version="1.0" encoding="utf-8"?>
+<p:sld xmlns:a="http://schemas.openxmlformats.org/drawingml/2006/main" xmlns:r="http://schemas.openxmlformats.org/officeDocument/2006/relationships" xmlns:p="http://schemas.openxmlformats.org/presentationml/2006/main">
+  <p:cSld name="Slide 13">
+    <p:bg>
+      <p:bgPr>
+        <a:solidFill>
+          <a:srgbClr val="FFFFFF"/>
+        </a:solidFill>
+      </p:bgPr>
+    </p:bg>
+    <p:spTree>
+      <p:nvGrpSpPr>
+        <p:cNvPr id="1" name=""/>
+        <p:cNvGrpSpPr/>
+        <p:nvPr/>
+      </p:nvGrpSpPr>
+      <p:grpSpPr>
+        <a:xfrm>
+          <a:off x="0" y="0"/>
+          <a:ext cx="0" cy="0"/>
+          <a:chOff x="0" y="0"/>
+          <a:chExt cx="0" cy="0"/>
+        </a:xfrm>
+      </p:grpSpPr>
+      <p:sp>
+        <p:nvSpPr>
+          <p:cNvPr id="2" name="Text 0"/>
+          <p:cNvSpPr txBox="1"/>
+          <p:nvPr/>
+        </p:nvSpPr>
+        <p:spPr>
+          <a:xfrm>
+            <a:off x="511956" y="390033"/>
+            <a:ext cx="11521105" cy="661609"/>
+          </a:xfrm>
+          <a:prstGeom prst="rect">
+            <a:avLst/>
+          </a:prstGeom>
+          <a:noFill/>
+          <a:ln/>
+        </p:spPr>
+        <p:txBody>
+          <a:bodyPr wrap="square" lIns="0" tIns="0" rIns="0" bIns="0" rtlCol="0" anchor="t"/>
+          <a:lstStyle/>
+          <a:p>
+            <a:pPr algn="l" indent="0" marL="0">
+              <a:lnSpc>
+                <a:spcPct val="98000"/>
+              </a:lnSpc>
+              <a:buNone/>
+            </a:pPr>
+            <a:r>
+              <a:rPr lang="en-US" sz="2210" b="1" spc="-30" kern="0" dirty="0">
+                <a:solidFill>
+                  <a:srgbClr val="0B1220"/>
+                </a:solidFill>
+                <a:latin typeface="Inter" pitchFamily="34" charset="0"/>
+                <a:ea typeface="Inter" pitchFamily="34" charset="-122"/>
+                <a:cs typeface="Inter" pitchFamily="34" charset="-120"/>
+              </a:rPr>
+              <a:t>Qué lo explica: escribimos por lo que queremos vender, cada equipo por su cuenta y sin medir</a:t>
+            </a:r>
+            <a:endParaRPr lang="en-US" sz="2210" dirty="0"/>
+          </a:p>
+        </p:txBody>
+      </p:sp>
+      <p:sp>
+        <p:nvSpPr>
+          <p:cNvPr id="3" name="Shape 1"/>
+          <p:cNvSpPr/>
+          <p:nvPr/>
+        </p:nvSpPr>
+        <p:spPr>
+          <a:xfrm>
+            <a:off x="511956" y="1161358"/>
+            <a:ext cx="3527477" cy="1398573"/>
+          </a:xfrm>
+          <a:prstGeom prst="rect">
+            <a:avLst/>
+          </a:prstGeom>
+          <a:solidFill>
+            <a:srgbClr val="F4F6F9"/>
+          </a:solidFill>
+          <a:ln/>
+        </p:spPr>
+      </p:sp>
+      <p:sp>
+        <p:nvSpPr>
+          <p:cNvPr id="4" name="Text 2"/>
+          <p:cNvSpPr txBox="1"/>
+          <p:nvPr/>
+        </p:nvSpPr>
+        <p:spPr>
+          <a:xfrm>
+            <a:off x="694765" y="1356374"/>
+            <a:ext cx="3275003" cy="512107"/>
+          </a:xfrm>
+          <a:prstGeom prst="rect">
+            <a:avLst/>
+          </a:prstGeom>
+          <a:noFill/>
+          <a:ln/>
+        </p:spPr>
+        <p:txBody>
+          <a:bodyPr wrap="square" lIns="0" tIns="0" rIns="0" bIns="0" rtlCol="0" anchor="t"/>
+          <a:lstStyle/>
+          <a:p>
+            <a:pPr algn="l" indent="0" marL="0">
+              <a:lnSpc>
+                <a:spcPct val="83000"/>
+              </a:lnSpc>
+              <a:buNone/>
+            </a:pPr>
+            <a:r>
+              <a:rPr lang="en-US" sz="4030" b="1" spc="-80" kern="0" dirty="0">
+                <a:solidFill>
+                  <a:srgbClr val="0B1220"/>
+                </a:solidFill>
+                <a:latin typeface="Inter" pitchFamily="34" charset="0"/>
+                <a:ea typeface="Inter" pitchFamily="34" charset="-122"/>
+                <a:cs typeface="Inter" pitchFamily="34" charset="-120"/>
+              </a:rPr>
+              <a:t>73 %</a:t>
+            </a:r>
+            <a:endParaRPr lang="en-US" sz="4030" dirty="0"/>
+          </a:p>
+        </p:txBody>
+      </p:sp>
+      <p:sp>
+        <p:nvSpPr>
+          <p:cNvPr id="5" name="Text 3"/>
+          <p:cNvSpPr txBox="1"/>
+          <p:nvPr/>
+        </p:nvSpPr>
+        <p:spPr>
+          <a:xfrm>
+            <a:off x="694765" y="1953782"/>
+            <a:ext cx="3275003" cy="411132"/>
+          </a:xfrm>
+          <a:prstGeom prst="rect">
+            <a:avLst/>
+          </a:prstGeom>
+          <a:noFill/>
+          <a:ln/>
+        </p:spPr>
+        <p:txBody>
+          <a:bodyPr wrap="square" lIns="0" tIns="0" rIns="0" bIns="0" rtlCol="0" anchor="t"/>
+          <a:lstStyle/>
+          <a:p>
+            <a:pPr algn="l" indent="0" marL="0">
               <a:lnSpc>
                 <a:spcPct val="112000"/>
               </a:lnSpc>
               <a:buNone/>
             </a:pPr>
             <a:r>
-              <a:rPr lang="en-US" sz="960" b="1" dirty="0">
+              <a:rPr lang="en-US" sz="1200" dirty="0">
+                <a:solidFill>
+                  <a:srgbClr val="0B1220"/>
+                </a:solidFill>
+                <a:latin typeface="Inter" pitchFamily="34" charset="0"/>
+                <a:ea typeface="Inter" pitchFamily="34" charset="-122"/>
+                <a:cs typeface="Inter" pitchFamily="34" charset="-120"/>
+              </a:rPr>
+              <a:t>de las personas no respondió a nada en nueve meses</a:t>
+            </a:r>
+            <a:endParaRPr lang="en-US" sz="1200" dirty="0"/>
+          </a:p>
+        </p:txBody>
+      </p:sp>
+      <p:sp>
+        <p:nvSpPr>
+          <p:cNvPr id="6" name="Shape 4"/>
+          <p:cNvSpPr/>
+          <p:nvPr/>
+        </p:nvSpPr>
+        <p:spPr>
+          <a:xfrm>
+            <a:off x="4331958" y="1161358"/>
+            <a:ext cx="3527628" cy="1398573"/>
+          </a:xfrm>
+          <a:prstGeom prst="rect">
+            <a:avLst/>
+          </a:prstGeom>
+          <a:solidFill>
+            <a:srgbClr val="F4F6F9"/>
+          </a:solidFill>
+          <a:ln/>
+        </p:spPr>
+      </p:sp>
+      <p:sp>
+        <p:nvSpPr>
+          <p:cNvPr id="7" name="Text 5"/>
+          <p:cNvSpPr txBox="1"/>
+          <p:nvPr/>
+        </p:nvSpPr>
+        <p:spPr>
+          <a:xfrm>
+            <a:off x="4514767" y="1356374"/>
+            <a:ext cx="3275158" cy="512107"/>
+          </a:xfrm>
+          <a:prstGeom prst="rect">
+            <a:avLst/>
+          </a:prstGeom>
+          <a:noFill/>
+          <a:ln/>
+        </p:spPr>
+        <p:txBody>
+          <a:bodyPr wrap="square" lIns="0" tIns="0" rIns="0" bIns="0" rtlCol="0" anchor="t"/>
+          <a:lstStyle/>
+          <a:p>
+            <a:pPr algn="l" indent="0" marL="0">
+              <a:lnSpc>
+                <a:spcPct val="83000"/>
+              </a:lnSpc>
+              <a:buNone/>
+            </a:pPr>
+            <a:r>
+              <a:rPr lang="en-US" sz="4030" b="1" spc="-80" kern="0" dirty="0">
+                <a:solidFill>
+                  <a:srgbClr val="0B1220"/>
+                </a:solidFill>
+                <a:latin typeface="Inter" pitchFamily="34" charset="0"/>
+                <a:ea typeface="Inter" pitchFamily="34" charset="-122"/>
+                <a:cs typeface="Inter" pitchFamily="34" charset="-120"/>
+              </a:rPr>
+              <a:t>2.3 M</a:t>
+            </a:r>
+            <a:endParaRPr lang="en-US" sz="4030" dirty="0"/>
+          </a:p>
+        </p:txBody>
+      </p:sp>
+      <p:sp>
+        <p:nvSpPr>
+          <p:cNvPr id="8" name="Text 6"/>
+          <p:cNvSpPr txBox="1"/>
+          <p:nvPr/>
+        </p:nvSpPr>
+        <p:spPr>
+          <a:xfrm>
+            <a:off x="4514767" y="1953782"/>
+            <a:ext cx="3275158" cy="411132"/>
+          </a:xfrm>
+          <a:prstGeom prst="rect">
+            <a:avLst/>
+          </a:prstGeom>
+          <a:noFill/>
+          <a:ln/>
+        </p:spPr>
+        <p:txBody>
+          <a:bodyPr wrap="square" lIns="0" tIns="0" rIns="0" bIns="0" rtlCol="0" anchor="t"/>
+          <a:lstStyle/>
+          <a:p>
+            <a:pPr algn="l" indent="0" marL="0">
+              <a:lnSpc>
+                <a:spcPct val="112000"/>
+              </a:lnSpc>
+              <a:buNone/>
+            </a:pPr>
+            <a:r>
+              <a:rPr lang="en-US" sz="1200" dirty="0">
+                <a:solidFill>
+                  <a:srgbClr val="0B1220"/>
+                </a:solidFill>
+                <a:latin typeface="Inter" pitchFamily="34" charset="0"/>
+                <a:ea typeface="Inter" pitchFamily="34" charset="-122"/>
+                <a:cs typeface="Inter" pitchFamily="34" charset="-120"/>
+              </a:rPr>
+              <a:t>personas al mes con tres o más campañas el mismo día</a:t>
+            </a:r>
+            <a:endParaRPr lang="en-US" sz="1200" dirty="0"/>
+          </a:p>
+        </p:txBody>
+      </p:sp>
+      <p:sp>
+        <p:nvSpPr>
+          <p:cNvPr id="9" name="Shape 7"/>
+          <p:cNvSpPr/>
+          <p:nvPr/>
+        </p:nvSpPr>
+        <p:spPr>
+          <a:xfrm>
+            <a:off x="8152111" y="1161358"/>
+            <a:ext cx="3527477" cy="1398573"/>
+          </a:xfrm>
+          <a:prstGeom prst="rect">
+            <a:avLst/>
+          </a:prstGeom>
+          <a:solidFill>
+            <a:srgbClr val="E8EEFC"/>
+          </a:solidFill>
+          <a:ln/>
+        </p:spPr>
+      </p:sp>
+      <p:sp>
+        <p:nvSpPr>
+          <p:cNvPr id="10" name="Text 8"/>
+          <p:cNvSpPr txBox="1"/>
+          <p:nvPr/>
+        </p:nvSpPr>
+        <p:spPr>
+          <a:xfrm>
+            <a:off x="8334920" y="1356374"/>
+            <a:ext cx="3275003" cy="512107"/>
+          </a:xfrm>
+          <a:prstGeom prst="rect">
+            <a:avLst/>
+          </a:prstGeom>
+          <a:noFill/>
+          <a:ln/>
+        </p:spPr>
+        <p:txBody>
+          <a:bodyPr wrap="square" lIns="0" tIns="0" rIns="0" bIns="0" rtlCol="0" anchor="t"/>
+          <a:lstStyle/>
+          <a:p>
+            <a:pPr algn="l" indent="0" marL="0">
+              <a:lnSpc>
+                <a:spcPct val="83000"/>
+              </a:lnSpc>
+              <a:buNone/>
+            </a:pPr>
+            <a:r>
+              <a:rPr lang="en-US" sz="4030" b="1" spc="-80" kern="0" dirty="0">
                 <a:solidFill>
                   <a:srgbClr val="1F4FD8"/>
                 </a:solidFill>
@@ -4788,41 +6359,41 @@
                 <a:ea typeface="Inter" pitchFamily="34" charset="-122"/>
                 <a:cs typeface="Inter" pitchFamily="34" charset="-120"/>
               </a:rPr>
-              <a:t>2</a:t>
-            </a:r>
-            <a:endParaRPr lang="en-US" sz="960" dirty="0"/>
-          </a:p>
-        </p:txBody>
-      </p:sp>
-      <p:sp>
-        <p:nvSpPr>
-          <p:cNvPr id="19" name="Text 17"/>
-          <p:cNvSpPr txBox="1"/>
-          <p:nvPr/>
-        </p:nvSpPr>
-        <p:spPr>
-          <a:xfrm>
-            <a:off x="4673312" y="2922987"/>
-            <a:ext cx="3300150" cy="1109213"/>
-          </a:xfrm>
-          <a:prstGeom prst="rect">
-            <a:avLst/>
-          </a:prstGeom>
-          <a:noFill/>
-          <a:ln/>
-        </p:spPr>
-        <p:txBody>
-          <a:bodyPr wrap="square" lIns="0" tIns="0" rIns="0" bIns="0" rtlCol="0" anchor="t"/>
-          <a:lstStyle/>
-          <a:p>
-            <a:pPr algn="l" indent="0" marL="0">
-              <a:lnSpc>
-                <a:spcPct val="116000"/>
-              </a:lnSpc>
-              <a:buNone/>
-            </a:pPr>
-            <a:r>
-              <a:rPr lang="en-US" sz="1250" b="1" dirty="0">
+              <a:t>1 de 3,228</a:t>
+            </a:r>
+            <a:endParaRPr lang="en-US" sz="4030" dirty="0"/>
+          </a:p>
+        </p:txBody>
+      </p:sp>
+      <p:sp>
+        <p:nvSpPr>
+          <p:cNvPr id="11" name="Text 9"/>
+          <p:cNvSpPr txBox="1"/>
+          <p:nvPr/>
+        </p:nvSpPr>
+        <p:spPr>
+          <a:xfrm>
+            <a:off x="8334920" y="1953782"/>
+            <a:ext cx="3275003" cy="205566"/>
+          </a:xfrm>
+          <a:prstGeom prst="rect">
+            <a:avLst/>
+          </a:prstGeom>
+          <a:noFill/>
+          <a:ln/>
+        </p:spPr>
+        <p:txBody>
+          <a:bodyPr wrap="square" lIns="0" tIns="0" rIns="0" bIns="0" rtlCol="0" anchor="t"/>
+          <a:lstStyle/>
+          <a:p>
+            <a:pPr algn="l" indent="0" marL="0">
+              <a:lnSpc>
+                <a:spcPct val="112000"/>
+              </a:lnSpc>
+              <a:buNone/>
+            </a:pPr>
+            <a:r>
+              <a:rPr lang="en-US" sz="1200" dirty="0">
                 <a:solidFill>
                   <a:srgbClr val="0B1220"/>
                 </a:solidFill>
@@ -4830,38 +6401,21 @@
                 <a:ea typeface="Inter" pitchFamily="34" charset="-122"/>
                 <a:cs typeface="Inter" pitchFamily="34" charset="-120"/>
               </a:rPr>
-              <a:t>Cada equipo decide solo.</a:t>
-            </a:r>
-            <a:pPr algn="l" indent="0" marL="0">
-              <a:lnSpc>
-                <a:spcPct val="116000"/>
-              </a:lnSpc>
-              <a:buNone/>
-            </a:pPr>
-            <a:r>
-              <a:rPr lang="en-US" sz="1250" dirty="0">
-                <a:solidFill>
-                  <a:srgbClr val="0B1220"/>
-                </a:solidFill>
-                <a:latin typeface="Inter" pitchFamily="34" charset="0"/>
-                <a:ea typeface="Inter" pitchFamily="34" charset="-122"/>
-                <a:cs typeface="Inter" pitchFamily="34" charset="-120"/>
-              </a:rPr>
-              <a:t> No hay límite de mensajes por persona ni calendario común: Marketing, Product Growth y Sales le escriben a la misma gente el mismo día.</a:t>
-            </a:r>
-            <a:endParaRPr lang="en-US" sz="1250" dirty="0"/>
-          </a:p>
-        </p:txBody>
-      </p:sp>
-      <p:sp>
-        <p:nvSpPr>
-          <p:cNvPr id="20" name="Shape 18"/>
+              <a:t>Canvas tiene un grupo de control real</a:t>
+            </a:r>
+            <a:endParaRPr lang="en-US" sz="1200" dirty="0"/>
+          </a:p>
+        </p:txBody>
+      </p:sp>
+      <p:sp>
+        <p:nvSpPr>
+          <p:cNvPr id="12" name="Shape 10"/>
           <p:cNvSpPr/>
           <p:nvPr/>
         </p:nvSpPr>
         <p:spPr>
           <a:xfrm>
-            <a:off x="8152111" y="2784184"/>
+            <a:off x="511956" y="2784184"/>
             <a:ext cx="3527477" cy="0"/>
           </a:xfrm>
           <a:prstGeom prst="line">
@@ -4878,13 +6432,13 @@
       </p:sp>
       <p:sp>
         <p:nvSpPr>
-          <p:cNvPr id="21" name="Shape 19"/>
+          <p:cNvPr id="13" name="Shape 11"/>
           <p:cNvSpPr/>
           <p:nvPr/>
         </p:nvSpPr>
         <p:spPr>
           <a:xfrm>
-            <a:off x="8152111" y="2922987"/>
+            <a:off x="511956" y="2922987"/>
             <a:ext cx="231639" cy="231639"/>
           </a:xfrm>
           <a:prstGeom prst="ellipse">
@@ -4898,13 +6452,13 @@
       </p:sp>
       <p:sp>
         <p:nvSpPr>
-          <p:cNvPr id="22" name="Text 20"/>
-          <p:cNvSpPr txBox="1"/>
-          <p:nvPr/>
-        </p:nvSpPr>
-        <p:spPr>
-          <a:xfrm>
-            <a:off x="8152111" y="2922987"/>
+          <p:cNvPr id="14" name="Text 12"/>
+          <p:cNvSpPr txBox="1"/>
+          <p:nvPr/>
+        </p:nvSpPr>
+        <p:spPr>
+          <a:xfrm>
+            <a:off x="511956" y="2922987"/>
             <a:ext cx="256876" cy="231639"/>
           </a:xfrm>
           <a:prstGeom prst="rect">
@@ -4932,7 +6486,7 @@
                 <a:ea typeface="Inter" pitchFamily="34" charset="-122"/>
                 <a:cs typeface="Inter" pitchFamily="34" charset="-120"/>
               </a:rPr>
-              <a:t>3</a:t>
+              <a:t>1</a:t>
             </a:r>
             <a:endParaRPr lang="en-US" sz="960" dirty="0"/>
           </a:p>
@@ -4940,13 +6494,13 @@
       </p:sp>
       <p:sp>
         <p:nvSpPr>
-          <p:cNvPr id="23" name="Text 21"/>
-          <p:cNvSpPr txBox="1"/>
-          <p:nvPr/>
-        </p:nvSpPr>
-        <p:spPr>
-          <a:xfrm>
-            <a:off x="8493465" y="2922987"/>
+          <p:cNvPr id="15" name="Text 13"/>
+          <p:cNvSpPr txBox="1"/>
+          <p:nvPr/>
+        </p:nvSpPr>
+        <p:spPr>
+          <a:xfrm>
+            <a:off x="853310" y="2922987"/>
             <a:ext cx="3299995" cy="1109213"/>
           </a:xfrm>
           <a:prstGeom prst="rect">
@@ -4974,7 +6528,7 @@
                 <a:ea typeface="Inter" pitchFamily="34" charset="-122"/>
                 <a:cs typeface="Inter" pitchFamily="34" charset="-120"/>
               </a:rPr>
-              <a:t>Nadie compara volumen contra respuesta.</a:t>
+              <a:t>Escribimos por lo que queremos vender.</a:t>
             </a:r>
             <a:pPr algn="l" indent="0" marL="0">
               <a:lnSpc>
@@ -4991,7 +6545,7 @@
                 <a:ea typeface="Inter" pitchFamily="34" charset="-122"/>
                 <a:cs typeface="Inter" pitchFamily="34" charset="-120"/>
               </a:rPr>
-              <a:t> Copiar una campaña cada mes es más fácil que medirla: 4 de cada 10 mensajes salen de campañas debajo del mínimo.</a:t>
+              <a:t> Las promociones salen a listas por etapa, no por lo que la persona hizo, y le seguimos escribiendo a quien no responde.</a:t>
             </a:r>
             <a:endParaRPr lang="en-US" sz="1250" dirty="0"/>
           </a:p>
@@ -4999,16 +6553,39 @@
       </p:sp>
       <p:sp>
         <p:nvSpPr>
-          <p:cNvPr id="24" name="Shape 22"/>
+          <p:cNvPr id="16" name="Shape 14"/>
           <p:cNvSpPr/>
           <p:nvPr/>
         </p:nvSpPr>
         <p:spPr>
           <a:xfrm>
-            <a:off x="511956" y="5992160"/>
-            <a:ext cx="11167783" cy="352808"/>
-          </a:xfrm>
-          <a:prstGeom prst="rect">
+            <a:off x="4331958" y="2784184"/>
+            <a:ext cx="3527628" cy="0"/>
+          </a:xfrm>
+          <a:prstGeom prst="line">
+            <a:avLst/>
+          </a:prstGeom>
+          <a:noFill/>
+          <a:ln w="9645">
+            <a:solidFill>
+              <a:srgbClr val="DDE2EA"/>
+            </a:solidFill>
+            <a:prstDash val="solid"/>
+          </a:ln>
+        </p:spPr>
+      </p:sp>
+      <p:sp>
+        <p:nvSpPr>
+          <p:cNvPr id="17" name="Shape 15"/>
+          <p:cNvSpPr/>
+          <p:nvPr/>
+        </p:nvSpPr>
+        <p:spPr>
+          <a:xfrm>
+            <a:off x="4331958" y="2922987"/>
+            <a:ext cx="231639" cy="231639"/>
+          </a:xfrm>
+          <a:prstGeom prst="ellipse">
             <a:avLst/>
           </a:prstGeom>
           <a:solidFill>
@@ -5019,6 +6596,271 @@
       </p:sp>
       <p:sp>
         <p:nvSpPr>
+          <p:cNvPr id="18" name="Text 16"/>
+          <p:cNvSpPr txBox="1"/>
+          <p:nvPr/>
+        </p:nvSpPr>
+        <p:spPr>
+          <a:xfrm>
+            <a:off x="4331958" y="2922987"/>
+            <a:ext cx="256876" cy="231639"/>
+          </a:xfrm>
+          <a:prstGeom prst="rect">
+            <a:avLst/>
+          </a:prstGeom>
+          <a:noFill/>
+          <a:ln/>
+        </p:spPr>
+        <p:txBody>
+          <a:bodyPr wrap="square" lIns="0" tIns="0" rIns="0" bIns="0" rtlCol="0" anchor="ctr"/>
+          <a:lstStyle/>
+          <a:p>
+            <a:pPr algn="ctr" indent="0" marL="0">
+              <a:lnSpc>
+                <a:spcPct val="112000"/>
+              </a:lnSpc>
+              <a:buNone/>
+            </a:pPr>
+            <a:r>
+              <a:rPr lang="en-US" sz="960" b="1" dirty="0">
+                <a:solidFill>
+                  <a:srgbClr val="1F4FD8"/>
+                </a:solidFill>
+                <a:latin typeface="Inter" pitchFamily="34" charset="0"/>
+                <a:ea typeface="Inter" pitchFamily="34" charset="-122"/>
+                <a:cs typeface="Inter" pitchFamily="34" charset="-120"/>
+              </a:rPr>
+              <a:t>2</a:t>
+            </a:r>
+            <a:endParaRPr lang="en-US" sz="960" dirty="0"/>
+          </a:p>
+        </p:txBody>
+      </p:sp>
+      <p:sp>
+        <p:nvSpPr>
+          <p:cNvPr id="19" name="Text 17"/>
+          <p:cNvSpPr txBox="1"/>
+          <p:nvPr/>
+        </p:nvSpPr>
+        <p:spPr>
+          <a:xfrm>
+            <a:off x="4673312" y="2922987"/>
+            <a:ext cx="3300150" cy="1109213"/>
+          </a:xfrm>
+          <a:prstGeom prst="rect">
+            <a:avLst/>
+          </a:prstGeom>
+          <a:noFill/>
+          <a:ln/>
+        </p:spPr>
+        <p:txBody>
+          <a:bodyPr wrap="square" lIns="0" tIns="0" rIns="0" bIns="0" rtlCol="0" anchor="t"/>
+          <a:lstStyle/>
+          <a:p>
+            <a:pPr algn="l" indent="0" marL="0">
+              <a:lnSpc>
+                <a:spcPct val="116000"/>
+              </a:lnSpc>
+              <a:buNone/>
+            </a:pPr>
+            <a:r>
+              <a:rPr lang="en-US" sz="1250" b="1" dirty="0">
+                <a:solidFill>
+                  <a:srgbClr val="0B1220"/>
+                </a:solidFill>
+                <a:latin typeface="Inter" pitchFamily="34" charset="0"/>
+                <a:ea typeface="Inter" pitchFamily="34" charset="-122"/>
+                <a:cs typeface="Inter" pitchFamily="34" charset="-120"/>
+              </a:rPr>
+              <a:t>Cada equipo decide solo.</a:t>
+            </a:r>
+            <a:pPr algn="l" indent="0" marL="0">
+              <a:lnSpc>
+                <a:spcPct val="116000"/>
+              </a:lnSpc>
+              <a:buNone/>
+            </a:pPr>
+            <a:r>
+              <a:rPr lang="en-US" sz="1250" dirty="0">
+                <a:solidFill>
+                  <a:srgbClr val="0B1220"/>
+                </a:solidFill>
+                <a:latin typeface="Inter" pitchFamily="34" charset="0"/>
+                <a:ea typeface="Inter" pitchFamily="34" charset="-122"/>
+                <a:cs typeface="Inter" pitchFamily="34" charset="-120"/>
+              </a:rPr>
+              <a:t> No hay límite de mensajes por persona ni calendario común: Marketing, Product Growth y Sales le escriben a la misma gente el mismo día.</a:t>
+            </a:r>
+            <a:endParaRPr lang="en-US" sz="1250" dirty="0"/>
+          </a:p>
+        </p:txBody>
+      </p:sp>
+      <p:sp>
+        <p:nvSpPr>
+          <p:cNvPr id="20" name="Shape 18"/>
+          <p:cNvSpPr/>
+          <p:nvPr/>
+        </p:nvSpPr>
+        <p:spPr>
+          <a:xfrm>
+            <a:off x="8152111" y="2784184"/>
+            <a:ext cx="3527477" cy="0"/>
+          </a:xfrm>
+          <a:prstGeom prst="line">
+            <a:avLst/>
+          </a:prstGeom>
+          <a:noFill/>
+          <a:ln w="9645">
+            <a:solidFill>
+              <a:srgbClr val="DDE2EA"/>
+            </a:solidFill>
+            <a:prstDash val="solid"/>
+          </a:ln>
+        </p:spPr>
+      </p:sp>
+      <p:sp>
+        <p:nvSpPr>
+          <p:cNvPr id="21" name="Shape 19"/>
+          <p:cNvSpPr/>
+          <p:nvPr/>
+        </p:nvSpPr>
+        <p:spPr>
+          <a:xfrm>
+            <a:off x="8152111" y="2922987"/>
+            <a:ext cx="231639" cy="231639"/>
+          </a:xfrm>
+          <a:prstGeom prst="ellipse">
+            <a:avLst/>
+          </a:prstGeom>
+          <a:solidFill>
+            <a:srgbClr val="E8EEFC"/>
+          </a:solidFill>
+          <a:ln/>
+        </p:spPr>
+      </p:sp>
+      <p:sp>
+        <p:nvSpPr>
+          <p:cNvPr id="22" name="Text 20"/>
+          <p:cNvSpPr txBox="1"/>
+          <p:nvPr/>
+        </p:nvSpPr>
+        <p:spPr>
+          <a:xfrm>
+            <a:off x="8152111" y="2922987"/>
+            <a:ext cx="256876" cy="231639"/>
+          </a:xfrm>
+          <a:prstGeom prst="rect">
+            <a:avLst/>
+          </a:prstGeom>
+          <a:noFill/>
+          <a:ln/>
+        </p:spPr>
+        <p:txBody>
+          <a:bodyPr wrap="square" lIns="0" tIns="0" rIns="0" bIns="0" rtlCol="0" anchor="ctr"/>
+          <a:lstStyle/>
+          <a:p>
+            <a:pPr algn="ctr" indent="0" marL="0">
+              <a:lnSpc>
+                <a:spcPct val="112000"/>
+              </a:lnSpc>
+              <a:buNone/>
+            </a:pPr>
+            <a:r>
+              <a:rPr lang="en-US" sz="960" b="1" dirty="0">
+                <a:solidFill>
+                  <a:srgbClr val="1F4FD8"/>
+                </a:solidFill>
+                <a:latin typeface="Inter" pitchFamily="34" charset="0"/>
+                <a:ea typeface="Inter" pitchFamily="34" charset="-122"/>
+                <a:cs typeface="Inter" pitchFamily="34" charset="-120"/>
+              </a:rPr>
+              <a:t>3</a:t>
+            </a:r>
+            <a:endParaRPr lang="en-US" sz="960" dirty="0"/>
+          </a:p>
+        </p:txBody>
+      </p:sp>
+      <p:sp>
+        <p:nvSpPr>
+          <p:cNvPr id="23" name="Text 21"/>
+          <p:cNvSpPr txBox="1"/>
+          <p:nvPr/>
+        </p:nvSpPr>
+        <p:spPr>
+          <a:xfrm>
+            <a:off x="8493465" y="2922987"/>
+            <a:ext cx="3299995" cy="1109213"/>
+          </a:xfrm>
+          <a:prstGeom prst="rect">
+            <a:avLst/>
+          </a:prstGeom>
+          <a:noFill/>
+          <a:ln/>
+        </p:spPr>
+        <p:txBody>
+          <a:bodyPr wrap="square" lIns="0" tIns="0" rIns="0" bIns="0" rtlCol="0" anchor="t"/>
+          <a:lstStyle/>
+          <a:p>
+            <a:pPr algn="l" indent="0" marL="0">
+              <a:lnSpc>
+                <a:spcPct val="116000"/>
+              </a:lnSpc>
+              <a:buNone/>
+            </a:pPr>
+            <a:r>
+              <a:rPr lang="en-US" sz="1250" b="1" dirty="0">
+                <a:solidFill>
+                  <a:srgbClr val="0B1220"/>
+                </a:solidFill>
+                <a:latin typeface="Inter" pitchFamily="34" charset="0"/>
+                <a:ea typeface="Inter" pitchFamily="34" charset="-122"/>
+                <a:cs typeface="Inter" pitchFamily="34" charset="-120"/>
+              </a:rPr>
+              <a:t>Nadie compara volumen contra respuesta.</a:t>
+            </a:r>
+            <a:pPr algn="l" indent="0" marL="0">
+              <a:lnSpc>
+                <a:spcPct val="116000"/>
+              </a:lnSpc>
+              <a:buNone/>
+            </a:pPr>
+            <a:r>
+              <a:rPr lang="en-US" sz="1250" dirty="0">
+                <a:solidFill>
+                  <a:srgbClr val="0B1220"/>
+                </a:solidFill>
+                <a:latin typeface="Inter" pitchFamily="34" charset="0"/>
+                <a:ea typeface="Inter" pitchFamily="34" charset="-122"/>
+                <a:cs typeface="Inter" pitchFamily="34" charset="-120"/>
+              </a:rPr>
+              <a:t> Copiar una campaña cada mes es más fácil que medirla: 4 de cada 10 mensajes salen de campañas debajo del mínimo.</a:t>
+            </a:r>
+            <a:endParaRPr lang="en-US" sz="1250" dirty="0"/>
+          </a:p>
+        </p:txBody>
+      </p:sp>
+      <p:sp>
+        <p:nvSpPr>
+          <p:cNvPr id="24" name="Shape 22"/>
+          <p:cNvSpPr/>
+          <p:nvPr/>
+        </p:nvSpPr>
+        <p:spPr>
+          <a:xfrm>
+            <a:off x="511956" y="5992160"/>
+            <a:ext cx="11167783" cy="352808"/>
+          </a:xfrm>
+          <a:prstGeom prst="rect">
+            <a:avLst/>
+          </a:prstGeom>
+          <a:solidFill>
+            <a:srgbClr val="E8EEFC"/>
+          </a:solidFill>
+          <a:ln/>
+        </p:spPr>
+      </p:sp>
+      <p:sp>
+        <p:nvSpPr>
           <p:cNvPr id="25" name="Text 23"/>
           <p:cNvSpPr txBox="1"/>
           <p:nvPr/>
@@ -5151,8 +6993,8 @@
         </p:nvSpPr>
         <p:spPr>
           <a:xfrm>
-            <a:off x="11570777" y="6454684"/>
-            <a:ext cx="130519" cy="135035"/>
+            <a:off x="11569873" y="6454684"/>
+            <a:ext cx="131450" cy="135035"/>
           </a:xfrm>
           <a:prstGeom prst="rect">
             <a:avLst/>
@@ -5179,7 +7021,7 @@
                 <a:ea typeface="Inter" pitchFamily="34" charset="-122"/>
                 <a:cs typeface="Inter" pitchFamily="34" charset="-120"/>
               </a:rPr>
-              <a:t>12</a:t>
+              <a:t>13</a:t>
             </a:r>
             <a:endParaRPr lang="en-US" sz="840" dirty="0"/>
           </a:p>

--- a/braze-analysis/deck/v6/marketing/DECK_marketing.pptx
+++ b/braze-analysis/deck/v6/marketing/DECK_marketing.pptx
@@ -18,9 +18,10 @@
     <p:sldId id="266" r:id="rId12"/>
     <p:sldId id="267" r:id="rId13"/>
     <p:sldId id="268" r:id="rId14"/>
+    <p:sldId id="269" r:id="rId15"/>
   </p:sldIdLst>
   <p:notesMasterIdLst>
-    <p:notesMasterId r:id="rId15"/>
+    <p:notesMasterId r:id="rId16"/>
   </p:notesMasterIdLst>
   <p:sldSz cx="12192000" cy="6858000"/>
   <p:notesSz cx="6858000" cy="12192000"/>
@@ -119,7 +120,7 @@
   <p:extLst>
     <p:ext uri="{521415D9-36F7-43E2-AB2F-B90AF26B5E84}">
       <p14:sectionLst xmlns:p14="http://schemas.microsoft.com/office/powerpoint/2010/main">
-        <p14:section name="Inicio" id="{10d54e60-fa37-03ee-8f16-65a60b84a059}">
+        <p14:section name="Inicio" id="{badf1b25-0407-8db2-0ed6-86b3f297fb1c}">
           <p14:sldIdLst>
             <p14:sldId id="256"/>
             <p14:sldId id="257"/>
@@ -134,6 +135,7 @@
             <p14:sldId id="266"/>
             <p14:sldId id="267"/>
             <p14:sldId id="268"/>
+            <p14:sldId id="269"/>
           </p14:sldIdLst>
         </p14:section>
       </p14:sectionLst>
@@ -916,6 +918,94 @@
             <a:fld id="{F7021451-1387-4CA6-816F-3879F97B5CBC}" type="slidenum">
               <a:rPr lang="en-US"/>
               <a:t>13</a:t>
+            </a:fld>
+            <a:endParaRPr lang="en-US"/>
+          </a:p>
+        </p:txBody>
+      </p:sp>
+    </p:spTree>
+    <p:extLst>
+      <p:ext uri="{BB962C8B-B14F-4D97-AF65-F5344CB8AC3E}">
+        <p14:creationId xmlns:p14="http://schemas.microsoft.com/office/powerpoint/2010/main" val="1024086991"/>
+      </p:ext>
+    </p:extLst>
+  </p:cSld>
+  <p:clrMapOvr>
+    <a:masterClrMapping/>
+  </p:clrMapOvr>
+</p:notes>
+</file>
+
+<file path=ppt/notesSlides/notesSlide14.xml><?xml version="1.0" encoding="utf-8"?>
+<p:notes xmlns:a="http://schemas.openxmlformats.org/drawingml/2006/main" xmlns:r="http://schemas.openxmlformats.org/officeDocument/2006/relationships" xmlns:p="http://schemas.openxmlformats.org/presentationml/2006/main">
+  <p:cSld>
+    <p:spTree>
+      <p:nvGrpSpPr>
+        <p:cNvPr id="1" name=""/>
+        <p:cNvGrpSpPr/>
+        <p:nvPr/>
+      </p:nvGrpSpPr>
+      <p:grpSpPr>
+        <a:xfrm>
+          <a:off x="0" y="0"/>
+          <a:ext cx="0" cy="0"/>
+          <a:chOff x="0" y="0"/>
+          <a:chExt cx="0" cy="0"/>
+        </a:xfrm>
+      </p:grpSpPr>
+      <p:sp>
+        <p:nvSpPr>
+          <p:cNvPr id="2" name="Slide Image Placeholder 1"/>
+          <p:cNvSpPr>
+            <a:spLocks noGrp="1" noRot="1" noChangeAspect="1"/>
+          </p:cNvSpPr>
+          <p:nvPr>
+            <p:ph type="sldImg"/>
+          </p:nvPr>
+        </p:nvSpPr>
+        <p:spPr/>
+      </p:sp>
+      <p:sp>
+        <p:nvSpPr>
+          <p:cNvPr id="3" name="Notes Placeholder 2"/>
+          <p:cNvSpPr>
+            <a:spLocks noGrp="1"/>
+          </p:cNvSpPr>
+          <p:nvPr>
+            <p:ph type="body" idx="1"/>
+          </p:nvPr>
+        </p:nvSpPr>
+        <p:spPr/>
+        <p:txBody>
+          <a:bodyPr/>
+          <a:lstStyle/>
+          <a:p>
+            <a:r>
+              <a:rPr lang="en-US" dirty="0"/>
+              <a:t/>
+            </a:r>
+            <a:endParaRPr lang="en-US" dirty="0"/>
+          </a:p>
+        </p:txBody>
+      </p:sp>
+      <p:sp>
+        <p:nvSpPr>
+          <p:cNvPr id="4" name="Slide Number Placeholder 3"/>
+          <p:cNvSpPr>
+            <a:spLocks noGrp="1"/>
+          </p:cNvSpPr>
+          <p:nvPr>
+            <p:ph type="sldNum" sz="quarter" idx="10"/>
+          </p:nvPr>
+        </p:nvSpPr>
+        <p:spPr/>
+        <p:txBody>
+          <a:bodyPr/>
+          <a:lstStyle/>
+          <a:p>
+            <a:fld id="{F7021451-1387-4CA6-816F-3879F97B5CBC}" type="slidenum">
+              <a:rPr lang="en-US"/>
+              <a:t>14</a:t>
             </a:fld>
             <a:endParaRPr lang="en-US"/>
           </a:p>
@@ -4310,7 +4400,7 @@
         <p:spPr>
           <a:xfrm>
             <a:off x="511956" y="390033"/>
-            <a:ext cx="11521105" cy="330805"/>
+            <a:ext cx="11521105" cy="661609"/>
           </a:xfrm>
           <a:prstGeom prst="rect">
             <a:avLst/>
@@ -4337,7 +4427,7 @@
                 <a:ea typeface="Inter" pitchFamily="34" charset="-122"/>
                 <a:cs typeface="Inter" pitchFamily="34" charset="-120"/>
               </a:rPr>
-              <a:t>Braze no tiene dueño ni reglas comunes, y se nota en ocho datos de la cuenta</a:t>
+              <a:t>Tres de cada diez comunicaciones que mandan no tienen equipo, ticket o nombre en regla: 36 % de los mensajes</a:t>
             </a:r>
             <a:endParaRPr lang="en-US" sz="2210" dirty="0"/>
           </a:p>
@@ -4351,8 +4441,490 @@
         </p:nvSpPr>
         <p:spPr>
           <a:xfrm>
-            <a:off x="511956" y="835376"/>
-            <a:ext cx="11167783" cy="0"/>
+            <a:off x="511956" y="1161358"/>
+            <a:ext cx="2673112" cy="1214256"/>
+          </a:xfrm>
+          <a:prstGeom prst="rect">
+            <a:avLst/>
+          </a:prstGeom>
+          <a:solidFill>
+            <a:srgbClr val="F4F6F9"/>
+          </a:solidFill>
+          <a:ln/>
+        </p:spPr>
+      </p:sp>
+      <p:sp>
+        <p:nvSpPr>
+          <p:cNvPr id="4" name="Text 2"/>
+          <p:cNvSpPr txBox="1"/>
+          <p:nvPr/>
+        </p:nvSpPr>
+        <p:spPr>
+          <a:xfrm>
+            <a:off x="670350" y="1283130"/>
+            <a:ext cx="2445301" cy="414448"/>
+          </a:xfrm>
+          <a:prstGeom prst="rect">
+            <a:avLst/>
+          </a:prstGeom>
+          <a:noFill/>
+          <a:ln/>
+        </p:spPr>
+        <p:txBody>
+          <a:bodyPr wrap="square" lIns="0" tIns="0" rIns="0" bIns="0" rtlCol="0" anchor="t"/>
+          <a:lstStyle/>
+          <a:p>
+            <a:pPr algn="l" indent="0" marL="0">
+              <a:lnSpc>
+                <a:spcPct val="83000"/>
+              </a:lnSpc>
+              <a:buNone/>
+            </a:pPr>
+            <a:r>
+              <a:rPr lang="en-US" sz="3260" b="1" spc="-70" kern="0" dirty="0">
+                <a:solidFill>
+                  <a:srgbClr val="0B1220"/>
+                </a:solidFill>
+                <a:latin typeface="Inter" pitchFamily="34" charset="0"/>
+                <a:ea typeface="Inter" pitchFamily="34" charset="-122"/>
+                <a:cs typeface="Inter" pitchFamily="34" charset="-120"/>
+              </a:rPr>
+              <a:t>6,144</a:t>
+            </a:r>
+            <a:endParaRPr lang="en-US" sz="3260" dirty="0"/>
+          </a:p>
+        </p:txBody>
+      </p:sp>
+      <p:sp>
+        <p:nvSpPr>
+          <p:cNvPr id="5" name="Text 3"/>
+          <p:cNvSpPr txBox="1"/>
+          <p:nvPr/>
+        </p:nvSpPr>
+        <p:spPr>
+          <a:xfrm>
+            <a:off x="670350" y="1740228"/>
+            <a:ext cx="2445301" cy="342409"/>
+          </a:xfrm>
+          <a:prstGeom prst="rect">
+            <a:avLst/>
+          </a:prstGeom>
+          <a:noFill/>
+          <a:ln/>
+        </p:spPr>
+        <p:txBody>
+          <a:bodyPr wrap="square" lIns="0" tIns="0" rIns="0" bIns="0" rtlCol="0" anchor="t"/>
+          <a:lstStyle/>
+          <a:p>
+            <a:pPr algn="l" indent="0" marL="0">
+              <a:lnSpc>
+                <a:spcPct val="107000"/>
+              </a:lnSpc>
+              <a:buNone/>
+            </a:pPr>
+            <a:r>
+              <a:rPr lang="en-US" sz="1040" dirty="0">
+                <a:solidFill>
+                  <a:srgbClr val="0B1220"/>
+                </a:solidFill>
+                <a:latin typeface="Inter" pitchFamily="34" charset="0"/>
+                <a:ea typeface="Inter" pitchFamily="34" charset="-122"/>
+                <a:cs typeface="Inter" pitchFamily="34" charset="-120"/>
+              </a:rPr>
+              <a:t>comunicaciones guardadas; en septiembre solo 341 mandaron algo</a:t>
+            </a:r>
+            <a:endParaRPr lang="en-US" sz="1040" dirty="0"/>
+          </a:p>
+        </p:txBody>
+      </p:sp>
+      <p:sp>
+        <p:nvSpPr>
+          <p:cNvPr id="6" name="Shape 4"/>
+          <p:cNvSpPr/>
+          <p:nvPr/>
+        </p:nvSpPr>
+        <p:spPr>
+          <a:xfrm>
+            <a:off x="3343463" y="1161358"/>
+            <a:ext cx="2673112" cy="1214256"/>
+          </a:xfrm>
+          <a:prstGeom prst="rect">
+            <a:avLst/>
+          </a:prstGeom>
+          <a:solidFill>
+            <a:srgbClr val="F4F6F9"/>
+          </a:solidFill>
+          <a:ln/>
+        </p:spPr>
+      </p:sp>
+      <p:sp>
+        <p:nvSpPr>
+          <p:cNvPr id="7" name="Text 5"/>
+          <p:cNvSpPr txBox="1"/>
+          <p:nvPr/>
+        </p:nvSpPr>
+        <p:spPr>
+          <a:xfrm>
+            <a:off x="3501857" y="1283130"/>
+            <a:ext cx="2445301" cy="414448"/>
+          </a:xfrm>
+          <a:prstGeom prst="rect">
+            <a:avLst/>
+          </a:prstGeom>
+          <a:noFill/>
+          <a:ln/>
+        </p:spPr>
+        <p:txBody>
+          <a:bodyPr wrap="square" lIns="0" tIns="0" rIns="0" bIns="0" rtlCol="0" anchor="t"/>
+          <a:lstStyle/>
+          <a:p>
+            <a:pPr algn="l" indent="0" marL="0">
+              <a:lnSpc>
+                <a:spcPct val="83000"/>
+              </a:lnSpc>
+              <a:buNone/>
+            </a:pPr>
+            <a:r>
+              <a:rPr lang="en-US" sz="3260" b="1" spc="-70" kern="0" dirty="0">
+                <a:solidFill>
+                  <a:srgbClr val="0B1220"/>
+                </a:solidFill>
+                <a:latin typeface="Inter" pitchFamily="34" charset="0"/>
+                <a:ea typeface="Inter" pitchFamily="34" charset="-122"/>
+                <a:cs typeface="Inter" pitchFamily="34" charset="-120"/>
+              </a:rPr>
+              <a:t>183</a:t>
+            </a:r>
+            <a:endParaRPr lang="en-US" sz="3260" dirty="0"/>
+          </a:p>
+        </p:txBody>
+      </p:sp>
+      <p:sp>
+        <p:nvSpPr>
+          <p:cNvPr id="8" name="Text 6"/>
+          <p:cNvSpPr txBox="1"/>
+          <p:nvPr/>
+        </p:nvSpPr>
+        <p:spPr>
+          <a:xfrm>
+            <a:off x="3501857" y="1740228"/>
+            <a:ext cx="2445301" cy="342409"/>
+          </a:xfrm>
+          <a:prstGeom prst="rect">
+            <a:avLst/>
+          </a:prstGeom>
+          <a:noFill/>
+          <a:ln/>
+        </p:spPr>
+        <p:txBody>
+          <a:bodyPr wrap="square" lIns="0" tIns="0" rIns="0" bIns="0" rtlCol="0" anchor="t"/>
+          <a:lstStyle/>
+          <a:p>
+            <a:pPr algn="l" indent="0" marL="0">
+              <a:lnSpc>
+                <a:spcPct val="107000"/>
+              </a:lnSpc>
+              <a:buNone/>
+            </a:pPr>
+            <a:r>
+              <a:rPr lang="en-US" sz="1040" dirty="0">
+                <a:solidFill>
+                  <a:srgbClr val="0B1220"/>
+                </a:solidFill>
+                <a:latin typeface="Inter" pitchFamily="34" charset="0"/>
+                <a:ea typeface="Inter" pitchFamily="34" charset="-122"/>
+                <a:cs typeface="Inter" pitchFamily="34" charset="-120"/>
+              </a:rPr>
+              <a:t>nombres distintos en el campo de equipo, para 5 equipos</a:t>
+            </a:r>
+            <a:endParaRPr lang="en-US" sz="1040" dirty="0"/>
+          </a:p>
+        </p:txBody>
+      </p:sp>
+      <p:sp>
+        <p:nvSpPr>
+          <p:cNvPr id="9" name="Shape 7"/>
+          <p:cNvSpPr/>
+          <p:nvPr/>
+        </p:nvSpPr>
+        <p:spPr>
+          <a:xfrm>
+            <a:off x="6174969" y="1161358"/>
+            <a:ext cx="2673112" cy="1214256"/>
+          </a:xfrm>
+          <a:prstGeom prst="rect">
+            <a:avLst/>
+          </a:prstGeom>
+          <a:solidFill>
+            <a:srgbClr val="F4F6F9"/>
+          </a:solidFill>
+          <a:ln/>
+        </p:spPr>
+      </p:sp>
+      <p:sp>
+        <p:nvSpPr>
+          <p:cNvPr id="10" name="Text 8"/>
+          <p:cNvSpPr txBox="1"/>
+          <p:nvPr/>
+        </p:nvSpPr>
+        <p:spPr>
+          <a:xfrm>
+            <a:off x="6333364" y="1283130"/>
+            <a:ext cx="2445301" cy="414448"/>
+          </a:xfrm>
+          <a:prstGeom prst="rect">
+            <a:avLst/>
+          </a:prstGeom>
+          <a:noFill/>
+          <a:ln/>
+        </p:spPr>
+        <p:txBody>
+          <a:bodyPr wrap="square" lIns="0" tIns="0" rIns="0" bIns="0" rtlCol="0" anchor="t"/>
+          <a:lstStyle/>
+          <a:p>
+            <a:pPr algn="l" indent="0" marL="0">
+              <a:lnSpc>
+                <a:spcPct val="83000"/>
+              </a:lnSpc>
+              <a:buNone/>
+            </a:pPr>
+            <a:r>
+              <a:rPr lang="en-US" sz="3260" b="1" spc="-70" kern="0" dirty="0">
+                <a:solidFill>
+                  <a:srgbClr val="0B1220"/>
+                </a:solidFill>
+                <a:latin typeface="Inter" pitchFamily="34" charset="0"/>
+                <a:ea typeface="Inter" pitchFamily="34" charset="-122"/>
+                <a:cs typeface="Inter" pitchFamily="34" charset="-120"/>
+              </a:rPr>
+              <a:t>731</a:t>
+            </a:r>
+            <a:endParaRPr lang="en-US" sz="3260" dirty="0"/>
+          </a:p>
+        </p:txBody>
+      </p:sp>
+      <p:sp>
+        <p:nvSpPr>
+          <p:cNvPr id="11" name="Text 9"/>
+          <p:cNvSpPr txBox="1"/>
+          <p:nvPr/>
+        </p:nvSpPr>
+        <p:spPr>
+          <a:xfrm>
+            <a:off x="6333364" y="1740228"/>
+            <a:ext cx="2445301" cy="513614"/>
+          </a:xfrm>
+          <a:prstGeom prst="rect">
+            <a:avLst/>
+          </a:prstGeom>
+          <a:noFill/>
+          <a:ln/>
+        </p:spPr>
+        <p:txBody>
+          <a:bodyPr wrap="square" lIns="0" tIns="0" rIns="0" bIns="0" rtlCol="0" anchor="t"/>
+          <a:lstStyle/>
+          <a:p>
+            <a:pPr algn="l" indent="0" marL="0">
+              <a:lnSpc>
+                <a:spcPct val="107000"/>
+              </a:lnSpc>
+              <a:buNone/>
+            </a:pPr>
+            <a:r>
+              <a:rPr lang="en-US" sz="1040" dirty="0">
+                <a:solidFill>
+                  <a:srgbClr val="0B1220"/>
+                </a:solidFill>
+                <a:latin typeface="Inter" pitchFamily="34" charset="0"/>
+                <a:ea typeface="Inter" pitchFamily="34" charset="-122"/>
+                <a:cs typeface="Inter" pitchFamily="34" charset="-120"/>
+              </a:rPr>
+              <a:t>nombres de audiencia; 85 M mensajes con segmento "Not Tracked"</a:t>
+            </a:r>
+            <a:endParaRPr lang="en-US" sz="1040" dirty="0"/>
+          </a:p>
+        </p:txBody>
+      </p:sp>
+      <p:sp>
+        <p:nvSpPr>
+          <p:cNvPr id="12" name="Shape 10"/>
+          <p:cNvSpPr/>
+          <p:nvPr/>
+        </p:nvSpPr>
+        <p:spPr>
+          <a:xfrm>
+            <a:off x="9006476" y="1161358"/>
+            <a:ext cx="2673263" cy="1214256"/>
+          </a:xfrm>
+          <a:prstGeom prst="rect">
+            <a:avLst/>
+          </a:prstGeom>
+          <a:solidFill>
+            <a:srgbClr val="E8EEFC"/>
+          </a:solidFill>
+          <a:ln/>
+        </p:spPr>
+      </p:sp>
+      <p:sp>
+        <p:nvSpPr>
+          <p:cNvPr id="13" name="Text 11"/>
+          <p:cNvSpPr txBox="1"/>
+          <p:nvPr/>
+        </p:nvSpPr>
+        <p:spPr>
+          <a:xfrm>
+            <a:off x="9164871" y="1283130"/>
+            <a:ext cx="2445457" cy="414448"/>
+          </a:xfrm>
+          <a:prstGeom prst="rect">
+            <a:avLst/>
+          </a:prstGeom>
+          <a:noFill/>
+          <a:ln/>
+        </p:spPr>
+        <p:txBody>
+          <a:bodyPr wrap="square" lIns="0" tIns="0" rIns="0" bIns="0" rtlCol="0" anchor="t"/>
+          <a:lstStyle/>
+          <a:p>
+            <a:pPr algn="l" indent="0" marL="0">
+              <a:lnSpc>
+                <a:spcPct val="83000"/>
+              </a:lnSpc>
+              <a:buNone/>
+            </a:pPr>
+            <a:r>
+              <a:rPr lang="en-US" sz="3260" b="1" spc="-70" kern="0" dirty="0">
+                <a:solidFill>
+                  <a:srgbClr val="1F4FD8"/>
+                </a:solidFill>
+                <a:latin typeface="Inter" pitchFamily="34" charset="0"/>
+                <a:ea typeface="Inter" pitchFamily="34" charset="-122"/>
+                <a:cs typeface="Inter" pitchFamily="34" charset="-120"/>
+              </a:rPr>
+              <a:t>1 de 3,228</a:t>
+            </a:r>
+            <a:endParaRPr lang="en-US" sz="3260" dirty="0"/>
+          </a:p>
+        </p:txBody>
+      </p:sp>
+      <p:sp>
+        <p:nvSpPr>
+          <p:cNvPr id="14" name="Text 12"/>
+          <p:cNvSpPr txBox="1"/>
+          <p:nvPr/>
+        </p:nvSpPr>
+        <p:spPr>
+          <a:xfrm>
+            <a:off x="9164871" y="1740228"/>
+            <a:ext cx="2445457" cy="171205"/>
+          </a:xfrm>
+          <a:prstGeom prst="rect">
+            <a:avLst/>
+          </a:prstGeom>
+          <a:noFill/>
+          <a:ln/>
+        </p:spPr>
+        <p:txBody>
+          <a:bodyPr wrap="square" lIns="0" tIns="0" rIns="0" bIns="0" rtlCol="0" anchor="t"/>
+          <a:lstStyle/>
+          <a:p>
+            <a:pPr algn="l" indent="0" marL="0">
+              <a:lnSpc>
+                <a:spcPct val="107000"/>
+              </a:lnSpc>
+              <a:buNone/>
+            </a:pPr>
+            <a:r>
+              <a:rPr lang="en-US" sz="1040" dirty="0">
+                <a:solidFill>
+                  <a:srgbClr val="0B1220"/>
+                </a:solidFill>
+                <a:latin typeface="Inter" pitchFamily="34" charset="0"/>
+                <a:ea typeface="Inter" pitchFamily="34" charset="-122"/>
+                <a:cs typeface="Inter" pitchFamily="34" charset="-120"/>
+              </a:rPr>
+              <a:t>Canvas con grupo de control real</a:t>
+            </a:r>
+            <a:endParaRPr lang="en-US" sz="1040" dirty="0"/>
+          </a:p>
+        </p:txBody>
+      </p:sp>
+      <p:sp>
+        <p:nvSpPr>
+          <p:cNvPr id="15" name="Text 13"/>
+          <p:cNvSpPr txBox="1"/>
+          <p:nvPr/>
+        </p:nvSpPr>
+        <p:spPr>
+          <a:xfrm>
+            <a:off x="511956" y="2546216"/>
+            <a:ext cx="7187252" cy="164573"/>
+          </a:xfrm>
+          <a:prstGeom prst="rect">
+            <a:avLst/>
+          </a:prstGeom>
+          <a:noFill/>
+          <a:ln/>
+        </p:spPr>
+        <p:txBody>
+          <a:bodyPr wrap="square" lIns="0" tIns="0" rIns="0" bIns="0" rtlCol="0" anchor="t"/>
+          <a:lstStyle/>
+          <a:p>
+            <a:pPr algn="l" indent="0" marL="0">
+              <a:lnSpc>
+                <a:spcPct val="112000"/>
+              </a:lnSpc>
+              <a:buNone/>
+            </a:pPr>
+            <a:r>
+              <a:rPr lang="en-US" sz="960" b="1" dirty="0">
+                <a:solidFill>
+                  <a:srgbClr val="0B1220"/>
+                </a:solidFill>
+                <a:latin typeface="Inter" pitchFamily="34" charset="0"/>
+                <a:ea typeface="Inter" pitchFamily="34" charset="-122"/>
+                <a:cs typeface="Inter" pitchFamily="34" charset="-120"/>
+              </a:rPr>
+              <a:t>Cada punto es una comunicación que mandó algo en 2026, por problema de orden</a:t>
+            </a:r>
+            <a:endParaRPr lang="en-US" sz="960" dirty="0"/>
+          </a:p>
+        </p:txBody>
+      </p:sp>
+      <p:pic>
+        <p:nvPicPr>
+          <p:cNvPr id="16" name="Image 0" descr="preencoded.png">    </p:cNvPr>
+          <p:cNvPicPr>
+            <a:picLocks noChangeAspect="1"/>
+          </p:cNvPicPr>
+          <p:nvPr/>
+        </p:nvPicPr>
+        <p:blipFill>
+          <a:blip r:embed="rId1"/>
+          <a:stretch>
+            <a:fillRect/>
+          </a:stretch>
+        </p:blipFill>
+        <p:spPr>
+          <a:xfrm>
+            <a:off x="511956" y="2771676"/>
+            <a:ext cx="6959858" cy="2930522"/>
+          </a:xfrm>
+          <a:prstGeom prst="rect">
+            <a:avLst/>
+          </a:prstGeom>
+        </p:spPr>
+      </p:pic>
+      <p:sp>
+        <p:nvSpPr>
+          <p:cNvPr id="17" name="Shape 14"/>
+          <p:cNvSpPr/>
+          <p:nvPr/>
+        </p:nvSpPr>
+        <p:spPr>
+          <a:xfrm>
+            <a:off x="7764640" y="2551039"/>
+            <a:ext cx="3914948" cy="0"/>
           </a:xfrm>
           <a:prstGeom prst="line">
             <a:avLst/>
@@ -4368,14 +4940,135 @@
       </p:sp>
       <p:sp>
         <p:nvSpPr>
-          <p:cNvPr id="4" name="Shape 2"/>
+          <p:cNvPr id="18" name="Shape 15"/>
           <p:cNvSpPr/>
           <p:nvPr/>
         </p:nvSpPr>
         <p:spPr>
           <a:xfrm>
-            <a:off x="511956" y="1467446"/>
-            <a:ext cx="11167783" cy="0"/>
+            <a:off x="7764640" y="2641162"/>
+            <a:ext cx="207224" cy="207224"/>
+          </a:xfrm>
+          <a:prstGeom prst="ellipse">
+            <a:avLst/>
+          </a:prstGeom>
+          <a:solidFill>
+            <a:srgbClr val="E8EEFC"/>
+          </a:solidFill>
+          <a:ln/>
+        </p:spPr>
+      </p:sp>
+      <p:sp>
+        <p:nvSpPr>
+          <p:cNvPr id="19" name="Text 16"/>
+          <p:cNvSpPr txBox="1"/>
+          <p:nvPr/>
+        </p:nvSpPr>
+        <p:spPr>
+          <a:xfrm>
+            <a:off x="7764640" y="2641162"/>
+            <a:ext cx="231729" cy="207224"/>
+          </a:xfrm>
+          <a:prstGeom prst="rect">
+            <a:avLst/>
+          </a:prstGeom>
+          <a:noFill/>
+          <a:ln/>
+        </p:spPr>
+        <p:txBody>
+          <a:bodyPr wrap="square" lIns="0" tIns="0" rIns="0" bIns="0" rtlCol="0" anchor="ctr"/>
+          <a:lstStyle/>
+          <a:p>
+            <a:pPr algn="ctr" indent="0" marL="0">
+              <a:lnSpc>
+                <a:spcPct val="112000"/>
+              </a:lnSpc>
+              <a:buNone/>
+            </a:pPr>
+            <a:r>
+              <a:rPr lang="en-US" sz="910" b="1" dirty="0">
+                <a:solidFill>
+                  <a:srgbClr val="1F4FD8"/>
+                </a:solidFill>
+                <a:latin typeface="Inter" pitchFamily="34" charset="0"/>
+                <a:ea typeface="Inter" pitchFamily="34" charset="-122"/>
+                <a:cs typeface="Inter" pitchFamily="34" charset="-120"/>
+              </a:rPr>
+              <a:t>1</a:t>
+            </a:r>
+            <a:endParaRPr lang="en-US" sz="910" dirty="0"/>
+          </a:p>
+        </p:txBody>
+      </p:sp>
+      <p:sp>
+        <p:nvSpPr>
+          <p:cNvPr id="20" name="Text 17"/>
+          <p:cNvSpPr txBox="1"/>
+          <p:nvPr/>
+        </p:nvSpPr>
+        <p:spPr>
+          <a:xfrm>
+            <a:off x="8069372" y="2641162"/>
+            <a:ext cx="3736811" cy="362001"/>
+          </a:xfrm>
+          <a:prstGeom prst="rect">
+            <a:avLst/>
+          </a:prstGeom>
+          <a:noFill/>
+          <a:ln/>
+        </p:spPr>
+        <p:txBody>
+          <a:bodyPr wrap="square" lIns="0" tIns="0" rIns="0" bIns="0" rtlCol="0" anchor="t"/>
+          <a:lstStyle/>
+          <a:p>
+            <a:pPr algn="l" indent="0" marL="0">
+              <a:lnSpc>
+                <a:spcPct val="112000"/>
+              </a:lnSpc>
+              <a:buNone/>
+            </a:pPr>
+            <a:r>
+              <a:rPr lang="en-US" sz="1060" b="1" dirty="0">
+                <a:solidFill>
+                  <a:srgbClr val="0B1220"/>
+                </a:solidFill>
+                <a:latin typeface="Inter" pitchFamily="34" charset="0"/>
+                <a:ea typeface="Inter" pitchFamily="34" charset="-122"/>
+                <a:cs typeface="Inter" pitchFamily="34" charset="-120"/>
+              </a:rPr>
+              <a:t>Nombres.</a:t>
+            </a:r>
+            <a:pPr algn="l" indent="0" marL="0">
+              <a:lnSpc>
+                <a:spcPct val="112000"/>
+              </a:lnSpc>
+              <a:buNone/>
+            </a:pPr>
+            <a:r>
+              <a:rPr lang="en-US" sz="1060" dirty="0">
+                <a:solidFill>
+                  <a:srgbClr val="0B1220"/>
+                </a:solidFill>
+                <a:latin typeface="Inter" pitchFamily="34" charset="0"/>
+                <a:ea typeface="Inter" pitchFamily="34" charset="-122"/>
+                <a:cs typeface="Inter" pitchFamily="34" charset="-120"/>
+              </a:rPr>
+              <a:t> 1,053 fuera de la convención: "Recurentes", "Recurrentess", "Softnactive", fecha "202600903".</a:t>
+            </a:r>
+            <a:endParaRPr lang="en-US" sz="1060" dirty="0"/>
+          </a:p>
+        </p:txBody>
+      </p:sp>
+      <p:sp>
+        <p:nvSpPr>
+          <p:cNvPr id="21" name="Shape 18"/>
+          <p:cNvSpPr/>
+          <p:nvPr/>
+        </p:nvSpPr>
+        <p:spPr>
+          <a:xfrm>
+            <a:off x="7764640" y="3081080"/>
+            <a:ext cx="3914948" cy="0"/>
           </a:xfrm>
           <a:prstGeom prst="line">
             <a:avLst/>
@@ -4391,274 +5084,143 @@
       </p:sp>
       <p:sp>
         <p:nvSpPr>
-          <p:cNvPr id="5" name="Text 3"/>
-          <p:cNvSpPr txBox="1"/>
-          <p:nvPr/>
-        </p:nvSpPr>
-        <p:spPr>
-          <a:xfrm>
-            <a:off x="511956" y="925499"/>
-            <a:ext cx="3718649" cy="129760"/>
-          </a:xfrm>
-          <a:prstGeom prst="rect">
-            <a:avLst/>
-          </a:prstGeom>
-          <a:noFill/>
-          <a:ln/>
-        </p:spPr>
-        <p:txBody>
-          <a:bodyPr wrap="square" lIns="0" tIns="0" rIns="0" bIns="0" rtlCol="0" anchor="t"/>
-          <a:lstStyle/>
-          <a:p>
-            <a:pPr algn="l" indent="0" marL="0">
-              <a:lnSpc>
-                <a:spcPct val="107000"/>
-              </a:lnSpc>
-              <a:buNone/>
-            </a:pPr>
-            <a:r>
-              <a:rPr lang="en-US" sz="790" b="1" spc="80" kern="0" dirty="0">
-                <a:solidFill>
-                  <a:srgbClr val="6B7484"/>
-                </a:solidFill>
-                <a:latin typeface="Inter" pitchFamily="34" charset="0"/>
-                <a:ea typeface="Inter" pitchFamily="34" charset="-122"/>
-                <a:cs typeface="Inter" pitchFamily="34" charset="-120"/>
-              </a:rPr>
-              <a:t>QUÉ SE MANDA</a:t>
-            </a:r>
-            <a:endParaRPr lang="en-US" sz="790" dirty="0"/>
-          </a:p>
-        </p:txBody>
-      </p:sp>
-      <p:sp>
-        <p:nvSpPr>
-          <p:cNvPr id="6" name="Text 4"/>
-          <p:cNvSpPr txBox="1"/>
-          <p:nvPr/>
-        </p:nvSpPr>
-        <p:spPr>
-          <a:xfrm>
-            <a:off x="511956" y="1079523"/>
-            <a:ext cx="3039830" cy="293580"/>
-          </a:xfrm>
-          <a:prstGeom prst="rect">
-            <a:avLst/>
-          </a:prstGeom>
-          <a:noFill/>
-          <a:ln/>
-        </p:spPr>
-        <p:txBody>
-          <a:bodyPr wrap="square" lIns="0" tIns="0" rIns="0" bIns="0" rtlCol="0" anchor="t"/>
-          <a:lstStyle/>
-          <a:p>
-            <a:pPr algn="l" indent="0" marL="0">
-              <a:lnSpc>
-                <a:spcPct val="107000"/>
-              </a:lnSpc>
-              <a:buNone/>
-            </a:pPr>
-            <a:r>
-              <a:rPr lang="en-US" sz="900" dirty="0">
-                <a:solidFill>
-                  <a:srgbClr val="3B4556"/>
-                </a:solidFill>
-                <a:latin typeface="Inter" pitchFamily="34" charset="0"/>
-                <a:ea typeface="Inter" pitchFamily="34" charset="-122"/>
-                <a:cs typeface="Inter" pitchFamily="34" charset="-120"/>
-              </a:rPr>
-              <a:t>Todo lo que vive en Braze: campañas, Canvas, listas y configuración.</a:t>
-            </a:r>
-            <a:endParaRPr lang="en-US" sz="900" dirty="0"/>
-          </a:p>
-        </p:txBody>
-      </p:sp>
-      <p:sp>
-        <p:nvSpPr>
-          <p:cNvPr id="7" name="Text 5"/>
-          <p:cNvSpPr txBox="1"/>
-          <p:nvPr/>
-        </p:nvSpPr>
-        <p:spPr>
-          <a:xfrm>
-            <a:off x="4299556" y="925499"/>
-            <a:ext cx="3718649" cy="129760"/>
-          </a:xfrm>
-          <a:prstGeom prst="rect">
-            <a:avLst/>
-          </a:prstGeom>
-          <a:noFill/>
-          <a:ln/>
-        </p:spPr>
-        <p:txBody>
-          <a:bodyPr wrap="square" lIns="0" tIns="0" rIns="0" bIns="0" rtlCol="0" anchor="t"/>
-          <a:lstStyle/>
-          <a:p>
-            <a:pPr algn="l" indent="0" marL="0">
-              <a:lnSpc>
-                <a:spcPct val="107000"/>
-              </a:lnSpc>
-              <a:buNone/>
-            </a:pPr>
-            <a:r>
-              <a:rPr lang="en-US" sz="790" b="1" spc="80" kern="0" dirty="0">
-                <a:solidFill>
-                  <a:srgbClr val="6B7484"/>
-                </a:solidFill>
-                <a:latin typeface="Inter" pitchFamily="34" charset="0"/>
-                <a:ea typeface="Inter" pitchFamily="34" charset="-122"/>
-                <a:cs typeface="Inter" pitchFamily="34" charset="-120"/>
-              </a:rPr>
-              <a:t>QUIÉN</a:t>
-            </a:r>
-            <a:endParaRPr lang="en-US" sz="790" dirty="0"/>
-          </a:p>
-        </p:txBody>
-      </p:sp>
-      <p:sp>
-        <p:nvSpPr>
-          <p:cNvPr id="8" name="Text 6"/>
-          <p:cNvSpPr txBox="1"/>
-          <p:nvPr/>
-        </p:nvSpPr>
-        <p:spPr>
-          <a:xfrm>
-            <a:off x="4299556" y="1079523"/>
-            <a:ext cx="3256841" cy="144680"/>
-          </a:xfrm>
-          <a:prstGeom prst="rect">
-            <a:avLst/>
-          </a:prstGeom>
-          <a:noFill/>
-          <a:ln/>
-        </p:spPr>
-        <p:txBody>
-          <a:bodyPr wrap="square" lIns="0" tIns="0" rIns="0" bIns="0" rtlCol="0" anchor="t"/>
-          <a:lstStyle/>
-          <a:p>
-            <a:pPr algn="l" indent="0" marL="0">
-              <a:lnSpc>
-                <a:spcPct val="107000"/>
-              </a:lnSpc>
-              <a:buNone/>
-            </a:pPr>
-            <a:r>
-              <a:rPr lang="en-US" sz="900" dirty="0">
-                <a:solidFill>
-                  <a:srgbClr val="3B4556"/>
-                </a:solidFill>
-                <a:latin typeface="Inter" pitchFamily="34" charset="0"/>
-                <a:ea typeface="Inter" pitchFamily="34" charset="-122"/>
-                <a:cs typeface="Inter" pitchFamily="34" charset="-120"/>
-              </a:rPr>
-              <a:t>Todos los equipos; nadie es dueño de la cuenta completa.</a:t>
-            </a:r>
-            <a:endParaRPr lang="en-US" sz="900" dirty="0"/>
-          </a:p>
-        </p:txBody>
-      </p:sp>
-      <p:sp>
-        <p:nvSpPr>
-          <p:cNvPr id="9" name="Text 7"/>
-          <p:cNvSpPr txBox="1"/>
-          <p:nvPr/>
-        </p:nvSpPr>
-        <p:spPr>
-          <a:xfrm>
-            <a:off x="8087156" y="925499"/>
-            <a:ext cx="3718649" cy="129760"/>
-          </a:xfrm>
-          <a:prstGeom prst="rect">
-            <a:avLst/>
-          </a:prstGeom>
-          <a:noFill/>
-          <a:ln/>
-        </p:spPr>
-        <p:txBody>
-          <a:bodyPr wrap="square" lIns="0" tIns="0" rIns="0" bIns="0" rtlCol="0" anchor="t"/>
-          <a:lstStyle/>
-          <a:p>
-            <a:pPr algn="l" indent="0" marL="0">
-              <a:lnSpc>
-                <a:spcPct val="107000"/>
-              </a:lnSpc>
-              <a:buNone/>
-            </a:pPr>
-            <a:r>
-              <a:rPr lang="en-US" sz="790" b="1" spc="80" kern="0" dirty="0">
-                <a:solidFill>
-                  <a:srgbClr val="6B7484"/>
-                </a:solidFill>
-                <a:latin typeface="Inter" pitchFamily="34" charset="0"/>
-                <a:ea typeface="Inter" pitchFamily="34" charset="-122"/>
-                <a:cs typeface="Inter" pitchFamily="34" charset="-120"/>
-              </a:rPr>
-              <a:t>A QUIÉN</a:t>
-            </a:r>
-            <a:endParaRPr lang="en-US" sz="790" dirty="0"/>
-          </a:p>
-        </p:txBody>
-      </p:sp>
-      <p:sp>
-        <p:nvSpPr>
-          <p:cNvPr id="10" name="Text 8"/>
-          <p:cNvSpPr txBox="1"/>
-          <p:nvPr/>
-        </p:nvSpPr>
-        <p:spPr>
-          <a:xfrm>
-            <a:off x="8087156" y="1079523"/>
-            <a:ext cx="2931791" cy="144680"/>
-          </a:xfrm>
-          <a:prstGeom prst="rect">
-            <a:avLst/>
-          </a:prstGeom>
-          <a:noFill/>
-          <a:ln/>
-        </p:spPr>
-        <p:txBody>
-          <a:bodyPr wrap="square" lIns="0" tIns="0" rIns="0" bIns="0" rtlCol="0" anchor="t"/>
-          <a:lstStyle/>
-          <a:p>
-            <a:pPr algn="l" indent="0" marL="0">
-              <a:lnSpc>
-                <a:spcPct val="107000"/>
-              </a:lnSpc>
-              <a:buNone/>
-            </a:pPr>
-            <a:r>
-              <a:rPr lang="en-US" sz="900" dirty="0">
-                <a:solidFill>
-                  <a:srgbClr val="3B4556"/>
-                </a:solidFill>
-                <a:latin typeface="Inter" pitchFamily="34" charset="0"/>
-                <a:ea typeface="Inter" pitchFamily="34" charset="-122"/>
-                <a:cs typeface="Inter" pitchFamily="34" charset="-120"/>
-              </a:rPr>
-              <a:t>Toda la base, incluidos bloqueados y dados de baja.</a:t>
-            </a:r>
-            <a:endParaRPr lang="en-US" sz="900" dirty="0"/>
-          </a:p>
-        </p:txBody>
-      </p:sp>
-      <p:sp>
-        <p:nvSpPr>
-          <p:cNvPr id="11" name="Shape 9"/>
+          <p:cNvPr id="22" name="Shape 19"/>
           <p:cNvSpPr/>
           <p:nvPr/>
         </p:nvSpPr>
         <p:spPr>
           <a:xfrm>
-            <a:off x="511956" y="1591630"/>
-            <a:ext cx="2609061" cy="0"/>
+            <a:off x="7764640" y="3171203"/>
+            <a:ext cx="207224" cy="207224"/>
+          </a:xfrm>
+          <a:prstGeom prst="ellipse">
+            <a:avLst/>
+          </a:prstGeom>
+          <a:solidFill>
+            <a:srgbClr val="E8EEFC"/>
+          </a:solidFill>
+          <a:ln/>
+        </p:spPr>
+      </p:sp>
+      <p:sp>
+        <p:nvSpPr>
+          <p:cNvPr id="23" name="Text 20"/>
+          <p:cNvSpPr txBox="1"/>
+          <p:nvPr/>
+        </p:nvSpPr>
+        <p:spPr>
+          <a:xfrm>
+            <a:off x="7764640" y="3171203"/>
+            <a:ext cx="231729" cy="207224"/>
+          </a:xfrm>
+          <a:prstGeom prst="rect">
+            <a:avLst/>
+          </a:prstGeom>
+          <a:noFill/>
+          <a:ln/>
+        </p:spPr>
+        <p:txBody>
+          <a:bodyPr wrap="square" lIns="0" tIns="0" rIns="0" bIns="0" rtlCol="0" anchor="ctr"/>
+          <a:lstStyle/>
+          <a:p>
+            <a:pPr algn="ctr" indent="0" marL="0">
+              <a:lnSpc>
+                <a:spcPct val="112000"/>
+              </a:lnSpc>
+              <a:buNone/>
+            </a:pPr>
+            <a:r>
+              <a:rPr lang="en-US" sz="910" b="1" dirty="0">
+                <a:solidFill>
+                  <a:srgbClr val="1F4FD8"/>
+                </a:solidFill>
+                <a:latin typeface="Inter" pitchFamily="34" charset="0"/>
+                <a:ea typeface="Inter" pitchFamily="34" charset="-122"/>
+                <a:cs typeface="Inter" pitchFamily="34" charset="-120"/>
+              </a:rPr>
+              <a:t>2</a:t>
+            </a:r>
+            <a:endParaRPr lang="en-US" sz="910" dirty="0"/>
+          </a:p>
+        </p:txBody>
+      </p:sp>
+      <p:sp>
+        <p:nvSpPr>
+          <p:cNvPr id="24" name="Text 21"/>
+          <p:cNvSpPr txBox="1"/>
+          <p:nvPr/>
+        </p:nvSpPr>
+        <p:spPr>
+          <a:xfrm>
+            <a:off x="8069372" y="3171203"/>
+            <a:ext cx="3736811" cy="543002"/>
+          </a:xfrm>
+          <a:prstGeom prst="rect">
+            <a:avLst/>
+          </a:prstGeom>
+          <a:noFill/>
+          <a:ln/>
+        </p:spPr>
+        <p:txBody>
+          <a:bodyPr wrap="square" lIns="0" tIns="0" rIns="0" bIns="0" rtlCol="0" anchor="t"/>
+          <a:lstStyle/>
+          <a:p>
+            <a:pPr algn="l" indent="0" marL="0">
+              <a:lnSpc>
+                <a:spcPct val="112000"/>
+              </a:lnSpc>
+              <a:buNone/>
+            </a:pPr>
+            <a:r>
+              <a:rPr lang="en-US" sz="1060" b="1" dirty="0">
+                <a:solidFill>
+                  <a:srgbClr val="0B1220"/>
+                </a:solidFill>
+                <a:latin typeface="Inter" pitchFamily="34" charset="0"/>
+                <a:ea typeface="Inter" pitchFamily="34" charset="-122"/>
+                <a:cs typeface="Inter" pitchFamily="34" charset="-120"/>
+              </a:rPr>
+              <a:t>Equipo y ticket.</a:t>
+            </a:r>
+            <a:pPr algn="l" indent="0" marL="0">
+              <a:lnSpc>
+                <a:spcPct val="112000"/>
+              </a:lnSpc>
+              <a:buNone/>
+            </a:pPr>
+            <a:r>
+              <a:rPr lang="en-US" sz="1060" dirty="0">
+                <a:solidFill>
+                  <a:srgbClr val="0B1220"/>
+                </a:solidFill>
+                <a:latin typeface="Inter" pitchFamily="34" charset="0"/>
+                <a:ea typeface="Inter" pitchFamily="34" charset="-122"/>
+                <a:cs typeface="Inter" pitchFamily="34" charset="-120"/>
+              </a:rPr>
+              <a:t> "Copy of Copy of Copy of Copy of Marketing" es un equipo; T0000 y B0000 sirven de ticket, y B0171 cubre 362.</a:t>
+            </a:r>
+            <a:endParaRPr lang="en-US" sz="1060" dirty="0"/>
+          </a:p>
+        </p:txBody>
+      </p:sp>
+      <p:sp>
+        <p:nvSpPr>
+          <p:cNvPr id="25" name="Shape 22"/>
+          <p:cNvSpPr/>
+          <p:nvPr/>
+        </p:nvSpPr>
+        <p:spPr>
+          <a:xfrm>
+            <a:off x="7764640" y="3792121"/>
+            <a:ext cx="3914948" cy="0"/>
           </a:xfrm>
           <a:prstGeom prst="line">
             <a:avLst/>
           </a:prstGeom>
           <a:noFill/>
-          <a:ln w="19291">
+          <a:ln w="9645">
             <a:solidFill>
-              <a:srgbClr val="0B1220"/>
+              <a:srgbClr val="DDE2EA"/>
             </a:solidFill>
             <a:prstDash val="solid"/>
           </a:ln>
@@ -4666,1185 +5228,16 @@
       </p:sp>
       <p:sp>
         <p:nvSpPr>
-          <p:cNvPr id="12" name="Text 10"/>
-          <p:cNvSpPr txBox="1"/>
-          <p:nvPr/>
-        </p:nvSpPr>
-        <p:spPr>
-          <a:xfrm>
-            <a:off x="511956" y="1710991"/>
-            <a:ext cx="2705621" cy="134884"/>
-          </a:xfrm>
-          <a:prstGeom prst="rect">
-            <a:avLst/>
-          </a:prstGeom>
-          <a:noFill/>
-          <a:ln/>
-        </p:spPr>
-        <p:txBody>
-          <a:bodyPr wrap="square" lIns="0" tIns="0" rIns="0" bIns="0" rtlCol="0" anchor="t"/>
-          <a:lstStyle/>
-          <a:p>
-            <a:pPr algn="l" indent="0" marL="0">
-              <a:lnSpc>
-                <a:spcPct val="112000"/>
-              </a:lnSpc>
-              <a:buNone/>
-            </a:pPr>
-            <a:r>
-              <a:rPr lang="en-US" sz="790" b="1" spc="80" kern="0" dirty="0">
-                <a:solidFill>
-                  <a:srgbClr val="6B7484"/>
-                </a:solidFill>
-                <a:latin typeface="Inter" pitchFamily="34" charset="0"/>
-                <a:ea typeface="Inter" pitchFamily="34" charset="-122"/>
-                <a:cs typeface="Inter" pitchFamily="34" charset="-120"/>
-              </a:rPr>
-              <a:t>ORDEN</a:t>
-            </a:r>
-            <a:endParaRPr lang="en-US" sz="790" dirty="0"/>
-          </a:p>
-        </p:txBody>
-      </p:sp>
-      <p:sp>
-        <p:nvSpPr>
-          <p:cNvPr id="13" name="Text 11"/>
-          <p:cNvSpPr txBox="1"/>
-          <p:nvPr/>
-        </p:nvSpPr>
-        <p:spPr>
-          <a:xfrm>
-            <a:off x="511956" y="1900733"/>
-            <a:ext cx="2705621" cy="390184"/>
-          </a:xfrm>
-          <a:prstGeom prst="rect">
-            <a:avLst/>
-          </a:prstGeom>
-          <a:noFill/>
-          <a:ln/>
-        </p:spPr>
-        <p:txBody>
-          <a:bodyPr wrap="square" lIns="0" tIns="0" rIns="0" bIns="0" rtlCol="0" anchor="t"/>
-          <a:lstStyle/>
-          <a:p>
-            <a:pPr algn="l" indent="0" marL="0">
-              <a:lnSpc>
-                <a:spcPct val="83000"/>
-              </a:lnSpc>
-              <a:buNone/>
-            </a:pPr>
-            <a:r>
-              <a:rPr lang="en-US" sz="3070" b="1" spc="-60" kern="0" dirty="0">
-                <a:solidFill>
-                  <a:srgbClr val="0B1220"/>
-                </a:solidFill>
-                <a:latin typeface="Inter" pitchFamily="34" charset="0"/>
-                <a:ea typeface="Inter" pitchFamily="34" charset="-122"/>
-                <a:cs typeface="Inter" pitchFamily="34" charset="-120"/>
-              </a:rPr>
-              <a:t>6,144</a:t>
-            </a:r>
-            <a:endParaRPr lang="en-US" sz="3070" dirty="0"/>
-          </a:p>
-        </p:txBody>
-      </p:sp>
-      <p:sp>
-        <p:nvSpPr>
-          <p:cNvPr id="14" name="Text 12"/>
-          <p:cNvSpPr txBox="1"/>
-          <p:nvPr/>
-        </p:nvSpPr>
-        <p:spPr>
-          <a:xfrm>
-            <a:off x="511956" y="2345774"/>
-            <a:ext cx="2705621" cy="378278"/>
-          </a:xfrm>
-          <a:prstGeom prst="rect">
-            <a:avLst/>
-          </a:prstGeom>
-          <a:noFill/>
-          <a:ln/>
-        </p:spPr>
-        <p:txBody>
-          <a:bodyPr wrap="square" lIns="0" tIns="0" rIns="0" bIns="0" rtlCol="0" anchor="t"/>
-          <a:lstStyle/>
-          <a:p>
-            <a:pPr algn="l" indent="0" marL="0">
-              <a:lnSpc>
-                <a:spcPct val="112000"/>
-              </a:lnSpc>
-              <a:buNone/>
-            </a:pPr>
-            <a:r>
-              <a:rPr lang="en-US" sz="1100" dirty="0">
-                <a:solidFill>
-                  <a:srgbClr val="3B4556"/>
-                </a:solidFill>
-                <a:latin typeface="Inter" pitchFamily="34" charset="0"/>
-                <a:ea typeface="Inter" pitchFamily="34" charset="-122"/>
-                <a:cs typeface="Inter" pitchFamily="34" charset="-120"/>
-              </a:rPr>
-              <a:t>comunicaciones guardadas; en septiembre solo 341 mandaron algo</a:t>
-            </a:r>
-            <a:endParaRPr lang="en-US" sz="1100" dirty="0"/>
-          </a:p>
-        </p:txBody>
-      </p:sp>
-      <p:sp>
-        <p:nvSpPr>
-          <p:cNvPr id="15" name="Shape 13"/>
+          <p:cNvPr id="26" name="Shape 23"/>
           <p:cNvSpPr/>
           <p:nvPr/>
         </p:nvSpPr>
         <p:spPr>
           <a:xfrm>
-            <a:off x="3364713" y="1591630"/>
-            <a:ext cx="2609212" cy="0"/>
-          </a:xfrm>
-          <a:prstGeom prst="line">
-            <a:avLst/>
-          </a:prstGeom>
-          <a:noFill/>
-          <a:ln w="19291">
-            <a:solidFill>
-              <a:srgbClr val="0B1220"/>
-            </a:solidFill>
-            <a:prstDash val="solid"/>
-          </a:ln>
-        </p:spPr>
-      </p:sp>
-      <p:sp>
-        <p:nvSpPr>
-          <p:cNvPr id="16" name="Text 14"/>
-          <p:cNvSpPr txBox="1"/>
-          <p:nvPr/>
-        </p:nvSpPr>
-        <p:spPr>
-          <a:xfrm>
-            <a:off x="3364713" y="1710991"/>
-            <a:ext cx="2705776" cy="134884"/>
-          </a:xfrm>
-          <a:prstGeom prst="rect">
-            <a:avLst/>
-          </a:prstGeom>
-          <a:noFill/>
-          <a:ln/>
-        </p:spPr>
-        <p:txBody>
-          <a:bodyPr wrap="square" lIns="0" tIns="0" rIns="0" bIns="0" rtlCol="0" anchor="t"/>
-          <a:lstStyle/>
-          <a:p>
-            <a:pPr algn="l" indent="0" marL="0">
-              <a:lnSpc>
-                <a:spcPct val="112000"/>
-              </a:lnSpc>
-              <a:buNone/>
-            </a:pPr>
-            <a:r>
-              <a:rPr lang="en-US" sz="790" b="1" spc="80" kern="0" dirty="0">
-                <a:solidFill>
-                  <a:srgbClr val="6B7484"/>
-                </a:solidFill>
-                <a:latin typeface="Inter" pitchFamily="34" charset="0"/>
-                <a:ea typeface="Inter" pitchFamily="34" charset="-122"/>
-                <a:cs typeface="Inter" pitchFamily="34" charset="-120"/>
-              </a:rPr>
-              <a:t>ORDEN</a:t>
-            </a:r>
-            <a:endParaRPr lang="en-US" sz="790" dirty="0"/>
-          </a:p>
-        </p:txBody>
-      </p:sp>
-      <p:sp>
-        <p:nvSpPr>
-          <p:cNvPr id="17" name="Text 15"/>
-          <p:cNvSpPr txBox="1"/>
-          <p:nvPr/>
-        </p:nvSpPr>
-        <p:spPr>
-          <a:xfrm>
-            <a:off x="3364713" y="1900733"/>
-            <a:ext cx="2705776" cy="390184"/>
-          </a:xfrm>
-          <a:prstGeom prst="rect">
-            <a:avLst/>
-          </a:prstGeom>
-          <a:noFill/>
-          <a:ln/>
-        </p:spPr>
-        <p:txBody>
-          <a:bodyPr wrap="square" lIns="0" tIns="0" rIns="0" bIns="0" rtlCol="0" anchor="t"/>
-          <a:lstStyle/>
-          <a:p>
-            <a:pPr algn="l" indent="0" marL="0">
-              <a:lnSpc>
-                <a:spcPct val="83000"/>
-              </a:lnSpc>
-              <a:buNone/>
-            </a:pPr>
-            <a:r>
-              <a:rPr lang="en-US" sz="3070" b="1" spc="-60" kern="0" dirty="0">
-                <a:solidFill>
-                  <a:srgbClr val="0B1220"/>
-                </a:solidFill>
-                <a:latin typeface="Inter" pitchFamily="34" charset="0"/>
-                <a:ea typeface="Inter" pitchFamily="34" charset="-122"/>
-                <a:cs typeface="Inter" pitchFamily="34" charset="-120"/>
-              </a:rPr>
-              <a:t>229</a:t>
-            </a:r>
-            <a:endParaRPr lang="en-US" sz="3070" dirty="0"/>
-          </a:p>
-        </p:txBody>
-      </p:sp>
-      <p:sp>
-        <p:nvSpPr>
-          <p:cNvPr id="18" name="Text 16"/>
-          <p:cNvSpPr txBox="1"/>
-          <p:nvPr/>
-        </p:nvSpPr>
-        <p:spPr>
-          <a:xfrm>
-            <a:off x="3364713" y="2345774"/>
-            <a:ext cx="2705776" cy="378278"/>
-          </a:xfrm>
-          <a:prstGeom prst="rect">
-            <a:avLst/>
-          </a:prstGeom>
-          <a:noFill/>
-          <a:ln/>
-        </p:spPr>
-        <p:txBody>
-          <a:bodyPr wrap="square" lIns="0" tIns="0" rIns="0" bIns="0" rtlCol="0" anchor="t"/>
-          <a:lstStyle/>
-          <a:p>
-            <a:pPr algn="l" indent="0" marL="0">
-              <a:lnSpc>
-                <a:spcPct val="112000"/>
-              </a:lnSpc>
-              <a:buNone/>
-            </a:pPr>
-            <a:r>
-              <a:rPr lang="en-US" sz="1100" dirty="0">
-                <a:solidFill>
-                  <a:srgbClr val="3B4556"/>
-                </a:solidFill>
-                <a:latin typeface="Inter" pitchFamily="34" charset="0"/>
-                <a:ea typeface="Inter" pitchFamily="34" charset="-122"/>
-                <a:cs typeface="Inter" pitchFamily="34" charset="-120"/>
-              </a:rPr>
-              <a:t>marcadas como archivadas siguieron enviando en septiembre</a:t>
-            </a:r>
-            <a:endParaRPr lang="en-US" sz="1100" dirty="0"/>
-          </a:p>
-        </p:txBody>
-      </p:sp>
-      <p:sp>
-        <p:nvSpPr>
-          <p:cNvPr id="19" name="Shape 17"/>
-          <p:cNvSpPr/>
-          <p:nvPr/>
-        </p:nvSpPr>
-        <p:spPr>
-          <a:xfrm>
-            <a:off x="6217620" y="1591630"/>
-            <a:ext cx="2609212" cy="0"/>
-          </a:xfrm>
-          <a:prstGeom prst="line">
-            <a:avLst/>
-          </a:prstGeom>
-          <a:noFill/>
-          <a:ln w="19291">
-            <a:solidFill>
-              <a:srgbClr val="0B1220"/>
-            </a:solidFill>
-            <a:prstDash val="solid"/>
-          </a:ln>
-        </p:spPr>
-      </p:sp>
-      <p:sp>
-        <p:nvSpPr>
-          <p:cNvPr id="20" name="Text 18"/>
-          <p:cNvSpPr txBox="1"/>
-          <p:nvPr/>
-        </p:nvSpPr>
-        <p:spPr>
-          <a:xfrm>
-            <a:off x="6217620" y="1710991"/>
-            <a:ext cx="2705776" cy="134884"/>
-          </a:xfrm>
-          <a:prstGeom prst="rect">
-            <a:avLst/>
-          </a:prstGeom>
-          <a:noFill/>
-          <a:ln/>
-        </p:spPr>
-        <p:txBody>
-          <a:bodyPr wrap="square" lIns="0" tIns="0" rIns="0" bIns="0" rtlCol="0" anchor="t"/>
-          <a:lstStyle/>
-          <a:p>
-            <a:pPr algn="l" indent="0" marL="0">
-              <a:lnSpc>
-                <a:spcPct val="112000"/>
-              </a:lnSpc>
-              <a:buNone/>
-            </a:pPr>
-            <a:r>
-              <a:rPr lang="en-US" sz="790" b="1" spc="80" kern="0" dirty="0">
-                <a:solidFill>
-                  <a:srgbClr val="6B7484"/>
-                </a:solidFill>
-                <a:latin typeface="Inter" pitchFamily="34" charset="0"/>
-                <a:ea typeface="Inter" pitchFamily="34" charset="-122"/>
-                <a:cs typeface="Inter" pitchFamily="34" charset="-120"/>
-              </a:rPr>
-              <a:t>DUEÑO</a:t>
-            </a:r>
-            <a:endParaRPr lang="en-US" sz="790" dirty="0"/>
-          </a:p>
-        </p:txBody>
-      </p:sp>
-      <p:sp>
-        <p:nvSpPr>
-          <p:cNvPr id="21" name="Text 19"/>
-          <p:cNvSpPr txBox="1"/>
-          <p:nvPr/>
-        </p:nvSpPr>
-        <p:spPr>
-          <a:xfrm>
-            <a:off x="6217620" y="1900733"/>
-            <a:ext cx="2705776" cy="390184"/>
-          </a:xfrm>
-          <a:prstGeom prst="rect">
-            <a:avLst/>
-          </a:prstGeom>
-          <a:noFill/>
-          <a:ln/>
-        </p:spPr>
-        <p:txBody>
-          <a:bodyPr wrap="square" lIns="0" tIns="0" rIns="0" bIns="0" rtlCol="0" anchor="t"/>
-          <a:lstStyle/>
-          <a:p>
-            <a:pPr algn="l" indent="0" marL="0">
-              <a:lnSpc>
-                <a:spcPct val="83000"/>
-              </a:lnSpc>
-              <a:buNone/>
-            </a:pPr>
-            <a:r>
-              <a:rPr lang="en-US" sz="3070" b="1" spc="-60" kern="0" dirty="0">
-                <a:solidFill>
-                  <a:srgbClr val="0B1220"/>
-                </a:solidFill>
-                <a:latin typeface="Inter" pitchFamily="34" charset="0"/>
-                <a:ea typeface="Inter" pitchFamily="34" charset="-122"/>
-                <a:cs typeface="Inter" pitchFamily="34" charset="-120"/>
-              </a:rPr>
-              <a:t>748</a:t>
-            </a:r>
-            <a:endParaRPr lang="en-US" sz="3070" dirty="0"/>
-          </a:p>
-        </p:txBody>
-      </p:sp>
-      <p:sp>
-        <p:nvSpPr>
-          <p:cNvPr id="22" name="Text 20"/>
-          <p:cNvSpPr txBox="1"/>
-          <p:nvPr/>
-        </p:nvSpPr>
-        <p:spPr>
-          <a:xfrm>
-            <a:off x="6217620" y="2345774"/>
-            <a:ext cx="2705776" cy="567417"/>
-          </a:xfrm>
-          <a:prstGeom prst="rect">
-            <a:avLst/>
-          </a:prstGeom>
-          <a:noFill/>
-          <a:ln/>
-        </p:spPr>
-        <p:txBody>
-          <a:bodyPr wrap="square" lIns="0" tIns="0" rIns="0" bIns="0" rtlCol="0" anchor="t"/>
-          <a:lstStyle/>
-          <a:p>
-            <a:pPr algn="l" indent="0" marL="0">
-              <a:lnSpc>
-                <a:spcPct val="112000"/>
-              </a:lnSpc>
-              <a:buNone/>
-            </a:pPr>
-            <a:r>
-              <a:rPr lang="en-US" sz="1100" dirty="0">
-                <a:solidFill>
-                  <a:srgbClr val="3B4556"/>
-                </a:solidFill>
-                <a:latin typeface="Inter" pitchFamily="34" charset="0"/>
-                <a:ea typeface="Inter" pitchFamily="34" charset="-122"/>
-                <a:cs typeface="Inter" pitchFamily="34" charset="-120"/>
-              </a:rPr>
-              <a:t>comunicaciones sin equipo ni ticket; 210 de ellas mandaron 85 M mensajes en 2026</a:t>
-            </a:r>
-            <a:endParaRPr lang="en-US" sz="1100" dirty="0"/>
-          </a:p>
-        </p:txBody>
-      </p:sp>
-      <p:sp>
-        <p:nvSpPr>
-          <p:cNvPr id="23" name="Shape 21"/>
-          <p:cNvSpPr/>
-          <p:nvPr/>
-        </p:nvSpPr>
-        <p:spPr>
-          <a:xfrm>
-            <a:off x="9070527" y="1591630"/>
-            <a:ext cx="2609212" cy="0"/>
-          </a:xfrm>
-          <a:prstGeom prst="line">
-            <a:avLst/>
-          </a:prstGeom>
-          <a:noFill/>
-          <a:ln w="19291">
-            <a:solidFill>
-              <a:srgbClr val="0B1220"/>
-            </a:solidFill>
-            <a:prstDash val="solid"/>
-          </a:ln>
-        </p:spPr>
-      </p:sp>
-      <p:sp>
-        <p:nvSpPr>
-          <p:cNvPr id="24" name="Text 22"/>
-          <p:cNvSpPr txBox="1"/>
-          <p:nvPr/>
-        </p:nvSpPr>
-        <p:spPr>
-          <a:xfrm>
-            <a:off x="9070527" y="1710991"/>
-            <a:ext cx="2705776" cy="134884"/>
-          </a:xfrm>
-          <a:prstGeom prst="rect">
-            <a:avLst/>
-          </a:prstGeom>
-          <a:noFill/>
-          <a:ln/>
-        </p:spPr>
-        <p:txBody>
-          <a:bodyPr wrap="square" lIns="0" tIns="0" rIns="0" bIns="0" rtlCol="0" anchor="t"/>
-          <a:lstStyle/>
-          <a:p>
-            <a:pPr algn="l" indent="0" marL="0">
-              <a:lnSpc>
-                <a:spcPct val="112000"/>
-              </a:lnSpc>
-              <a:buNone/>
-            </a:pPr>
-            <a:r>
-              <a:rPr lang="en-US" sz="790" b="1" spc="80" kern="0" dirty="0">
-                <a:solidFill>
-                  <a:srgbClr val="6B7484"/>
-                </a:solidFill>
-                <a:latin typeface="Inter" pitchFamily="34" charset="0"/>
-                <a:ea typeface="Inter" pitchFamily="34" charset="-122"/>
-                <a:cs typeface="Inter" pitchFamily="34" charset="-120"/>
-              </a:rPr>
-              <a:t>DUEÑO</a:t>
-            </a:r>
-            <a:endParaRPr lang="en-US" sz="790" dirty="0"/>
-          </a:p>
-        </p:txBody>
-      </p:sp>
-      <p:sp>
-        <p:nvSpPr>
-          <p:cNvPr id="25" name="Text 23"/>
-          <p:cNvSpPr txBox="1"/>
-          <p:nvPr/>
-        </p:nvSpPr>
-        <p:spPr>
-          <a:xfrm>
-            <a:off x="9070527" y="1900733"/>
-            <a:ext cx="2705776" cy="390184"/>
-          </a:xfrm>
-          <a:prstGeom prst="rect">
-            <a:avLst/>
-          </a:prstGeom>
-          <a:noFill/>
-          <a:ln/>
-        </p:spPr>
-        <p:txBody>
-          <a:bodyPr wrap="square" lIns="0" tIns="0" rIns="0" bIns="0" rtlCol="0" anchor="t"/>
-          <a:lstStyle/>
-          <a:p>
-            <a:pPr algn="l" indent="0" marL="0">
-              <a:lnSpc>
-                <a:spcPct val="83000"/>
-              </a:lnSpc>
-              <a:buNone/>
-            </a:pPr>
-            <a:r>
-              <a:rPr lang="en-US" sz="3070" b="1" spc="-60" kern="0" dirty="0">
-                <a:solidFill>
-                  <a:srgbClr val="0B1220"/>
-                </a:solidFill>
-                <a:latin typeface="Inter" pitchFamily="34" charset="0"/>
-                <a:ea typeface="Inter" pitchFamily="34" charset="-122"/>
-                <a:cs typeface="Inter" pitchFamily="34" charset="-120"/>
-              </a:rPr>
-              <a:t>74</a:t>
-            </a:r>
-            <a:endParaRPr lang="en-US" sz="3070" dirty="0"/>
-          </a:p>
-        </p:txBody>
-      </p:sp>
-      <p:sp>
-        <p:nvSpPr>
-          <p:cNvPr id="26" name="Text 24"/>
-          <p:cNvSpPr txBox="1"/>
-          <p:nvPr/>
-        </p:nvSpPr>
-        <p:spPr>
-          <a:xfrm>
-            <a:off x="9070527" y="2345774"/>
-            <a:ext cx="2705776" cy="567417"/>
-          </a:xfrm>
-          <a:prstGeom prst="rect">
-            <a:avLst/>
-          </a:prstGeom>
-          <a:noFill/>
-          <a:ln/>
-        </p:spPr>
-        <p:txBody>
-          <a:bodyPr wrap="square" lIns="0" tIns="0" rIns="0" bIns="0" rtlCol="0" anchor="t"/>
-          <a:lstStyle/>
-          <a:p>
-            <a:pPr algn="l" indent="0" marL="0">
-              <a:lnSpc>
-                <a:spcPct val="112000"/>
-              </a:lnSpc>
-              <a:buNone/>
-            </a:pPr>
-            <a:r>
-              <a:rPr lang="en-US" sz="1100" dirty="0">
-                <a:solidFill>
-                  <a:srgbClr val="3B4556"/>
-                </a:solidFill>
-                <a:latin typeface="Inter" pitchFamily="34" charset="0"/>
-                <a:ea typeface="Inter" pitchFamily="34" charset="-122"/>
-                <a:cs typeface="Inter" pitchFamily="34" charset="-120"/>
-              </a:rPr>
-              <a:t>campañas se copiaron cinco o más veces en vez de medirse: 667 versiones</a:t>
-            </a:r>
-            <a:endParaRPr lang="en-US" sz="1100" dirty="0"/>
-          </a:p>
-        </p:txBody>
-      </p:sp>
-      <p:sp>
-        <p:nvSpPr>
-          <p:cNvPr id="27" name="Shape 25"/>
-          <p:cNvSpPr/>
-          <p:nvPr/>
-        </p:nvSpPr>
-        <p:spPr>
-          <a:xfrm>
-            <a:off x="511956" y="3190946"/>
-            <a:ext cx="2609061" cy="0"/>
-          </a:xfrm>
-          <a:prstGeom prst="line">
-            <a:avLst/>
-          </a:prstGeom>
-          <a:noFill/>
-          <a:ln w="19291">
-            <a:solidFill>
-              <a:srgbClr val="0B1220"/>
-            </a:solidFill>
-            <a:prstDash val="solid"/>
-          </a:ln>
-        </p:spPr>
-      </p:sp>
-      <p:sp>
-        <p:nvSpPr>
-          <p:cNvPr id="28" name="Text 26"/>
-          <p:cNvSpPr txBox="1"/>
-          <p:nvPr/>
-        </p:nvSpPr>
-        <p:spPr>
-          <a:xfrm>
-            <a:off x="511956" y="3310307"/>
-            <a:ext cx="2705621" cy="134884"/>
-          </a:xfrm>
-          <a:prstGeom prst="rect">
-            <a:avLst/>
-          </a:prstGeom>
-          <a:noFill/>
-          <a:ln/>
-        </p:spPr>
-        <p:txBody>
-          <a:bodyPr wrap="square" lIns="0" tIns="0" rIns="0" bIns="0" rtlCol="0" anchor="t"/>
-          <a:lstStyle/>
-          <a:p>
-            <a:pPr algn="l" indent="0" marL="0">
-              <a:lnSpc>
-                <a:spcPct val="112000"/>
-              </a:lnSpc>
-              <a:buNone/>
-            </a:pPr>
-            <a:r>
-              <a:rPr lang="en-US" sz="790" b="1" spc="80" kern="0" dirty="0">
-                <a:solidFill>
-                  <a:srgbClr val="6B7484"/>
-                </a:solidFill>
-                <a:latin typeface="Inter" pitchFamily="34" charset="0"/>
-                <a:ea typeface="Inter" pitchFamily="34" charset="-122"/>
-                <a:cs typeface="Inter" pitchFamily="34" charset="-120"/>
-              </a:rPr>
-              <a:t>REGLAS</a:t>
-            </a:r>
-            <a:endParaRPr lang="en-US" sz="790" dirty="0"/>
-          </a:p>
-        </p:txBody>
-      </p:sp>
-      <p:sp>
-        <p:nvSpPr>
-          <p:cNvPr id="29" name="Text 27"/>
-          <p:cNvSpPr txBox="1"/>
-          <p:nvPr/>
-        </p:nvSpPr>
-        <p:spPr>
-          <a:xfrm>
-            <a:off x="511956" y="3500049"/>
-            <a:ext cx="2705621" cy="390184"/>
-          </a:xfrm>
-          <a:prstGeom prst="rect">
-            <a:avLst/>
-          </a:prstGeom>
-          <a:noFill/>
-          <a:ln/>
-        </p:spPr>
-        <p:txBody>
-          <a:bodyPr wrap="square" lIns="0" tIns="0" rIns="0" bIns="0" rtlCol="0" anchor="t"/>
-          <a:lstStyle/>
-          <a:p>
-            <a:pPr algn="l" indent="0" marL="0">
-              <a:lnSpc>
-                <a:spcPct val="83000"/>
-              </a:lnSpc>
-              <a:buNone/>
-            </a:pPr>
-            <a:r>
-              <a:rPr lang="en-US" sz="3070" b="1" spc="-60" kern="0" dirty="0">
-                <a:solidFill>
-                  <a:srgbClr val="1F4FD8"/>
-                </a:solidFill>
-                <a:latin typeface="Inter" pitchFamily="34" charset="0"/>
-                <a:ea typeface="Inter" pitchFamily="34" charset="-122"/>
-                <a:cs typeface="Inter" pitchFamily="34" charset="-120"/>
-              </a:rPr>
-              <a:t>43 M</a:t>
-            </a:r>
-            <a:endParaRPr lang="en-US" sz="3070" dirty="0"/>
-          </a:p>
-        </p:txBody>
-      </p:sp>
-      <p:sp>
-        <p:nvSpPr>
-          <p:cNvPr id="30" name="Text 28"/>
-          <p:cNvSpPr txBox="1"/>
-          <p:nvPr/>
-        </p:nvSpPr>
-        <p:spPr>
-          <a:xfrm>
-            <a:off x="511956" y="3945090"/>
-            <a:ext cx="2705621" cy="378278"/>
-          </a:xfrm>
-          <a:prstGeom prst="rect">
-            <a:avLst/>
-          </a:prstGeom>
-          <a:noFill/>
-          <a:ln/>
-        </p:spPr>
-        <p:txBody>
-          <a:bodyPr wrap="square" lIns="0" tIns="0" rIns="0" bIns="0" rtlCol="0" anchor="t"/>
-          <a:lstStyle/>
-          <a:p>
-            <a:pPr algn="l" indent="0" marL="0">
-              <a:lnSpc>
-                <a:spcPct val="112000"/>
-              </a:lnSpc>
-              <a:buNone/>
-            </a:pPr>
-            <a:r>
-              <a:rPr lang="en-US" sz="1100" dirty="0">
-                <a:solidFill>
-                  <a:srgbClr val="3B4556"/>
-                </a:solidFill>
-                <a:latin typeface="Inter" pitchFamily="34" charset="0"/>
-                <a:ea typeface="Inter" pitchFamily="34" charset="-122"/>
-                <a:cs typeface="Inter" pitchFamily="34" charset="-120"/>
-              </a:rPr>
-              <a:t>promociones a personas con KPay congelado</a:t>
-            </a:r>
-            <a:endParaRPr lang="en-US" sz="1100" dirty="0"/>
-          </a:p>
-        </p:txBody>
-      </p:sp>
-      <p:sp>
-        <p:nvSpPr>
-          <p:cNvPr id="31" name="Shape 29"/>
-          <p:cNvSpPr/>
-          <p:nvPr/>
-        </p:nvSpPr>
-        <p:spPr>
-          <a:xfrm>
-            <a:off x="3364713" y="3190946"/>
-            <a:ext cx="2609212" cy="0"/>
-          </a:xfrm>
-          <a:prstGeom prst="line">
-            <a:avLst/>
-          </a:prstGeom>
-          <a:noFill/>
-          <a:ln w="19291">
-            <a:solidFill>
-              <a:srgbClr val="0B1220"/>
-            </a:solidFill>
-            <a:prstDash val="solid"/>
-          </a:ln>
-        </p:spPr>
-      </p:sp>
-      <p:sp>
-        <p:nvSpPr>
-          <p:cNvPr id="32" name="Text 30"/>
-          <p:cNvSpPr txBox="1"/>
-          <p:nvPr/>
-        </p:nvSpPr>
-        <p:spPr>
-          <a:xfrm>
-            <a:off x="3364713" y="3310307"/>
-            <a:ext cx="2705776" cy="134884"/>
-          </a:xfrm>
-          <a:prstGeom prst="rect">
-            <a:avLst/>
-          </a:prstGeom>
-          <a:noFill/>
-          <a:ln/>
-        </p:spPr>
-        <p:txBody>
-          <a:bodyPr wrap="square" lIns="0" tIns="0" rIns="0" bIns="0" rtlCol="0" anchor="t"/>
-          <a:lstStyle/>
-          <a:p>
-            <a:pPr algn="l" indent="0" marL="0">
-              <a:lnSpc>
-                <a:spcPct val="112000"/>
-              </a:lnSpc>
-              <a:buNone/>
-            </a:pPr>
-            <a:r>
-              <a:rPr lang="en-US" sz="790" b="1" spc="80" kern="0" dirty="0">
-                <a:solidFill>
-                  <a:srgbClr val="6B7484"/>
-                </a:solidFill>
-                <a:latin typeface="Inter" pitchFamily="34" charset="0"/>
-                <a:ea typeface="Inter" pitchFamily="34" charset="-122"/>
-                <a:cs typeface="Inter" pitchFamily="34" charset="-120"/>
-              </a:rPr>
-              <a:t>REGLAS</a:t>
-            </a:r>
-            <a:endParaRPr lang="en-US" sz="790" dirty="0"/>
-          </a:p>
-        </p:txBody>
-      </p:sp>
-      <p:sp>
-        <p:nvSpPr>
-          <p:cNvPr id="33" name="Text 31"/>
-          <p:cNvSpPr txBox="1"/>
-          <p:nvPr/>
-        </p:nvSpPr>
-        <p:spPr>
-          <a:xfrm>
-            <a:off x="3364713" y="3500049"/>
-            <a:ext cx="2705776" cy="390184"/>
-          </a:xfrm>
-          <a:prstGeom prst="rect">
-            <a:avLst/>
-          </a:prstGeom>
-          <a:noFill/>
-          <a:ln/>
-        </p:spPr>
-        <p:txBody>
-          <a:bodyPr wrap="square" lIns="0" tIns="0" rIns="0" bIns="0" rtlCol="0" anchor="t"/>
-          <a:lstStyle/>
-          <a:p>
-            <a:pPr algn="l" indent="0" marL="0">
-              <a:lnSpc>
-                <a:spcPct val="83000"/>
-              </a:lnSpc>
-              <a:buNone/>
-            </a:pPr>
-            <a:r>
-              <a:rPr lang="en-US" sz="3070" b="1" spc="-60" kern="0" dirty="0">
-                <a:solidFill>
-                  <a:srgbClr val="1F4FD8"/>
-                </a:solidFill>
-                <a:latin typeface="Inter" pitchFamily="34" charset="0"/>
-                <a:ea typeface="Inter" pitchFamily="34" charset="-122"/>
-                <a:cs typeface="Inter" pitchFamily="34" charset="-120"/>
-              </a:rPr>
-              <a:t>9.8 M</a:t>
-            </a:r>
-            <a:endParaRPr lang="en-US" sz="3070" dirty="0"/>
-          </a:p>
-        </p:txBody>
-      </p:sp>
-      <p:sp>
-        <p:nvSpPr>
-          <p:cNvPr id="34" name="Text 32"/>
-          <p:cNvSpPr txBox="1"/>
-          <p:nvPr/>
-        </p:nvSpPr>
-        <p:spPr>
-          <a:xfrm>
-            <a:off x="3364713" y="3945090"/>
-            <a:ext cx="2705776" cy="378278"/>
-          </a:xfrm>
-          <a:prstGeom prst="rect">
-            <a:avLst/>
-          </a:prstGeom>
-          <a:noFill/>
-          <a:ln/>
-        </p:spPr>
-        <p:txBody>
-          <a:bodyPr wrap="square" lIns="0" tIns="0" rIns="0" bIns="0" rtlCol="0" anchor="t"/>
-          <a:lstStyle/>
-          <a:p>
-            <a:pPr algn="l" indent="0" marL="0">
-              <a:lnSpc>
-                <a:spcPct val="112000"/>
-              </a:lnSpc>
-              <a:buNone/>
-            </a:pPr>
-            <a:r>
-              <a:rPr lang="en-US" sz="1100" dirty="0">
-                <a:solidFill>
-                  <a:srgbClr val="3B4556"/>
-                </a:solidFill>
-                <a:latin typeface="Inter" pitchFamily="34" charset="0"/>
-                <a:ea typeface="Inter" pitchFamily="34" charset="-122"/>
-                <a:cs typeface="Inter" pitchFamily="34" charset="-120"/>
-              </a:rPr>
-              <a:t>WhatsApp a personas marcadas como baja</a:t>
-            </a:r>
-            <a:endParaRPr lang="en-US" sz="1100" dirty="0"/>
-          </a:p>
-        </p:txBody>
-      </p:sp>
-      <p:sp>
-        <p:nvSpPr>
-          <p:cNvPr id="35" name="Shape 33"/>
-          <p:cNvSpPr/>
-          <p:nvPr/>
-        </p:nvSpPr>
-        <p:spPr>
-          <a:xfrm>
-            <a:off x="6217620" y="3190946"/>
-            <a:ext cx="2609212" cy="0"/>
-          </a:xfrm>
-          <a:prstGeom prst="line">
-            <a:avLst/>
-          </a:prstGeom>
-          <a:noFill/>
-          <a:ln w="19291">
-            <a:solidFill>
-              <a:srgbClr val="0B1220"/>
-            </a:solidFill>
-            <a:prstDash val="solid"/>
-          </a:ln>
-        </p:spPr>
-      </p:sp>
-      <p:sp>
-        <p:nvSpPr>
-          <p:cNvPr id="36" name="Text 34"/>
-          <p:cNvSpPr txBox="1"/>
-          <p:nvPr/>
-        </p:nvSpPr>
-        <p:spPr>
-          <a:xfrm>
-            <a:off x="6217620" y="3310307"/>
-            <a:ext cx="2705776" cy="134884"/>
-          </a:xfrm>
-          <a:prstGeom prst="rect">
-            <a:avLst/>
-          </a:prstGeom>
-          <a:noFill/>
-          <a:ln/>
-        </p:spPr>
-        <p:txBody>
-          <a:bodyPr wrap="square" lIns="0" tIns="0" rIns="0" bIns="0" rtlCol="0" anchor="t"/>
-          <a:lstStyle/>
-          <a:p>
-            <a:pPr algn="l" indent="0" marL="0">
-              <a:lnSpc>
-                <a:spcPct val="112000"/>
-              </a:lnSpc>
-              <a:buNone/>
-            </a:pPr>
-            <a:r>
-              <a:rPr lang="en-US" sz="790" b="1" spc="80" kern="0" dirty="0">
-                <a:solidFill>
-                  <a:srgbClr val="6B7484"/>
-                </a:solidFill>
-                <a:latin typeface="Inter" pitchFamily="34" charset="0"/>
-                <a:ea typeface="Inter" pitchFamily="34" charset="-122"/>
-                <a:cs typeface="Inter" pitchFamily="34" charset="-120"/>
-              </a:rPr>
-              <a:t>REGLAS</a:t>
-            </a:r>
-            <a:endParaRPr lang="en-US" sz="790" dirty="0"/>
-          </a:p>
-        </p:txBody>
-      </p:sp>
-      <p:sp>
-        <p:nvSpPr>
-          <p:cNvPr id="37" name="Text 35"/>
-          <p:cNvSpPr txBox="1"/>
-          <p:nvPr/>
-        </p:nvSpPr>
-        <p:spPr>
-          <a:xfrm>
-            <a:off x="6217620" y="3500049"/>
-            <a:ext cx="2705776" cy="390184"/>
-          </a:xfrm>
-          <a:prstGeom prst="rect">
-            <a:avLst/>
-          </a:prstGeom>
-          <a:noFill/>
-          <a:ln/>
-        </p:spPr>
-        <p:txBody>
-          <a:bodyPr wrap="square" lIns="0" tIns="0" rIns="0" bIns="0" rtlCol="0" anchor="t"/>
-          <a:lstStyle/>
-          <a:p>
-            <a:pPr algn="l" indent="0" marL="0">
-              <a:lnSpc>
-                <a:spcPct val="83000"/>
-              </a:lnSpc>
-              <a:buNone/>
-            </a:pPr>
-            <a:r>
-              <a:rPr lang="en-US" sz="3070" b="1" spc="-60" kern="0" dirty="0">
-                <a:solidFill>
-                  <a:srgbClr val="1F4FD8"/>
-                </a:solidFill>
-                <a:latin typeface="Inter" pitchFamily="34" charset="0"/>
-                <a:ea typeface="Inter" pitchFamily="34" charset="-122"/>
-                <a:cs typeface="Inter" pitchFamily="34" charset="-120"/>
-              </a:rPr>
-              <a:t>9.9 M</a:t>
-            </a:r>
-            <a:endParaRPr lang="en-US" sz="3070" dirty="0"/>
-          </a:p>
-        </p:txBody>
-      </p:sp>
-      <p:sp>
-        <p:nvSpPr>
-          <p:cNvPr id="38" name="Text 36"/>
-          <p:cNvSpPr txBox="1"/>
-          <p:nvPr/>
-        </p:nvSpPr>
-        <p:spPr>
-          <a:xfrm>
-            <a:off x="6217620" y="3945090"/>
-            <a:ext cx="2705776" cy="378278"/>
-          </a:xfrm>
-          <a:prstGeom prst="rect">
-            <a:avLst/>
-          </a:prstGeom>
-          <a:noFill/>
-          <a:ln/>
-        </p:spPr>
-        <p:txBody>
-          <a:bodyPr wrap="square" lIns="0" tIns="0" rIns="0" bIns="0" rtlCol="0" anchor="t"/>
-          <a:lstStyle/>
-          <a:p>
-            <a:pPr algn="l" indent="0" marL="0">
-              <a:lnSpc>
-                <a:spcPct val="112000"/>
-              </a:lnSpc>
-              <a:buNone/>
-            </a:pPr>
-            <a:r>
-              <a:rPr lang="en-US" sz="1100" dirty="0">
-                <a:solidFill>
-                  <a:srgbClr val="3B4556"/>
-                </a:solidFill>
-                <a:latin typeface="Inter" pitchFamily="34" charset="0"/>
-                <a:ea typeface="Inter" pitchFamily="34" charset="-122"/>
-                <a:cs typeface="Inter" pitchFamily="34" charset="-120"/>
-              </a:rPr>
-              <a:t>veces una persona recibió la misma campaña dos veces el mismo día</a:t>
-            </a:r>
-            <a:endParaRPr lang="en-US" sz="1100" dirty="0"/>
-          </a:p>
-        </p:txBody>
-      </p:sp>
-      <p:sp>
-        <p:nvSpPr>
-          <p:cNvPr id="39" name="Shape 37"/>
-          <p:cNvSpPr/>
-          <p:nvPr/>
-        </p:nvSpPr>
-        <p:spPr>
-          <a:xfrm>
-            <a:off x="9070527" y="3190946"/>
-            <a:ext cx="2609212" cy="0"/>
-          </a:xfrm>
-          <a:prstGeom prst="line">
-            <a:avLst/>
-          </a:prstGeom>
-          <a:noFill/>
-          <a:ln w="19291">
-            <a:solidFill>
-              <a:srgbClr val="0B1220"/>
-            </a:solidFill>
-            <a:prstDash val="solid"/>
-          </a:ln>
-        </p:spPr>
-      </p:sp>
-      <p:sp>
-        <p:nvSpPr>
-          <p:cNvPr id="40" name="Text 38"/>
-          <p:cNvSpPr txBox="1"/>
-          <p:nvPr/>
-        </p:nvSpPr>
-        <p:spPr>
-          <a:xfrm>
-            <a:off x="9070527" y="3310307"/>
-            <a:ext cx="2705776" cy="134884"/>
-          </a:xfrm>
-          <a:prstGeom prst="rect">
-            <a:avLst/>
-          </a:prstGeom>
-          <a:noFill/>
-          <a:ln/>
-        </p:spPr>
-        <p:txBody>
-          <a:bodyPr wrap="square" lIns="0" tIns="0" rIns="0" bIns="0" rtlCol="0" anchor="t"/>
-          <a:lstStyle/>
-          <a:p>
-            <a:pPr algn="l" indent="0" marL="0">
-              <a:lnSpc>
-                <a:spcPct val="112000"/>
-              </a:lnSpc>
-              <a:buNone/>
-            </a:pPr>
-            <a:r>
-              <a:rPr lang="en-US" sz="790" b="1" spc="80" kern="0" dirty="0">
-                <a:solidFill>
-                  <a:srgbClr val="6B7484"/>
-                </a:solidFill>
-                <a:latin typeface="Inter" pitchFamily="34" charset="0"/>
-                <a:ea typeface="Inter" pitchFamily="34" charset="-122"/>
-                <a:cs typeface="Inter" pitchFamily="34" charset="-120"/>
-              </a:rPr>
-              <a:t>MEDICIÓN</a:t>
-            </a:r>
-            <a:endParaRPr lang="en-US" sz="790" dirty="0"/>
-          </a:p>
-        </p:txBody>
-      </p:sp>
-      <p:sp>
-        <p:nvSpPr>
-          <p:cNvPr id="41" name="Text 39"/>
-          <p:cNvSpPr txBox="1"/>
-          <p:nvPr/>
-        </p:nvSpPr>
-        <p:spPr>
-          <a:xfrm>
-            <a:off x="9070527" y="3500049"/>
-            <a:ext cx="2705776" cy="390184"/>
-          </a:xfrm>
-          <a:prstGeom prst="rect">
-            <a:avLst/>
-          </a:prstGeom>
-          <a:noFill/>
-          <a:ln/>
-        </p:spPr>
-        <p:txBody>
-          <a:bodyPr wrap="square" lIns="0" tIns="0" rIns="0" bIns="0" rtlCol="0" anchor="t"/>
-          <a:lstStyle/>
-          <a:p>
-            <a:pPr algn="l" indent="0" marL="0">
-              <a:lnSpc>
-                <a:spcPct val="83000"/>
-              </a:lnSpc>
-              <a:buNone/>
-            </a:pPr>
-            <a:r>
-              <a:rPr lang="en-US" sz="3070" b="1" spc="-60" kern="0" dirty="0">
-                <a:solidFill>
-                  <a:srgbClr val="1F4FD8"/>
-                </a:solidFill>
-                <a:latin typeface="Inter" pitchFamily="34" charset="0"/>
-                <a:ea typeface="Inter" pitchFamily="34" charset="-122"/>
-                <a:cs typeface="Inter" pitchFamily="34" charset="-120"/>
-              </a:rPr>
-              <a:t>1 de 3,228</a:t>
-            </a:r>
-            <a:endParaRPr lang="en-US" sz="3070" dirty="0"/>
-          </a:p>
-        </p:txBody>
-      </p:sp>
-      <p:sp>
-        <p:nvSpPr>
-          <p:cNvPr id="42" name="Text 40"/>
-          <p:cNvSpPr txBox="1"/>
-          <p:nvPr/>
-        </p:nvSpPr>
-        <p:spPr>
-          <a:xfrm>
-            <a:off x="9070527" y="3945090"/>
-            <a:ext cx="2705776" cy="567417"/>
-          </a:xfrm>
-          <a:prstGeom prst="rect">
-            <a:avLst/>
-          </a:prstGeom>
-          <a:noFill/>
-          <a:ln/>
-        </p:spPr>
-        <p:txBody>
-          <a:bodyPr wrap="square" lIns="0" tIns="0" rIns="0" bIns="0" rtlCol="0" anchor="t"/>
-          <a:lstStyle/>
-          <a:p>
-            <a:pPr algn="l" indent="0" marL="0">
-              <a:lnSpc>
-                <a:spcPct val="112000"/>
-              </a:lnSpc>
-              <a:buNone/>
-            </a:pPr>
-            <a:r>
-              <a:rPr lang="en-US" sz="1100" dirty="0">
-                <a:solidFill>
-                  <a:srgbClr val="3B4556"/>
-                </a:solidFill>
-                <a:latin typeface="Inter" pitchFamily="34" charset="0"/>
-                <a:ea typeface="Inter" pitchFamily="34" charset="-122"/>
-                <a:cs typeface="Inter" pitchFamily="34" charset="-120"/>
-              </a:rPr>
-              <a:t>Canvas tiene grupo de control real; solo el correo registra bajas por campaña</a:t>
-            </a:r>
-            <a:endParaRPr lang="en-US" sz="1100" dirty="0"/>
-          </a:p>
-        </p:txBody>
-      </p:sp>
-      <p:sp>
-        <p:nvSpPr>
-          <p:cNvPr id="43" name="Shape 41"/>
-          <p:cNvSpPr/>
-          <p:nvPr/>
-        </p:nvSpPr>
-        <p:spPr>
-          <a:xfrm>
-            <a:off x="511956" y="5992160"/>
-            <a:ext cx="11167783" cy="352808"/>
-          </a:xfrm>
-          <a:prstGeom prst="rect">
+            <a:off x="7764640" y="3882245"/>
+            <a:ext cx="207224" cy="207224"/>
+          </a:xfrm>
+          <a:prstGeom prst="ellipse">
             <a:avLst/>
           </a:prstGeom>
           <a:solidFill>
@@ -5855,7 +5248,128 @@
       </p:sp>
       <p:sp>
         <p:nvSpPr>
-          <p:cNvPr id="44" name="Text 42"/>
+          <p:cNvPr id="27" name="Text 24"/>
+          <p:cNvSpPr txBox="1"/>
+          <p:nvPr/>
+        </p:nvSpPr>
+        <p:spPr>
+          <a:xfrm>
+            <a:off x="7764640" y="3882245"/>
+            <a:ext cx="231729" cy="207224"/>
+          </a:xfrm>
+          <a:prstGeom prst="rect">
+            <a:avLst/>
+          </a:prstGeom>
+          <a:noFill/>
+          <a:ln/>
+        </p:spPr>
+        <p:txBody>
+          <a:bodyPr wrap="square" lIns="0" tIns="0" rIns="0" bIns="0" rtlCol="0" anchor="ctr"/>
+          <a:lstStyle/>
+          <a:p>
+            <a:pPr algn="ctr" indent="0" marL="0">
+              <a:lnSpc>
+                <a:spcPct val="112000"/>
+              </a:lnSpc>
+              <a:buNone/>
+            </a:pPr>
+            <a:r>
+              <a:rPr lang="en-US" sz="910" b="1" dirty="0">
+                <a:solidFill>
+                  <a:srgbClr val="1F4FD8"/>
+                </a:solidFill>
+                <a:latin typeface="Inter" pitchFamily="34" charset="0"/>
+                <a:ea typeface="Inter" pitchFamily="34" charset="-122"/>
+                <a:cs typeface="Inter" pitchFamily="34" charset="-120"/>
+              </a:rPr>
+              <a:t>3</a:t>
+            </a:r>
+            <a:endParaRPr lang="en-US" sz="910" dirty="0"/>
+          </a:p>
+        </p:txBody>
+      </p:sp>
+      <p:sp>
+        <p:nvSpPr>
+          <p:cNvPr id="28" name="Text 25"/>
+          <p:cNvSpPr txBox="1"/>
+          <p:nvPr/>
+        </p:nvSpPr>
+        <p:spPr>
+          <a:xfrm>
+            <a:off x="8069372" y="3882245"/>
+            <a:ext cx="3736811" cy="543002"/>
+          </a:xfrm>
+          <a:prstGeom prst="rect">
+            <a:avLst/>
+          </a:prstGeom>
+          <a:noFill/>
+          <a:ln/>
+        </p:spPr>
+        <p:txBody>
+          <a:bodyPr wrap="square" lIns="0" tIns="0" rIns="0" bIns="0" rtlCol="0" anchor="t"/>
+          <a:lstStyle/>
+          <a:p>
+            <a:pPr algn="l" indent="0" marL="0">
+              <a:lnSpc>
+                <a:spcPct val="112000"/>
+              </a:lnSpc>
+              <a:buNone/>
+            </a:pPr>
+            <a:r>
+              <a:rPr lang="en-US" sz="1060" b="1" dirty="0">
+                <a:solidFill>
+                  <a:srgbClr val="0B1220"/>
+                </a:solidFill>
+                <a:latin typeface="Inter" pitchFamily="34" charset="0"/>
+                <a:ea typeface="Inter" pitchFamily="34" charset="-122"/>
+                <a:cs typeface="Inter" pitchFamily="34" charset="-120"/>
+              </a:rPr>
+              <a:t>Copias.</a:t>
+            </a:r>
+            <a:pPr algn="l" indent="0" marL="0">
+              <a:lnSpc>
+                <a:spcPct val="112000"/>
+              </a:lnSpc>
+              <a:buNone/>
+            </a:pPr>
+            <a:r>
+              <a:rPr lang="en-US" sz="1060" dirty="0">
+                <a:solidFill>
+                  <a:srgbClr val="0B1220"/>
+                </a:solidFill>
+                <a:latin typeface="Inter" pitchFamily="34" charset="0"/>
+                <a:ea typeface="Inter" pitchFamily="34" charset="-122"/>
+                <a:cs typeface="Inter" pitchFamily="34" charset="-120"/>
+              </a:rPr>
+              <a:t> 63 % de lo que manda cada mes se creó ese mes: se arma una campaña nueva en vez de reusar la anterior.</a:t>
+            </a:r>
+            <a:endParaRPr lang="en-US" sz="1060" dirty="0"/>
+          </a:p>
+        </p:txBody>
+      </p:sp>
+      <p:sp>
+        <p:nvSpPr>
+          <p:cNvPr id="29" name="Shape 26"/>
+          <p:cNvSpPr/>
+          <p:nvPr/>
+        </p:nvSpPr>
+        <p:spPr>
+          <a:xfrm>
+            <a:off x="511956" y="5992160"/>
+            <a:ext cx="11167783" cy="352808"/>
+          </a:xfrm>
+          <a:prstGeom prst="rect">
+            <a:avLst/>
+          </a:prstGeom>
+          <a:solidFill>
+            <a:srgbClr val="E8EEFC"/>
+          </a:solidFill>
+          <a:ln/>
+        </p:spPr>
+      </p:sp>
+      <p:sp>
+        <p:nvSpPr>
+          <p:cNvPr id="30" name="Text 27"/>
           <p:cNvSpPr txBox="1"/>
           <p:nvPr/>
         </p:nvSpPr>
@@ -5897,14 +5411,14 @@
       </p:sp>
       <p:sp>
         <p:nvSpPr>
-          <p:cNvPr id="45" name="Text 43"/>
+          <p:cNvPr id="31" name="Text 28"/>
           <p:cNvSpPr txBox="1"/>
           <p:nvPr/>
         </p:nvSpPr>
         <p:spPr>
           <a:xfrm>
             <a:off x="1409876" y="6077461"/>
-            <a:ext cx="6359879" cy="182206"/>
+            <a:ext cx="7019604" cy="182206"/>
           </a:xfrm>
           <a:prstGeom prst="rect">
             <a:avLst/>
@@ -5931,7 +5445,7 @@
                 <a:ea typeface="Inter" pitchFamily="34" charset="-122"/>
                 <a:cs typeface="Inter" pitchFamily="34" charset="-120"/>
               </a:rPr>
-              <a:t>No es una campaña mala: es una cuenta sin dueño, sin reglas comunes y sin forma de medir.</a:t>
+              <a:t>Sin nombre, equipo, ticket ni audiencia confiables, nadie puede saber qué manda Braze ni de quién es.</a:t>
             </a:r>
             <a:endParaRPr lang="en-US" sz="1100" dirty="0"/>
           </a:p>
@@ -5939,14 +5453,14 @@
       </p:sp>
       <p:sp>
         <p:nvSpPr>
-          <p:cNvPr id="46" name="Text 44"/>
+          <p:cNvPr id="32" name="Text 29"/>
           <p:cNvSpPr txBox="1"/>
           <p:nvPr/>
         </p:nvSpPr>
         <p:spPr>
           <a:xfrm>
             <a:off x="511956" y="6454684"/>
-            <a:ext cx="8526262" cy="135035"/>
+            <a:ext cx="9230849" cy="135035"/>
           </a:xfrm>
           <a:prstGeom prst="rect">
             <a:avLst/>
@@ -5973,7 +5487,7 @@
                 <a:ea typeface="Inter" pitchFamily="34" charset="-122"/>
                 <a:cs typeface="Inter" pitchFamily="34" charset="-120"/>
               </a:rPr>
-              <a:t>Fuente: Braze, catálogo de campañas y Canvas, envíos por comunicación (E1, E2), bloqueados (E7a, Sheets v4), grupos de control (E13), enero a septiembre 2026.</a:t>
+              <a:t>Fuente: Braze, catálogo de campañas y Canvas (E2), envíos por comunicación (E1), segmentos (E11), pasos de Canvas (E15) y grupos de control (E13), enero a septiembre 2026.</a:t>
             </a:r>
             <a:endParaRPr lang="en-US" sz="840" dirty="0"/>
           </a:p>
@@ -5981,7 +5495,7 @@
       </p:sp>
       <p:sp>
         <p:nvSpPr>
-          <p:cNvPr id="47" name="Text 45"/>
+          <p:cNvPr id="33" name="Text 30"/>
           <p:cNvSpPr txBox="1"/>
           <p:nvPr/>
         </p:nvSpPr>
@@ -6089,7 +5603,7 @@
                 <a:ea typeface="Inter" pitchFamily="34" charset="-122"/>
                 <a:cs typeface="Inter" pitchFamily="34" charset="-120"/>
               </a:rPr>
-              <a:t>Qué lo explica: escribimos por lo que queremos vender, cada equipo por su cuenta y sin medir</a:t>
+              <a:t>Le escribimos a quien no debería recibir promociones: congelados, dados de baja y quien pidió no recibirlas</a:t>
             </a:r>
             <a:endParaRPr lang="en-US" sz="2210" dirty="0"/>
           </a:p>
@@ -6103,320 +5617,8 @@
         </p:nvSpPr>
         <p:spPr>
           <a:xfrm>
-            <a:off x="511956" y="1161358"/>
-            <a:ext cx="3527477" cy="1398573"/>
-          </a:xfrm>
-          <a:prstGeom prst="rect">
-            <a:avLst/>
-          </a:prstGeom>
-          <a:solidFill>
-            <a:srgbClr val="F4F6F9"/>
-          </a:solidFill>
-          <a:ln/>
-        </p:spPr>
-      </p:sp>
-      <p:sp>
-        <p:nvSpPr>
-          <p:cNvPr id="4" name="Text 2"/>
-          <p:cNvSpPr txBox="1"/>
-          <p:nvPr/>
-        </p:nvSpPr>
-        <p:spPr>
-          <a:xfrm>
-            <a:off x="694765" y="1356374"/>
-            <a:ext cx="3275003" cy="512107"/>
-          </a:xfrm>
-          <a:prstGeom prst="rect">
-            <a:avLst/>
-          </a:prstGeom>
-          <a:noFill/>
-          <a:ln/>
-        </p:spPr>
-        <p:txBody>
-          <a:bodyPr wrap="square" lIns="0" tIns="0" rIns="0" bIns="0" rtlCol="0" anchor="t"/>
-          <a:lstStyle/>
-          <a:p>
-            <a:pPr algn="l" indent="0" marL="0">
-              <a:lnSpc>
-                <a:spcPct val="83000"/>
-              </a:lnSpc>
-              <a:buNone/>
-            </a:pPr>
-            <a:r>
-              <a:rPr lang="en-US" sz="4030" b="1" spc="-80" kern="0" dirty="0">
-                <a:solidFill>
-                  <a:srgbClr val="0B1220"/>
-                </a:solidFill>
-                <a:latin typeface="Inter" pitchFamily="34" charset="0"/>
-                <a:ea typeface="Inter" pitchFamily="34" charset="-122"/>
-                <a:cs typeface="Inter" pitchFamily="34" charset="-120"/>
-              </a:rPr>
-              <a:t>73 %</a:t>
-            </a:r>
-            <a:endParaRPr lang="en-US" sz="4030" dirty="0"/>
-          </a:p>
-        </p:txBody>
-      </p:sp>
-      <p:sp>
-        <p:nvSpPr>
-          <p:cNvPr id="5" name="Text 3"/>
-          <p:cNvSpPr txBox="1"/>
-          <p:nvPr/>
-        </p:nvSpPr>
-        <p:spPr>
-          <a:xfrm>
-            <a:off x="694765" y="1953782"/>
-            <a:ext cx="3275003" cy="411132"/>
-          </a:xfrm>
-          <a:prstGeom prst="rect">
-            <a:avLst/>
-          </a:prstGeom>
-          <a:noFill/>
-          <a:ln/>
-        </p:spPr>
-        <p:txBody>
-          <a:bodyPr wrap="square" lIns="0" tIns="0" rIns="0" bIns="0" rtlCol="0" anchor="t"/>
-          <a:lstStyle/>
-          <a:p>
-            <a:pPr algn="l" indent="0" marL="0">
-              <a:lnSpc>
-                <a:spcPct val="112000"/>
-              </a:lnSpc>
-              <a:buNone/>
-            </a:pPr>
-            <a:r>
-              <a:rPr lang="en-US" sz="1200" dirty="0">
-                <a:solidFill>
-                  <a:srgbClr val="0B1220"/>
-                </a:solidFill>
-                <a:latin typeface="Inter" pitchFamily="34" charset="0"/>
-                <a:ea typeface="Inter" pitchFamily="34" charset="-122"/>
-                <a:cs typeface="Inter" pitchFamily="34" charset="-120"/>
-              </a:rPr>
-              <a:t>de las personas no respondió a nada en nueve meses</a:t>
-            </a:r>
-            <a:endParaRPr lang="en-US" sz="1200" dirty="0"/>
-          </a:p>
-        </p:txBody>
-      </p:sp>
-      <p:sp>
-        <p:nvSpPr>
-          <p:cNvPr id="6" name="Shape 4"/>
-          <p:cNvSpPr/>
-          <p:nvPr/>
-        </p:nvSpPr>
-        <p:spPr>
-          <a:xfrm>
-            <a:off x="4331958" y="1161358"/>
-            <a:ext cx="3527628" cy="1398573"/>
-          </a:xfrm>
-          <a:prstGeom prst="rect">
-            <a:avLst/>
-          </a:prstGeom>
-          <a:solidFill>
-            <a:srgbClr val="F4F6F9"/>
-          </a:solidFill>
-          <a:ln/>
-        </p:spPr>
-      </p:sp>
-      <p:sp>
-        <p:nvSpPr>
-          <p:cNvPr id="7" name="Text 5"/>
-          <p:cNvSpPr txBox="1"/>
-          <p:nvPr/>
-        </p:nvSpPr>
-        <p:spPr>
-          <a:xfrm>
-            <a:off x="4514767" y="1356374"/>
-            <a:ext cx="3275158" cy="512107"/>
-          </a:xfrm>
-          <a:prstGeom prst="rect">
-            <a:avLst/>
-          </a:prstGeom>
-          <a:noFill/>
-          <a:ln/>
-        </p:spPr>
-        <p:txBody>
-          <a:bodyPr wrap="square" lIns="0" tIns="0" rIns="0" bIns="0" rtlCol="0" anchor="t"/>
-          <a:lstStyle/>
-          <a:p>
-            <a:pPr algn="l" indent="0" marL="0">
-              <a:lnSpc>
-                <a:spcPct val="83000"/>
-              </a:lnSpc>
-              <a:buNone/>
-            </a:pPr>
-            <a:r>
-              <a:rPr lang="en-US" sz="4030" b="1" spc="-80" kern="0" dirty="0">
-                <a:solidFill>
-                  <a:srgbClr val="0B1220"/>
-                </a:solidFill>
-                <a:latin typeface="Inter" pitchFamily="34" charset="0"/>
-                <a:ea typeface="Inter" pitchFamily="34" charset="-122"/>
-                <a:cs typeface="Inter" pitchFamily="34" charset="-120"/>
-              </a:rPr>
-              <a:t>2.3 M</a:t>
-            </a:r>
-            <a:endParaRPr lang="en-US" sz="4030" dirty="0"/>
-          </a:p>
-        </p:txBody>
-      </p:sp>
-      <p:sp>
-        <p:nvSpPr>
-          <p:cNvPr id="8" name="Text 6"/>
-          <p:cNvSpPr txBox="1"/>
-          <p:nvPr/>
-        </p:nvSpPr>
-        <p:spPr>
-          <a:xfrm>
-            <a:off x="4514767" y="1953782"/>
-            <a:ext cx="3275158" cy="411132"/>
-          </a:xfrm>
-          <a:prstGeom prst="rect">
-            <a:avLst/>
-          </a:prstGeom>
-          <a:noFill/>
-          <a:ln/>
-        </p:spPr>
-        <p:txBody>
-          <a:bodyPr wrap="square" lIns="0" tIns="0" rIns="0" bIns="0" rtlCol="0" anchor="t"/>
-          <a:lstStyle/>
-          <a:p>
-            <a:pPr algn="l" indent="0" marL="0">
-              <a:lnSpc>
-                <a:spcPct val="112000"/>
-              </a:lnSpc>
-              <a:buNone/>
-            </a:pPr>
-            <a:r>
-              <a:rPr lang="en-US" sz="1200" dirty="0">
-                <a:solidFill>
-                  <a:srgbClr val="0B1220"/>
-                </a:solidFill>
-                <a:latin typeface="Inter" pitchFamily="34" charset="0"/>
-                <a:ea typeface="Inter" pitchFamily="34" charset="-122"/>
-                <a:cs typeface="Inter" pitchFamily="34" charset="-120"/>
-              </a:rPr>
-              <a:t>personas al mes con tres o más campañas el mismo día</a:t>
-            </a:r>
-            <a:endParaRPr lang="en-US" sz="1200" dirty="0"/>
-          </a:p>
-        </p:txBody>
-      </p:sp>
-      <p:sp>
-        <p:nvSpPr>
-          <p:cNvPr id="9" name="Shape 7"/>
-          <p:cNvSpPr/>
-          <p:nvPr/>
-        </p:nvSpPr>
-        <p:spPr>
-          <a:xfrm>
-            <a:off x="8152111" y="1161358"/>
-            <a:ext cx="3527477" cy="1398573"/>
-          </a:xfrm>
-          <a:prstGeom prst="rect">
-            <a:avLst/>
-          </a:prstGeom>
-          <a:solidFill>
-            <a:srgbClr val="E8EEFC"/>
-          </a:solidFill>
-          <a:ln/>
-        </p:spPr>
-      </p:sp>
-      <p:sp>
-        <p:nvSpPr>
-          <p:cNvPr id="10" name="Text 8"/>
-          <p:cNvSpPr txBox="1"/>
-          <p:nvPr/>
-        </p:nvSpPr>
-        <p:spPr>
-          <a:xfrm>
-            <a:off x="8334920" y="1356374"/>
-            <a:ext cx="3275003" cy="512107"/>
-          </a:xfrm>
-          <a:prstGeom prst="rect">
-            <a:avLst/>
-          </a:prstGeom>
-          <a:noFill/>
-          <a:ln/>
-        </p:spPr>
-        <p:txBody>
-          <a:bodyPr wrap="square" lIns="0" tIns="0" rIns="0" bIns="0" rtlCol="0" anchor="t"/>
-          <a:lstStyle/>
-          <a:p>
-            <a:pPr algn="l" indent="0" marL="0">
-              <a:lnSpc>
-                <a:spcPct val="83000"/>
-              </a:lnSpc>
-              <a:buNone/>
-            </a:pPr>
-            <a:r>
-              <a:rPr lang="en-US" sz="4030" b="1" spc="-80" kern="0" dirty="0">
-                <a:solidFill>
-                  <a:srgbClr val="1F4FD8"/>
-                </a:solidFill>
-                <a:latin typeface="Inter" pitchFamily="34" charset="0"/>
-                <a:ea typeface="Inter" pitchFamily="34" charset="-122"/>
-                <a:cs typeface="Inter" pitchFamily="34" charset="-120"/>
-              </a:rPr>
-              <a:t>1 de 3,228</a:t>
-            </a:r>
-            <a:endParaRPr lang="en-US" sz="4030" dirty="0"/>
-          </a:p>
-        </p:txBody>
-      </p:sp>
-      <p:sp>
-        <p:nvSpPr>
-          <p:cNvPr id="11" name="Text 9"/>
-          <p:cNvSpPr txBox="1"/>
-          <p:nvPr/>
-        </p:nvSpPr>
-        <p:spPr>
-          <a:xfrm>
-            <a:off x="8334920" y="1953782"/>
-            <a:ext cx="3275003" cy="205566"/>
-          </a:xfrm>
-          <a:prstGeom prst="rect">
-            <a:avLst/>
-          </a:prstGeom>
-          <a:noFill/>
-          <a:ln/>
-        </p:spPr>
-        <p:txBody>
-          <a:bodyPr wrap="square" lIns="0" tIns="0" rIns="0" bIns="0" rtlCol="0" anchor="t"/>
-          <a:lstStyle/>
-          <a:p>
-            <a:pPr algn="l" indent="0" marL="0">
-              <a:lnSpc>
-                <a:spcPct val="112000"/>
-              </a:lnSpc>
-              <a:buNone/>
-            </a:pPr>
-            <a:r>
-              <a:rPr lang="en-US" sz="1200" dirty="0">
-                <a:solidFill>
-                  <a:srgbClr val="0B1220"/>
-                </a:solidFill>
-                <a:latin typeface="Inter" pitchFamily="34" charset="0"/>
-                <a:ea typeface="Inter" pitchFamily="34" charset="-122"/>
-                <a:cs typeface="Inter" pitchFamily="34" charset="-120"/>
-              </a:rPr>
-              <a:t>Canvas tiene un grupo de control real</a:t>
-            </a:r>
-            <a:endParaRPr lang="en-US" sz="1200" dirty="0"/>
-          </a:p>
-        </p:txBody>
-      </p:sp>
-      <p:sp>
-        <p:nvSpPr>
-          <p:cNvPr id="12" name="Shape 10"/>
-          <p:cNvSpPr/>
-          <p:nvPr/>
-        </p:nvSpPr>
-        <p:spPr>
-          <a:xfrm>
-            <a:off x="511956" y="2784184"/>
-            <a:ext cx="3527477" cy="0"/>
+            <a:off x="511956" y="1166180"/>
+            <a:ext cx="11167783" cy="0"/>
           </a:xfrm>
           <a:prstGeom prst="line">
             <a:avLst/>
@@ -6432,135 +5634,14 @@
       </p:sp>
       <p:sp>
         <p:nvSpPr>
-          <p:cNvPr id="13" name="Shape 11"/>
+          <p:cNvPr id="4" name="Shape 2"/>
           <p:cNvSpPr/>
           <p:nvPr/>
         </p:nvSpPr>
         <p:spPr>
           <a:xfrm>
-            <a:off x="511956" y="2922987"/>
-            <a:ext cx="231639" cy="231639"/>
-          </a:xfrm>
-          <a:prstGeom prst="ellipse">
-            <a:avLst/>
-          </a:prstGeom>
-          <a:solidFill>
-            <a:srgbClr val="E8EEFC"/>
-          </a:solidFill>
-          <a:ln/>
-        </p:spPr>
-      </p:sp>
-      <p:sp>
-        <p:nvSpPr>
-          <p:cNvPr id="14" name="Text 12"/>
-          <p:cNvSpPr txBox="1"/>
-          <p:nvPr/>
-        </p:nvSpPr>
-        <p:spPr>
-          <a:xfrm>
-            <a:off x="511956" y="2922987"/>
-            <a:ext cx="256876" cy="231639"/>
-          </a:xfrm>
-          <a:prstGeom prst="rect">
-            <a:avLst/>
-          </a:prstGeom>
-          <a:noFill/>
-          <a:ln/>
-        </p:spPr>
-        <p:txBody>
-          <a:bodyPr wrap="square" lIns="0" tIns="0" rIns="0" bIns="0" rtlCol="0" anchor="ctr"/>
-          <a:lstStyle/>
-          <a:p>
-            <a:pPr algn="ctr" indent="0" marL="0">
-              <a:lnSpc>
-                <a:spcPct val="112000"/>
-              </a:lnSpc>
-              <a:buNone/>
-            </a:pPr>
-            <a:r>
-              <a:rPr lang="en-US" sz="960" b="1" dirty="0">
-                <a:solidFill>
-                  <a:srgbClr val="1F4FD8"/>
-                </a:solidFill>
-                <a:latin typeface="Inter" pitchFamily="34" charset="0"/>
-                <a:ea typeface="Inter" pitchFamily="34" charset="-122"/>
-                <a:cs typeface="Inter" pitchFamily="34" charset="-120"/>
-              </a:rPr>
-              <a:t>1</a:t>
-            </a:r>
-            <a:endParaRPr lang="en-US" sz="960" dirty="0"/>
-          </a:p>
-        </p:txBody>
-      </p:sp>
-      <p:sp>
-        <p:nvSpPr>
-          <p:cNvPr id="15" name="Text 13"/>
-          <p:cNvSpPr txBox="1"/>
-          <p:nvPr/>
-        </p:nvSpPr>
-        <p:spPr>
-          <a:xfrm>
-            <a:off x="853310" y="2922987"/>
-            <a:ext cx="3299995" cy="1109213"/>
-          </a:xfrm>
-          <a:prstGeom prst="rect">
-            <a:avLst/>
-          </a:prstGeom>
-          <a:noFill/>
-          <a:ln/>
-        </p:spPr>
-        <p:txBody>
-          <a:bodyPr wrap="square" lIns="0" tIns="0" rIns="0" bIns="0" rtlCol="0" anchor="t"/>
-          <a:lstStyle/>
-          <a:p>
-            <a:pPr algn="l" indent="0" marL="0">
-              <a:lnSpc>
-                <a:spcPct val="116000"/>
-              </a:lnSpc>
-              <a:buNone/>
-            </a:pPr>
-            <a:r>
-              <a:rPr lang="en-US" sz="1250" b="1" dirty="0">
-                <a:solidFill>
-                  <a:srgbClr val="0B1220"/>
-                </a:solidFill>
-                <a:latin typeface="Inter" pitchFamily="34" charset="0"/>
-                <a:ea typeface="Inter" pitchFamily="34" charset="-122"/>
-                <a:cs typeface="Inter" pitchFamily="34" charset="-120"/>
-              </a:rPr>
-              <a:t>Escribimos por lo que queremos vender.</a:t>
-            </a:r>
-            <a:pPr algn="l" indent="0" marL="0">
-              <a:lnSpc>
-                <a:spcPct val="116000"/>
-              </a:lnSpc>
-              <a:buNone/>
-            </a:pPr>
-            <a:r>
-              <a:rPr lang="en-US" sz="1250" dirty="0">
-                <a:solidFill>
-                  <a:srgbClr val="0B1220"/>
-                </a:solidFill>
-                <a:latin typeface="Inter" pitchFamily="34" charset="0"/>
-                <a:ea typeface="Inter" pitchFamily="34" charset="-122"/>
-                <a:cs typeface="Inter" pitchFamily="34" charset="-120"/>
-              </a:rPr>
-              <a:t> Las promociones salen a listas por etapa, no por lo que la persona hizo, y le seguimos escribiendo a quien no responde.</a:t>
-            </a:r>
-            <a:endParaRPr lang="en-US" sz="1250" dirty="0"/>
-          </a:p>
-        </p:txBody>
-      </p:sp>
-      <p:sp>
-        <p:nvSpPr>
-          <p:cNvPr id="16" name="Shape 14"/>
-          <p:cNvSpPr/>
-          <p:nvPr/>
-        </p:nvSpPr>
-        <p:spPr>
-          <a:xfrm>
-            <a:off x="4331958" y="2784184"/>
-            <a:ext cx="3527628" cy="0"/>
+            <a:off x="511956" y="1798251"/>
+            <a:ext cx="11167783" cy="0"/>
           </a:xfrm>
           <a:prstGeom prst="line">
             <a:avLst/>
@@ -6576,16 +5657,268 @@
       </p:sp>
       <p:sp>
         <p:nvSpPr>
-          <p:cNvPr id="17" name="Shape 15"/>
+          <p:cNvPr id="5" name="Text 3"/>
+          <p:cNvSpPr txBox="1"/>
+          <p:nvPr/>
+        </p:nvSpPr>
+        <p:spPr>
+          <a:xfrm>
+            <a:off x="511956" y="1256304"/>
+            <a:ext cx="3718649" cy="129760"/>
+          </a:xfrm>
+          <a:prstGeom prst="rect">
+            <a:avLst/>
+          </a:prstGeom>
+          <a:noFill/>
+          <a:ln/>
+        </p:spPr>
+        <p:txBody>
+          <a:bodyPr wrap="square" lIns="0" tIns="0" rIns="0" bIns="0" rtlCol="0" anchor="t"/>
+          <a:lstStyle/>
+          <a:p>
+            <a:pPr algn="l" indent="0" marL="0">
+              <a:lnSpc>
+                <a:spcPct val="107000"/>
+              </a:lnSpc>
+              <a:buNone/>
+            </a:pPr>
+            <a:r>
+              <a:rPr lang="en-US" sz="790" b="1" spc="80" kern="0" dirty="0">
+                <a:solidFill>
+                  <a:srgbClr val="6B7484"/>
+                </a:solidFill>
+                <a:latin typeface="Inter" pitchFamily="34" charset="0"/>
+                <a:ea typeface="Inter" pitchFamily="34" charset="-122"/>
+                <a:cs typeface="Inter" pitchFamily="34" charset="-120"/>
+              </a:rPr>
+              <a:t>QUÉ SE MANDA</a:t>
+            </a:r>
+            <a:endParaRPr lang="en-US" sz="790" dirty="0"/>
+          </a:p>
+        </p:txBody>
+      </p:sp>
+      <p:sp>
+        <p:nvSpPr>
+          <p:cNvPr id="6" name="Text 4"/>
+          <p:cNvSpPr txBox="1"/>
+          <p:nvPr/>
+        </p:nvSpPr>
+        <p:spPr>
+          <a:xfrm>
+            <a:off x="511956" y="1410328"/>
+            <a:ext cx="3625511" cy="144680"/>
+          </a:xfrm>
+          <a:prstGeom prst="rect">
+            <a:avLst/>
+          </a:prstGeom>
+          <a:noFill/>
+          <a:ln/>
+        </p:spPr>
+        <p:txBody>
+          <a:bodyPr wrap="square" lIns="0" tIns="0" rIns="0" bIns="0" rtlCol="0" anchor="t"/>
+          <a:lstStyle/>
+          <a:p>
+            <a:pPr algn="l" indent="0" marL="0">
+              <a:lnSpc>
+                <a:spcPct val="107000"/>
+              </a:lnSpc>
+              <a:buNone/>
+            </a:pPr>
+            <a:r>
+              <a:rPr lang="en-US" sz="900" dirty="0">
+                <a:solidFill>
+                  <a:srgbClr val="3B4556"/>
+                </a:solidFill>
+                <a:latin typeface="Inter" pitchFamily="34" charset="0"/>
+                <a:ea typeface="Inter" pitchFamily="34" charset="-122"/>
+                <a:cs typeface="Inter" pitchFamily="34" charset="-120"/>
+              </a:rPr>
+              <a:t>Promociones: Tasa 0, referidos, ofertas de KPay y de comercios.</a:t>
+            </a:r>
+            <a:endParaRPr lang="en-US" sz="900" dirty="0"/>
+          </a:p>
+        </p:txBody>
+      </p:sp>
+      <p:sp>
+        <p:nvSpPr>
+          <p:cNvPr id="7" name="Text 5"/>
+          <p:cNvSpPr txBox="1"/>
+          <p:nvPr/>
+        </p:nvSpPr>
+        <p:spPr>
+          <a:xfrm>
+            <a:off x="4299556" y="1256304"/>
+            <a:ext cx="3718649" cy="129760"/>
+          </a:xfrm>
+          <a:prstGeom prst="rect">
+            <a:avLst/>
+          </a:prstGeom>
+          <a:noFill/>
+          <a:ln/>
+        </p:spPr>
+        <p:txBody>
+          <a:bodyPr wrap="square" lIns="0" tIns="0" rIns="0" bIns="0" rtlCol="0" anchor="t"/>
+          <a:lstStyle/>
+          <a:p>
+            <a:pPr algn="l" indent="0" marL="0">
+              <a:lnSpc>
+                <a:spcPct val="107000"/>
+              </a:lnSpc>
+              <a:buNone/>
+            </a:pPr>
+            <a:r>
+              <a:rPr lang="en-US" sz="790" b="1" spc="80" kern="0" dirty="0">
+                <a:solidFill>
+                  <a:srgbClr val="6B7484"/>
+                </a:solidFill>
+                <a:latin typeface="Inter" pitchFamily="34" charset="0"/>
+                <a:ea typeface="Inter" pitchFamily="34" charset="-122"/>
+                <a:cs typeface="Inter" pitchFamily="34" charset="-120"/>
+              </a:rPr>
+              <a:t>QUIÉN</a:t>
+            </a:r>
+            <a:endParaRPr lang="en-US" sz="790" dirty="0"/>
+          </a:p>
+        </p:txBody>
+      </p:sp>
+      <p:sp>
+        <p:nvSpPr>
+          <p:cNvPr id="8" name="Text 6"/>
+          <p:cNvSpPr txBox="1"/>
+          <p:nvPr/>
+        </p:nvSpPr>
+        <p:spPr>
+          <a:xfrm>
+            <a:off x="4299556" y="1410328"/>
+            <a:ext cx="3456777" cy="293580"/>
+          </a:xfrm>
+          <a:prstGeom prst="rect">
+            <a:avLst/>
+          </a:prstGeom>
+          <a:noFill/>
+          <a:ln/>
+        </p:spPr>
+        <p:txBody>
+          <a:bodyPr wrap="square" lIns="0" tIns="0" rIns="0" bIns="0" rtlCol="0" anchor="t"/>
+          <a:lstStyle/>
+          <a:p>
+            <a:pPr algn="l" indent="0" marL="0">
+              <a:lnSpc>
+                <a:spcPct val="107000"/>
+              </a:lnSpc>
+              <a:buNone/>
+            </a:pPr>
+            <a:r>
+              <a:rPr lang="en-US" sz="900" dirty="0">
+                <a:solidFill>
+                  <a:srgbClr val="3B4556"/>
+                </a:solidFill>
+                <a:latin typeface="Inter" pitchFamily="34" charset="0"/>
+                <a:ea typeface="Inter" pitchFamily="34" charset="-122"/>
+                <a:cs typeface="Inter" pitchFamily="34" charset="-120"/>
+              </a:rPr>
+              <a:t>Todos los equipos; Marketing manda la mayor parte de lo que llega tras la baja.</a:t>
+            </a:r>
+            <a:endParaRPr lang="en-US" sz="900" dirty="0"/>
+          </a:p>
+        </p:txBody>
+      </p:sp>
+      <p:sp>
+        <p:nvSpPr>
+          <p:cNvPr id="9" name="Text 7"/>
+          <p:cNvSpPr txBox="1"/>
+          <p:nvPr/>
+        </p:nvSpPr>
+        <p:spPr>
+          <a:xfrm>
+            <a:off x="8087156" y="1256304"/>
+            <a:ext cx="3718649" cy="129760"/>
+          </a:xfrm>
+          <a:prstGeom prst="rect">
+            <a:avLst/>
+          </a:prstGeom>
+          <a:noFill/>
+          <a:ln/>
+        </p:spPr>
+        <p:txBody>
+          <a:bodyPr wrap="square" lIns="0" tIns="0" rIns="0" bIns="0" rtlCol="0" anchor="t"/>
+          <a:lstStyle/>
+          <a:p>
+            <a:pPr algn="l" indent="0" marL="0">
+              <a:lnSpc>
+                <a:spcPct val="107000"/>
+              </a:lnSpc>
+              <a:buNone/>
+            </a:pPr>
+            <a:r>
+              <a:rPr lang="en-US" sz="790" b="1" spc="80" kern="0" dirty="0">
+                <a:solidFill>
+                  <a:srgbClr val="6B7484"/>
+                </a:solidFill>
+                <a:latin typeface="Inter" pitchFamily="34" charset="0"/>
+                <a:ea typeface="Inter" pitchFamily="34" charset="-122"/>
+                <a:cs typeface="Inter" pitchFamily="34" charset="-120"/>
+              </a:rPr>
+              <a:t>A QUIÉN</a:t>
+            </a:r>
+            <a:endParaRPr lang="en-US" sz="790" dirty="0"/>
+          </a:p>
+        </p:txBody>
+      </p:sp>
+      <p:sp>
+        <p:nvSpPr>
+          <p:cNvPr id="10" name="Text 8"/>
+          <p:cNvSpPr txBox="1"/>
+          <p:nvPr/>
+        </p:nvSpPr>
+        <p:spPr>
+          <a:xfrm>
+            <a:off x="8087156" y="1410328"/>
+            <a:ext cx="3705610" cy="293580"/>
+          </a:xfrm>
+          <a:prstGeom prst="rect">
+            <a:avLst/>
+          </a:prstGeom>
+          <a:noFill/>
+          <a:ln/>
+        </p:spPr>
+        <p:txBody>
+          <a:bodyPr wrap="square" lIns="0" tIns="0" rIns="0" bIns="0" rtlCol="0" anchor="t"/>
+          <a:lstStyle/>
+          <a:p>
+            <a:pPr algn="l" indent="0" marL="0">
+              <a:lnSpc>
+                <a:spcPct val="107000"/>
+              </a:lnSpc>
+              <a:buNone/>
+            </a:pPr>
+            <a:r>
+              <a:rPr lang="en-US" sz="900" dirty="0">
+                <a:solidFill>
+                  <a:srgbClr val="3B4556"/>
+                </a:solidFill>
+                <a:latin typeface="Inter" pitchFamily="34" charset="0"/>
+                <a:ea typeface="Inter" pitchFamily="34" charset="-122"/>
+                <a:cs typeface="Inter" pitchFamily="34" charset="-120"/>
+              </a:rPr>
+              <a:t>Personas con KPay congelado, dados de baja, REUS, ARCO y lista negra.</a:t>
+            </a:r>
+            <a:endParaRPr lang="en-US" sz="900" dirty="0"/>
+          </a:p>
+        </p:txBody>
+      </p:sp>
+      <p:sp>
+        <p:nvSpPr>
+          <p:cNvPr id="11" name="Shape 9"/>
           <p:cNvSpPr/>
           <p:nvPr/>
         </p:nvSpPr>
         <p:spPr>
           <a:xfrm>
-            <a:off x="4331958" y="2922987"/>
-            <a:ext cx="231639" cy="231639"/>
-          </a:xfrm>
-          <a:prstGeom prst="ellipse">
+            <a:off x="511956" y="1912789"/>
+            <a:ext cx="2106751" cy="1214256"/>
+          </a:xfrm>
+          <a:prstGeom prst="rect">
             <a:avLst/>
           </a:prstGeom>
           <a:solidFill>
@@ -6596,33 +5929,241 @@
       </p:sp>
       <p:sp>
         <p:nvSpPr>
+          <p:cNvPr id="12" name="Text 10"/>
+          <p:cNvSpPr txBox="1"/>
+          <p:nvPr/>
+        </p:nvSpPr>
+        <p:spPr>
+          <a:xfrm>
+            <a:off x="670350" y="2034561"/>
+            <a:ext cx="1861949" cy="414448"/>
+          </a:xfrm>
+          <a:prstGeom prst="rect">
+            <a:avLst/>
+          </a:prstGeom>
+          <a:noFill/>
+          <a:ln/>
+        </p:spPr>
+        <p:txBody>
+          <a:bodyPr wrap="square" lIns="0" tIns="0" rIns="0" bIns="0" rtlCol="0" anchor="t"/>
+          <a:lstStyle/>
+          <a:p>
+            <a:pPr algn="l" indent="0" marL="0">
+              <a:lnSpc>
+                <a:spcPct val="83000"/>
+              </a:lnSpc>
+              <a:buNone/>
+            </a:pPr>
+            <a:r>
+              <a:rPr lang="en-US" sz="3260" b="1" spc="-70" kern="0" dirty="0">
+                <a:solidFill>
+                  <a:srgbClr val="1F4FD8"/>
+                </a:solidFill>
+                <a:latin typeface="Inter" pitchFamily="34" charset="0"/>
+                <a:ea typeface="Inter" pitchFamily="34" charset="-122"/>
+                <a:cs typeface="Inter" pitchFamily="34" charset="-120"/>
+              </a:rPr>
+              <a:t>43.3 M</a:t>
+            </a:r>
+            <a:endParaRPr lang="en-US" sz="3260" dirty="0"/>
+          </a:p>
+        </p:txBody>
+      </p:sp>
+      <p:sp>
+        <p:nvSpPr>
+          <p:cNvPr id="13" name="Text 11"/>
+          <p:cNvSpPr txBox="1"/>
+          <p:nvPr/>
+        </p:nvSpPr>
+        <p:spPr>
+          <a:xfrm>
+            <a:off x="670350" y="2491660"/>
+            <a:ext cx="1861949" cy="513614"/>
+          </a:xfrm>
+          <a:prstGeom prst="rect">
+            <a:avLst/>
+          </a:prstGeom>
+          <a:noFill/>
+          <a:ln/>
+        </p:spPr>
+        <p:txBody>
+          <a:bodyPr wrap="square" lIns="0" tIns="0" rIns="0" bIns="0" rtlCol="0" anchor="t"/>
+          <a:lstStyle/>
+          <a:p>
+            <a:pPr algn="l" indent="0" marL="0">
+              <a:lnSpc>
+                <a:spcPct val="107000"/>
+              </a:lnSpc>
+              <a:buNone/>
+            </a:pPr>
+            <a:r>
+              <a:rPr lang="en-US" sz="1040" dirty="0">
+                <a:solidFill>
+                  <a:srgbClr val="0B1220"/>
+                </a:solidFill>
+                <a:latin typeface="Inter" pitchFamily="34" charset="0"/>
+                <a:ea typeface="Inter" pitchFamily="34" charset="-122"/>
+                <a:cs typeface="Inter" pitchFamily="34" charset="-120"/>
+              </a:rPr>
+              <a:t>promociones a quien tiene KPay congelado y no puede comprar</a:t>
+            </a:r>
+            <a:endParaRPr lang="en-US" sz="1040" dirty="0"/>
+          </a:p>
+        </p:txBody>
+      </p:sp>
+      <p:sp>
+        <p:nvSpPr>
+          <p:cNvPr id="14" name="Shape 12"/>
+          <p:cNvSpPr/>
+          <p:nvPr/>
+        </p:nvSpPr>
+        <p:spPr>
+          <a:xfrm>
+            <a:off x="2777101" y="1912789"/>
+            <a:ext cx="2106901" cy="1214256"/>
+          </a:xfrm>
+          <a:prstGeom prst="rect">
+            <a:avLst/>
+          </a:prstGeom>
+          <a:solidFill>
+            <a:srgbClr val="E8EEFC"/>
+          </a:solidFill>
+          <a:ln/>
+        </p:spPr>
+      </p:sp>
+      <p:sp>
+        <p:nvSpPr>
+          <p:cNvPr id="15" name="Text 13"/>
+          <p:cNvSpPr txBox="1"/>
+          <p:nvPr/>
+        </p:nvSpPr>
+        <p:spPr>
+          <a:xfrm>
+            <a:off x="2935495" y="2034561"/>
+            <a:ext cx="1862104" cy="414448"/>
+          </a:xfrm>
+          <a:prstGeom prst="rect">
+            <a:avLst/>
+          </a:prstGeom>
+          <a:noFill/>
+          <a:ln/>
+        </p:spPr>
+        <p:txBody>
+          <a:bodyPr wrap="square" lIns="0" tIns="0" rIns="0" bIns="0" rtlCol="0" anchor="t"/>
+          <a:lstStyle/>
+          <a:p>
+            <a:pPr algn="l" indent="0" marL="0">
+              <a:lnSpc>
+                <a:spcPct val="83000"/>
+              </a:lnSpc>
+              <a:buNone/>
+            </a:pPr>
+            <a:r>
+              <a:rPr lang="en-US" sz="3260" b="1" spc="-70" kern="0" dirty="0">
+                <a:solidFill>
+                  <a:srgbClr val="1F4FD8"/>
+                </a:solidFill>
+                <a:latin typeface="Inter" pitchFamily="34" charset="0"/>
+                <a:ea typeface="Inter" pitchFamily="34" charset="-122"/>
+                <a:cs typeface="Inter" pitchFamily="34" charset="-120"/>
+              </a:rPr>
+              <a:t>9.8 M</a:t>
+            </a:r>
+            <a:endParaRPr lang="en-US" sz="3260" dirty="0"/>
+          </a:p>
+        </p:txBody>
+      </p:sp>
+      <p:sp>
+        <p:nvSpPr>
+          <p:cNvPr id="16" name="Text 14"/>
+          <p:cNvSpPr txBox="1"/>
+          <p:nvPr/>
+        </p:nvSpPr>
+        <p:spPr>
+          <a:xfrm>
+            <a:off x="2935495" y="2491660"/>
+            <a:ext cx="1862104" cy="513614"/>
+          </a:xfrm>
+          <a:prstGeom prst="rect">
+            <a:avLst/>
+          </a:prstGeom>
+          <a:noFill/>
+          <a:ln/>
+        </p:spPr>
+        <p:txBody>
+          <a:bodyPr wrap="square" lIns="0" tIns="0" rIns="0" bIns="0" rtlCol="0" anchor="t"/>
+          <a:lstStyle/>
+          <a:p>
+            <a:pPr algn="l" indent="0" marL="0">
+              <a:lnSpc>
+                <a:spcPct val="107000"/>
+              </a:lnSpc>
+              <a:buNone/>
+            </a:pPr>
+            <a:r>
+              <a:rPr lang="en-US" sz="1040" dirty="0">
+                <a:solidFill>
+                  <a:srgbClr val="0B1220"/>
+                </a:solidFill>
+                <a:latin typeface="Inter" pitchFamily="34" charset="0"/>
+                <a:ea typeface="Inter" pitchFamily="34" charset="-122"/>
+                <a:cs typeface="Inter" pitchFamily="34" charset="-120"/>
+              </a:rPr>
+              <a:t>WhatsApp a personas marcadas como baja de WhatsApp</a:t>
+            </a:r>
+            <a:endParaRPr lang="en-US" sz="1040" dirty="0"/>
+          </a:p>
+        </p:txBody>
+      </p:sp>
+      <p:sp>
+        <p:nvSpPr>
+          <p:cNvPr id="17" name="Shape 15"/>
+          <p:cNvSpPr/>
+          <p:nvPr/>
+        </p:nvSpPr>
+        <p:spPr>
+          <a:xfrm>
+            <a:off x="5042397" y="1912789"/>
+            <a:ext cx="2106751" cy="1214256"/>
+          </a:xfrm>
+          <a:prstGeom prst="rect">
+            <a:avLst/>
+          </a:prstGeom>
+          <a:solidFill>
+            <a:srgbClr val="E8EEFC"/>
+          </a:solidFill>
+          <a:ln/>
+        </p:spPr>
+      </p:sp>
+      <p:sp>
+        <p:nvSpPr>
           <p:cNvPr id="18" name="Text 16"/>
           <p:cNvSpPr txBox="1"/>
           <p:nvPr/>
         </p:nvSpPr>
         <p:spPr>
           <a:xfrm>
-            <a:off x="4331958" y="2922987"/>
-            <a:ext cx="256876" cy="231639"/>
-          </a:xfrm>
-          <a:prstGeom prst="rect">
-            <a:avLst/>
-          </a:prstGeom>
-          <a:noFill/>
-          <a:ln/>
-        </p:spPr>
-        <p:txBody>
-          <a:bodyPr wrap="square" lIns="0" tIns="0" rIns="0" bIns="0" rtlCol="0" anchor="ctr"/>
-          <a:lstStyle/>
-          <a:p>
-            <a:pPr algn="ctr" indent="0" marL="0">
-              <a:lnSpc>
-                <a:spcPct val="112000"/>
-              </a:lnSpc>
-              <a:buNone/>
-            </a:pPr>
-            <a:r>
-              <a:rPr lang="en-US" sz="960" b="1" dirty="0">
+            <a:off x="5200791" y="2034561"/>
+            <a:ext cx="1861949" cy="414448"/>
+          </a:xfrm>
+          <a:prstGeom prst="rect">
+            <a:avLst/>
+          </a:prstGeom>
+          <a:noFill/>
+          <a:ln/>
+        </p:spPr>
+        <p:txBody>
+          <a:bodyPr wrap="square" lIns="0" tIns="0" rIns="0" bIns="0" rtlCol="0" anchor="t"/>
+          <a:lstStyle/>
+          <a:p>
+            <a:pPr algn="l" indent="0" marL="0">
+              <a:lnSpc>
+                <a:spcPct val="83000"/>
+              </a:lnSpc>
+              <a:buNone/>
+            </a:pPr>
+            <a:r>
+              <a:rPr lang="en-US" sz="3260" b="1" spc="-70" kern="0" dirty="0">
                 <a:solidFill>
                   <a:srgbClr val="1F4FD8"/>
                 </a:solidFill>
@@ -6630,9 +6171,9 @@
                 <a:ea typeface="Inter" pitchFamily="34" charset="-122"/>
                 <a:cs typeface="Inter" pitchFamily="34" charset="-120"/>
               </a:rPr>
-              <a:t>2</a:t>
-            </a:r>
-            <a:endParaRPr lang="en-US" sz="960" dirty="0"/>
+              <a:t>249 mil</a:t>
+            </a:r>
+            <a:endParaRPr lang="en-US" sz="3260" dirty="0"/>
           </a:p>
         </p:txBody>
       </p:sp>
@@ -6644,27 +6185,27 @@
         </p:nvSpPr>
         <p:spPr>
           <a:xfrm>
-            <a:off x="4673312" y="2922987"/>
-            <a:ext cx="3300150" cy="1109213"/>
-          </a:xfrm>
-          <a:prstGeom prst="rect">
-            <a:avLst/>
-          </a:prstGeom>
-          <a:noFill/>
-          <a:ln/>
-        </p:spPr>
-        <p:txBody>
-          <a:bodyPr wrap="square" lIns="0" tIns="0" rIns="0" bIns="0" rtlCol="0" anchor="t"/>
-          <a:lstStyle/>
-          <a:p>
-            <a:pPr algn="l" indent="0" marL="0">
-              <a:lnSpc>
-                <a:spcPct val="116000"/>
-              </a:lnSpc>
-              <a:buNone/>
-            </a:pPr>
-            <a:r>
-              <a:rPr lang="en-US" sz="1250" b="1" dirty="0">
+            <a:off x="5200791" y="2491660"/>
+            <a:ext cx="1861949" cy="513614"/>
+          </a:xfrm>
+          <a:prstGeom prst="rect">
+            <a:avLst/>
+          </a:prstGeom>
+          <a:noFill/>
+          <a:ln/>
+        </p:spPr>
+        <p:txBody>
+          <a:bodyPr wrap="square" lIns="0" tIns="0" rIns="0" bIns="0" rtlCol="0" anchor="t"/>
+          <a:lstStyle/>
+          <a:p>
+            <a:pPr algn="l" indent="0" marL="0">
+              <a:lnSpc>
+                <a:spcPct val="107000"/>
+              </a:lnSpc>
+              <a:buNone/>
+            </a:pPr>
+            <a:r>
+              <a:rPr lang="en-US" sz="1040" dirty="0">
                 <a:solidFill>
                   <a:srgbClr val="0B1220"/>
                 </a:solidFill>
@@ -6672,26 +6213,9 @@
                 <a:ea typeface="Inter" pitchFamily="34" charset="-122"/>
                 <a:cs typeface="Inter" pitchFamily="34" charset="-120"/>
               </a:rPr>
-              <a:t>Cada equipo decide solo.</a:t>
-            </a:r>
-            <a:pPr algn="l" indent="0" marL="0">
-              <a:lnSpc>
-                <a:spcPct val="116000"/>
-              </a:lnSpc>
-              <a:buNone/>
-            </a:pPr>
-            <a:r>
-              <a:rPr lang="en-US" sz="1250" dirty="0">
-                <a:solidFill>
-                  <a:srgbClr val="0B1220"/>
-                </a:solidFill>
-                <a:latin typeface="Inter" pitchFamily="34" charset="0"/>
-                <a:ea typeface="Inter" pitchFamily="34" charset="-122"/>
-                <a:cs typeface="Inter" pitchFamily="34" charset="-120"/>
-              </a:rPr>
-              <a:t> No hay límite de mensajes por persona ni calendario común: Marketing, Product Growth y Sales le escriben a la misma gente el mismo día.</a:t>
-            </a:r>
-            <a:endParaRPr lang="en-US" sz="1250" dirty="0"/>
+              <a:t>promociones a quien pidió no recibir publicidad (REUS o ARCO)</a:t>
+            </a:r>
+            <a:endParaRPr lang="en-US" sz="1040" dirty="0"/>
           </a:p>
         </p:txBody>
       </p:sp>
@@ -6703,8 +6227,282 @@
         </p:nvSpPr>
         <p:spPr>
           <a:xfrm>
-            <a:off x="8152111" y="2784184"/>
-            <a:ext cx="3527477" cy="0"/>
+            <a:off x="7307542" y="1912789"/>
+            <a:ext cx="2106901" cy="1214256"/>
+          </a:xfrm>
+          <a:prstGeom prst="rect">
+            <a:avLst/>
+          </a:prstGeom>
+          <a:solidFill>
+            <a:srgbClr val="E8EEFC"/>
+          </a:solidFill>
+          <a:ln/>
+        </p:spPr>
+      </p:sp>
+      <p:sp>
+        <p:nvSpPr>
+          <p:cNvPr id="21" name="Text 19"/>
+          <p:cNvSpPr txBox="1"/>
+          <p:nvPr/>
+        </p:nvSpPr>
+        <p:spPr>
+          <a:xfrm>
+            <a:off x="7465936" y="2034561"/>
+            <a:ext cx="1862104" cy="414448"/>
+          </a:xfrm>
+          <a:prstGeom prst="rect">
+            <a:avLst/>
+          </a:prstGeom>
+          <a:noFill/>
+          <a:ln/>
+        </p:spPr>
+        <p:txBody>
+          <a:bodyPr wrap="square" lIns="0" tIns="0" rIns="0" bIns="0" rtlCol="0" anchor="t"/>
+          <a:lstStyle/>
+          <a:p>
+            <a:pPr algn="l" indent="0" marL="0">
+              <a:lnSpc>
+                <a:spcPct val="83000"/>
+              </a:lnSpc>
+              <a:buNone/>
+            </a:pPr>
+            <a:r>
+              <a:rPr lang="en-US" sz="3260" b="1" spc="-70" kern="0" dirty="0">
+                <a:solidFill>
+                  <a:srgbClr val="1F4FD8"/>
+                </a:solidFill>
+                <a:latin typeface="Inter" pitchFamily="34" charset="0"/>
+                <a:ea typeface="Inter" pitchFamily="34" charset="-122"/>
+                <a:cs typeface="Inter" pitchFamily="34" charset="-120"/>
+              </a:rPr>
+              <a:t>146 mil</a:t>
+            </a:r>
+            <a:endParaRPr lang="en-US" sz="3260" dirty="0"/>
+          </a:p>
+        </p:txBody>
+      </p:sp>
+      <p:sp>
+        <p:nvSpPr>
+          <p:cNvPr id="22" name="Text 20"/>
+          <p:cNvSpPr txBox="1"/>
+          <p:nvPr/>
+        </p:nvSpPr>
+        <p:spPr>
+          <a:xfrm>
+            <a:off x="7465936" y="2491660"/>
+            <a:ext cx="1862104" cy="342409"/>
+          </a:xfrm>
+          <a:prstGeom prst="rect">
+            <a:avLst/>
+          </a:prstGeom>
+          <a:noFill/>
+          <a:ln/>
+        </p:spPr>
+        <p:txBody>
+          <a:bodyPr wrap="square" lIns="0" tIns="0" rIns="0" bIns="0" rtlCol="0" anchor="t"/>
+          <a:lstStyle/>
+          <a:p>
+            <a:pPr algn="l" indent="0" marL="0">
+              <a:lnSpc>
+                <a:spcPct val="107000"/>
+              </a:lnSpc>
+              <a:buNone/>
+            </a:pPr>
+            <a:r>
+              <a:rPr lang="en-US" sz="1040" dirty="0">
+                <a:solidFill>
+                  <a:srgbClr val="0B1220"/>
+                </a:solidFill>
+                <a:latin typeface="Inter" pitchFamily="34" charset="0"/>
+                <a:ea typeface="Inter" pitchFamily="34" charset="-122"/>
+                <a:cs typeface="Inter" pitchFamily="34" charset="-120"/>
+              </a:rPr>
+              <a:t>promociones a personas en lista negra</a:t>
+            </a:r>
+            <a:endParaRPr lang="en-US" sz="1040" dirty="0"/>
+          </a:p>
+        </p:txBody>
+      </p:sp>
+      <p:sp>
+        <p:nvSpPr>
+          <p:cNvPr id="23" name="Shape 21"/>
+          <p:cNvSpPr/>
+          <p:nvPr/>
+        </p:nvSpPr>
+        <p:spPr>
+          <a:xfrm>
+            <a:off x="9572838" y="1912789"/>
+            <a:ext cx="2106751" cy="1214256"/>
+          </a:xfrm>
+          <a:prstGeom prst="rect">
+            <a:avLst/>
+          </a:prstGeom>
+          <a:solidFill>
+            <a:srgbClr val="E8EEFC"/>
+          </a:solidFill>
+          <a:ln/>
+        </p:spPr>
+      </p:sp>
+      <p:sp>
+        <p:nvSpPr>
+          <p:cNvPr id="24" name="Text 22"/>
+          <p:cNvSpPr txBox="1"/>
+          <p:nvPr/>
+        </p:nvSpPr>
+        <p:spPr>
+          <a:xfrm>
+            <a:off x="9731232" y="2034561"/>
+            <a:ext cx="1861949" cy="414448"/>
+          </a:xfrm>
+          <a:prstGeom prst="rect">
+            <a:avLst/>
+          </a:prstGeom>
+          <a:noFill/>
+          <a:ln/>
+        </p:spPr>
+        <p:txBody>
+          <a:bodyPr wrap="square" lIns="0" tIns="0" rIns="0" bIns="0" rtlCol="0" anchor="t"/>
+          <a:lstStyle/>
+          <a:p>
+            <a:pPr algn="l" indent="0" marL="0">
+              <a:lnSpc>
+                <a:spcPct val="83000"/>
+              </a:lnSpc>
+              <a:buNone/>
+            </a:pPr>
+            <a:r>
+              <a:rPr lang="en-US" sz="3260" b="1" spc="-70" kern="0" dirty="0">
+                <a:solidFill>
+                  <a:srgbClr val="1F4FD8"/>
+                </a:solidFill>
+                <a:latin typeface="Inter" pitchFamily="34" charset="0"/>
+                <a:ea typeface="Inter" pitchFamily="34" charset="-122"/>
+                <a:cs typeface="Inter" pitchFamily="34" charset="-120"/>
+              </a:rPr>
+              <a:t>79 mil</a:t>
+            </a:r>
+            <a:endParaRPr lang="en-US" sz="3260" dirty="0"/>
+          </a:p>
+        </p:txBody>
+      </p:sp>
+      <p:sp>
+        <p:nvSpPr>
+          <p:cNvPr id="25" name="Text 23"/>
+          <p:cNvSpPr txBox="1"/>
+          <p:nvPr/>
+        </p:nvSpPr>
+        <p:spPr>
+          <a:xfrm>
+            <a:off x="9731232" y="2491660"/>
+            <a:ext cx="1861949" cy="342409"/>
+          </a:xfrm>
+          <a:prstGeom prst="rect">
+            <a:avLst/>
+          </a:prstGeom>
+          <a:noFill/>
+          <a:ln/>
+        </p:spPr>
+        <p:txBody>
+          <a:bodyPr wrap="square" lIns="0" tIns="0" rIns="0" bIns="0" rtlCol="0" anchor="t"/>
+          <a:lstStyle/>
+          <a:p>
+            <a:pPr algn="l" indent="0" marL="0">
+              <a:lnSpc>
+                <a:spcPct val="107000"/>
+              </a:lnSpc>
+              <a:buNone/>
+            </a:pPr>
+            <a:r>
+              <a:rPr lang="en-US" sz="1040" dirty="0">
+                <a:solidFill>
+                  <a:srgbClr val="0B1220"/>
+                </a:solidFill>
+                <a:latin typeface="Inter" pitchFamily="34" charset="0"/>
+                <a:ea typeface="Inter" pitchFamily="34" charset="-122"/>
+                <a:cs typeface="Inter" pitchFamily="34" charset="-120"/>
+              </a:rPr>
+              <a:t>promociones a quien ya se dio de baja del correo</a:t>
+            </a:r>
+            <a:endParaRPr lang="en-US" sz="1040" dirty="0"/>
+          </a:p>
+        </p:txBody>
+      </p:sp>
+      <p:sp>
+        <p:nvSpPr>
+          <p:cNvPr id="26" name="Text 24"/>
+          <p:cNvSpPr txBox="1"/>
+          <p:nvPr/>
+        </p:nvSpPr>
+        <p:spPr>
+          <a:xfrm>
+            <a:off x="511956" y="3297647"/>
+            <a:ext cx="6963101" cy="164573"/>
+          </a:xfrm>
+          <a:prstGeom prst="rect">
+            <a:avLst/>
+          </a:prstGeom>
+          <a:noFill/>
+          <a:ln/>
+        </p:spPr>
+        <p:txBody>
+          <a:bodyPr wrap="square" lIns="0" tIns="0" rIns="0" bIns="0" rtlCol="0" anchor="t"/>
+          <a:lstStyle/>
+          <a:p>
+            <a:pPr algn="l" indent="0" marL="0">
+              <a:lnSpc>
+                <a:spcPct val="112000"/>
+              </a:lnSpc>
+              <a:buNone/>
+            </a:pPr>
+            <a:r>
+              <a:rPr lang="en-US" sz="960" b="1" dirty="0">
+                <a:solidFill>
+                  <a:srgbClr val="0B1220"/>
+                </a:solidFill>
+                <a:latin typeface="Inter" pitchFamily="34" charset="0"/>
+                <a:ea typeface="Inter" pitchFamily="34" charset="-122"/>
+                <a:cs typeface="Inter" pitchFamily="34" charset="-120"/>
+              </a:rPr>
+              <a:t>Cada punto es una campaña que mandó promociones a un grupo que no debería recibirlas</a:t>
+            </a:r>
+            <a:endParaRPr lang="en-US" sz="960" dirty="0"/>
+          </a:p>
+        </p:txBody>
+      </p:sp>
+      <p:pic>
+        <p:nvPicPr>
+          <p:cNvPr id="27" name="Image 0" descr="preencoded.png">    </p:cNvPr>
+          <p:cNvPicPr>
+            <a:picLocks noChangeAspect="1"/>
+          </p:cNvPicPr>
+          <p:nvPr/>
+        </p:nvPicPr>
+        <p:blipFill>
+          <a:blip r:embed="rId1"/>
+          <a:stretch>
+            <a:fillRect/>
+          </a:stretch>
+        </p:blipFill>
+        <p:spPr>
+          <a:xfrm>
+            <a:off x="511956" y="3523107"/>
+            <a:ext cx="6742235" cy="2235606"/>
+          </a:xfrm>
+          <a:prstGeom prst="rect">
+            <a:avLst/>
+          </a:prstGeom>
+        </p:spPr>
+      </p:pic>
+      <p:sp>
+        <p:nvSpPr>
+          <p:cNvPr id="28" name="Shape 25"/>
+          <p:cNvSpPr/>
+          <p:nvPr/>
+        </p:nvSpPr>
+        <p:spPr>
+          <a:xfrm>
+            <a:off x="7547017" y="3302470"/>
+            <a:ext cx="4132722" cy="0"/>
           </a:xfrm>
           <a:prstGeom prst="line">
             <a:avLst/>
@@ -6720,14 +6518,14 @@
       </p:sp>
       <p:sp>
         <p:nvSpPr>
-          <p:cNvPr id="21" name="Shape 19"/>
+          <p:cNvPr id="29" name="Shape 26"/>
           <p:cNvSpPr/>
           <p:nvPr/>
         </p:nvSpPr>
         <p:spPr>
           <a:xfrm>
-            <a:off x="8152111" y="2922987"/>
-            <a:ext cx="231639" cy="231639"/>
+            <a:off x="7547017" y="3392594"/>
+            <a:ext cx="207224" cy="207224"/>
           </a:xfrm>
           <a:prstGeom prst="ellipse">
             <a:avLst/>
@@ -6740,14 +6538,14 @@
       </p:sp>
       <p:sp>
         <p:nvSpPr>
-          <p:cNvPr id="22" name="Text 20"/>
-          <p:cNvSpPr txBox="1"/>
-          <p:nvPr/>
-        </p:nvSpPr>
-        <p:spPr>
-          <a:xfrm>
-            <a:off x="8152111" y="2922987"/>
-            <a:ext cx="256876" cy="231639"/>
+          <p:cNvPr id="30" name="Text 27"/>
+          <p:cNvSpPr txBox="1"/>
+          <p:nvPr/>
+        </p:nvSpPr>
+        <p:spPr>
+          <a:xfrm>
+            <a:off x="7547017" y="3392594"/>
+            <a:ext cx="231729" cy="207224"/>
           </a:xfrm>
           <a:prstGeom prst="rect">
             <a:avLst/>
@@ -6766,7 +6564,7 @@
               <a:buNone/>
             </a:pPr>
             <a:r>
-              <a:rPr lang="en-US" sz="960" b="1" dirty="0">
+              <a:rPr lang="en-US" sz="910" b="1" dirty="0">
                 <a:solidFill>
                   <a:srgbClr val="1F4FD8"/>
                 </a:solidFill>
@@ -6774,41 +6572,41 @@
                 <a:ea typeface="Inter" pitchFamily="34" charset="-122"/>
                 <a:cs typeface="Inter" pitchFamily="34" charset="-120"/>
               </a:rPr>
-              <a:t>3</a:t>
-            </a:r>
-            <a:endParaRPr lang="en-US" sz="960" dirty="0"/>
-          </a:p>
-        </p:txBody>
-      </p:sp>
-      <p:sp>
-        <p:nvSpPr>
-          <p:cNvPr id="23" name="Text 21"/>
-          <p:cNvSpPr txBox="1"/>
-          <p:nvPr/>
-        </p:nvSpPr>
-        <p:spPr>
-          <a:xfrm>
-            <a:off x="8493465" y="2922987"/>
-            <a:ext cx="3299995" cy="1109213"/>
-          </a:xfrm>
-          <a:prstGeom prst="rect">
-            <a:avLst/>
-          </a:prstGeom>
-          <a:noFill/>
-          <a:ln/>
-        </p:spPr>
-        <p:txBody>
-          <a:bodyPr wrap="square" lIns="0" tIns="0" rIns="0" bIns="0" rtlCol="0" anchor="t"/>
-          <a:lstStyle/>
-          <a:p>
-            <a:pPr algn="l" indent="0" marL="0">
-              <a:lnSpc>
-                <a:spcPct val="116000"/>
-              </a:lnSpc>
-              <a:buNone/>
-            </a:pPr>
-            <a:r>
-              <a:rPr lang="en-US" sz="1250" b="1" dirty="0">
+              <a:t>1</a:t>
+            </a:r>
+            <a:endParaRPr lang="en-US" sz="910" dirty="0"/>
+          </a:p>
+        </p:txBody>
+      </p:sp>
+      <p:sp>
+        <p:nvSpPr>
+          <p:cNvPr id="31" name="Text 28"/>
+          <p:cNvSpPr txBox="1"/>
+          <p:nvPr/>
+        </p:nvSpPr>
+        <p:spPr>
+          <a:xfrm>
+            <a:off x="7851750" y="3392594"/>
+            <a:ext cx="3961117" cy="543002"/>
+          </a:xfrm>
+          <a:prstGeom prst="rect">
+            <a:avLst/>
+          </a:prstGeom>
+          <a:noFill/>
+          <a:ln/>
+        </p:spPr>
+        <p:txBody>
+          <a:bodyPr wrap="square" lIns="0" tIns="0" rIns="0" bIns="0" rtlCol="0" anchor="t"/>
+          <a:lstStyle/>
+          <a:p>
+            <a:pPr algn="l" indent="0" marL="0">
+              <a:lnSpc>
+                <a:spcPct val="112000"/>
+              </a:lnSpc>
+              <a:buNone/>
+            </a:pPr>
+            <a:r>
+              <a:rPr lang="en-US" sz="1060" b="1" dirty="0">
                 <a:solidFill>
                   <a:srgbClr val="0B1220"/>
                 </a:solidFill>
@@ -6816,16 +6614,16 @@
                 <a:ea typeface="Inter" pitchFamily="34" charset="-122"/>
                 <a:cs typeface="Inter" pitchFamily="34" charset="-120"/>
               </a:rPr>
-              <a:t>Nadie compara volumen contra respuesta.</a:t>
-            </a:r>
-            <a:pPr algn="l" indent="0" marL="0">
-              <a:lnSpc>
-                <a:spcPct val="116000"/>
-              </a:lnSpc>
-              <a:buNone/>
-            </a:pPr>
-            <a:r>
-              <a:rPr lang="en-US" sz="1250" dirty="0">
+              <a:t>KPay congelado.</a:t>
+            </a:r>
+            <a:pPr algn="l" indent="0" marL="0">
+              <a:lnSpc>
+                <a:spcPct val="112000"/>
+              </a:lnSpc>
+              <a:buNone/>
+            </a:pPr>
+            <a:r>
+              <a:rPr lang="en-US" sz="1060" dirty="0">
                 <a:solidFill>
                   <a:srgbClr val="0B1220"/>
                 </a:solidFill>
@@ -6833,24 +6631,47 @@
                 <a:ea typeface="Inter" pitchFamily="34" charset="-122"/>
                 <a:cs typeface="Inter" pitchFamily="34" charset="-120"/>
               </a:rPr>
-              <a:t> Copiar una campaña cada mes es más fácil que medirla: 4 de cada 10 mensajes salen de campañas debajo del mínimo.</a:t>
-            </a:r>
-            <a:endParaRPr lang="en-US" sz="1250" dirty="0"/>
-          </a:p>
-        </p:txBody>
-      </p:sp>
-      <p:sp>
-        <p:nvSpPr>
-          <p:cNvPr id="24" name="Shape 22"/>
+              <a:t> Su línea de KPay está bloqueada y no puede comprar; 30.1 M de esas promociones ofrecían justo KPay.</a:t>
+            </a:r>
+            <a:endParaRPr lang="en-US" sz="1060" dirty="0"/>
+          </a:p>
+        </p:txBody>
+      </p:sp>
+      <p:sp>
+        <p:nvSpPr>
+          <p:cNvPr id="32" name="Shape 29"/>
           <p:cNvSpPr/>
           <p:nvPr/>
         </p:nvSpPr>
         <p:spPr>
           <a:xfrm>
-            <a:off x="511956" y="5992160"/>
-            <a:ext cx="11167783" cy="352808"/>
-          </a:xfrm>
-          <a:prstGeom prst="rect">
+            <a:off x="7547017" y="4013512"/>
+            <a:ext cx="4132722" cy="0"/>
+          </a:xfrm>
+          <a:prstGeom prst="line">
+            <a:avLst/>
+          </a:prstGeom>
+          <a:noFill/>
+          <a:ln w="9645">
+            <a:solidFill>
+              <a:srgbClr val="DDE2EA"/>
+            </a:solidFill>
+            <a:prstDash val="solid"/>
+          </a:ln>
+        </p:spPr>
+      </p:sp>
+      <p:sp>
+        <p:nvSpPr>
+          <p:cNvPr id="33" name="Shape 30"/>
+          <p:cNvSpPr/>
+          <p:nvPr/>
+        </p:nvSpPr>
+        <p:spPr>
+          <a:xfrm>
+            <a:off x="7547017" y="4103635"/>
+            <a:ext cx="207224" cy="207224"/>
+          </a:xfrm>
+          <a:prstGeom prst="ellipse">
             <a:avLst/>
           </a:prstGeom>
           <a:solidFill>
@@ -6861,7 +6682,272 @@
       </p:sp>
       <p:sp>
         <p:nvSpPr>
-          <p:cNvPr id="25" name="Text 23"/>
+          <p:cNvPr id="34" name="Text 31"/>
+          <p:cNvSpPr txBox="1"/>
+          <p:nvPr/>
+        </p:nvSpPr>
+        <p:spPr>
+          <a:xfrm>
+            <a:off x="7547017" y="4103635"/>
+            <a:ext cx="231729" cy="207224"/>
+          </a:xfrm>
+          <a:prstGeom prst="rect">
+            <a:avLst/>
+          </a:prstGeom>
+          <a:noFill/>
+          <a:ln/>
+        </p:spPr>
+        <p:txBody>
+          <a:bodyPr wrap="square" lIns="0" tIns="0" rIns="0" bIns="0" rtlCol="0" anchor="ctr"/>
+          <a:lstStyle/>
+          <a:p>
+            <a:pPr algn="ctr" indent="0" marL="0">
+              <a:lnSpc>
+                <a:spcPct val="112000"/>
+              </a:lnSpc>
+              <a:buNone/>
+            </a:pPr>
+            <a:r>
+              <a:rPr lang="en-US" sz="910" b="1" dirty="0">
+                <a:solidFill>
+                  <a:srgbClr val="1F4FD8"/>
+                </a:solidFill>
+                <a:latin typeface="Inter" pitchFamily="34" charset="0"/>
+                <a:ea typeface="Inter" pitchFamily="34" charset="-122"/>
+                <a:cs typeface="Inter" pitchFamily="34" charset="-120"/>
+              </a:rPr>
+              <a:t>2</a:t>
+            </a:r>
+            <a:endParaRPr lang="en-US" sz="910" dirty="0"/>
+          </a:p>
+        </p:txBody>
+      </p:sp>
+      <p:sp>
+        <p:nvSpPr>
+          <p:cNvPr id="35" name="Text 32"/>
+          <p:cNvSpPr txBox="1"/>
+          <p:nvPr/>
+        </p:nvSpPr>
+        <p:spPr>
+          <a:xfrm>
+            <a:off x="7851750" y="4103635"/>
+            <a:ext cx="3961117" cy="543002"/>
+          </a:xfrm>
+          <a:prstGeom prst="rect">
+            <a:avLst/>
+          </a:prstGeom>
+          <a:noFill/>
+          <a:ln/>
+        </p:spPr>
+        <p:txBody>
+          <a:bodyPr wrap="square" lIns="0" tIns="0" rIns="0" bIns="0" rtlCol="0" anchor="t"/>
+          <a:lstStyle/>
+          <a:p>
+            <a:pPr algn="l" indent="0" marL="0">
+              <a:lnSpc>
+                <a:spcPct val="112000"/>
+              </a:lnSpc>
+              <a:buNone/>
+            </a:pPr>
+            <a:r>
+              <a:rPr lang="en-US" sz="1060" b="1" dirty="0">
+                <a:solidFill>
+                  <a:srgbClr val="0B1220"/>
+                </a:solidFill>
+                <a:latin typeface="Inter" pitchFamily="34" charset="0"/>
+                <a:ea typeface="Inter" pitchFamily="34" charset="-122"/>
+                <a:cs typeface="Inter" pitchFamily="34" charset="-120"/>
+              </a:rPr>
+              <a:t>REUS o ARCO.</a:t>
+            </a:r>
+            <a:pPr algn="l" indent="0" marL="0">
+              <a:lnSpc>
+                <a:spcPct val="112000"/>
+              </a:lnSpc>
+              <a:buNone/>
+            </a:pPr>
+            <a:r>
+              <a:rPr lang="en-US" sz="1060" dirty="0">
+                <a:solidFill>
+                  <a:srgbClr val="0B1220"/>
+                </a:solidFill>
+                <a:latin typeface="Inter" pitchFamily="34" charset="0"/>
+                <a:ea typeface="Inter" pitchFamily="34" charset="-122"/>
+                <a:cs typeface="Inter" pitchFamily="34" charset="-120"/>
+              </a:rPr>
+              <a:t> REUS: registro de CONDUSEF para no recibir publicidad. ARCO: pidió cancelar u oponerse al uso de sus datos.</a:t>
+            </a:r>
+            <a:endParaRPr lang="en-US" sz="1060" dirty="0"/>
+          </a:p>
+        </p:txBody>
+      </p:sp>
+      <p:sp>
+        <p:nvSpPr>
+          <p:cNvPr id="36" name="Shape 33"/>
+          <p:cNvSpPr/>
+          <p:nvPr/>
+        </p:nvSpPr>
+        <p:spPr>
+          <a:xfrm>
+            <a:off x="7547017" y="4724553"/>
+            <a:ext cx="4132722" cy="0"/>
+          </a:xfrm>
+          <a:prstGeom prst="line">
+            <a:avLst/>
+          </a:prstGeom>
+          <a:noFill/>
+          <a:ln w="9645">
+            <a:solidFill>
+              <a:srgbClr val="DDE2EA"/>
+            </a:solidFill>
+            <a:prstDash val="solid"/>
+          </a:ln>
+        </p:spPr>
+      </p:sp>
+      <p:sp>
+        <p:nvSpPr>
+          <p:cNvPr id="37" name="Shape 34"/>
+          <p:cNvSpPr/>
+          <p:nvPr/>
+        </p:nvSpPr>
+        <p:spPr>
+          <a:xfrm>
+            <a:off x="7547017" y="4814677"/>
+            <a:ext cx="207224" cy="207224"/>
+          </a:xfrm>
+          <a:prstGeom prst="ellipse">
+            <a:avLst/>
+          </a:prstGeom>
+          <a:solidFill>
+            <a:srgbClr val="E8EEFC"/>
+          </a:solidFill>
+          <a:ln/>
+        </p:spPr>
+      </p:sp>
+      <p:sp>
+        <p:nvSpPr>
+          <p:cNvPr id="38" name="Text 35"/>
+          <p:cNvSpPr txBox="1"/>
+          <p:nvPr/>
+        </p:nvSpPr>
+        <p:spPr>
+          <a:xfrm>
+            <a:off x="7547017" y="4814677"/>
+            <a:ext cx="231729" cy="207224"/>
+          </a:xfrm>
+          <a:prstGeom prst="rect">
+            <a:avLst/>
+          </a:prstGeom>
+          <a:noFill/>
+          <a:ln/>
+        </p:spPr>
+        <p:txBody>
+          <a:bodyPr wrap="square" lIns="0" tIns="0" rIns="0" bIns="0" rtlCol="0" anchor="ctr"/>
+          <a:lstStyle/>
+          <a:p>
+            <a:pPr algn="ctr" indent="0" marL="0">
+              <a:lnSpc>
+                <a:spcPct val="112000"/>
+              </a:lnSpc>
+              <a:buNone/>
+            </a:pPr>
+            <a:r>
+              <a:rPr lang="en-US" sz="910" b="1" dirty="0">
+                <a:solidFill>
+                  <a:srgbClr val="1F4FD8"/>
+                </a:solidFill>
+                <a:latin typeface="Inter" pitchFamily="34" charset="0"/>
+                <a:ea typeface="Inter" pitchFamily="34" charset="-122"/>
+                <a:cs typeface="Inter" pitchFamily="34" charset="-120"/>
+              </a:rPr>
+              <a:t>3</a:t>
+            </a:r>
+            <a:endParaRPr lang="en-US" sz="910" dirty="0"/>
+          </a:p>
+        </p:txBody>
+      </p:sp>
+      <p:sp>
+        <p:nvSpPr>
+          <p:cNvPr id="39" name="Text 36"/>
+          <p:cNvSpPr txBox="1"/>
+          <p:nvPr/>
+        </p:nvSpPr>
+        <p:spPr>
+          <a:xfrm>
+            <a:off x="7851750" y="4814677"/>
+            <a:ext cx="3961117" cy="362001"/>
+          </a:xfrm>
+          <a:prstGeom prst="rect">
+            <a:avLst/>
+          </a:prstGeom>
+          <a:noFill/>
+          <a:ln/>
+        </p:spPr>
+        <p:txBody>
+          <a:bodyPr wrap="square" lIns="0" tIns="0" rIns="0" bIns="0" rtlCol="0" anchor="t"/>
+          <a:lstStyle/>
+          <a:p>
+            <a:pPr algn="l" indent="0" marL="0">
+              <a:lnSpc>
+                <a:spcPct val="112000"/>
+              </a:lnSpc>
+              <a:buNone/>
+            </a:pPr>
+            <a:r>
+              <a:rPr lang="en-US" sz="1060" b="1" dirty="0">
+                <a:solidFill>
+                  <a:srgbClr val="0B1220"/>
+                </a:solidFill>
+                <a:latin typeface="Inter" pitchFamily="34" charset="0"/>
+                <a:ea typeface="Inter" pitchFamily="34" charset="-122"/>
+                <a:cs typeface="Inter" pitchFamily="34" charset="-120"/>
+              </a:rPr>
+              <a:t>Baja de correo.</a:t>
+            </a:r>
+            <a:pPr algn="l" indent="0" marL="0">
+              <a:lnSpc>
+                <a:spcPct val="112000"/>
+              </a:lnSpc>
+              <a:buNone/>
+            </a:pPr>
+            <a:r>
+              <a:rPr lang="en-US" sz="1060" dirty="0">
+                <a:solidFill>
+                  <a:srgbClr val="0B1220"/>
+                </a:solidFill>
+                <a:latin typeface="Inter" pitchFamily="34" charset="0"/>
+                <a:ea typeface="Inter" pitchFamily="34" charset="-122"/>
+                <a:cs typeface="Inter" pitchFamily="34" charset="-120"/>
+              </a:rPr>
+              <a:t> De 79 mil promociones a quien ya se dio de baja, 58 mil son de Marketing; la mayor, rescate de Tasa 0.</a:t>
+            </a:r>
+            <a:endParaRPr lang="en-US" sz="1060" dirty="0"/>
+          </a:p>
+        </p:txBody>
+      </p:sp>
+      <p:sp>
+        <p:nvSpPr>
+          <p:cNvPr id="40" name="Shape 37"/>
+          <p:cNvSpPr/>
+          <p:nvPr/>
+        </p:nvSpPr>
+        <p:spPr>
+          <a:xfrm>
+            <a:off x="511956" y="5992160"/>
+            <a:ext cx="11167783" cy="352808"/>
+          </a:xfrm>
+          <a:prstGeom prst="rect">
+            <a:avLst/>
+          </a:prstGeom>
+          <a:solidFill>
+            <a:srgbClr val="E8EEFC"/>
+          </a:solidFill>
+          <a:ln/>
+        </p:spPr>
+      </p:sp>
+      <p:sp>
+        <p:nvSpPr>
+          <p:cNvPr id="41" name="Text 38"/>
           <p:cNvSpPr txBox="1"/>
           <p:nvPr/>
         </p:nvSpPr>
@@ -6903,6 +6989,1012 @@
       </p:sp>
       <p:sp>
         <p:nvSpPr>
+          <p:cNvPr id="42" name="Text 39"/>
+          <p:cNvSpPr txBox="1"/>
+          <p:nvPr/>
+        </p:nvSpPr>
+        <p:spPr>
+          <a:xfrm>
+            <a:off x="1409876" y="6077461"/>
+            <a:ext cx="6421971" cy="182206"/>
+          </a:xfrm>
+          <a:prstGeom prst="rect">
+            <a:avLst/>
+          </a:prstGeom>
+          <a:noFill/>
+          <a:ln/>
+        </p:spPr>
+        <p:txBody>
+          <a:bodyPr wrap="square" lIns="0" tIns="0" rIns="0" bIns="0" rtlCol="0" anchor="t"/>
+          <a:lstStyle/>
+          <a:p>
+            <a:pPr algn="l" indent="0" marL="0">
+              <a:lnSpc>
+                <a:spcPct val="107000"/>
+              </a:lnSpc>
+              <a:buNone/>
+            </a:pPr>
+            <a:r>
+              <a:rPr lang="en-US" sz="1100" dirty="0">
+                <a:solidFill>
+                  <a:srgbClr val="0B1220"/>
+                </a:solidFill>
+                <a:latin typeface="Inter" pitchFamily="34" charset="0"/>
+                <a:ea typeface="Inter" pitchFamily="34" charset="-122"/>
+                <a:cs typeface="Inter" pitchFamily="34" charset="-120"/>
+              </a:rPr>
+              <a:t>Es riesgo legal y de marca, no de una campaña: ninguna exclusión es común a toda la cuenta.</a:t>
+            </a:r>
+            <a:endParaRPr lang="en-US" sz="1100" dirty="0"/>
+          </a:p>
+        </p:txBody>
+      </p:sp>
+      <p:sp>
+        <p:nvSpPr>
+          <p:cNvPr id="43" name="Text 40"/>
+          <p:cNvSpPr txBox="1"/>
+          <p:nvPr/>
+        </p:nvSpPr>
+        <p:spPr>
+          <a:xfrm>
+            <a:off x="511956" y="6454684"/>
+            <a:ext cx="6847765" cy="135035"/>
+          </a:xfrm>
+          <a:prstGeom prst="rect">
+            <a:avLst/>
+          </a:prstGeom>
+          <a:noFill/>
+          <a:ln/>
+        </p:spPr>
+        <p:txBody>
+          <a:bodyPr wrap="square" lIns="0" tIns="0" rIns="0" bIns="0" rtlCol="0" anchor="t"/>
+          <a:lstStyle/>
+          <a:p>
+            <a:pPr algn="l" indent="0" marL="0">
+              <a:lnSpc>
+                <a:spcPct val="99000"/>
+              </a:lnSpc>
+              <a:buNone/>
+            </a:pPr>
+            <a:r>
+              <a:rPr lang="en-US" sz="840" dirty="0">
+                <a:solidFill>
+                  <a:srgbClr val="6B7484"/>
+                </a:solidFill>
+                <a:latin typeface="Inter" pitchFamily="34" charset="0"/>
+                <a:ea typeface="Inter" pitchFamily="34" charset="-122"/>
+                <a:cs typeface="Inter" pitchFamily="34" charset="-120"/>
+              </a:rPr>
+              <a:t>Fuente: Braze, envíos por comunicación (E1), banderas de contacto (E7a, E17) y envíos tras la baja (E5b), enero a septiembre 2026.</a:t>
+            </a:r>
+            <a:endParaRPr lang="en-US" sz="840" dirty="0"/>
+          </a:p>
+        </p:txBody>
+      </p:sp>
+      <p:sp>
+        <p:nvSpPr>
+          <p:cNvPr id="44" name="Text 41"/>
+          <p:cNvSpPr txBox="1"/>
+          <p:nvPr/>
+        </p:nvSpPr>
+        <p:spPr>
+          <a:xfrm>
+            <a:off x="11569873" y="6454684"/>
+            <a:ext cx="131450" cy="135035"/>
+          </a:xfrm>
+          <a:prstGeom prst="rect">
+            <a:avLst/>
+          </a:prstGeom>
+          <a:noFill/>
+          <a:ln/>
+        </p:spPr>
+        <p:txBody>
+          <a:bodyPr wrap="square" lIns="0" tIns="0" rIns="0" bIns="0" rtlCol="0" anchor="t"/>
+          <a:lstStyle/>
+          <a:p>
+            <a:pPr algn="l" indent="0" marL="0">
+              <a:lnSpc>
+                <a:spcPct val="99000"/>
+              </a:lnSpc>
+              <a:buNone/>
+            </a:pPr>
+            <a:r>
+              <a:rPr lang="en-US" sz="840" dirty="0">
+                <a:solidFill>
+                  <a:srgbClr val="6B7484"/>
+                </a:solidFill>
+                <a:latin typeface="Inter" pitchFamily="34" charset="0"/>
+                <a:ea typeface="Inter" pitchFamily="34" charset="-122"/>
+                <a:cs typeface="Inter" pitchFamily="34" charset="-120"/>
+              </a:rPr>
+              <a:t>13</a:t>
+            </a:r>
+            <a:endParaRPr lang="en-US" sz="840" dirty="0"/>
+          </a:p>
+        </p:txBody>
+      </p:sp>
+    </p:spTree>
+  </p:cSld>
+  <p:clrMapOvr>
+    <a:masterClrMapping/>
+  </p:clrMapOvr>
+</p:sld>
+</file>
+
+<file path=ppt/slides/slide14.xml><?xml version="1.0" encoding="utf-8"?>
+<p:sld xmlns:a="http://schemas.openxmlformats.org/drawingml/2006/main" xmlns:r="http://schemas.openxmlformats.org/officeDocument/2006/relationships" xmlns:p="http://schemas.openxmlformats.org/presentationml/2006/main">
+  <p:cSld name="Slide 14">
+    <p:bg>
+      <p:bgPr>
+        <a:solidFill>
+          <a:srgbClr val="FFFFFF"/>
+        </a:solidFill>
+      </p:bgPr>
+    </p:bg>
+    <p:spTree>
+      <p:nvGrpSpPr>
+        <p:cNvPr id="1" name=""/>
+        <p:cNvGrpSpPr/>
+        <p:nvPr/>
+      </p:nvGrpSpPr>
+      <p:grpSpPr>
+        <a:xfrm>
+          <a:off x="0" y="0"/>
+          <a:ext cx="0" cy="0"/>
+          <a:chOff x="0" y="0"/>
+          <a:chExt cx="0" cy="0"/>
+        </a:xfrm>
+      </p:grpSpPr>
+      <p:sp>
+        <p:nvSpPr>
+          <p:cNvPr id="2" name="Text 0"/>
+          <p:cNvSpPr txBox="1"/>
+          <p:nvPr/>
+        </p:nvSpPr>
+        <p:spPr>
+          <a:xfrm>
+            <a:off x="511956" y="390033"/>
+            <a:ext cx="11521105" cy="661609"/>
+          </a:xfrm>
+          <a:prstGeom prst="rect">
+            <a:avLst/>
+          </a:prstGeom>
+          <a:noFill/>
+          <a:ln/>
+        </p:spPr>
+        <p:txBody>
+          <a:bodyPr wrap="square" lIns="0" tIns="0" rIns="0" bIns="0" rtlCol="0" anchor="t"/>
+          <a:lstStyle/>
+          <a:p>
+            <a:pPr algn="l" indent="0" marL="0">
+              <a:lnSpc>
+                <a:spcPct val="98000"/>
+              </a:lnSpc>
+              <a:buNone/>
+            </a:pPr>
+            <a:r>
+              <a:rPr lang="en-US" sz="2210" b="1" spc="-30" kern="0" dirty="0">
+                <a:solidFill>
+                  <a:srgbClr val="0B1220"/>
+                </a:solidFill>
+                <a:latin typeface="Inter" pitchFamily="34" charset="0"/>
+                <a:ea typeface="Inter" pitchFamily="34" charset="-122"/>
+                <a:cs typeface="Inter" pitchFamily="34" charset="-120"/>
+              </a:rPr>
+              <a:t>Qué lo explica: escribimos por lo que queremos vender, cada equipo por su cuenta y sin medir</a:t>
+            </a:r>
+            <a:endParaRPr lang="en-US" sz="2210" dirty="0"/>
+          </a:p>
+        </p:txBody>
+      </p:sp>
+      <p:sp>
+        <p:nvSpPr>
+          <p:cNvPr id="3" name="Shape 1"/>
+          <p:cNvSpPr/>
+          <p:nvPr/>
+        </p:nvSpPr>
+        <p:spPr>
+          <a:xfrm>
+            <a:off x="511956" y="1161358"/>
+            <a:ext cx="3527477" cy="1398573"/>
+          </a:xfrm>
+          <a:prstGeom prst="rect">
+            <a:avLst/>
+          </a:prstGeom>
+          <a:solidFill>
+            <a:srgbClr val="F4F6F9"/>
+          </a:solidFill>
+          <a:ln/>
+        </p:spPr>
+      </p:sp>
+      <p:sp>
+        <p:nvSpPr>
+          <p:cNvPr id="4" name="Text 2"/>
+          <p:cNvSpPr txBox="1"/>
+          <p:nvPr/>
+        </p:nvSpPr>
+        <p:spPr>
+          <a:xfrm>
+            <a:off x="694765" y="1356374"/>
+            <a:ext cx="3275003" cy="512107"/>
+          </a:xfrm>
+          <a:prstGeom prst="rect">
+            <a:avLst/>
+          </a:prstGeom>
+          <a:noFill/>
+          <a:ln/>
+        </p:spPr>
+        <p:txBody>
+          <a:bodyPr wrap="square" lIns="0" tIns="0" rIns="0" bIns="0" rtlCol="0" anchor="t"/>
+          <a:lstStyle/>
+          <a:p>
+            <a:pPr algn="l" indent="0" marL="0">
+              <a:lnSpc>
+                <a:spcPct val="83000"/>
+              </a:lnSpc>
+              <a:buNone/>
+            </a:pPr>
+            <a:r>
+              <a:rPr lang="en-US" sz="4030" b="1" spc="-80" kern="0" dirty="0">
+                <a:solidFill>
+                  <a:srgbClr val="0B1220"/>
+                </a:solidFill>
+                <a:latin typeface="Inter" pitchFamily="34" charset="0"/>
+                <a:ea typeface="Inter" pitchFamily="34" charset="-122"/>
+                <a:cs typeface="Inter" pitchFamily="34" charset="-120"/>
+              </a:rPr>
+              <a:t>73 %</a:t>
+            </a:r>
+            <a:endParaRPr lang="en-US" sz="4030" dirty="0"/>
+          </a:p>
+        </p:txBody>
+      </p:sp>
+      <p:sp>
+        <p:nvSpPr>
+          <p:cNvPr id="5" name="Text 3"/>
+          <p:cNvSpPr txBox="1"/>
+          <p:nvPr/>
+        </p:nvSpPr>
+        <p:spPr>
+          <a:xfrm>
+            <a:off x="694765" y="1953782"/>
+            <a:ext cx="3275003" cy="411132"/>
+          </a:xfrm>
+          <a:prstGeom prst="rect">
+            <a:avLst/>
+          </a:prstGeom>
+          <a:noFill/>
+          <a:ln/>
+        </p:spPr>
+        <p:txBody>
+          <a:bodyPr wrap="square" lIns="0" tIns="0" rIns="0" bIns="0" rtlCol="0" anchor="t"/>
+          <a:lstStyle/>
+          <a:p>
+            <a:pPr algn="l" indent="0" marL="0">
+              <a:lnSpc>
+                <a:spcPct val="112000"/>
+              </a:lnSpc>
+              <a:buNone/>
+            </a:pPr>
+            <a:r>
+              <a:rPr lang="en-US" sz="1200" dirty="0">
+                <a:solidFill>
+                  <a:srgbClr val="0B1220"/>
+                </a:solidFill>
+                <a:latin typeface="Inter" pitchFamily="34" charset="0"/>
+                <a:ea typeface="Inter" pitchFamily="34" charset="-122"/>
+                <a:cs typeface="Inter" pitchFamily="34" charset="-120"/>
+              </a:rPr>
+              <a:t>de las personas no respondió a nada en nueve meses</a:t>
+            </a:r>
+            <a:endParaRPr lang="en-US" sz="1200" dirty="0"/>
+          </a:p>
+        </p:txBody>
+      </p:sp>
+      <p:sp>
+        <p:nvSpPr>
+          <p:cNvPr id="6" name="Shape 4"/>
+          <p:cNvSpPr/>
+          <p:nvPr/>
+        </p:nvSpPr>
+        <p:spPr>
+          <a:xfrm>
+            <a:off x="4331958" y="1161358"/>
+            <a:ext cx="3527628" cy="1398573"/>
+          </a:xfrm>
+          <a:prstGeom prst="rect">
+            <a:avLst/>
+          </a:prstGeom>
+          <a:solidFill>
+            <a:srgbClr val="F4F6F9"/>
+          </a:solidFill>
+          <a:ln/>
+        </p:spPr>
+      </p:sp>
+      <p:sp>
+        <p:nvSpPr>
+          <p:cNvPr id="7" name="Text 5"/>
+          <p:cNvSpPr txBox="1"/>
+          <p:nvPr/>
+        </p:nvSpPr>
+        <p:spPr>
+          <a:xfrm>
+            <a:off x="4514767" y="1356374"/>
+            <a:ext cx="3275158" cy="512107"/>
+          </a:xfrm>
+          <a:prstGeom prst="rect">
+            <a:avLst/>
+          </a:prstGeom>
+          <a:noFill/>
+          <a:ln/>
+        </p:spPr>
+        <p:txBody>
+          <a:bodyPr wrap="square" lIns="0" tIns="0" rIns="0" bIns="0" rtlCol="0" anchor="t"/>
+          <a:lstStyle/>
+          <a:p>
+            <a:pPr algn="l" indent="0" marL="0">
+              <a:lnSpc>
+                <a:spcPct val="83000"/>
+              </a:lnSpc>
+              <a:buNone/>
+            </a:pPr>
+            <a:r>
+              <a:rPr lang="en-US" sz="4030" b="1" spc="-80" kern="0" dirty="0">
+                <a:solidFill>
+                  <a:srgbClr val="0B1220"/>
+                </a:solidFill>
+                <a:latin typeface="Inter" pitchFamily="34" charset="0"/>
+                <a:ea typeface="Inter" pitchFamily="34" charset="-122"/>
+                <a:cs typeface="Inter" pitchFamily="34" charset="-120"/>
+              </a:rPr>
+              <a:t>2.3 M</a:t>
+            </a:r>
+            <a:endParaRPr lang="en-US" sz="4030" dirty="0"/>
+          </a:p>
+        </p:txBody>
+      </p:sp>
+      <p:sp>
+        <p:nvSpPr>
+          <p:cNvPr id="8" name="Text 6"/>
+          <p:cNvSpPr txBox="1"/>
+          <p:nvPr/>
+        </p:nvSpPr>
+        <p:spPr>
+          <a:xfrm>
+            <a:off x="4514767" y="1953782"/>
+            <a:ext cx="3275158" cy="411132"/>
+          </a:xfrm>
+          <a:prstGeom prst="rect">
+            <a:avLst/>
+          </a:prstGeom>
+          <a:noFill/>
+          <a:ln/>
+        </p:spPr>
+        <p:txBody>
+          <a:bodyPr wrap="square" lIns="0" tIns="0" rIns="0" bIns="0" rtlCol="0" anchor="t"/>
+          <a:lstStyle/>
+          <a:p>
+            <a:pPr algn="l" indent="0" marL="0">
+              <a:lnSpc>
+                <a:spcPct val="112000"/>
+              </a:lnSpc>
+              <a:buNone/>
+            </a:pPr>
+            <a:r>
+              <a:rPr lang="en-US" sz="1200" dirty="0">
+                <a:solidFill>
+                  <a:srgbClr val="0B1220"/>
+                </a:solidFill>
+                <a:latin typeface="Inter" pitchFamily="34" charset="0"/>
+                <a:ea typeface="Inter" pitchFamily="34" charset="-122"/>
+                <a:cs typeface="Inter" pitchFamily="34" charset="-120"/>
+              </a:rPr>
+              <a:t>personas al mes con tres o más campañas el mismo día</a:t>
+            </a:r>
+            <a:endParaRPr lang="en-US" sz="1200" dirty="0"/>
+          </a:p>
+        </p:txBody>
+      </p:sp>
+      <p:sp>
+        <p:nvSpPr>
+          <p:cNvPr id="9" name="Shape 7"/>
+          <p:cNvSpPr/>
+          <p:nvPr/>
+        </p:nvSpPr>
+        <p:spPr>
+          <a:xfrm>
+            <a:off x="8152111" y="1161358"/>
+            <a:ext cx="3527477" cy="1398573"/>
+          </a:xfrm>
+          <a:prstGeom prst="rect">
+            <a:avLst/>
+          </a:prstGeom>
+          <a:solidFill>
+            <a:srgbClr val="E8EEFC"/>
+          </a:solidFill>
+          <a:ln/>
+        </p:spPr>
+      </p:sp>
+      <p:sp>
+        <p:nvSpPr>
+          <p:cNvPr id="10" name="Text 8"/>
+          <p:cNvSpPr txBox="1"/>
+          <p:nvPr/>
+        </p:nvSpPr>
+        <p:spPr>
+          <a:xfrm>
+            <a:off x="8334920" y="1356374"/>
+            <a:ext cx="3275003" cy="512107"/>
+          </a:xfrm>
+          <a:prstGeom prst="rect">
+            <a:avLst/>
+          </a:prstGeom>
+          <a:noFill/>
+          <a:ln/>
+        </p:spPr>
+        <p:txBody>
+          <a:bodyPr wrap="square" lIns="0" tIns="0" rIns="0" bIns="0" rtlCol="0" anchor="t"/>
+          <a:lstStyle/>
+          <a:p>
+            <a:pPr algn="l" indent="0" marL="0">
+              <a:lnSpc>
+                <a:spcPct val="83000"/>
+              </a:lnSpc>
+              <a:buNone/>
+            </a:pPr>
+            <a:r>
+              <a:rPr lang="en-US" sz="4030" b="1" spc="-80" kern="0" dirty="0">
+                <a:solidFill>
+                  <a:srgbClr val="1F4FD8"/>
+                </a:solidFill>
+                <a:latin typeface="Inter" pitchFamily="34" charset="0"/>
+                <a:ea typeface="Inter" pitchFamily="34" charset="-122"/>
+                <a:cs typeface="Inter" pitchFamily="34" charset="-120"/>
+              </a:rPr>
+              <a:t>1 de 3,228</a:t>
+            </a:r>
+            <a:endParaRPr lang="en-US" sz="4030" dirty="0"/>
+          </a:p>
+        </p:txBody>
+      </p:sp>
+      <p:sp>
+        <p:nvSpPr>
+          <p:cNvPr id="11" name="Text 9"/>
+          <p:cNvSpPr txBox="1"/>
+          <p:nvPr/>
+        </p:nvSpPr>
+        <p:spPr>
+          <a:xfrm>
+            <a:off x="8334920" y="1953782"/>
+            <a:ext cx="3275003" cy="205566"/>
+          </a:xfrm>
+          <a:prstGeom prst="rect">
+            <a:avLst/>
+          </a:prstGeom>
+          <a:noFill/>
+          <a:ln/>
+        </p:spPr>
+        <p:txBody>
+          <a:bodyPr wrap="square" lIns="0" tIns="0" rIns="0" bIns="0" rtlCol="0" anchor="t"/>
+          <a:lstStyle/>
+          <a:p>
+            <a:pPr algn="l" indent="0" marL="0">
+              <a:lnSpc>
+                <a:spcPct val="112000"/>
+              </a:lnSpc>
+              <a:buNone/>
+            </a:pPr>
+            <a:r>
+              <a:rPr lang="en-US" sz="1200" dirty="0">
+                <a:solidFill>
+                  <a:srgbClr val="0B1220"/>
+                </a:solidFill>
+                <a:latin typeface="Inter" pitchFamily="34" charset="0"/>
+                <a:ea typeface="Inter" pitchFamily="34" charset="-122"/>
+                <a:cs typeface="Inter" pitchFamily="34" charset="-120"/>
+              </a:rPr>
+              <a:t>Canvas tiene un grupo de control real</a:t>
+            </a:r>
+            <a:endParaRPr lang="en-US" sz="1200" dirty="0"/>
+          </a:p>
+        </p:txBody>
+      </p:sp>
+      <p:sp>
+        <p:nvSpPr>
+          <p:cNvPr id="12" name="Shape 10"/>
+          <p:cNvSpPr/>
+          <p:nvPr/>
+        </p:nvSpPr>
+        <p:spPr>
+          <a:xfrm>
+            <a:off x="511956" y="2784184"/>
+            <a:ext cx="3527477" cy="0"/>
+          </a:xfrm>
+          <a:prstGeom prst="line">
+            <a:avLst/>
+          </a:prstGeom>
+          <a:noFill/>
+          <a:ln w="9645">
+            <a:solidFill>
+              <a:srgbClr val="DDE2EA"/>
+            </a:solidFill>
+            <a:prstDash val="solid"/>
+          </a:ln>
+        </p:spPr>
+      </p:sp>
+      <p:sp>
+        <p:nvSpPr>
+          <p:cNvPr id="13" name="Shape 11"/>
+          <p:cNvSpPr/>
+          <p:nvPr/>
+        </p:nvSpPr>
+        <p:spPr>
+          <a:xfrm>
+            <a:off x="511956" y="2922987"/>
+            <a:ext cx="231639" cy="231639"/>
+          </a:xfrm>
+          <a:prstGeom prst="ellipse">
+            <a:avLst/>
+          </a:prstGeom>
+          <a:solidFill>
+            <a:srgbClr val="E8EEFC"/>
+          </a:solidFill>
+          <a:ln/>
+        </p:spPr>
+      </p:sp>
+      <p:sp>
+        <p:nvSpPr>
+          <p:cNvPr id="14" name="Text 12"/>
+          <p:cNvSpPr txBox="1"/>
+          <p:nvPr/>
+        </p:nvSpPr>
+        <p:spPr>
+          <a:xfrm>
+            <a:off x="511956" y="2922987"/>
+            <a:ext cx="256876" cy="231639"/>
+          </a:xfrm>
+          <a:prstGeom prst="rect">
+            <a:avLst/>
+          </a:prstGeom>
+          <a:noFill/>
+          <a:ln/>
+        </p:spPr>
+        <p:txBody>
+          <a:bodyPr wrap="square" lIns="0" tIns="0" rIns="0" bIns="0" rtlCol="0" anchor="ctr"/>
+          <a:lstStyle/>
+          <a:p>
+            <a:pPr algn="ctr" indent="0" marL="0">
+              <a:lnSpc>
+                <a:spcPct val="112000"/>
+              </a:lnSpc>
+              <a:buNone/>
+            </a:pPr>
+            <a:r>
+              <a:rPr lang="en-US" sz="960" b="1" dirty="0">
+                <a:solidFill>
+                  <a:srgbClr val="1F4FD8"/>
+                </a:solidFill>
+                <a:latin typeface="Inter" pitchFamily="34" charset="0"/>
+                <a:ea typeface="Inter" pitchFamily="34" charset="-122"/>
+                <a:cs typeface="Inter" pitchFamily="34" charset="-120"/>
+              </a:rPr>
+              <a:t>1</a:t>
+            </a:r>
+            <a:endParaRPr lang="en-US" sz="960" dirty="0"/>
+          </a:p>
+        </p:txBody>
+      </p:sp>
+      <p:sp>
+        <p:nvSpPr>
+          <p:cNvPr id="15" name="Text 13"/>
+          <p:cNvSpPr txBox="1"/>
+          <p:nvPr/>
+        </p:nvSpPr>
+        <p:spPr>
+          <a:xfrm>
+            <a:off x="853310" y="2922987"/>
+            <a:ext cx="3299995" cy="1109213"/>
+          </a:xfrm>
+          <a:prstGeom prst="rect">
+            <a:avLst/>
+          </a:prstGeom>
+          <a:noFill/>
+          <a:ln/>
+        </p:spPr>
+        <p:txBody>
+          <a:bodyPr wrap="square" lIns="0" tIns="0" rIns="0" bIns="0" rtlCol="0" anchor="t"/>
+          <a:lstStyle/>
+          <a:p>
+            <a:pPr algn="l" indent="0" marL="0">
+              <a:lnSpc>
+                <a:spcPct val="116000"/>
+              </a:lnSpc>
+              <a:buNone/>
+            </a:pPr>
+            <a:r>
+              <a:rPr lang="en-US" sz="1250" b="1" dirty="0">
+                <a:solidFill>
+                  <a:srgbClr val="0B1220"/>
+                </a:solidFill>
+                <a:latin typeface="Inter" pitchFamily="34" charset="0"/>
+                <a:ea typeface="Inter" pitchFamily="34" charset="-122"/>
+                <a:cs typeface="Inter" pitchFamily="34" charset="-120"/>
+              </a:rPr>
+              <a:t>Escribimos por lo que queremos vender.</a:t>
+            </a:r>
+            <a:pPr algn="l" indent="0" marL="0">
+              <a:lnSpc>
+                <a:spcPct val="116000"/>
+              </a:lnSpc>
+              <a:buNone/>
+            </a:pPr>
+            <a:r>
+              <a:rPr lang="en-US" sz="1250" dirty="0">
+                <a:solidFill>
+                  <a:srgbClr val="0B1220"/>
+                </a:solidFill>
+                <a:latin typeface="Inter" pitchFamily="34" charset="0"/>
+                <a:ea typeface="Inter" pitchFamily="34" charset="-122"/>
+                <a:cs typeface="Inter" pitchFamily="34" charset="-120"/>
+              </a:rPr>
+              <a:t> Las promociones salen a listas por etapa, no por lo que la persona hizo, y le seguimos escribiendo a quien no responde.</a:t>
+            </a:r>
+            <a:endParaRPr lang="en-US" sz="1250" dirty="0"/>
+          </a:p>
+        </p:txBody>
+      </p:sp>
+      <p:sp>
+        <p:nvSpPr>
+          <p:cNvPr id="16" name="Shape 14"/>
+          <p:cNvSpPr/>
+          <p:nvPr/>
+        </p:nvSpPr>
+        <p:spPr>
+          <a:xfrm>
+            <a:off x="4331958" y="2784184"/>
+            <a:ext cx="3527628" cy="0"/>
+          </a:xfrm>
+          <a:prstGeom prst="line">
+            <a:avLst/>
+          </a:prstGeom>
+          <a:noFill/>
+          <a:ln w="9645">
+            <a:solidFill>
+              <a:srgbClr val="DDE2EA"/>
+            </a:solidFill>
+            <a:prstDash val="solid"/>
+          </a:ln>
+        </p:spPr>
+      </p:sp>
+      <p:sp>
+        <p:nvSpPr>
+          <p:cNvPr id="17" name="Shape 15"/>
+          <p:cNvSpPr/>
+          <p:nvPr/>
+        </p:nvSpPr>
+        <p:spPr>
+          <a:xfrm>
+            <a:off x="4331958" y="2922987"/>
+            <a:ext cx="231639" cy="231639"/>
+          </a:xfrm>
+          <a:prstGeom prst="ellipse">
+            <a:avLst/>
+          </a:prstGeom>
+          <a:solidFill>
+            <a:srgbClr val="E8EEFC"/>
+          </a:solidFill>
+          <a:ln/>
+        </p:spPr>
+      </p:sp>
+      <p:sp>
+        <p:nvSpPr>
+          <p:cNvPr id="18" name="Text 16"/>
+          <p:cNvSpPr txBox="1"/>
+          <p:nvPr/>
+        </p:nvSpPr>
+        <p:spPr>
+          <a:xfrm>
+            <a:off x="4331958" y="2922987"/>
+            <a:ext cx="256876" cy="231639"/>
+          </a:xfrm>
+          <a:prstGeom prst="rect">
+            <a:avLst/>
+          </a:prstGeom>
+          <a:noFill/>
+          <a:ln/>
+        </p:spPr>
+        <p:txBody>
+          <a:bodyPr wrap="square" lIns="0" tIns="0" rIns="0" bIns="0" rtlCol="0" anchor="ctr"/>
+          <a:lstStyle/>
+          <a:p>
+            <a:pPr algn="ctr" indent="0" marL="0">
+              <a:lnSpc>
+                <a:spcPct val="112000"/>
+              </a:lnSpc>
+              <a:buNone/>
+            </a:pPr>
+            <a:r>
+              <a:rPr lang="en-US" sz="960" b="1" dirty="0">
+                <a:solidFill>
+                  <a:srgbClr val="1F4FD8"/>
+                </a:solidFill>
+                <a:latin typeface="Inter" pitchFamily="34" charset="0"/>
+                <a:ea typeface="Inter" pitchFamily="34" charset="-122"/>
+                <a:cs typeface="Inter" pitchFamily="34" charset="-120"/>
+              </a:rPr>
+              <a:t>2</a:t>
+            </a:r>
+            <a:endParaRPr lang="en-US" sz="960" dirty="0"/>
+          </a:p>
+        </p:txBody>
+      </p:sp>
+      <p:sp>
+        <p:nvSpPr>
+          <p:cNvPr id="19" name="Text 17"/>
+          <p:cNvSpPr txBox="1"/>
+          <p:nvPr/>
+        </p:nvSpPr>
+        <p:spPr>
+          <a:xfrm>
+            <a:off x="4673312" y="2922987"/>
+            <a:ext cx="3300150" cy="1109213"/>
+          </a:xfrm>
+          <a:prstGeom prst="rect">
+            <a:avLst/>
+          </a:prstGeom>
+          <a:noFill/>
+          <a:ln/>
+        </p:spPr>
+        <p:txBody>
+          <a:bodyPr wrap="square" lIns="0" tIns="0" rIns="0" bIns="0" rtlCol="0" anchor="t"/>
+          <a:lstStyle/>
+          <a:p>
+            <a:pPr algn="l" indent="0" marL="0">
+              <a:lnSpc>
+                <a:spcPct val="116000"/>
+              </a:lnSpc>
+              <a:buNone/>
+            </a:pPr>
+            <a:r>
+              <a:rPr lang="en-US" sz="1250" b="1" dirty="0">
+                <a:solidFill>
+                  <a:srgbClr val="0B1220"/>
+                </a:solidFill>
+                <a:latin typeface="Inter" pitchFamily="34" charset="0"/>
+                <a:ea typeface="Inter" pitchFamily="34" charset="-122"/>
+                <a:cs typeface="Inter" pitchFamily="34" charset="-120"/>
+              </a:rPr>
+              <a:t>Cada equipo decide solo.</a:t>
+            </a:r>
+            <a:pPr algn="l" indent="0" marL="0">
+              <a:lnSpc>
+                <a:spcPct val="116000"/>
+              </a:lnSpc>
+              <a:buNone/>
+            </a:pPr>
+            <a:r>
+              <a:rPr lang="en-US" sz="1250" dirty="0">
+                <a:solidFill>
+                  <a:srgbClr val="0B1220"/>
+                </a:solidFill>
+                <a:latin typeface="Inter" pitchFamily="34" charset="0"/>
+                <a:ea typeface="Inter" pitchFamily="34" charset="-122"/>
+                <a:cs typeface="Inter" pitchFamily="34" charset="-120"/>
+              </a:rPr>
+              <a:t> No hay límite de mensajes por persona ni calendario común: Marketing, Product Growth y Sales le escriben a la misma gente el mismo día.</a:t>
+            </a:r>
+            <a:endParaRPr lang="en-US" sz="1250" dirty="0"/>
+          </a:p>
+        </p:txBody>
+      </p:sp>
+      <p:sp>
+        <p:nvSpPr>
+          <p:cNvPr id="20" name="Shape 18"/>
+          <p:cNvSpPr/>
+          <p:nvPr/>
+        </p:nvSpPr>
+        <p:spPr>
+          <a:xfrm>
+            <a:off x="8152111" y="2784184"/>
+            <a:ext cx="3527477" cy="0"/>
+          </a:xfrm>
+          <a:prstGeom prst="line">
+            <a:avLst/>
+          </a:prstGeom>
+          <a:noFill/>
+          <a:ln w="9645">
+            <a:solidFill>
+              <a:srgbClr val="DDE2EA"/>
+            </a:solidFill>
+            <a:prstDash val="solid"/>
+          </a:ln>
+        </p:spPr>
+      </p:sp>
+      <p:sp>
+        <p:nvSpPr>
+          <p:cNvPr id="21" name="Shape 19"/>
+          <p:cNvSpPr/>
+          <p:nvPr/>
+        </p:nvSpPr>
+        <p:spPr>
+          <a:xfrm>
+            <a:off x="8152111" y="2922987"/>
+            <a:ext cx="231639" cy="231639"/>
+          </a:xfrm>
+          <a:prstGeom prst="ellipse">
+            <a:avLst/>
+          </a:prstGeom>
+          <a:solidFill>
+            <a:srgbClr val="E8EEFC"/>
+          </a:solidFill>
+          <a:ln/>
+        </p:spPr>
+      </p:sp>
+      <p:sp>
+        <p:nvSpPr>
+          <p:cNvPr id="22" name="Text 20"/>
+          <p:cNvSpPr txBox="1"/>
+          <p:nvPr/>
+        </p:nvSpPr>
+        <p:spPr>
+          <a:xfrm>
+            <a:off x="8152111" y="2922987"/>
+            <a:ext cx="256876" cy="231639"/>
+          </a:xfrm>
+          <a:prstGeom prst="rect">
+            <a:avLst/>
+          </a:prstGeom>
+          <a:noFill/>
+          <a:ln/>
+        </p:spPr>
+        <p:txBody>
+          <a:bodyPr wrap="square" lIns="0" tIns="0" rIns="0" bIns="0" rtlCol="0" anchor="ctr"/>
+          <a:lstStyle/>
+          <a:p>
+            <a:pPr algn="ctr" indent="0" marL="0">
+              <a:lnSpc>
+                <a:spcPct val="112000"/>
+              </a:lnSpc>
+              <a:buNone/>
+            </a:pPr>
+            <a:r>
+              <a:rPr lang="en-US" sz="960" b="1" dirty="0">
+                <a:solidFill>
+                  <a:srgbClr val="1F4FD8"/>
+                </a:solidFill>
+                <a:latin typeface="Inter" pitchFamily="34" charset="0"/>
+                <a:ea typeface="Inter" pitchFamily="34" charset="-122"/>
+                <a:cs typeface="Inter" pitchFamily="34" charset="-120"/>
+              </a:rPr>
+              <a:t>3</a:t>
+            </a:r>
+            <a:endParaRPr lang="en-US" sz="960" dirty="0"/>
+          </a:p>
+        </p:txBody>
+      </p:sp>
+      <p:sp>
+        <p:nvSpPr>
+          <p:cNvPr id="23" name="Text 21"/>
+          <p:cNvSpPr txBox="1"/>
+          <p:nvPr/>
+        </p:nvSpPr>
+        <p:spPr>
+          <a:xfrm>
+            <a:off x="8493465" y="2922987"/>
+            <a:ext cx="3299995" cy="1109213"/>
+          </a:xfrm>
+          <a:prstGeom prst="rect">
+            <a:avLst/>
+          </a:prstGeom>
+          <a:noFill/>
+          <a:ln/>
+        </p:spPr>
+        <p:txBody>
+          <a:bodyPr wrap="square" lIns="0" tIns="0" rIns="0" bIns="0" rtlCol="0" anchor="t"/>
+          <a:lstStyle/>
+          <a:p>
+            <a:pPr algn="l" indent="0" marL="0">
+              <a:lnSpc>
+                <a:spcPct val="116000"/>
+              </a:lnSpc>
+              <a:buNone/>
+            </a:pPr>
+            <a:r>
+              <a:rPr lang="en-US" sz="1250" b="1" dirty="0">
+                <a:solidFill>
+                  <a:srgbClr val="0B1220"/>
+                </a:solidFill>
+                <a:latin typeface="Inter" pitchFamily="34" charset="0"/>
+                <a:ea typeface="Inter" pitchFamily="34" charset="-122"/>
+                <a:cs typeface="Inter" pitchFamily="34" charset="-120"/>
+              </a:rPr>
+              <a:t>Nadie compara volumen contra respuesta.</a:t>
+            </a:r>
+            <a:pPr algn="l" indent="0" marL="0">
+              <a:lnSpc>
+                <a:spcPct val="116000"/>
+              </a:lnSpc>
+              <a:buNone/>
+            </a:pPr>
+            <a:r>
+              <a:rPr lang="en-US" sz="1250" dirty="0">
+                <a:solidFill>
+                  <a:srgbClr val="0B1220"/>
+                </a:solidFill>
+                <a:latin typeface="Inter" pitchFamily="34" charset="0"/>
+                <a:ea typeface="Inter" pitchFamily="34" charset="-122"/>
+                <a:cs typeface="Inter" pitchFamily="34" charset="-120"/>
+              </a:rPr>
+              <a:t> Copiar una campaña cada mes es más fácil que medirla: 4 de cada 10 mensajes salen de campañas debajo del mínimo.</a:t>
+            </a:r>
+            <a:endParaRPr lang="en-US" sz="1250" dirty="0"/>
+          </a:p>
+        </p:txBody>
+      </p:sp>
+      <p:sp>
+        <p:nvSpPr>
+          <p:cNvPr id="24" name="Shape 22"/>
+          <p:cNvSpPr/>
+          <p:nvPr/>
+        </p:nvSpPr>
+        <p:spPr>
+          <a:xfrm>
+            <a:off x="511956" y="5992160"/>
+            <a:ext cx="11167783" cy="352808"/>
+          </a:xfrm>
+          <a:prstGeom prst="rect">
+            <a:avLst/>
+          </a:prstGeom>
+          <a:solidFill>
+            <a:srgbClr val="E8EEFC"/>
+          </a:solidFill>
+          <a:ln/>
+        </p:spPr>
+      </p:sp>
+      <p:sp>
+        <p:nvSpPr>
+          <p:cNvPr id="25" name="Text 23"/>
+          <p:cNvSpPr txBox="1"/>
+          <p:nvPr/>
+        </p:nvSpPr>
+        <p:spPr>
+          <a:xfrm>
+            <a:off x="670350" y="6116043"/>
+            <a:ext cx="616853" cy="134733"/>
+          </a:xfrm>
+          <a:prstGeom prst="rect">
+            <a:avLst/>
+          </a:prstGeom>
+          <a:noFill/>
+          <a:ln/>
+        </p:spPr>
+        <p:txBody>
+          <a:bodyPr wrap="square" lIns="0" tIns="0" rIns="0" bIns="0" rtlCol="0" anchor="t"/>
+          <a:lstStyle/>
+          <a:p>
+            <a:pPr algn="l" indent="0" marL="0">
+              <a:lnSpc>
+                <a:spcPct val="107000"/>
+              </a:lnSpc>
+              <a:buNone/>
+            </a:pPr>
+            <a:r>
+              <a:rPr lang="en-US" sz="820" b="1" spc="100" kern="0" dirty="0">
+                <a:solidFill>
+                  <a:srgbClr val="1F4FD8"/>
+                </a:solidFill>
+                <a:latin typeface="Inter" pitchFamily="34" charset="0"/>
+                <a:ea typeface="Inter" pitchFamily="34" charset="-122"/>
+                <a:cs typeface="Inter" pitchFamily="34" charset="-120"/>
+              </a:rPr>
+              <a:t>SO WHAT</a:t>
+            </a:r>
+            <a:endParaRPr lang="en-US" sz="820" dirty="0"/>
+          </a:p>
+        </p:txBody>
+      </p:sp>
+      <p:sp>
+        <p:nvSpPr>
           <p:cNvPr id="26" name="Text 24"/>
           <p:cNvSpPr txBox="1"/>
           <p:nvPr/>
@@ -6993,8 +8085,8 @@
         </p:nvSpPr>
         <p:spPr>
           <a:xfrm>
-            <a:off x="11569873" y="6454684"/>
-            <a:ext cx="131450" cy="135035"/>
+            <a:off x="11566859" y="6454684"/>
+            <a:ext cx="134555" cy="135035"/>
           </a:xfrm>
           <a:prstGeom prst="rect">
             <a:avLst/>
@@ -7021,7 +8113,7 @@
                 <a:ea typeface="Inter" pitchFamily="34" charset="-122"/>
                 <a:cs typeface="Inter" pitchFamily="34" charset="-120"/>
               </a:rPr>
-              <a:t>13</a:t>
+              <a:t>14</a:t>
             </a:r>
             <a:endParaRPr lang="en-US" sz="840" dirty="0"/>
           </a:p>
@@ -7408,7 +8500,7 @@
         <p:spPr>
           <a:xfrm>
             <a:off x="511956" y="1912789"/>
-            <a:ext cx="3527477" cy="1398573"/>
+            <a:ext cx="3527477" cy="1043052"/>
           </a:xfrm>
           <a:prstGeom prst="rect">
             <a:avLst/>
@@ -7427,8 +8519,8 @@
         </p:nvSpPr>
         <p:spPr>
           <a:xfrm>
-            <a:off x="694765" y="2107806"/>
-            <a:ext cx="3275003" cy="512107"/>
+            <a:off x="670350" y="2034561"/>
+            <a:ext cx="3325297" cy="414448"/>
           </a:xfrm>
           <a:prstGeom prst="rect">
             <a:avLst/>
@@ -7447,7 +8539,7 @@
               <a:buNone/>
             </a:pPr>
             <a:r>
-              <a:rPr lang="en-US" sz="4030" b="1" spc="-80" kern="0" dirty="0">
+              <a:rPr lang="en-US" sz="3260" b="1" spc="-70" kern="0" dirty="0">
                 <a:solidFill>
                   <a:srgbClr val="0B1220"/>
                 </a:solidFill>
@@ -7457,7 +8549,7 @@
               </a:rPr>
               <a:t>3.0 M MXN</a:t>
             </a:r>
-            <a:endParaRPr lang="en-US" sz="4030" dirty="0"/>
+            <a:endParaRPr lang="en-US" sz="3260" dirty="0"/>
           </a:p>
         </p:txBody>
       </p:sp>
@@ -7469,27 +8561,27 @@
         </p:nvSpPr>
         <p:spPr>
           <a:xfrm>
-            <a:off x="694765" y="2705213"/>
-            <a:ext cx="3275003" cy="411132"/>
-          </a:xfrm>
-          <a:prstGeom prst="rect">
-            <a:avLst/>
-          </a:prstGeom>
-          <a:noFill/>
-          <a:ln/>
-        </p:spPr>
-        <p:txBody>
-          <a:bodyPr wrap="square" lIns="0" tIns="0" rIns="0" bIns="0" rtlCol="0" anchor="t"/>
-          <a:lstStyle/>
-          <a:p>
-            <a:pPr algn="l" indent="0" marL="0">
-              <a:lnSpc>
-                <a:spcPct val="112000"/>
-              </a:lnSpc>
-              <a:buNone/>
-            </a:pPr>
-            <a:r>
-              <a:rPr lang="en-US" sz="1200" dirty="0">
+            <a:off x="670350" y="2491660"/>
+            <a:ext cx="3325297" cy="171205"/>
+          </a:xfrm>
+          <a:prstGeom prst="rect">
+            <a:avLst/>
+          </a:prstGeom>
+          <a:noFill/>
+          <a:ln/>
+        </p:spPr>
+        <p:txBody>
+          <a:bodyPr wrap="square" lIns="0" tIns="0" rIns="0" bIns="0" rtlCol="0" anchor="t"/>
+          <a:lstStyle/>
+          <a:p>
+            <a:pPr algn="l" indent="0" marL="0">
+              <a:lnSpc>
+                <a:spcPct val="107000"/>
+              </a:lnSpc>
+              <a:buNone/>
+            </a:pPr>
+            <a:r>
+              <a:rPr lang="en-US" sz="1040" dirty="0">
                 <a:solidFill>
                   <a:srgbClr val="0B1220"/>
                 </a:solidFill>
@@ -7499,7 +8591,7 @@
               </a:rPr>
               <a:t>al mes en mensajes; 84 % se va en WhatsApp</a:t>
             </a:r>
-            <a:endParaRPr lang="en-US" sz="1200" dirty="0"/>
+            <a:endParaRPr lang="en-US" sz="1040" dirty="0"/>
           </a:p>
         </p:txBody>
       </p:sp>
@@ -7512,7 +8604,7 @@
         <p:spPr>
           <a:xfrm>
             <a:off x="4331958" y="1912789"/>
-            <a:ext cx="3527628" cy="1398573"/>
+            <a:ext cx="3527628" cy="1043052"/>
           </a:xfrm>
           <a:prstGeom prst="rect">
             <a:avLst/>
@@ -7531,8 +8623,8 @@
         </p:nvSpPr>
         <p:spPr>
           <a:xfrm>
-            <a:off x="4514767" y="2107806"/>
-            <a:ext cx="3275158" cy="512107"/>
+            <a:off x="4490353" y="2034561"/>
+            <a:ext cx="3325453" cy="414448"/>
           </a:xfrm>
           <a:prstGeom prst="rect">
             <a:avLst/>
@@ -7551,7 +8643,7 @@
               <a:buNone/>
             </a:pPr>
             <a:r>
-              <a:rPr lang="en-US" sz="4030" b="1" spc="-80" kern="0" dirty="0">
+              <a:rPr lang="en-US" sz="3260" b="1" spc="-70" kern="0" dirty="0">
                 <a:solidFill>
                   <a:srgbClr val="0B1220"/>
                 </a:solidFill>
@@ -7561,7 +8653,7 @@
               </a:rPr>
               <a:t>32 MXN</a:t>
             </a:r>
-            <a:endParaRPr lang="en-US" sz="4030" dirty="0"/>
+            <a:endParaRPr lang="en-US" sz="3260" dirty="0"/>
           </a:p>
         </p:txBody>
       </p:sp>
@@ -7573,27 +8665,27 @@
         </p:nvSpPr>
         <p:spPr>
           <a:xfrm>
-            <a:off x="4514767" y="2705213"/>
-            <a:ext cx="3275158" cy="411132"/>
-          </a:xfrm>
-          <a:prstGeom prst="rect">
-            <a:avLst/>
-          </a:prstGeom>
-          <a:noFill/>
-          <a:ln/>
-        </p:spPr>
-        <p:txBody>
-          <a:bodyPr wrap="square" lIns="0" tIns="0" rIns="0" bIns="0" rtlCol="0" anchor="t"/>
-          <a:lstStyle/>
-          <a:p>
-            <a:pPr algn="l" indent="0" marL="0">
-              <a:lnSpc>
-                <a:spcPct val="112000"/>
-              </a:lnSpc>
-              <a:buNone/>
-            </a:pPr>
-            <a:r>
-              <a:rPr lang="en-US" sz="1200" dirty="0">
+            <a:off x="4490353" y="2491660"/>
+            <a:ext cx="3325453" cy="342409"/>
+          </a:xfrm>
+          <a:prstGeom prst="rect">
+            <a:avLst/>
+          </a:prstGeom>
+          <a:noFill/>
+          <a:ln/>
+        </p:spPr>
+        <p:txBody>
+          <a:bodyPr wrap="square" lIns="0" tIns="0" rIns="0" bIns="0" rtlCol="0" anchor="t"/>
+          <a:lstStyle/>
+          <a:p>
+            <a:pPr algn="l" indent="0" marL="0">
+              <a:lnSpc>
+                <a:spcPct val="107000"/>
+              </a:lnSpc>
+              <a:buNone/>
+            </a:pPr>
+            <a:r>
+              <a:rPr lang="en-US" sz="1040" dirty="0">
                 <a:solidFill>
                   <a:srgbClr val="0B1220"/>
                 </a:solidFill>
@@ -7603,7 +8695,7 @@
               </a:rPr>
               <a:t>por conversión; Product Growth 21 y el resto de 4 a 17</a:t>
             </a:r>
-            <a:endParaRPr lang="en-US" sz="1200" dirty="0"/>
+            <a:endParaRPr lang="en-US" sz="1040" dirty="0"/>
           </a:p>
         </p:txBody>
       </p:sp>
@@ -7616,7 +8708,7 @@
         <p:spPr>
           <a:xfrm>
             <a:off x="8152111" y="1912789"/>
-            <a:ext cx="3527477" cy="1398573"/>
+            <a:ext cx="3527477" cy="1043052"/>
           </a:xfrm>
           <a:prstGeom prst="rect">
             <a:avLst/>
@@ -7635,8 +8727,8 @@
         </p:nvSpPr>
         <p:spPr>
           <a:xfrm>
-            <a:off x="8334920" y="2107806"/>
-            <a:ext cx="3275003" cy="512107"/>
+            <a:off x="8310505" y="2034561"/>
+            <a:ext cx="3325297" cy="414448"/>
           </a:xfrm>
           <a:prstGeom prst="rect">
             <a:avLst/>
@@ -7655,7 +8747,7 @@
               <a:buNone/>
             </a:pPr>
             <a:r>
-              <a:rPr lang="en-US" sz="4030" b="1" spc="-80" kern="0" dirty="0">
+              <a:rPr lang="en-US" sz="3260" b="1" spc="-70" kern="0" dirty="0">
                 <a:solidFill>
                   <a:srgbClr val="1F4FD8"/>
                 </a:solidFill>
@@ -7665,7 +8757,7 @@
               </a:rPr>
               <a:t>5.9</a:t>
             </a:r>
-            <a:endParaRPr lang="en-US" sz="4030" dirty="0"/>
+            <a:endParaRPr lang="en-US" sz="3260" dirty="0"/>
           </a:p>
         </p:txBody>
       </p:sp>
@@ -7677,8 +8769,50 @@
         </p:nvSpPr>
         <p:spPr>
           <a:xfrm>
-            <a:off x="8334920" y="2705213"/>
-            <a:ext cx="3275003" cy="411132"/>
+            <a:off x="8310505" y="2491660"/>
+            <a:ext cx="3325297" cy="342409"/>
+          </a:xfrm>
+          <a:prstGeom prst="rect">
+            <a:avLst/>
+          </a:prstGeom>
+          <a:noFill/>
+          <a:ln/>
+        </p:spPr>
+        <p:txBody>
+          <a:bodyPr wrap="square" lIns="0" tIns="0" rIns="0" bIns="0" rtlCol="0" anchor="t"/>
+          <a:lstStyle/>
+          <a:p>
+            <a:pPr algn="l" indent="0" marL="0">
+              <a:lnSpc>
+                <a:spcPct val="107000"/>
+              </a:lnSpc>
+              <a:buNone/>
+            </a:pPr>
+            <a:r>
+              <a:rPr lang="en-US" sz="1040" dirty="0">
+                <a:solidFill>
+                  <a:srgbClr val="0B1220"/>
+                </a:solidFill>
+                <a:latin typeface="Inter" pitchFamily="34" charset="0"/>
+                <a:ea typeface="Inter" pitchFamily="34" charset="-122"/>
+                <a:cs typeface="Inter" pitchFamily="34" charset="-120"/>
+              </a:rPr>
+              <a:t>bajas por cada mil correos; el resto de los equipos, 2.6</a:t>
+            </a:r>
+            <a:endParaRPr lang="en-US" sz="1040" dirty="0"/>
+          </a:p>
+        </p:txBody>
+      </p:sp>
+      <p:sp>
+        <p:nvSpPr>
+          <p:cNvPr id="20" name="Text 18"/>
+          <p:cNvSpPr txBox="1"/>
+          <p:nvPr/>
+        </p:nvSpPr>
+        <p:spPr>
+          <a:xfrm>
+            <a:off x="511956" y="3126443"/>
+            <a:ext cx="6179037" cy="164573"/>
           </a:xfrm>
           <a:prstGeom prst="rect">
             <a:avLst/>
@@ -7697,7 +8831,7 @@
               <a:buNone/>
             </a:pPr>
             <a:r>
-              <a:rPr lang="en-US" sz="1200" dirty="0">
+              <a:rPr lang="en-US" sz="960" b="1" dirty="0">
                 <a:solidFill>
                   <a:srgbClr val="0B1220"/>
                 </a:solidFill>
@@ -7705,22 +8839,46 @@
                 <a:ea typeface="Inter" pitchFamily="34" charset="-122"/>
                 <a:cs typeface="Inter" pitchFamily="34" charset="-120"/>
               </a:rPr>
-              <a:t>bajas por cada mil correos; el resto de los equipos, 2.6</a:t>
-            </a:r>
-            <a:endParaRPr lang="en-US" sz="1200" dirty="0"/>
-          </a:p>
-        </p:txBody>
-      </p:sp>
-      <p:sp>
-        <p:nvSpPr>
-          <p:cNvPr id="20" name="Shape 18"/>
+              <a:t>Cada punto es una campaña con 20 mil MXN o más: MXN por conversión, por equipo</a:t>
+            </a:r>
+            <a:endParaRPr lang="en-US" sz="960" dirty="0"/>
+          </a:p>
+        </p:txBody>
+      </p:sp>
+      <p:pic>
+        <p:nvPicPr>
+          <p:cNvPr id="21" name="Image 0" descr="preencoded.png">    </p:cNvPr>
+          <p:cNvPicPr>
+            <a:picLocks noChangeAspect="1"/>
+          </p:cNvPicPr>
+          <p:nvPr/>
+        </p:nvPicPr>
+        <p:blipFill>
+          <a:blip r:embed="rId1"/>
+          <a:stretch>
+            <a:fillRect/>
+          </a:stretch>
+        </p:blipFill>
+        <p:spPr>
+          <a:xfrm>
+            <a:off x="511956" y="3351902"/>
+            <a:ext cx="5981008" cy="2266501"/>
+          </a:xfrm>
+          <a:prstGeom prst="rect">
+            <a:avLst/>
+          </a:prstGeom>
+        </p:spPr>
+      </p:pic>
+      <p:sp>
+        <p:nvSpPr>
+          <p:cNvPr id="22" name="Shape 19"/>
           <p:cNvSpPr/>
           <p:nvPr/>
         </p:nvSpPr>
         <p:spPr>
           <a:xfrm>
-            <a:off x="511956" y="3535616"/>
-            <a:ext cx="5437554" cy="0"/>
+            <a:off x="6785790" y="3131265"/>
+            <a:ext cx="4893949" cy="0"/>
           </a:xfrm>
           <a:prstGeom prst="line">
             <a:avLst/>
@@ -7736,14 +8894,14 @@
       </p:sp>
       <p:sp>
         <p:nvSpPr>
-          <p:cNvPr id="21" name="Shape 19"/>
+          <p:cNvPr id="23" name="Shape 20"/>
           <p:cNvSpPr/>
           <p:nvPr/>
         </p:nvSpPr>
         <p:spPr>
           <a:xfrm>
-            <a:off x="511956" y="3674418"/>
-            <a:ext cx="231639" cy="231639"/>
+            <a:off x="6785790" y="3221389"/>
+            <a:ext cx="207224" cy="207224"/>
           </a:xfrm>
           <a:prstGeom prst="ellipse">
             <a:avLst/>
@@ -7756,14 +8914,14 @@
       </p:sp>
       <p:sp>
         <p:nvSpPr>
-          <p:cNvPr id="22" name="Text 20"/>
-          <p:cNvSpPr txBox="1"/>
-          <p:nvPr/>
-        </p:nvSpPr>
-        <p:spPr>
-          <a:xfrm>
-            <a:off x="511956" y="3674418"/>
-            <a:ext cx="256876" cy="231639"/>
+          <p:cNvPr id="24" name="Text 21"/>
+          <p:cNvSpPr txBox="1"/>
+          <p:nvPr/>
+        </p:nvSpPr>
+        <p:spPr>
+          <a:xfrm>
+            <a:off x="6785790" y="3221389"/>
+            <a:ext cx="231729" cy="207224"/>
           </a:xfrm>
           <a:prstGeom prst="rect">
             <a:avLst/>
@@ -7782,7 +8940,7 @@
               <a:buNone/>
             </a:pPr>
             <a:r>
-              <a:rPr lang="en-US" sz="960" b="1" dirty="0">
+              <a:rPr lang="en-US" sz="910" b="1" dirty="0">
                 <a:solidFill>
                   <a:srgbClr val="1F4FD8"/>
                 </a:solidFill>
@@ -7792,39 +8950,39 @@
               </a:rPr>
               <a:t>1</a:t>
             </a:r>
-            <a:endParaRPr lang="en-US" sz="960" dirty="0"/>
-          </a:p>
-        </p:txBody>
-      </p:sp>
-      <p:sp>
-        <p:nvSpPr>
-          <p:cNvPr id="23" name="Text 21"/>
-          <p:cNvSpPr txBox="1"/>
-          <p:nvPr/>
-        </p:nvSpPr>
-        <p:spPr>
-          <a:xfrm>
-            <a:off x="853310" y="3674418"/>
-            <a:ext cx="5267374" cy="665528"/>
-          </a:xfrm>
-          <a:prstGeom prst="rect">
-            <a:avLst/>
-          </a:prstGeom>
-          <a:noFill/>
-          <a:ln/>
-        </p:spPr>
-        <p:txBody>
-          <a:bodyPr wrap="square" lIns="0" tIns="0" rIns="0" bIns="0" rtlCol="0" anchor="t"/>
-          <a:lstStyle/>
-          <a:p>
-            <a:pPr algn="l" indent="0" marL="0">
-              <a:lnSpc>
-                <a:spcPct val="116000"/>
-              </a:lnSpc>
-              <a:buNone/>
-            </a:pPr>
-            <a:r>
-              <a:rPr lang="en-US" sz="1250" b="1" dirty="0">
+            <a:endParaRPr lang="en-US" sz="910" dirty="0"/>
+          </a:p>
+        </p:txBody>
+      </p:sp>
+      <p:sp>
+        <p:nvSpPr>
+          <p:cNvPr id="25" name="Text 22"/>
+          <p:cNvSpPr txBox="1"/>
+          <p:nvPr/>
+        </p:nvSpPr>
+        <p:spPr>
+          <a:xfrm>
+            <a:off x="7090522" y="3221389"/>
+            <a:ext cx="4745182" cy="362001"/>
+          </a:xfrm>
+          <a:prstGeom prst="rect">
+            <a:avLst/>
+          </a:prstGeom>
+          <a:noFill/>
+          <a:ln/>
+        </p:spPr>
+        <p:txBody>
+          <a:bodyPr wrap="square" lIns="0" tIns="0" rIns="0" bIns="0" rtlCol="0" anchor="t"/>
+          <a:lstStyle/>
+          <a:p>
+            <a:pPr algn="l" indent="0" marL="0">
+              <a:lnSpc>
+                <a:spcPct val="112000"/>
+              </a:lnSpc>
+              <a:buNone/>
+            </a:pPr>
+            <a:r>
+              <a:rPr lang="en-US" sz="1060" b="1" dirty="0">
                 <a:solidFill>
                   <a:srgbClr val="0B1220"/>
                 </a:solidFill>
@@ -7836,12 +8994,12 @@
             </a:r>
             <a:pPr algn="l" indent="0" marL="0">
               <a:lnSpc>
-                <a:spcPct val="116000"/>
-              </a:lnSpc>
-              <a:buNone/>
-            </a:pPr>
-            <a:r>
-              <a:rPr lang="en-US" sz="1250" dirty="0">
+                <a:spcPct val="112000"/>
+              </a:lnSpc>
+              <a:buNone/>
+            </a:pPr>
+            <a:r>
+              <a:rPr lang="en-US" sz="1060" dirty="0">
                 <a:solidFill>
                   <a:srgbClr val="0B1220"/>
                 </a:solidFill>
@@ -7849,22 +9007,22 @@
                 <a:ea typeface="Inter" pitchFamily="34" charset="-122"/>
                 <a:cs typeface="Inter" pitchFamily="34" charset="-120"/>
               </a:rPr>
-              <a:t> La mitad del dinero va a Tasa 0 a leads que casi no convierte; por WhatsApp, una base fría cuesta 13 veces más por conversión.</a:t>
-            </a:r>
-            <a:endParaRPr lang="en-US" sz="1250" dirty="0"/>
-          </a:p>
-        </p:txBody>
-      </p:sp>
-      <p:sp>
-        <p:nvSpPr>
-          <p:cNvPr id="24" name="Shape 22"/>
+              <a:t> La campaña típica de Marketing paga 128 MXN por conversión; la de Product Growth, 47. Tasa 0 a rezagados, 460.</a:t>
+            </a:r>
+            <a:endParaRPr lang="en-US" sz="1060" dirty="0"/>
+          </a:p>
+        </p:txBody>
+      </p:sp>
+      <p:sp>
+        <p:nvSpPr>
+          <p:cNvPr id="26" name="Shape 23"/>
           <p:cNvSpPr/>
           <p:nvPr/>
         </p:nvSpPr>
         <p:spPr>
           <a:xfrm>
-            <a:off x="6242035" y="3535616"/>
-            <a:ext cx="5437705" cy="0"/>
+            <a:off x="6785790" y="3661306"/>
+            <a:ext cx="4893949" cy="0"/>
           </a:xfrm>
           <a:prstGeom prst="line">
             <a:avLst/>
@@ -7880,14 +9038,14 @@
       </p:sp>
       <p:sp>
         <p:nvSpPr>
-          <p:cNvPr id="25" name="Shape 23"/>
+          <p:cNvPr id="27" name="Shape 24"/>
           <p:cNvSpPr/>
           <p:nvPr/>
         </p:nvSpPr>
         <p:spPr>
           <a:xfrm>
-            <a:off x="6242035" y="3674418"/>
-            <a:ext cx="231639" cy="231639"/>
+            <a:off x="6785790" y="3751430"/>
+            <a:ext cx="207224" cy="207224"/>
           </a:xfrm>
           <a:prstGeom prst="ellipse">
             <a:avLst/>
@@ -7900,14 +9058,14 @@
       </p:sp>
       <p:sp>
         <p:nvSpPr>
-          <p:cNvPr id="26" name="Text 24"/>
-          <p:cNvSpPr txBox="1"/>
-          <p:nvPr/>
-        </p:nvSpPr>
-        <p:spPr>
-          <a:xfrm>
-            <a:off x="6242035" y="3674418"/>
-            <a:ext cx="256876" cy="231639"/>
+          <p:cNvPr id="28" name="Text 25"/>
+          <p:cNvSpPr txBox="1"/>
+          <p:nvPr/>
+        </p:nvSpPr>
+        <p:spPr>
+          <a:xfrm>
+            <a:off x="6785790" y="3751430"/>
+            <a:ext cx="231729" cy="207224"/>
           </a:xfrm>
           <a:prstGeom prst="rect">
             <a:avLst/>
@@ -7926,7 +9084,7 @@
               <a:buNone/>
             </a:pPr>
             <a:r>
-              <a:rPr lang="en-US" sz="960" b="1" dirty="0">
+              <a:rPr lang="en-US" sz="910" b="1" dirty="0">
                 <a:solidFill>
                   <a:srgbClr val="1F4FD8"/>
                 </a:solidFill>
@@ -7936,39 +9094,39 @@
               </a:rPr>
               <a:t>2</a:t>
             </a:r>
-            <a:endParaRPr lang="en-US" sz="960" dirty="0"/>
-          </a:p>
-        </p:txBody>
-      </p:sp>
-      <p:sp>
-        <p:nvSpPr>
-          <p:cNvPr id="27" name="Text 25"/>
-          <p:cNvSpPr txBox="1"/>
-          <p:nvPr/>
-        </p:nvSpPr>
-        <p:spPr>
-          <a:xfrm>
-            <a:off x="6583389" y="3674418"/>
-            <a:ext cx="5267529" cy="443685"/>
-          </a:xfrm>
-          <a:prstGeom prst="rect">
-            <a:avLst/>
-          </a:prstGeom>
-          <a:noFill/>
-          <a:ln/>
-        </p:spPr>
-        <p:txBody>
-          <a:bodyPr wrap="square" lIns="0" tIns="0" rIns="0" bIns="0" rtlCol="0" anchor="t"/>
-          <a:lstStyle/>
-          <a:p>
-            <a:pPr algn="l" indent="0" marL="0">
-              <a:lnSpc>
-                <a:spcPct val="116000"/>
-              </a:lnSpc>
-              <a:buNone/>
-            </a:pPr>
-            <a:r>
-              <a:rPr lang="en-US" sz="1250" b="1" dirty="0">
+            <a:endParaRPr lang="en-US" sz="910" dirty="0"/>
+          </a:p>
+        </p:txBody>
+      </p:sp>
+      <p:sp>
+        <p:nvSpPr>
+          <p:cNvPr id="29" name="Text 26"/>
+          <p:cNvSpPr txBox="1"/>
+          <p:nvPr/>
+        </p:nvSpPr>
+        <p:spPr>
+          <a:xfrm>
+            <a:off x="7090522" y="3751430"/>
+            <a:ext cx="4745182" cy="362001"/>
+          </a:xfrm>
+          <a:prstGeom prst="rect">
+            <a:avLst/>
+          </a:prstGeom>
+          <a:noFill/>
+          <a:ln/>
+        </p:spPr>
+        <p:txBody>
+          <a:bodyPr wrap="square" lIns="0" tIns="0" rIns="0" bIns="0" rtlCol="0" anchor="t"/>
+          <a:lstStyle/>
+          <a:p>
+            <a:pPr algn="l" indent="0" marL="0">
+              <a:lnSpc>
+                <a:spcPct val="112000"/>
+              </a:lnSpc>
+              <a:buNone/>
+            </a:pPr>
+            <a:r>
+              <a:rPr lang="en-US" sz="1060" b="1" dirty="0">
                 <a:solidFill>
                   <a:srgbClr val="0B1220"/>
                 </a:solidFill>
@@ -7980,12 +9138,12 @@
             </a:r>
             <a:pPr algn="l" indent="0" marL="0">
               <a:lnSpc>
-                <a:spcPct val="116000"/>
-              </a:lnSpc>
-              <a:buNone/>
-            </a:pPr>
-            <a:r>
-              <a:rPr lang="en-US" sz="1250" dirty="0">
+                <a:spcPct val="112000"/>
+              </a:lnSpc>
+              <a:buNone/>
+            </a:pPr>
+            <a:r>
+              <a:rPr lang="en-US" sz="1060" dirty="0">
                 <a:solidFill>
                   <a:srgbClr val="0B1220"/>
                 </a:solidFill>
@@ -7995,20 +9153,20 @@
               </a:rPr>
               <a:t> Dos terceras partes del push que abre menos de 1 de cada 100 personas son de Marketing.</a:t>
             </a:r>
-            <a:endParaRPr lang="en-US" sz="1250" dirty="0"/>
-          </a:p>
-        </p:txBody>
-      </p:sp>
-      <p:sp>
-        <p:nvSpPr>
-          <p:cNvPr id="28" name="Shape 26"/>
+            <a:endParaRPr lang="en-US" sz="1060" dirty="0"/>
+          </a:p>
+        </p:txBody>
+      </p:sp>
+      <p:sp>
+        <p:nvSpPr>
+          <p:cNvPr id="30" name="Shape 27"/>
           <p:cNvSpPr/>
           <p:nvPr/>
         </p:nvSpPr>
         <p:spPr>
           <a:xfrm>
-            <a:off x="511956" y="4503163"/>
-            <a:ext cx="5437554" cy="0"/>
+            <a:off x="6785790" y="4191347"/>
+            <a:ext cx="4893949" cy="0"/>
           </a:xfrm>
           <a:prstGeom prst="line">
             <a:avLst/>
@@ -8024,14 +9182,14 @@
       </p:sp>
       <p:sp>
         <p:nvSpPr>
-          <p:cNvPr id="29" name="Shape 27"/>
+          <p:cNvPr id="31" name="Shape 28"/>
           <p:cNvSpPr/>
           <p:nvPr/>
         </p:nvSpPr>
         <p:spPr>
           <a:xfrm>
-            <a:off x="511956" y="4641965"/>
-            <a:ext cx="231639" cy="231639"/>
+            <a:off x="6785790" y="4281471"/>
+            <a:ext cx="207224" cy="207224"/>
           </a:xfrm>
           <a:prstGeom prst="ellipse">
             <a:avLst/>
@@ -8044,14 +9202,14 @@
       </p:sp>
       <p:sp>
         <p:nvSpPr>
-          <p:cNvPr id="30" name="Text 28"/>
-          <p:cNvSpPr txBox="1"/>
-          <p:nvPr/>
-        </p:nvSpPr>
-        <p:spPr>
-          <a:xfrm>
-            <a:off x="511956" y="4641965"/>
-            <a:ext cx="256876" cy="231639"/>
+          <p:cNvPr id="32" name="Text 29"/>
+          <p:cNvSpPr txBox="1"/>
+          <p:nvPr/>
+        </p:nvSpPr>
+        <p:spPr>
+          <a:xfrm>
+            <a:off x="6785790" y="4281471"/>
+            <a:ext cx="231729" cy="207224"/>
           </a:xfrm>
           <a:prstGeom prst="rect">
             <a:avLst/>
@@ -8070,7 +9228,7 @@
               <a:buNone/>
             </a:pPr>
             <a:r>
-              <a:rPr lang="en-US" sz="960" b="1" dirty="0">
+              <a:rPr lang="en-US" sz="910" b="1" dirty="0">
                 <a:solidFill>
                   <a:srgbClr val="1F4FD8"/>
                 </a:solidFill>
@@ -8080,39 +9238,39 @@
               </a:rPr>
               <a:t>3</a:t>
             </a:r>
-            <a:endParaRPr lang="en-US" sz="960" dirty="0"/>
-          </a:p>
-        </p:txBody>
-      </p:sp>
-      <p:sp>
-        <p:nvSpPr>
-          <p:cNvPr id="31" name="Text 29"/>
-          <p:cNvSpPr txBox="1"/>
-          <p:nvPr/>
-        </p:nvSpPr>
-        <p:spPr>
-          <a:xfrm>
-            <a:off x="853310" y="4641965"/>
-            <a:ext cx="5267374" cy="443685"/>
-          </a:xfrm>
-          <a:prstGeom prst="rect">
-            <a:avLst/>
-          </a:prstGeom>
-          <a:noFill/>
-          <a:ln/>
-        </p:spPr>
-        <p:txBody>
-          <a:bodyPr wrap="square" lIns="0" tIns="0" rIns="0" bIns="0" rtlCol="0" anchor="t"/>
-          <a:lstStyle/>
-          <a:p>
-            <a:pPr algn="l" indent="0" marL="0">
-              <a:lnSpc>
-                <a:spcPct val="116000"/>
-              </a:lnSpc>
-              <a:buNone/>
-            </a:pPr>
-            <a:r>
-              <a:rPr lang="en-US" sz="1250" b="1" dirty="0">
+            <a:endParaRPr lang="en-US" sz="910" dirty="0"/>
+          </a:p>
+        </p:txBody>
+      </p:sp>
+      <p:sp>
+        <p:nvSpPr>
+          <p:cNvPr id="33" name="Text 30"/>
+          <p:cNvSpPr txBox="1"/>
+          <p:nvPr/>
+        </p:nvSpPr>
+        <p:spPr>
+          <a:xfrm>
+            <a:off x="7090522" y="4281471"/>
+            <a:ext cx="4745182" cy="362001"/>
+          </a:xfrm>
+          <a:prstGeom prst="rect">
+            <a:avLst/>
+          </a:prstGeom>
+          <a:noFill/>
+          <a:ln/>
+        </p:spPr>
+        <p:txBody>
+          <a:bodyPr wrap="square" lIns="0" tIns="0" rIns="0" bIns="0" rtlCol="0" anchor="t"/>
+          <a:lstStyle/>
+          <a:p>
+            <a:pPr algn="l" indent="0" marL="0">
+              <a:lnSpc>
+                <a:spcPct val="112000"/>
+              </a:lnSpc>
+              <a:buNone/>
+            </a:pPr>
+            <a:r>
+              <a:rPr lang="en-US" sz="1060" b="1" dirty="0">
                 <a:solidFill>
                   <a:srgbClr val="0B1220"/>
                 </a:solidFill>
@@ -8124,12 +9282,12 @@
             </a:r>
             <a:pPr algn="l" indent="0" marL="0">
               <a:lnSpc>
-                <a:spcPct val="116000"/>
-              </a:lnSpc>
-              <a:buNone/>
-            </a:pPr>
-            <a:r>
-              <a:rPr lang="en-US" sz="1250" dirty="0">
+                <a:spcPct val="112000"/>
+              </a:lnSpc>
+              <a:buNone/>
+            </a:pPr>
+            <a:r>
+              <a:rPr lang="en-US" sz="1060" dirty="0">
                 <a:solidFill>
                   <a:srgbClr val="0B1220"/>
                 </a:solidFill>
@@ -8139,20 +9297,20 @@
               </a:rPr>
               <a:t> Hasta 2.3 M personas al mes reciben tres o más campañas el mismo día, casi siempre con Marketing.</a:t>
             </a:r>
-            <a:endParaRPr lang="en-US" sz="1250" dirty="0"/>
-          </a:p>
-        </p:txBody>
-      </p:sp>
-      <p:sp>
-        <p:nvSpPr>
-          <p:cNvPr id="32" name="Shape 30"/>
+            <a:endParaRPr lang="en-US" sz="1060" dirty="0"/>
+          </a:p>
+        </p:txBody>
+      </p:sp>
+      <p:sp>
+        <p:nvSpPr>
+          <p:cNvPr id="34" name="Shape 31"/>
           <p:cNvSpPr/>
           <p:nvPr/>
         </p:nvSpPr>
         <p:spPr>
           <a:xfrm>
-            <a:off x="6242035" y="4503163"/>
-            <a:ext cx="5437705" cy="0"/>
+            <a:off x="6785790" y="4721388"/>
+            <a:ext cx="4893949" cy="0"/>
           </a:xfrm>
           <a:prstGeom prst="line">
             <a:avLst/>
@@ -8168,14 +9326,14 @@
       </p:sp>
       <p:sp>
         <p:nvSpPr>
-          <p:cNvPr id="33" name="Shape 31"/>
+          <p:cNvPr id="35" name="Shape 32"/>
           <p:cNvSpPr/>
           <p:nvPr/>
         </p:nvSpPr>
         <p:spPr>
           <a:xfrm>
-            <a:off x="6242035" y="4641965"/>
-            <a:ext cx="231639" cy="231639"/>
+            <a:off x="6785790" y="4811512"/>
+            <a:ext cx="207224" cy="207224"/>
           </a:xfrm>
           <a:prstGeom prst="ellipse">
             <a:avLst/>
@@ -8188,14 +9346,14 @@
       </p:sp>
       <p:sp>
         <p:nvSpPr>
-          <p:cNvPr id="34" name="Text 32"/>
-          <p:cNvSpPr txBox="1"/>
-          <p:nvPr/>
-        </p:nvSpPr>
-        <p:spPr>
-          <a:xfrm>
-            <a:off x="6242035" y="4641965"/>
-            <a:ext cx="256876" cy="231639"/>
+          <p:cNvPr id="36" name="Text 33"/>
+          <p:cNvSpPr txBox="1"/>
+          <p:nvPr/>
+        </p:nvSpPr>
+        <p:spPr>
+          <a:xfrm>
+            <a:off x="6785790" y="4811512"/>
+            <a:ext cx="231729" cy="207224"/>
           </a:xfrm>
           <a:prstGeom prst="rect">
             <a:avLst/>
@@ -8214,7 +9372,7 @@
               <a:buNone/>
             </a:pPr>
             <a:r>
-              <a:rPr lang="en-US" sz="960" b="1" dirty="0">
+              <a:rPr lang="en-US" sz="910" b="1" dirty="0">
                 <a:solidFill>
                   <a:srgbClr val="1F4FD8"/>
                 </a:solidFill>
@@ -8224,39 +9382,39 @@
               </a:rPr>
               <a:t>4</a:t>
             </a:r>
-            <a:endParaRPr lang="en-US" sz="960" dirty="0"/>
-          </a:p>
-        </p:txBody>
-      </p:sp>
-      <p:sp>
-        <p:nvSpPr>
-          <p:cNvPr id="35" name="Text 33"/>
-          <p:cNvSpPr txBox="1"/>
-          <p:nvPr/>
-        </p:nvSpPr>
-        <p:spPr>
-          <a:xfrm>
-            <a:off x="6583389" y="4641965"/>
-            <a:ext cx="5267529" cy="443685"/>
-          </a:xfrm>
-          <a:prstGeom prst="rect">
-            <a:avLst/>
-          </a:prstGeom>
-          <a:noFill/>
-          <a:ln/>
-        </p:spPr>
-        <p:txBody>
-          <a:bodyPr wrap="square" lIns="0" tIns="0" rIns="0" bIns="0" rtlCol="0" anchor="t"/>
-          <a:lstStyle/>
-          <a:p>
-            <a:pPr algn="l" indent="0" marL="0">
-              <a:lnSpc>
-                <a:spcPct val="116000"/>
-              </a:lnSpc>
-              <a:buNone/>
-            </a:pPr>
-            <a:r>
-              <a:rPr lang="en-US" sz="1250" b="1" dirty="0">
+            <a:endParaRPr lang="en-US" sz="910" dirty="0"/>
+          </a:p>
+        </p:txBody>
+      </p:sp>
+      <p:sp>
+        <p:nvSpPr>
+          <p:cNvPr id="37" name="Text 34"/>
+          <p:cNvSpPr txBox="1"/>
+          <p:nvPr/>
+        </p:nvSpPr>
+        <p:spPr>
+          <a:xfrm>
+            <a:off x="7090522" y="4811512"/>
+            <a:ext cx="4745182" cy="362001"/>
+          </a:xfrm>
+          <a:prstGeom prst="rect">
+            <a:avLst/>
+          </a:prstGeom>
+          <a:noFill/>
+          <a:ln/>
+        </p:spPr>
+        <p:txBody>
+          <a:bodyPr wrap="square" lIns="0" tIns="0" rIns="0" bIns="0" rtlCol="0" anchor="t"/>
+          <a:lstStyle/>
+          <a:p>
+            <a:pPr algn="l" indent="0" marL="0">
+              <a:lnSpc>
+                <a:spcPct val="112000"/>
+              </a:lnSpc>
+              <a:buNone/>
+            </a:pPr>
+            <a:r>
+              <a:rPr lang="en-US" sz="1060" b="1" dirty="0">
                 <a:solidFill>
                   <a:srgbClr val="0B1220"/>
                 </a:solidFill>
@@ -8268,12 +9426,12 @@
             </a:r>
             <a:pPr algn="l" indent="0" marL="0">
               <a:lnSpc>
-                <a:spcPct val="116000"/>
-              </a:lnSpc>
-              <a:buNone/>
-            </a:pPr>
-            <a:r>
-              <a:rPr lang="en-US" sz="1250" dirty="0">
+                <a:spcPct val="112000"/>
+              </a:lnSpc>
+              <a:buNone/>
+            </a:pPr>
+            <a:r>
+              <a:rPr lang="en-US" sz="1060" dirty="0">
                 <a:solidFill>
                   <a:srgbClr val="0B1220"/>
                 </a:solidFill>
@@ -8281,15 +9439,15 @@
                 <a:ea typeface="Inter" pitchFamily="34" charset="-122"/>
                 <a:cs typeface="Inter" pitchFamily="34" charset="-120"/>
               </a:rPr>
-              <a:t> El recordatorio de registro: 21 MXN por préstamo. Lo que nace de algo que hizo la persona responde siete veces más.</a:t>
-            </a:r>
-            <a:endParaRPr lang="en-US" sz="1250" dirty="0"/>
-          </a:p>
-        </p:txBody>
-      </p:sp>
-      <p:sp>
-        <p:nvSpPr>
-          <p:cNvPr id="36" name="Shape 34"/>
+              <a:t> El recordatorio de registro: 21 MXN por préstamo; lo que nace de algo que hizo la persona responde siete veces más.</a:t>
+            </a:r>
+            <a:endParaRPr lang="en-US" sz="1060" dirty="0"/>
+          </a:p>
+        </p:txBody>
+      </p:sp>
+      <p:sp>
+        <p:nvSpPr>
+          <p:cNvPr id="38" name="Shape 35"/>
           <p:cNvSpPr/>
           <p:nvPr/>
         </p:nvSpPr>
@@ -8309,7 +9467,7 @@
       </p:sp>
       <p:sp>
         <p:nvSpPr>
-          <p:cNvPr id="37" name="Text 35"/>
+          <p:cNvPr id="39" name="Text 36"/>
           <p:cNvSpPr txBox="1"/>
           <p:nvPr/>
         </p:nvSpPr>
@@ -8351,7 +9509,7 @@
       </p:sp>
       <p:sp>
         <p:nvSpPr>
-          <p:cNvPr id="38" name="Text 36"/>
+          <p:cNvPr id="40" name="Text 37"/>
           <p:cNvSpPr txBox="1"/>
           <p:nvPr/>
         </p:nvSpPr>
@@ -8393,7 +9551,7 @@
       </p:sp>
       <p:sp>
         <p:nvSpPr>
-          <p:cNvPr id="39" name="Text 37"/>
+          <p:cNvPr id="41" name="Text 38"/>
           <p:cNvSpPr txBox="1"/>
           <p:nvPr/>
         </p:nvSpPr>
@@ -8435,7 +9593,7 @@
       </p:sp>
       <p:sp>
         <p:nvSpPr>
-          <p:cNvPr id="40" name="Text 38"/>
+          <p:cNvPr id="42" name="Text 39"/>
           <p:cNvSpPr txBox="1"/>
           <p:nvPr/>
         </p:nvSpPr>

--- a/braze-analysis/deck/v6/marketing/DECK_marketing.pptx
+++ b/braze-analysis/deck/v6/marketing/DECK_marketing.pptx
@@ -120,7 +120,7 @@
   <p:extLst>
     <p:ext uri="{521415D9-36F7-43E2-AB2F-B90AF26B5E84}">
       <p14:sectionLst xmlns:p14="http://schemas.microsoft.com/office/powerpoint/2010/main">
-        <p14:section name="Inicio" id="{badf1b25-0407-8db2-0ed6-86b3f297fb1c}">
+        <p14:section name="Inicio" id="{e18a75f4-633e-c07c-b14c-833b099ea460}">
           <p14:sldIdLst>
             <p14:sldId id="256"/>
             <p14:sldId id="257"/>
@@ -6463,7 +6463,7 @@
                 <a:ea typeface="Inter" pitchFamily="34" charset="-122"/>
                 <a:cs typeface="Inter" pitchFamily="34" charset="-120"/>
               </a:rPr>
-              <a:t>Cada punto es una campaña que mandó promociones a un grupo que no debería recibirlas</a:t>
+              <a:t>502 campañas mandaron promociones a quien no debía recibirlas; las 10 primeras suman solo 24 %</a:t>
             </a:r>
             <a:endParaRPr lang="en-US" sz="960" dirty="0"/>
           </a:p>
@@ -6486,7 +6486,7 @@
         <p:spPr>
           <a:xfrm>
             <a:off x="511956" y="3523107"/>
-            <a:ext cx="6742235" cy="2235606"/>
+            <a:ext cx="6742235" cy="2380889"/>
           </a:xfrm>
           <a:prstGeom prst="rect">
             <a:avLst/>
@@ -8839,7 +8839,7 @@
                 <a:ea typeface="Inter" pitchFamily="34" charset="-122"/>
                 <a:cs typeface="Inter" pitchFamily="34" charset="-120"/>
               </a:rPr>
-              <a:t>Cada punto es una campaña con 20 mil MXN o más: MXN por conversión, por equipo</a:t>
+              <a:t>Cada punto es una campaña con 20 mil MXN o más: gasto contra MXN por conversión</a:t>
             </a:r>
             <a:endParaRPr lang="en-US" sz="960" dirty="0"/>
           </a:p>
@@ -8862,7 +8862,7 @@
         <p:spPr>
           <a:xfrm>
             <a:off x="511956" y="3351902"/>
-            <a:ext cx="5981008" cy="2266501"/>
+            <a:ext cx="5981159" cy="2392494"/>
           </a:xfrm>
           <a:prstGeom prst="rect">
             <a:avLst/>
@@ -9007,7 +9007,7 @@
                 <a:ea typeface="Inter" pitchFamily="34" charset="-122"/>
                 <a:cs typeface="Inter" pitchFamily="34" charset="-120"/>
               </a:rPr>
-              <a:t> La campaña típica de Marketing paga 128 MXN por conversión; la de Product Growth, 47. Tasa 0 a rezagados, 460.</a:t>
+              <a:t> La campaña típica de Marketing paga 128 MXN por conversión; la del resto, 34. Gastar más no la abarata (R² 0.03).</a:t>
             </a:r>
             <a:endParaRPr lang="en-US" sz="1060" dirty="0"/>
           </a:p>

--- a/braze-analysis/deck/v6/marketing/DECK_marketing.pptx
+++ b/braze-analysis/deck/v6/marketing/DECK_marketing.pptx
@@ -19,9 +19,10 @@
     <p:sldId id="267" r:id="rId13"/>
     <p:sldId id="268" r:id="rId14"/>
     <p:sldId id="269" r:id="rId15"/>
+    <p:sldId id="270" r:id="rId16"/>
   </p:sldIdLst>
   <p:notesMasterIdLst>
-    <p:notesMasterId r:id="rId16"/>
+    <p:notesMasterId r:id="rId17"/>
   </p:notesMasterIdLst>
   <p:sldSz cx="12192000" cy="6858000"/>
   <p:notesSz cx="6858000" cy="12192000"/>
@@ -120,7 +121,7 @@
   <p:extLst>
     <p:ext uri="{521415D9-36F7-43E2-AB2F-B90AF26B5E84}">
       <p14:sectionLst xmlns:p14="http://schemas.microsoft.com/office/powerpoint/2010/main">
-        <p14:section name="Inicio" id="{e18a75f4-633e-c07c-b14c-833b099ea460}">
+        <p14:section name="Inicio" id="{9ed9d948-b8e3-76d5-6a96-2a0294e6a1b6}">
           <p14:sldIdLst>
             <p14:sldId id="256"/>
             <p14:sldId id="257"/>
@@ -136,6 +137,7 @@
             <p14:sldId id="267"/>
             <p14:sldId id="268"/>
             <p14:sldId id="269"/>
+            <p14:sldId id="270"/>
           </p14:sldIdLst>
         </p14:section>
       </p14:sectionLst>
@@ -1006,6 +1008,94 @@
             <a:fld id="{F7021451-1387-4CA6-816F-3879F97B5CBC}" type="slidenum">
               <a:rPr lang="en-US"/>
               <a:t>14</a:t>
+            </a:fld>
+            <a:endParaRPr lang="en-US"/>
+          </a:p>
+        </p:txBody>
+      </p:sp>
+    </p:spTree>
+    <p:extLst>
+      <p:ext uri="{BB962C8B-B14F-4D97-AF65-F5344CB8AC3E}">
+        <p14:creationId xmlns:p14="http://schemas.microsoft.com/office/powerpoint/2010/main" val="1024086991"/>
+      </p:ext>
+    </p:extLst>
+  </p:cSld>
+  <p:clrMapOvr>
+    <a:masterClrMapping/>
+  </p:clrMapOvr>
+</p:notes>
+</file>
+
+<file path=ppt/notesSlides/notesSlide15.xml><?xml version="1.0" encoding="utf-8"?>
+<p:notes xmlns:a="http://schemas.openxmlformats.org/drawingml/2006/main" xmlns:r="http://schemas.openxmlformats.org/officeDocument/2006/relationships" xmlns:p="http://schemas.openxmlformats.org/presentationml/2006/main">
+  <p:cSld>
+    <p:spTree>
+      <p:nvGrpSpPr>
+        <p:cNvPr id="1" name=""/>
+        <p:cNvGrpSpPr/>
+        <p:nvPr/>
+      </p:nvGrpSpPr>
+      <p:grpSpPr>
+        <a:xfrm>
+          <a:off x="0" y="0"/>
+          <a:ext cx="0" cy="0"/>
+          <a:chOff x="0" y="0"/>
+          <a:chExt cx="0" cy="0"/>
+        </a:xfrm>
+      </p:grpSpPr>
+      <p:sp>
+        <p:nvSpPr>
+          <p:cNvPr id="2" name="Slide Image Placeholder 1"/>
+          <p:cNvSpPr>
+            <a:spLocks noGrp="1" noRot="1" noChangeAspect="1"/>
+          </p:cNvSpPr>
+          <p:nvPr>
+            <p:ph type="sldImg"/>
+          </p:nvPr>
+        </p:nvSpPr>
+        <p:spPr/>
+      </p:sp>
+      <p:sp>
+        <p:nvSpPr>
+          <p:cNvPr id="3" name="Notes Placeholder 2"/>
+          <p:cNvSpPr>
+            <a:spLocks noGrp="1"/>
+          </p:cNvSpPr>
+          <p:nvPr>
+            <p:ph type="body" idx="1"/>
+          </p:nvPr>
+        </p:nvSpPr>
+        <p:spPr/>
+        <p:txBody>
+          <a:bodyPr/>
+          <a:lstStyle/>
+          <a:p>
+            <a:r>
+              <a:rPr lang="en-US" dirty="0"/>
+              <a:t/>
+            </a:r>
+            <a:endParaRPr lang="en-US" dirty="0"/>
+          </a:p>
+        </p:txBody>
+      </p:sp>
+      <p:sp>
+        <p:nvSpPr>
+          <p:cNvPr id="4" name="Slide Number Placeholder 3"/>
+          <p:cNvSpPr>
+            <a:spLocks noGrp="1"/>
+          </p:cNvSpPr>
+          <p:nvPr>
+            <p:ph type="sldNum" sz="quarter" idx="10"/>
+          </p:nvPr>
+        </p:nvSpPr>
+        <p:spPr/>
+        <p:txBody>
+          <a:bodyPr/>
+          <a:lstStyle/>
+          <a:p>
+            <a:fld id="{F7021451-1387-4CA6-816F-3879F97B5CBC}" type="slidenum">
+              <a:rPr lang="en-US"/>
+              <a:t>15</a:t>
             </a:fld>
             <a:endParaRPr lang="en-US"/>
           </a:p>
@@ -2315,7 +2405,7 @@
                 <a:ea typeface="Inter" pitchFamily="34" charset="-122"/>
                 <a:cs typeface="Inter" pitchFamily="34" charset="-120"/>
               </a:rPr>
-              <a:t>Ocho campañas de email causan un tercio de las bajas del correo, y seis casi no reciben clics</a:t>
+              <a:t>A quien se dio de baja le siguen llegando promociones de Tasa 0 y referidos, casi todas de Marketing</a:t>
             </a:r>
             <a:endParaRPr lang="en-US" sz="2210" dirty="0"/>
           </a:p>
@@ -2418,7 +2508,7 @@
         <p:spPr>
           <a:xfrm>
             <a:off x="511956" y="1410328"/>
-            <a:ext cx="3576614" cy="293580"/>
+            <a:ext cx="3486891" cy="293580"/>
           </a:xfrm>
           <a:prstGeom prst="rect">
             <a:avLst/>
@@ -2445,7 +2535,7 @@
                 <a:ea typeface="Inter" pitchFamily="34" charset="-122"/>
                 <a:cs typeface="Inter" pitchFamily="34" charset="-120"/>
               </a:rPr>
-              <a:t>BillPay, Tasa 0, referidos, AnotayGana, Cuesta de Enero, crédito en plazos y Veriff.</a:t>
+              <a:t>Correo promocional: Tasa 0, newsletters, referidos, cupones y recordatorio de registro</a:t>
             </a:r>
             <a:endParaRPr lang="en-US" sz="900" dirty="0"/>
           </a:p>
@@ -2502,7 +2592,7 @@
         <p:spPr>
           <a:xfrm>
             <a:off x="4299556" y="1410328"/>
-            <a:ext cx="3453206" cy="144680"/>
+            <a:ext cx="3195836" cy="144680"/>
           </a:xfrm>
           <a:prstGeom prst="rect">
             <a:avLst/>
@@ -2529,7 +2619,7 @@
                 <a:ea typeface="Inter" pitchFamily="34" charset="-122"/>
                 <a:cs typeface="Inter" pitchFamily="34" charset="-120"/>
               </a:rPr>
-              <a:t>Product Growth 4 campañas, Marketing 3 y Others 1 (BillPay).</a:t>
+              <a:t>Marketing (58 de 79 mil), Product Growth, Sales y Others</a:t>
             </a:r>
             <a:endParaRPr lang="en-US" sz="900" dirty="0"/>
           </a:p>
@@ -2586,7 +2676,7 @@
         <p:spPr>
           <a:xfrm>
             <a:off x="8087156" y="1410328"/>
-            <a:ext cx="3424179" cy="144680"/>
+            <a:ext cx="3246130" cy="144680"/>
           </a:xfrm>
           <a:prstGeom prst="rect">
             <a:avLst/>
@@ -2613,7 +2703,7 @@
                 <a:ea typeface="Inter" pitchFamily="34" charset="-122"/>
                 <a:cs typeface="Inter" pitchFamily="34" charset="-120"/>
               </a:rPr>
-              <a:t>Toda la base, leads y registrados que nunca tomaron crédito.</a:t>
+              <a:t>45 mil personas que ya se habían dado de baja del correo</a:t>
             </a:r>
             <a:endParaRPr lang="en-US" sz="900" dirty="0"/>
           </a:p>
@@ -2780,7 +2870,7 @@
                 <a:ea typeface="Inter" pitchFamily="34" charset="-122"/>
                 <a:cs typeface="Inter" pitchFamily="34" charset="-120"/>
               </a:rPr>
-              <a:t>Las ocho suman 379 mil de 1.09 M bajas (35 %); seis reciben menos de 10 clics por mil.</a:t>
+              <a:t>94 % de lo que llega tras la baja es cobranza y avisos de pago: eso sí procede.</a:t>
             </a:r>
             <a:endParaRPr lang="en-US" sz="940" dirty="0"/>
           </a:p>
@@ -2881,7 +2971,7 @@
                 <a:ea typeface="Inter" pitchFamily="34" charset="-122"/>
                 <a:cs typeface="Inter" pitchFamily="34" charset="-120"/>
               </a:rPr>
-              <a:t>Tasa 0 contada como historia a rezagados: 9 bajas por mil correos; la mediana, 3.3.</a:t>
+              <a:t>79 mil promociones; la mayor, rescate con Tasa 0 a leads rezagados (Marketing), 13.9 mil.</a:t>
             </a:r>
             <a:endParaRPr lang="en-US" sz="940" dirty="0"/>
           </a:p>
@@ -2982,7 +3072,7 @@
                 <a:ea typeface="Inter" pitchFamily="34" charset="-122"/>
                 <a:cs typeface="Inter" pitchFamily="34" charset="-120"/>
               </a:rPr>
-              <a:t>El lanzamiento de BillPay salió una vez y sumó 80 mil bajas registradas (37 mil en junio).</a:t>
+              <a:t>El recordatorio de Veriff siguió llegando nueve meses seguidos a quien ya se había dado de baja.</a:t>
             </a:r>
             <a:endParaRPr lang="en-US" sz="940" dirty="0"/>
           </a:p>
@@ -3082,7 +3172,7 @@
         <p:spPr>
           <a:xfrm>
             <a:off x="8233041" y="3513009"/>
-            <a:ext cx="3191955" cy="301567"/>
+            <a:ext cx="3452120" cy="301567"/>
           </a:xfrm>
           <a:prstGeom prst="rect">
             <a:avLst/>
@@ -3109,7 +3199,7 @@
                 <a:ea typeface="Inter" pitchFamily="34" charset="-122"/>
                 <a:cs typeface="Inter" pitchFamily="34" charset="-120"/>
               </a:rPr>
-              <a:t>Se manda la misma promoción a listas enteras sin ver si abren; a quien no le interesa, se da de baja.</a:t>
+              <a:t>El filtro de suscripción está en la entrada del Canvas y no en cada paso de correo (lo más probable).</a:t>
             </a:r>
             <a:endParaRPr lang="en-US" sz="920" dirty="0"/>
           </a:p>
@@ -3186,7 +3276,7 @@
         <p:spPr>
           <a:xfrm>
             <a:off x="1409876" y="6077461"/>
-            <a:ext cx="6083570" cy="182206"/>
+            <a:ext cx="6946026" cy="182206"/>
           </a:xfrm>
           <a:prstGeom prst="rect">
             <a:avLst/>
@@ -3213,7 +3303,7 @@
                 <a:ea typeface="Inter" pitchFamily="34" charset="-122"/>
                 <a:cs typeface="Inter" pitchFamily="34" charset="-120"/>
               </a:rPr>
-              <a:t>Quien se da de baja ya no recibe correos: achicar estos ocho envíos protege el contacto.</a:t>
+              <a:t>Ajuste de configuración, no de negocio: filtro de suscripción en cada paso de correo, en una semana.</a:t>
             </a:r>
             <a:endParaRPr lang="en-US" sz="1100" dirty="0"/>
           </a:p>
@@ -3228,7 +3318,7 @@
         <p:spPr>
           <a:xfrm>
             <a:off x="511956" y="6454684"/>
-            <a:ext cx="8750879" cy="135035"/>
+            <a:ext cx="8943364" cy="135035"/>
           </a:xfrm>
           <a:prstGeom prst="rect">
             <a:avLst/>
@@ -3255,7 +3345,7 @@
                 <a:ea typeface="Inter" pitchFamily="34" charset="-122"/>
                 <a:cs typeface="Inter" pitchFamily="34" charset="-120"/>
               </a:rPr>
-              <a:t>Fuente: Braze, envíos por campaña y canal, ene a sep 2026; 169 campañas de email con 300 mil correos o más. Bajas = eventos atribuidos a la campaña, no personas.</a:t>
+              <a:t>Fuente: Braze E5b (correos después de la baja), enero a septiembre 2026; tipo de mensaje del catálogo de campañas (muestra C). Cada punto es un Canvas con su fecha.</a:t>
             </a:r>
             <a:endParaRPr lang="en-US" sz="840" dirty="0"/>
           </a:p>
@@ -3371,7 +3461,7 @@
                 <a:ea typeface="Inter" pitchFamily="34" charset="-122"/>
                 <a:cs typeface="Inter" pitchFamily="34" charset="-120"/>
               </a:rPr>
-              <a:t>Los mensajes que salen porque la persona hizo algo responden siete veces más en correo que los de una lista</a:t>
+              <a:t>Ocho campañas de email causan un tercio de las bajas del correo, y seis casi no reciben clics</a:t>
             </a:r>
             <a:endParaRPr lang="en-US" sz="2210" dirty="0"/>
           </a:p>
@@ -3474,7 +3564,7 @@
         <p:spPr>
           <a:xfrm>
             <a:off x="511956" y="1410328"/>
-            <a:ext cx="3419677" cy="293580"/>
+            <a:ext cx="3576614" cy="293580"/>
           </a:xfrm>
           <a:prstGeom prst="rect">
             <a:avLst/>
@@ -3501,7 +3591,7 @@
                 <a:ea typeface="Inter" pitchFamily="34" charset="-122"/>
                 <a:cs typeface="Inter" pitchFamily="34" charset="-120"/>
               </a:rPr>
-              <a:t>Recordatorios, precobranza, ofertas tras comprar o cancelar, bienvenida y 45 días.</a:t>
+              <a:t>BillPay, Tasa 0, referidos, AnotayGana, Cuesta de Enero, crédito en plazos y Veriff.</a:t>
             </a:r>
             <a:endParaRPr lang="en-US" sz="900" dirty="0"/>
           </a:p>
@@ -3558,7 +3648,7 @@
         <p:spPr>
           <a:xfrm>
             <a:off x="4299556" y="1410328"/>
-            <a:ext cx="3130019" cy="144680"/>
+            <a:ext cx="3453206" cy="144680"/>
           </a:xfrm>
           <a:prstGeom prst="rect">
             <a:avLst/>
@@ -3585,7 +3675,7 @@
                 <a:ea typeface="Inter" pitchFamily="34" charset="-122"/>
                 <a:cs typeface="Inter" pitchFamily="34" charset="-120"/>
               </a:rPr>
-              <a:t>Marketing, Product Growth y Collections (precobranza).</a:t>
+              <a:t>Product Growth 4 campañas, Marketing 3 y Others 1 (BillPay).</a:t>
             </a:r>
             <a:endParaRPr lang="en-US" sz="900" dirty="0"/>
           </a:p>
@@ -3642,7 +3732,7 @@
         <p:spPr>
           <a:xfrm>
             <a:off x="8087156" y="1410328"/>
-            <a:ext cx="3608591" cy="293580"/>
+            <a:ext cx="3424179" cy="144680"/>
           </a:xfrm>
           <a:prstGeom prst="rect">
             <a:avLst/>
@@ -3669,7 +3759,7 @@
                 <a:ea typeface="Inter" pitchFamily="34" charset="-122"/>
                 <a:cs typeface="Inter" pitchFamily="34" charset="-120"/>
               </a:rPr>
-              <a:t>Quien se registró, compró, tiene un pago, canceló o lleva tiempo sin volver.</a:t>
+              <a:t>Toda la base, leads y registrados que nunca tomaron crédito.</a:t>
             </a:r>
             <a:endParaRPr lang="en-US" sz="900" dirty="0"/>
           </a:p>
@@ -3809,7 +3899,7 @@
         <p:spPr>
           <a:xfrm>
             <a:off x="8338224" y="2113834"/>
-            <a:ext cx="3460049" cy="157641"/>
+            <a:ext cx="3460049" cy="315282"/>
           </a:xfrm>
           <a:prstGeom prst="rect">
             <a:avLst/>
@@ -3836,7 +3926,7 @@
                 <a:ea typeface="Inter" pitchFamily="34" charset="-122"/>
                 <a:cs typeface="Inter" pitchFamily="34" charset="-120"/>
               </a:rPr>
-              <a:t>Son 12 % de los mensajes y 57 % de los clics de correo.</a:t>
+              <a:t>Las ocho suman 379 mil de 1.09 M bajas (35 %); seis reciben menos de 10 clics por mil.</a:t>
             </a:r>
             <a:endParaRPr lang="en-US" sz="940" dirty="0"/>
           </a:p>
@@ -3850,7 +3940,7 @@
         </p:nvSpPr>
         <p:spPr>
           <a:xfrm>
-            <a:off x="8094390" y="2356760"/>
+            <a:off x="8094390" y="2514401"/>
             <a:ext cx="164573" cy="164573"/>
           </a:xfrm>
           <a:prstGeom prst="ellipse">
@@ -3870,7 +3960,7 @@
         </p:nvSpPr>
         <p:spPr>
           <a:xfrm>
-            <a:off x="8094390" y="2356760"/>
+            <a:off x="8094390" y="2514401"/>
             <a:ext cx="164573" cy="164573"/>
           </a:xfrm>
           <a:prstGeom prst="rect">
@@ -3909,7 +3999,7 @@
         </p:nvSpPr>
         <p:spPr>
           <a:xfrm>
-            <a:off x="8338224" y="2344568"/>
+            <a:off x="8338224" y="2502209"/>
             <a:ext cx="3460049" cy="315282"/>
           </a:xfrm>
           <a:prstGeom prst="rect">
@@ -3937,7 +4027,7 @@
                 <a:ea typeface="Inter" pitchFamily="34" charset="-122"/>
                 <a:cs typeface="Inter" pitchFamily="34" charset="-120"/>
               </a:rPr>
-              <a:t>Correo, en promedio: 26 clics por mil contra 3.5; push: 49 aperturas por mil contra 10.</a:t>
+              <a:t>Tasa 0 contada como historia a rezagados: 9 bajas por mil correos; la mediana, 3.3.</a:t>
             </a:r>
             <a:endParaRPr lang="en-US" sz="940" dirty="0"/>
           </a:p>
@@ -3951,7 +4041,7 @@
         </p:nvSpPr>
         <p:spPr>
           <a:xfrm>
-            <a:off x="8094390" y="2745135"/>
+            <a:off x="8094390" y="2902776"/>
             <a:ext cx="164573" cy="164573"/>
           </a:xfrm>
           <a:prstGeom prst="ellipse">
@@ -3971,7 +4061,7 @@
         </p:nvSpPr>
         <p:spPr>
           <a:xfrm>
-            <a:off x="8094390" y="2745135"/>
+            <a:off x="8094390" y="2902776"/>
             <a:ext cx="164573" cy="164573"/>
           </a:xfrm>
           <a:prstGeom prst="rect">
@@ -4010,7 +4100,7 @@
         </p:nvSpPr>
         <p:spPr>
           <a:xfrm>
-            <a:off x="8338224" y="2732944"/>
+            <a:off x="8338224" y="2890584"/>
             <a:ext cx="3460049" cy="315282"/>
           </a:xfrm>
           <a:prstGeom prst="rect">
@@ -4038,7 +4128,7 @@
                 <a:ea typeface="Inter" pitchFamily="34" charset="-122"/>
                 <a:cs typeface="Inter" pitchFamily="34" charset="-120"/>
               </a:rPr>
-              <a:t>No todo motivo funciona igual: aniversario y compra en comercio responden poco por correo.</a:t>
+              <a:t>El lanzamiento de BillPay salió una vez y sumó 80 mil bajas registradas (37 mil en junio).</a:t>
             </a:r>
             <a:endParaRPr lang="en-US" sz="940" dirty="0"/>
           </a:p>
@@ -4052,7 +4142,7 @@
         </p:nvSpPr>
         <p:spPr>
           <a:xfrm>
-            <a:off x="8094390" y="3133526"/>
+            <a:off x="8094390" y="3291167"/>
             <a:ext cx="3585349" cy="596503"/>
           </a:xfrm>
           <a:prstGeom prst="rect">
@@ -4072,7 +4162,7 @@
         </p:nvSpPr>
         <p:spPr>
           <a:xfrm>
-            <a:off x="8108858" y="3133526"/>
+            <a:off x="8108858" y="3291167"/>
             <a:ext cx="0" cy="596503"/>
           </a:xfrm>
           <a:prstGeom prst="line">
@@ -4095,7 +4185,7 @@
         </p:nvSpPr>
         <p:spPr>
           <a:xfrm>
-            <a:off x="8233041" y="3194412"/>
+            <a:off x="8233041" y="3352053"/>
             <a:ext cx="3455380" cy="130513"/>
           </a:xfrm>
           <a:prstGeom prst="rect">
@@ -4137,8 +4227,8 @@
         </p:nvSpPr>
         <p:spPr>
           <a:xfrm>
-            <a:off x="8233041" y="3355369"/>
-            <a:ext cx="3242250" cy="301567"/>
+            <a:off x="8233041" y="3513009"/>
+            <a:ext cx="3191955" cy="301567"/>
           </a:xfrm>
           <a:prstGeom prst="rect">
             <a:avLst/>
@@ -4165,7 +4255,7 @@
                 <a:ea typeface="Inter" pitchFamily="34" charset="-122"/>
                 <a:cs typeface="Inter" pitchFamily="34" charset="-120"/>
               </a:rPr>
-              <a:t>La mayoría de las promociones nace de una lista y no de algo que hizo la persona.</a:t>
+              <a:t>Se manda la misma promoción a listas enteras sin ver si abren; a quien no le interesa, se da de baja.</a:t>
             </a:r>
             <a:endParaRPr lang="en-US" sz="920" dirty="0"/>
           </a:p>
@@ -4242,7 +4332,7 @@
         <p:spPr>
           <a:xfrm>
             <a:off x="1409876" y="6077461"/>
-            <a:ext cx="5444646" cy="182206"/>
+            <a:ext cx="6083570" cy="182206"/>
           </a:xfrm>
           <a:prstGeom prst="rect">
             <a:avLst/>
@@ -4269,7 +4359,7 @@
                 <a:ea typeface="Inter" pitchFamily="34" charset="-122"/>
                 <a:cs typeface="Inter" pitchFamily="34" charset="-120"/>
               </a:rPr>
-              <a:t>Cada promoción nueva debe nacer de algo que hizo la persona, no de una lista.</a:t>
+              <a:t>Quien se da de baja ya no recibe correos: achicar estos ocho envíos protege el contacto.</a:t>
             </a:r>
             <a:endParaRPr lang="en-US" sz="1100" dirty="0"/>
           </a:p>
@@ -4284,7 +4374,7 @@
         <p:spPr>
           <a:xfrm>
             <a:off x="511956" y="6454684"/>
-            <a:ext cx="9797281" cy="135035"/>
+            <a:ext cx="8750879" cy="135035"/>
           </a:xfrm>
           <a:prstGeom prst="rect">
             <a:avLst/>
@@ -4311,7 +4401,7 @@
                 <a:ea typeface="Inter" pitchFamily="34" charset="-122"/>
                 <a:cs typeface="Inter" pitchFamily="34" charset="-120"/>
               </a:rPr>
-              <a:t>Fuente: Braze, envíos por campaña y canal, ene a sep 2026. Motivo inferido del nombre de la campaña. Quien hizo algo ya es más activo: sin grupo sin mensajes no se sabe cuánto vende.</a:t>
+              <a:t>Fuente: Braze, envíos por campaña y canal, ene a sep 2026; 169 campañas de email con 300 mil correos o más. Bajas = eventos atribuidos a la campaña, no personas.</a:t>
             </a:r>
             <a:endParaRPr lang="en-US" sz="840" dirty="0"/>
           </a:p>
@@ -4427,7 +4517,7 @@
                 <a:ea typeface="Inter" pitchFamily="34" charset="-122"/>
                 <a:cs typeface="Inter" pitchFamily="34" charset="-120"/>
               </a:rPr>
-              <a:t>Tres de cada diez comunicaciones que mandan no tienen equipo, ticket o nombre en regla: 36 % de los mensajes</a:t>
+              <a:t>Los mensajes que salen porque la persona hizo algo responden siete veces más en correo que los de una lista</a:t>
             </a:r>
             <a:endParaRPr lang="en-US" sz="2210" dirty="0"/>
           </a:p>
@@ -4441,59 +4531,43 @@
         </p:nvSpPr>
         <p:spPr>
           <a:xfrm>
-            <a:off x="511956" y="1161358"/>
-            <a:ext cx="2673112" cy="1214256"/>
-          </a:xfrm>
-          <a:prstGeom prst="rect">
-            <a:avLst/>
-          </a:prstGeom>
-          <a:solidFill>
-            <a:srgbClr val="F4F6F9"/>
-          </a:solidFill>
-          <a:ln/>
-        </p:spPr>
-      </p:sp>
-      <p:sp>
-        <p:nvSpPr>
-          <p:cNvPr id="4" name="Text 2"/>
-          <p:cNvSpPr txBox="1"/>
-          <p:nvPr/>
-        </p:nvSpPr>
-        <p:spPr>
-          <a:xfrm>
-            <a:off x="670350" y="1283130"/>
-            <a:ext cx="2445301" cy="414448"/>
-          </a:xfrm>
-          <a:prstGeom prst="rect">
-            <a:avLst/>
-          </a:prstGeom>
-          <a:noFill/>
-          <a:ln/>
-        </p:spPr>
-        <p:txBody>
-          <a:bodyPr wrap="square" lIns="0" tIns="0" rIns="0" bIns="0" rtlCol="0" anchor="t"/>
-          <a:lstStyle/>
-          <a:p>
-            <a:pPr algn="l" indent="0" marL="0">
-              <a:lnSpc>
-                <a:spcPct val="83000"/>
-              </a:lnSpc>
-              <a:buNone/>
-            </a:pPr>
-            <a:r>
-              <a:rPr lang="en-US" sz="3260" b="1" spc="-70" kern="0" dirty="0">
-                <a:solidFill>
-                  <a:srgbClr val="0B1220"/>
-                </a:solidFill>
-                <a:latin typeface="Inter" pitchFamily="34" charset="0"/>
-                <a:ea typeface="Inter" pitchFamily="34" charset="-122"/>
-                <a:cs typeface="Inter" pitchFamily="34" charset="-120"/>
-              </a:rPr>
-              <a:t>6,144</a:t>
-            </a:r>
-            <a:endParaRPr lang="en-US" sz="3260" dirty="0"/>
-          </a:p>
-        </p:txBody>
+            <a:off x="511956" y="1166180"/>
+            <a:ext cx="11167783" cy="0"/>
+          </a:xfrm>
+          <a:prstGeom prst="line">
+            <a:avLst/>
+          </a:prstGeom>
+          <a:noFill/>
+          <a:ln w="9645">
+            <a:solidFill>
+              <a:srgbClr val="DDE2EA"/>
+            </a:solidFill>
+            <a:prstDash val="solid"/>
+          </a:ln>
+        </p:spPr>
+      </p:sp>
+      <p:sp>
+        <p:nvSpPr>
+          <p:cNvPr id="4" name="Shape 2"/>
+          <p:cNvSpPr/>
+          <p:nvPr/>
+        </p:nvSpPr>
+        <p:spPr>
+          <a:xfrm>
+            <a:off x="511956" y="1798251"/>
+            <a:ext cx="11167783" cy="0"/>
+          </a:xfrm>
+          <a:prstGeom prst="line">
+            <a:avLst/>
+          </a:prstGeom>
+          <a:noFill/>
+          <a:ln w="9645">
+            <a:solidFill>
+              <a:srgbClr val="DDE2EA"/>
+            </a:solidFill>
+            <a:prstDash val="solid"/>
+          </a:ln>
+        </p:spPr>
       </p:sp>
       <p:sp>
         <p:nvSpPr>
@@ -4503,8 +4577,8 @@
         </p:nvSpPr>
         <p:spPr>
           <a:xfrm>
-            <a:off x="670350" y="1740228"/>
-            <a:ext cx="2445301" cy="342409"/>
+            <a:off x="511956" y="1256304"/>
+            <a:ext cx="3718649" cy="129760"/>
           </a:xfrm>
           <a:prstGeom prst="rect">
             <a:avLst/>
@@ -4523,39 +4597,61 @@
               <a:buNone/>
             </a:pPr>
             <a:r>
-              <a:rPr lang="en-US" sz="1040" dirty="0">
-                <a:solidFill>
-                  <a:srgbClr val="0B1220"/>
-                </a:solidFill>
-                <a:latin typeface="Inter" pitchFamily="34" charset="0"/>
-                <a:ea typeface="Inter" pitchFamily="34" charset="-122"/>
-                <a:cs typeface="Inter" pitchFamily="34" charset="-120"/>
-              </a:rPr>
-              <a:t>comunicaciones guardadas; en septiembre solo 341 mandaron algo</a:t>
-            </a:r>
-            <a:endParaRPr lang="en-US" sz="1040" dirty="0"/>
-          </a:p>
-        </p:txBody>
-      </p:sp>
-      <p:sp>
-        <p:nvSpPr>
-          <p:cNvPr id="6" name="Shape 4"/>
-          <p:cNvSpPr/>
-          <p:nvPr/>
-        </p:nvSpPr>
-        <p:spPr>
-          <a:xfrm>
-            <a:off x="3343463" y="1161358"/>
-            <a:ext cx="2673112" cy="1214256"/>
-          </a:xfrm>
-          <a:prstGeom prst="rect">
-            <a:avLst/>
-          </a:prstGeom>
-          <a:solidFill>
-            <a:srgbClr val="F4F6F9"/>
-          </a:solidFill>
-          <a:ln/>
-        </p:spPr>
+              <a:rPr lang="en-US" sz="790" b="1" spc="80" kern="0" dirty="0">
+                <a:solidFill>
+                  <a:srgbClr val="6B7484"/>
+                </a:solidFill>
+                <a:latin typeface="Inter" pitchFamily="34" charset="0"/>
+                <a:ea typeface="Inter" pitchFamily="34" charset="-122"/>
+                <a:cs typeface="Inter" pitchFamily="34" charset="-120"/>
+              </a:rPr>
+              <a:t>QUÉ SE MANDA</a:t>
+            </a:r>
+            <a:endParaRPr lang="en-US" sz="790" dirty="0"/>
+          </a:p>
+        </p:txBody>
+      </p:sp>
+      <p:sp>
+        <p:nvSpPr>
+          <p:cNvPr id="6" name="Text 4"/>
+          <p:cNvSpPr txBox="1"/>
+          <p:nvPr/>
+        </p:nvSpPr>
+        <p:spPr>
+          <a:xfrm>
+            <a:off x="511956" y="1410328"/>
+            <a:ext cx="3419677" cy="293580"/>
+          </a:xfrm>
+          <a:prstGeom prst="rect">
+            <a:avLst/>
+          </a:prstGeom>
+          <a:noFill/>
+          <a:ln/>
+        </p:spPr>
+        <p:txBody>
+          <a:bodyPr wrap="square" lIns="0" tIns="0" rIns="0" bIns="0" rtlCol="0" anchor="t"/>
+          <a:lstStyle/>
+          <a:p>
+            <a:pPr algn="l" indent="0" marL="0">
+              <a:lnSpc>
+                <a:spcPct val="107000"/>
+              </a:lnSpc>
+              <a:buNone/>
+            </a:pPr>
+            <a:r>
+              <a:rPr lang="en-US" sz="900" dirty="0">
+                <a:solidFill>
+                  <a:srgbClr val="3B4556"/>
+                </a:solidFill>
+                <a:latin typeface="Inter" pitchFamily="34" charset="0"/>
+                <a:ea typeface="Inter" pitchFamily="34" charset="-122"/>
+                <a:cs typeface="Inter" pitchFamily="34" charset="-120"/>
+              </a:rPr>
+              <a:t>Recordatorios, precobranza, ofertas tras comprar o cancelar, bienvenida y 45 días.</a:t>
+            </a:r>
+            <a:endParaRPr lang="en-US" sz="900" dirty="0"/>
+          </a:p>
+        </p:txBody>
       </p:sp>
       <p:sp>
         <p:nvSpPr>
@@ -4565,37 +4661,37 @@
         </p:nvSpPr>
         <p:spPr>
           <a:xfrm>
-            <a:off x="3501857" y="1283130"/>
-            <a:ext cx="2445301" cy="414448"/>
-          </a:xfrm>
-          <a:prstGeom prst="rect">
-            <a:avLst/>
-          </a:prstGeom>
-          <a:noFill/>
-          <a:ln/>
-        </p:spPr>
-        <p:txBody>
-          <a:bodyPr wrap="square" lIns="0" tIns="0" rIns="0" bIns="0" rtlCol="0" anchor="t"/>
-          <a:lstStyle/>
-          <a:p>
-            <a:pPr algn="l" indent="0" marL="0">
-              <a:lnSpc>
-                <a:spcPct val="83000"/>
-              </a:lnSpc>
-              <a:buNone/>
-            </a:pPr>
-            <a:r>
-              <a:rPr lang="en-US" sz="3260" b="1" spc="-70" kern="0" dirty="0">
-                <a:solidFill>
-                  <a:srgbClr val="0B1220"/>
-                </a:solidFill>
-                <a:latin typeface="Inter" pitchFamily="34" charset="0"/>
-                <a:ea typeface="Inter" pitchFamily="34" charset="-122"/>
-                <a:cs typeface="Inter" pitchFamily="34" charset="-120"/>
-              </a:rPr>
-              <a:t>183</a:t>
-            </a:r>
-            <a:endParaRPr lang="en-US" sz="3260" dirty="0"/>
+            <a:off x="4299556" y="1256304"/>
+            <a:ext cx="3718649" cy="129760"/>
+          </a:xfrm>
+          <a:prstGeom prst="rect">
+            <a:avLst/>
+          </a:prstGeom>
+          <a:noFill/>
+          <a:ln/>
+        </p:spPr>
+        <p:txBody>
+          <a:bodyPr wrap="square" lIns="0" tIns="0" rIns="0" bIns="0" rtlCol="0" anchor="t"/>
+          <a:lstStyle/>
+          <a:p>
+            <a:pPr algn="l" indent="0" marL="0">
+              <a:lnSpc>
+                <a:spcPct val="107000"/>
+              </a:lnSpc>
+              <a:buNone/>
+            </a:pPr>
+            <a:r>
+              <a:rPr lang="en-US" sz="790" b="1" spc="80" kern="0" dirty="0">
+                <a:solidFill>
+                  <a:srgbClr val="6B7484"/>
+                </a:solidFill>
+                <a:latin typeface="Inter" pitchFamily="34" charset="0"/>
+                <a:ea typeface="Inter" pitchFamily="34" charset="-122"/>
+                <a:cs typeface="Inter" pitchFamily="34" charset="-120"/>
+              </a:rPr>
+              <a:t>QUIÉN</a:t>
+            </a:r>
+            <a:endParaRPr lang="en-US" sz="790" dirty="0"/>
           </a:p>
         </p:txBody>
       </p:sp>
@@ -4607,8 +4703,8 @@
         </p:nvSpPr>
         <p:spPr>
           <a:xfrm>
-            <a:off x="3501857" y="1740228"/>
-            <a:ext cx="2445301" cy="342409"/>
+            <a:off x="4299556" y="1410328"/>
+            <a:ext cx="3130019" cy="144680"/>
           </a:xfrm>
           <a:prstGeom prst="rect">
             <a:avLst/>
@@ -4627,39 +4723,61 @@
               <a:buNone/>
             </a:pPr>
             <a:r>
-              <a:rPr lang="en-US" sz="1040" dirty="0">
-                <a:solidFill>
-                  <a:srgbClr val="0B1220"/>
-                </a:solidFill>
-                <a:latin typeface="Inter" pitchFamily="34" charset="0"/>
-                <a:ea typeface="Inter" pitchFamily="34" charset="-122"/>
-                <a:cs typeface="Inter" pitchFamily="34" charset="-120"/>
-              </a:rPr>
-              <a:t>nombres distintos en el campo de equipo, para 5 equipos</a:t>
-            </a:r>
-            <a:endParaRPr lang="en-US" sz="1040" dirty="0"/>
-          </a:p>
-        </p:txBody>
-      </p:sp>
-      <p:sp>
-        <p:nvSpPr>
-          <p:cNvPr id="9" name="Shape 7"/>
-          <p:cNvSpPr/>
-          <p:nvPr/>
-        </p:nvSpPr>
-        <p:spPr>
-          <a:xfrm>
-            <a:off x="6174969" y="1161358"/>
-            <a:ext cx="2673112" cy="1214256"/>
-          </a:xfrm>
-          <a:prstGeom prst="rect">
-            <a:avLst/>
-          </a:prstGeom>
-          <a:solidFill>
-            <a:srgbClr val="F4F6F9"/>
-          </a:solidFill>
-          <a:ln/>
-        </p:spPr>
+              <a:rPr lang="en-US" sz="900" dirty="0">
+                <a:solidFill>
+                  <a:srgbClr val="3B4556"/>
+                </a:solidFill>
+                <a:latin typeface="Inter" pitchFamily="34" charset="0"/>
+                <a:ea typeface="Inter" pitchFamily="34" charset="-122"/>
+                <a:cs typeface="Inter" pitchFamily="34" charset="-120"/>
+              </a:rPr>
+              <a:t>Marketing, Product Growth y Collections (precobranza).</a:t>
+            </a:r>
+            <a:endParaRPr lang="en-US" sz="900" dirty="0"/>
+          </a:p>
+        </p:txBody>
+      </p:sp>
+      <p:sp>
+        <p:nvSpPr>
+          <p:cNvPr id="9" name="Text 7"/>
+          <p:cNvSpPr txBox="1"/>
+          <p:nvPr/>
+        </p:nvSpPr>
+        <p:spPr>
+          <a:xfrm>
+            <a:off x="8087156" y="1256304"/>
+            <a:ext cx="3718649" cy="129760"/>
+          </a:xfrm>
+          <a:prstGeom prst="rect">
+            <a:avLst/>
+          </a:prstGeom>
+          <a:noFill/>
+          <a:ln/>
+        </p:spPr>
+        <p:txBody>
+          <a:bodyPr wrap="square" lIns="0" tIns="0" rIns="0" bIns="0" rtlCol="0" anchor="t"/>
+          <a:lstStyle/>
+          <a:p>
+            <a:pPr algn="l" indent="0" marL="0">
+              <a:lnSpc>
+                <a:spcPct val="107000"/>
+              </a:lnSpc>
+              <a:buNone/>
+            </a:pPr>
+            <a:r>
+              <a:rPr lang="en-US" sz="790" b="1" spc="80" kern="0" dirty="0">
+                <a:solidFill>
+                  <a:srgbClr val="6B7484"/>
+                </a:solidFill>
+                <a:latin typeface="Inter" pitchFamily="34" charset="0"/>
+                <a:ea typeface="Inter" pitchFamily="34" charset="-122"/>
+                <a:cs typeface="Inter" pitchFamily="34" charset="-120"/>
+              </a:rPr>
+              <a:t>A QUIÉN</a:t>
+            </a:r>
+            <a:endParaRPr lang="en-US" sz="790" dirty="0"/>
+          </a:p>
+        </p:txBody>
       </p:sp>
       <p:sp>
         <p:nvSpPr>
@@ -4669,50 +4787,8 @@
         </p:nvSpPr>
         <p:spPr>
           <a:xfrm>
-            <a:off x="6333364" y="1283130"/>
-            <a:ext cx="2445301" cy="414448"/>
-          </a:xfrm>
-          <a:prstGeom prst="rect">
-            <a:avLst/>
-          </a:prstGeom>
-          <a:noFill/>
-          <a:ln/>
-        </p:spPr>
-        <p:txBody>
-          <a:bodyPr wrap="square" lIns="0" tIns="0" rIns="0" bIns="0" rtlCol="0" anchor="t"/>
-          <a:lstStyle/>
-          <a:p>
-            <a:pPr algn="l" indent="0" marL="0">
-              <a:lnSpc>
-                <a:spcPct val="83000"/>
-              </a:lnSpc>
-              <a:buNone/>
-            </a:pPr>
-            <a:r>
-              <a:rPr lang="en-US" sz="3260" b="1" spc="-70" kern="0" dirty="0">
-                <a:solidFill>
-                  <a:srgbClr val="0B1220"/>
-                </a:solidFill>
-                <a:latin typeface="Inter" pitchFamily="34" charset="0"/>
-                <a:ea typeface="Inter" pitchFamily="34" charset="-122"/>
-                <a:cs typeface="Inter" pitchFamily="34" charset="-120"/>
-              </a:rPr>
-              <a:t>731</a:t>
-            </a:r>
-            <a:endParaRPr lang="en-US" sz="3260" dirty="0"/>
-          </a:p>
-        </p:txBody>
-      </p:sp>
-      <p:sp>
-        <p:nvSpPr>
-          <p:cNvPr id="11" name="Text 9"/>
-          <p:cNvSpPr txBox="1"/>
-          <p:nvPr/>
-        </p:nvSpPr>
-        <p:spPr>
-          <a:xfrm>
-            <a:off x="6333364" y="1740228"/>
-            <a:ext cx="2445301" cy="513614"/>
+            <a:off x="8087156" y="1410328"/>
+            <a:ext cx="3608591" cy="293580"/>
           </a:xfrm>
           <a:prstGeom prst="rect">
             <a:avLst/>
@@ -4731,169 +4807,23 @@
               <a:buNone/>
             </a:pPr>
             <a:r>
-              <a:rPr lang="en-US" sz="1040" dirty="0">
-                <a:solidFill>
-                  <a:srgbClr val="0B1220"/>
-                </a:solidFill>
-                <a:latin typeface="Inter" pitchFamily="34" charset="0"/>
-                <a:ea typeface="Inter" pitchFamily="34" charset="-122"/>
-                <a:cs typeface="Inter" pitchFamily="34" charset="-120"/>
-              </a:rPr>
-              <a:t>nombres de audiencia; 85 M mensajes con segmento "Not Tracked"</a:t>
-            </a:r>
-            <a:endParaRPr lang="en-US" sz="1040" dirty="0"/>
-          </a:p>
-        </p:txBody>
-      </p:sp>
-      <p:sp>
-        <p:nvSpPr>
-          <p:cNvPr id="12" name="Shape 10"/>
-          <p:cNvSpPr/>
-          <p:nvPr/>
-        </p:nvSpPr>
-        <p:spPr>
-          <a:xfrm>
-            <a:off x="9006476" y="1161358"/>
-            <a:ext cx="2673263" cy="1214256"/>
-          </a:xfrm>
-          <a:prstGeom prst="rect">
-            <a:avLst/>
-          </a:prstGeom>
-          <a:solidFill>
-            <a:srgbClr val="E8EEFC"/>
-          </a:solidFill>
-          <a:ln/>
-        </p:spPr>
-      </p:sp>
-      <p:sp>
-        <p:nvSpPr>
-          <p:cNvPr id="13" name="Text 11"/>
-          <p:cNvSpPr txBox="1"/>
-          <p:nvPr/>
-        </p:nvSpPr>
-        <p:spPr>
-          <a:xfrm>
-            <a:off x="9164871" y="1283130"/>
-            <a:ext cx="2445457" cy="414448"/>
-          </a:xfrm>
-          <a:prstGeom prst="rect">
-            <a:avLst/>
-          </a:prstGeom>
-          <a:noFill/>
-          <a:ln/>
-        </p:spPr>
-        <p:txBody>
-          <a:bodyPr wrap="square" lIns="0" tIns="0" rIns="0" bIns="0" rtlCol="0" anchor="t"/>
-          <a:lstStyle/>
-          <a:p>
-            <a:pPr algn="l" indent="0" marL="0">
-              <a:lnSpc>
-                <a:spcPct val="83000"/>
-              </a:lnSpc>
-              <a:buNone/>
-            </a:pPr>
-            <a:r>
-              <a:rPr lang="en-US" sz="3260" b="1" spc="-70" kern="0" dirty="0">
-                <a:solidFill>
-                  <a:srgbClr val="1F4FD8"/>
-                </a:solidFill>
-                <a:latin typeface="Inter" pitchFamily="34" charset="0"/>
-                <a:ea typeface="Inter" pitchFamily="34" charset="-122"/>
-                <a:cs typeface="Inter" pitchFamily="34" charset="-120"/>
-              </a:rPr>
-              <a:t>1 de 3,228</a:t>
-            </a:r>
-            <a:endParaRPr lang="en-US" sz="3260" dirty="0"/>
-          </a:p>
-        </p:txBody>
-      </p:sp>
-      <p:sp>
-        <p:nvSpPr>
-          <p:cNvPr id="14" name="Text 12"/>
-          <p:cNvSpPr txBox="1"/>
-          <p:nvPr/>
-        </p:nvSpPr>
-        <p:spPr>
-          <a:xfrm>
-            <a:off x="9164871" y="1740228"/>
-            <a:ext cx="2445457" cy="171205"/>
-          </a:xfrm>
-          <a:prstGeom prst="rect">
-            <a:avLst/>
-          </a:prstGeom>
-          <a:noFill/>
-          <a:ln/>
-        </p:spPr>
-        <p:txBody>
-          <a:bodyPr wrap="square" lIns="0" tIns="0" rIns="0" bIns="0" rtlCol="0" anchor="t"/>
-          <a:lstStyle/>
-          <a:p>
-            <a:pPr algn="l" indent="0" marL="0">
-              <a:lnSpc>
-                <a:spcPct val="107000"/>
-              </a:lnSpc>
-              <a:buNone/>
-            </a:pPr>
-            <a:r>
-              <a:rPr lang="en-US" sz="1040" dirty="0">
-                <a:solidFill>
-                  <a:srgbClr val="0B1220"/>
-                </a:solidFill>
-                <a:latin typeface="Inter" pitchFamily="34" charset="0"/>
-                <a:ea typeface="Inter" pitchFamily="34" charset="-122"/>
-                <a:cs typeface="Inter" pitchFamily="34" charset="-120"/>
-              </a:rPr>
-              <a:t>Canvas con grupo de control real</a:t>
-            </a:r>
-            <a:endParaRPr lang="en-US" sz="1040" dirty="0"/>
-          </a:p>
-        </p:txBody>
-      </p:sp>
-      <p:sp>
-        <p:nvSpPr>
-          <p:cNvPr id="15" name="Text 13"/>
-          <p:cNvSpPr txBox="1"/>
-          <p:nvPr/>
-        </p:nvSpPr>
-        <p:spPr>
-          <a:xfrm>
-            <a:off x="511956" y="2546216"/>
-            <a:ext cx="7187252" cy="164573"/>
-          </a:xfrm>
-          <a:prstGeom prst="rect">
-            <a:avLst/>
-          </a:prstGeom>
-          <a:noFill/>
-          <a:ln/>
-        </p:spPr>
-        <p:txBody>
-          <a:bodyPr wrap="square" lIns="0" tIns="0" rIns="0" bIns="0" rtlCol="0" anchor="t"/>
-          <a:lstStyle/>
-          <a:p>
-            <a:pPr algn="l" indent="0" marL="0">
-              <a:lnSpc>
-                <a:spcPct val="112000"/>
-              </a:lnSpc>
-              <a:buNone/>
-            </a:pPr>
-            <a:r>
-              <a:rPr lang="en-US" sz="960" b="1" dirty="0">
-                <a:solidFill>
-                  <a:srgbClr val="0B1220"/>
-                </a:solidFill>
-                <a:latin typeface="Inter" pitchFamily="34" charset="0"/>
-                <a:ea typeface="Inter" pitchFamily="34" charset="-122"/>
-                <a:cs typeface="Inter" pitchFamily="34" charset="-120"/>
-              </a:rPr>
-              <a:t>Cada punto es una comunicación que mandó algo en 2026, por problema de orden</a:t>
-            </a:r>
-            <a:endParaRPr lang="en-US" sz="960" dirty="0"/>
+              <a:rPr lang="en-US" sz="900" dirty="0">
+                <a:solidFill>
+                  <a:srgbClr val="3B4556"/>
+                </a:solidFill>
+                <a:latin typeface="Inter" pitchFamily="34" charset="0"/>
+                <a:ea typeface="Inter" pitchFamily="34" charset="-122"/>
+                <a:cs typeface="Inter" pitchFamily="34" charset="-120"/>
+              </a:rPr>
+              <a:t>Quien se registró, compró, tiene un pago, canceló o lleva tiempo sin volver.</a:t>
+            </a:r>
+            <a:endParaRPr lang="en-US" sz="900" dirty="0"/>
           </a:p>
         </p:txBody>
       </p:sp>
       <p:pic>
         <p:nvPicPr>
-          <p:cNvPr id="16" name="Image 0" descr="preencoded.png">    </p:cNvPr>
+          <p:cNvPr id="11" name="Image 0" descr="preencoded.png">    </p:cNvPr>
           <p:cNvPicPr>
             <a:picLocks noChangeAspect="1"/>
           </p:cNvPicPr>
@@ -4907,8 +4837,8 @@
         </p:blipFill>
         <p:spPr>
           <a:xfrm>
-            <a:off x="511956" y="2771676"/>
-            <a:ext cx="6959858" cy="2930522"/>
+            <a:off x="511956" y="1912789"/>
+            <a:ext cx="7289909" cy="3969656"/>
           </a:xfrm>
           <a:prstGeom prst="rect">
             <a:avLst/>
@@ -4917,22 +4847,387 @@
       </p:pic>
       <p:sp>
         <p:nvSpPr>
-          <p:cNvPr id="17" name="Shape 14"/>
+          <p:cNvPr id="12" name="Text 9"/>
+          <p:cNvSpPr txBox="1"/>
+          <p:nvPr/>
+        </p:nvSpPr>
+        <p:spPr>
+          <a:xfrm>
+            <a:off x="8094390" y="1912789"/>
+            <a:ext cx="3711198" cy="115744"/>
+          </a:xfrm>
+          <a:prstGeom prst="rect">
+            <a:avLst/>
+          </a:prstGeom>
+          <a:noFill/>
+          <a:ln/>
+        </p:spPr>
+        <p:txBody>
+          <a:bodyPr wrap="square" lIns="0" tIns="0" rIns="0" bIns="0" rtlCol="0" anchor="t"/>
+          <a:lstStyle/>
+          <a:p>
+            <a:pPr algn="l" indent="0" marL="0">
+              <a:lnSpc>
+                <a:spcPct val="99000"/>
+              </a:lnSpc>
+              <a:buNone/>
+            </a:pPr>
+            <a:r>
+              <a:rPr lang="en-US" sz="790" b="1" spc="80" kern="0" dirty="0">
+                <a:solidFill>
+                  <a:srgbClr val="6B7484"/>
+                </a:solidFill>
+                <a:latin typeface="Inter" pitchFamily="34" charset="0"/>
+                <a:ea typeface="Inter" pitchFamily="34" charset="-122"/>
+                <a:cs typeface="Inter" pitchFamily="34" charset="-120"/>
+              </a:rPr>
+              <a:t>QUÉ DICE LA GRÁFICA</a:t>
+            </a:r>
+            <a:endParaRPr lang="en-US" sz="790" dirty="0"/>
+          </a:p>
+        </p:txBody>
+      </p:sp>
+      <p:sp>
+        <p:nvSpPr>
+          <p:cNvPr id="13" name="Shape 10"/>
           <p:cNvSpPr/>
           <p:nvPr/>
         </p:nvSpPr>
         <p:spPr>
           <a:xfrm>
-            <a:off x="7764640" y="2551039"/>
-            <a:ext cx="3914948" cy="0"/>
+            <a:off x="8094390" y="2126026"/>
+            <a:ext cx="164573" cy="164573"/>
+          </a:xfrm>
+          <a:prstGeom prst="ellipse">
+            <a:avLst/>
+          </a:prstGeom>
+          <a:solidFill>
+            <a:srgbClr val="E8EEFC"/>
+          </a:solidFill>
+          <a:ln/>
+        </p:spPr>
+      </p:sp>
+      <p:sp>
+        <p:nvSpPr>
+          <p:cNvPr id="14" name="Text 11"/>
+          <p:cNvSpPr txBox="1"/>
+          <p:nvPr/>
+        </p:nvSpPr>
+        <p:spPr>
+          <a:xfrm>
+            <a:off x="8094390" y="2126026"/>
+            <a:ext cx="164573" cy="164573"/>
+          </a:xfrm>
+          <a:prstGeom prst="rect">
+            <a:avLst/>
+          </a:prstGeom>
+          <a:noFill/>
+          <a:ln/>
+        </p:spPr>
+        <p:txBody>
+          <a:bodyPr wrap="square" lIns="0" tIns="0" rIns="0" bIns="0" rtlCol="0" anchor="ctr"/>
+          <a:lstStyle/>
+          <a:p>
+            <a:pPr algn="ctr" indent="0" marL="0">
+              <a:buNone/>
+            </a:pPr>
+            <a:r>
+              <a:rPr lang="en-US" sz="768" b="1" dirty="0">
+                <a:solidFill>
+                  <a:srgbClr val="1F4FD8"/>
+                </a:solidFill>
+                <a:latin typeface="Inter" pitchFamily="34" charset="0"/>
+                <a:ea typeface="Inter" pitchFamily="34" charset="-122"/>
+                <a:cs typeface="Inter" pitchFamily="34" charset="-120"/>
+              </a:rPr>
+              <a:t>1</a:t>
+            </a:r>
+            <a:endParaRPr lang="en-US" sz="768" dirty="0"/>
+          </a:p>
+        </p:txBody>
+      </p:sp>
+      <p:sp>
+        <p:nvSpPr>
+          <p:cNvPr id="15" name="Text 12"/>
+          <p:cNvSpPr txBox="1"/>
+          <p:nvPr/>
+        </p:nvSpPr>
+        <p:spPr>
+          <a:xfrm>
+            <a:off x="8338224" y="2113834"/>
+            <a:ext cx="3460049" cy="157641"/>
+          </a:xfrm>
+          <a:prstGeom prst="rect">
+            <a:avLst/>
+          </a:prstGeom>
+          <a:noFill/>
+          <a:ln/>
+        </p:spPr>
+        <p:txBody>
+          <a:bodyPr wrap="square" lIns="0" tIns="0" rIns="0" bIns="0" rtlCol="0" anchor="t"/>
+          <a:lstStyle/>
+          <a:p>
+            <a:pPr algn="l" indent="0" marL="0">
+              <a:lnSpc>
+                <a:spcPct val="109000"/>
+              </a:lnSpc>
+              <a:buNone/>
+            </a:pPr>
+            <a:r>
+              <a:rPr lang="en-US" sz="940" dirty="0">
+                <a:solidFill>
+                  <a:srgbClr val="3B4556"/>
+                </a:solidFill>
+                <a:latin typeface="Inter" pitchFamily="34" charset="0"/>
+                <a:ea typeface="Inter" pitchFamily="34" charset="-122"/>
+                <a:cs typeface="Inter" pitchFamily="34" charset="-120"/>
+              </a:rPr>
+              <a:t>Son 12 % de los mensajes y 57 % de los clics de correo.</a:t>
+            </a:r>
+            <a:endParaRPr lang="en-US" sz="940" dirty="0"/>
+          </a:p>
+        </p:txBody>
+      </p:sp>
+      <p:sp>
+        <p:nvSpPr>
+          <p:cNvPr id="16" name="Shape 13"/>
+          <p:cNvSpPr/>
+          <p:nvPr/>
+        </p:nvSpPr>
+        <p:spPr>
+          <a:xfrm>
+            <a:off x="8094390" y="2356760"/>
+            <a:ext cx="164573" cy="164573"/>
+          </a:xfrm>
+          <a:prstGeom prst="ellipse">
+            <a:avLst/>
+          </a:prstGeom>
+          <a:solidFill>
+            <a:srgbClr val="E8EEFC"/>
+          </a:solidFill>
+          <a:ln/>
+        </p:spPr>
+      </p:sp>
+      <p:sp>
+        <p:nvSpPr>
+          <p:cNvPr id="17" name="Text 14"/>
+          <p:cNvSpPr txBox="1"/>
+          <p:nvPr/>
+        </p:nvSpPr>
+        <p:spPr>
+          <a:xfrm>
+            <a:off x="8094390" y="2356760"/>
+            <a:ext cx="164573" cy="164573"/>
+          </a:xfrm>
+          <a:prstGeom prst="rect">
+            <a:avLst/>
+          </a:prstGeom>
+          <a:noFill/>
+          <a:ln/>
+        </p:spPr>
+        <p:txBody>
+          <a:bodyPr wrap="square" lIns="0" tIns="0" rIns="0" bIns="0" rtlCol="0" anchor="ctr"/>
+          <a:lstStyle/>
+          <a:p>
+            <a:pPr algn="ctr" indent="0" marL="0">
+              <a:buNone/>
+            </a:pPr>
+            <a:r>
+              <a:rPr lang="en-US" sz="768" b="1" dirty="0">
+                <a:solidFill>
+                  <a:srgbClr val="1F4FD8"/>
+                </a:solidFill>
+                <a:latin typeface="Inter" pitchFamily="34" charset="0"/>
+                <a:ea typeface="Inter" pitchFamily="34" charset="-122"/>
+                <a:cs typeface="Inter" pitchFamily="34" charset="-120"/>
+              </a:rPr>
+              <a:t>2</a:t>
+            </a:r>
+            <a:endParaRPr lang="en-US" sz="768" dirty="0"/>
+          </a:p>
+        </p:txBody>
+      </p:sp>
+      <p:sp>
+        <p:nvSpPr>
+          <p:cNvPr id="18" name="Text 15"/>
+          <p:cNvSpPr txBox="1"/>
+          <p:nvPr/>
+        </p:nvSpPr>
+        <p:spPr>
+          <a:xfrm>
+            <a:off x="8338224" y="2344568"/>
+            <a:ext cx="3460049" cy="315282"/>
+          </a:xfrm>
+          <a:prstGeom prst="rect">
+            <a:avLst/>
+          </a:prstGeom>
+          <a:noFill/>
+          <a:ln/>
+        </p:spPr>
+        <p:txBody>
+          <a:bodyPr wrap="square" lIns="0" tIns="0" rIns="0" bIns="0" rtlCol="0" anchor="t"/>
+          <a:lstStyle/>
+          <a:p>
+            <a:pPr algn="l" indent="0" marL="0">
+              <a:lnSpc>
+                <a:spcPct val="109000"/>
+              </a:lnSpc>
+              <a:buNone/>
+            </a:pPr>
+            <a:r>
+              <a:rPr lang="en-US" sz="940" dirty="0">
+                <a:solidFill>
+                  <a:srgbClr val="3B4556"/>
+                </a:solidFill>
+                <a:latin typeface="Inter" pitchFamily="34" charset="0"/>
+                <a:ea typeface="Inter" pitchFamily="34" charset="-122"/>
+                <a:cs typeface="Inter" pitchFamily="34" charset="-120"/>
+              </a:rPr>
+              <a:t>Correo, en promedio: 26 clics por mil contra 3.5; push: 49 aperturas por mil contra 10.</a:t>
+            </a:r>
+            <a:endParaRPr lang="en-US" sz="940" dirty="0"/>
+          </a:p>
+        </p:txBody>
+      </p:sp>
+      <p:sp>
+        <p:nvSpPr>
+          <p:cNvPr id="19" name="Shape 16"/>
+          <p:cNvSpPr/>
+          <p:nvPr/>
+        </p:nvSpPr>
+        <p:spPr>
+          <a:xfrm>
+            <a:off x="8094390" y="2745135"/>
+            <a:ext cx="164573" cy="164573"/>
+          </a:xfrm>
+          <a:prstGeom prst="ellipse">
+            <a:avLst/>
+          </a:prstGeom>
+          <a:solidFill>
+            <a:srgbClr val="E8EEFC"/>
+          </a:solidFill>
+          <a:ln/>
+        </p:spPr>
+      </p:sp>
+      <p:sp>
+        <p:nvSpPr>
+          <p:cNvPr id="20" name="Text 17"/>
+          <p:cNvSpPr txBox="1"/>
+          <p:nvPr/>
+        </p:nvSpPr>
+        <p:spPr>
+          <a:xfrm>
+            <a:off x="8094390" y="2745135"/>
+            <a:ext cx="164573" cy="164573"/>
+          </a:xfrm>
+          <a:prstGeom prst="rect">
+            <a:avLst/>
+          </a:prstGeom>
+          <a:noFill/>
+          <a:ln/>
+        </p:spPr>
+        <p:txBody>
+          <a:bodyPr wrap="square" lIns="0" tIns="0" rIns="0" bIns="0" rtlCol="0" anchor="ctr"/>
+          <a:lstStyle/>
+          <a:p>
+            <a:pPr algn="ctr" indent="0" marL="0">
+              <a:buNone/>
+            </a:pPr>
+            <a:r>
+              <a:rPr lang="en-US" sz="768" b="1" dirty="0">
+                <a:solidFill>
+                  <a:srgbClr val="1F4FD8"/>
+                </a:solidFill>
+                <a:latin typeface="Inter" pitchFamily="34" charset="0"/>
+                <a:ea typeface="Inter" pitchFamily="34" charset="-122"/>
+                <a:cs typeface="Inter" pitchFamily="34" charset="-120"/>
+              </a:rPr>
+              <a:t>3</a:t>
+            </a:r>
+            <a:endParaRPr lang="en-US" sz="768" dirty="0"/>
+          </a:p>
+        </p:txBody>
+      </p:sp>
+      <p:sp>
+        <p:nvSpPr>
+          <p:cNvPr id="21" name="Text 18"/>
+          <p:cNvSpPr txBox="1"/>
+          <p:nvPr/>
+        </p:nvSpPr>
+        <p:spPr>
+          <a:xfrm>
+            <a:off x="8338224" y="2732944"/>
+            <a:ext cx="3460049" cy="315282"/>
+          </a:xfrm>
+          <a:prstGeom prst="rect">
+            <a:avLst/>
+          </a:prstGeom>
+          <a:noFill/>
+          <a:ln/>
+        </p:spPr>
+        <p:txBody>
+          <a:bodyPr wrap="square" lIns="0" tIns="0" rIns="0" bIns="0" rtlCol="0" anchor="t"/>
+          <a:lstStyle/>
+          <a:p>
+            <a:pPr algn="l" indent="0" marL="0">
+              <a:lnSpc>
+                <a:spcPct val="109000"/>
+              </a:lnSpc>
+              <a:buNone/>
+            </a:pPr>
+            <a:r>
+              <a:rPr lang="en-US" sz="940" dirty="0">
+                <a:solidFill>
+                  <a:srgbClr val="3B4556"/>
+                </a:solidFill>
+                <a:latin typeface="Inter" pitchFamily="34" charset="0"/>
+                <a:ea typeface="Inter" pitchFamily="34" charset="-122"/>
+                <a:cs typeface="Inter" pitchFamily="34" charset="-120"/>
+              </a:rPr>
+              <a:t>No todo motivo funciona igual: aniversario y compra en comercio responden poco por correo.</a:t>
+            </a:r>
+            <a:endParaRPr lang="en-US" sz="940" dirty="0"/>
+          </a:p>
+        </p:txBody>
+      </p:sp>
+      <p:sp>
+        <p:nvSpPr>
+          <p:cNvPr id="22" name="Shape 19"/>
+          <p:cNvSpPr/>
+          <p:nvPr/>
+        </p:nvSpPr>
+        <p:spPr>
+          <a:xfrm>
+            <a:off x="8094390" y="3133526"/>
+            <a:ext cx="3585349" cy="596503"/>
+          </a:xfrm>
+          <a:prstGeom prst="rect">
+            <a:avLst/>
+          </a:prstGeom>
+          <a:solidFill>
+            <a:srgbClr val="F4F6F9"/>
+          </a:solidFill>
+          <a:ln/>
+        </p:spPr>
+      </p:sp>
+      <p:sp>
+        <p:nvSpPr>
+          <p:cNvPr id="23" name="Shape 20"/>
+          <p:cNvSpPr/>
+          <p:nvPr/>
+        </p:nvSpPr>
+        <p:spPr>
+          <a:xfrm>
+            <a:off x="8108858" y="3133526"/>
+            <a:ext cx="0" cy="596503"/>
           </a:xfrm>
           <a:prstGeom prst="line">
             <a:avLst/>
           </a:prstGeom>
           <a:noFill/>
-          <a:ln w="9645">
+          <a:ln w="28936">
             <a:solidFill>
-              <a:srgbClr val="DDE2EA"/>
+              <a:srgbClr val="0B1220"/>
             </a:solidFill>
             <a:prstDash val="solid"/>
           </a:ln>
@@ -4940,16 +5235,100 @@
       </p:sp>
       <p:sp>
         <p:nvSpPr>
-          <p:cNvPr id="18" name="Shape 15"/>
+          <p:cNvPr id="24" name="Text 21"/>
+          <p:cNvSpPr txBox="1"/>
+          <p:nvPr/>
+        </p:nvSpPr>
+        <p:spPr>
+          <a:xfrm>
+            <a:off x="8233041" y="3194412"/>
+            <a:ext cx="3455380" cy="130513"/>
+          </a:xfrm>
+          <a:prstGeom prst="rect">
+            <a:avLst/>
+          </a:prstGeom>
+          <a:noFill/>
+          <a:ln/>
+        </p:spPr>
+        <p:txBody>
+          <a:bodyPr wrap="square" lIns="0" tIns="0" rIns="0" bIns="0" rtlCol="0" anchor="t"/>
+          <a:lstStyle/>
+          <a:p>
+            <a:pPr algn="l" indent="0" marL="0">
+              <a:lnSpc>
+                <a:spcPct val="111000"/>
+              </a:lnSpc>
+              <a:buNone/>
+            </a:pPr>
+            <a:r>
+              <a:rPr lang="en-US" sz="770" b="1" spc="80" kern="0" dirty="0">
+                <a:solidFill>
+                  <a:srgbClr val="6B7484"/>
+                </a:solidFill>
+                <a:latin typeface="Inter" pitchFamily="34" charset="0"/>
+                <a:ea typeface="Inter" pitchFamily="34" charset="-122"/>
+                <a:cs typeface="Inter" pitchFamily="34" charset="-120"/>
+              </a:rPr>
+              <a:t>CAUSA RAÍZ</a:t>
+            </a:r>
+            <a:endParaRPr lang="en-US" sz="770" dirty="0"/>
+          </a:p>
+        </p:txBody>
+      </p:sp>
+      <p:sp>
+        <p:nvSpPr>
+          <p:cNvPr id="25" name="Text 22"/>
+          <p:cNvSpPr txBox="1"/>
+          <p:nvPr/>
+        </p:nvSpPr>
+        <p:spPr>
+          <a:xfrm>
+            <a:off x="8233041" y="3355369"/>
+            <a:ext cx="3242250" cy="301567"/>
+          </a:xfrm>
+          <a:prstGeom prst="rect">
+            <a:avLst/>
+          </a:prstGeom>
+          <a:noFill/>
+          <a:ln/>
+        </p:spPr>
+        <p:txBody>
+          <a:bodyPr wrap="square" lIns="0" tIns="0" rIns="0" bIns="0" rtlCol="0" anchor="t"/>
+          <a:lstStyle/>
+          <a:p>
+            <a:pPr algn="l" indent="0" marL="0">
+              <a:lnSpc>
+                <a:spcPct val="111000"/>
+              </a:lnSpc>
+              <a:buNone/>
+            </a:pPr>
+            <a:r>
+              <a:rPr lang="en-US" sz="920" dirty="0">
+                <a:solidFill>
+                  <a:srgbClr val="0B1220"/>
+                </a:solidFill>
+                <a:latin typeface="Inter" pitchFamily="34" charset="0"/>
+                <a:ea typeface="Inter" pitchFamily="34" charset="-122"/>
+                <a:cs typeface="Inter" pitchFamily="34" charset="-120"/>
+              </a:rPr>
+              <a:t>La mayoría de las promociones nace de una lista y no de algo que hizo la persona.</a:t>
+            </a:r>
+            <a:endParaRPr lang="en-US" sz="920" dirty="0"/>
+          </a:p>
+        </p:txBody>
+      </p:sp>
+      <p:sp>
+        <p:nvSpPr>
+          <p:cNvPr id="26" name="Shape 23"/>
           <p:cNvSpPr/>
           <p:nvPr/>
         </p:nvSpPr>
         <p:spPr>
           <a:xfrm>
-            <a:off x="7764640" y="2641162"/>
-            <a:ext cx="207224" cy="207224"/>
-          </a:xfrm>
-          <a:prstGeom prst="ellipse">
+            <a:off x="511956" y="5992160"/>
+            <a:ext cx="11167783" cy="352808"/>
+          </a:xfrm>
+          <a:prstGeom prst="rect">
             <a:avLst/>
           </a:prstGeom>
           <a:solidFill>
@@ -4960,416 +5339,7 @@
       </p:sp>
       <p:sp>
         <p:nvSpPr>
-          <p:cNvPr id="19" name="Text 16"/>
-          <p:cNvSpPr txBox="1"/>
-          <p:nvPr/>
-        </p:nvSpPr>
-        <p:spPr>
-          <a:xfrm>
-            <a:off x="7764640" y="2641162"/>
-            <a:ext cx="231729" cy="207224"/>
-          </a:xfrm>
-          <a:prstGeom prst="rect">
-            <a:avLst/>
-          </a:prstGeom>
-          <a:noFill/>
-          <a:ln/>
-        </p:spPr>
-        <p:txBody>
-          <a:bodyPr wrap="square" lIns="0" tIns="0" rIns="0" bIns="0" rtlCol="0" anchor="ctr"/>
-          <a:lstStyle/>
-          <a:p>
-            <a:pPr algn="ctr" indent="0" marL="0">
-              <a:lnSpc>
-                <a:spcPct val="112000"/>
-              </a:lnSpc>
-              <a:buNone/>
-            </a:pPr>
-            <a:r>
-              <a:rPr lang="en-US" sz="910" b="1" dirty="0">
-                <a:solidFill>
-                  <a:srgbClr val="1F4FD8"/>
-                </a:solidFill>
-                <a:latin typeface="Inter" pitchFamily="34" charset="0"/>
-                <a:ea typeface="Inter" pitchFamily="34" charset="-122"/>
-                <a:cs typeface="Inter" pitchFamily="34" charset="-120"/>
-              </a:rPr>
-              <a:t>1</a:t>
-            </a:r>
-            <a:endParaRPr lang="en-US" sz="910" dirty="0"/>
-          </a:p>
-        </p:txBody>
-      </p:sp>
-      <p:sp>
-        <p:nvSpPr>
-          <p:cNvPr id="20" name="Text 17"/>
-          <p:cNvSpPr txBox="1"/>
-          <p:nvPr/>
-        </p:nvSpPr>
-        <p:spPr>
-          <a:xfrm>
-            <a:off x="8069372" y="2641162"/>
-            <a:ext cx="3736811" cy="362001"/>
-          </a:xfrm>
-          <a:prstGeom prst="rect">
-            <a:avLst/>
-          </a:prstGeom>
-          <a:noFill/>
-          <a:ln/>
-        </p:spPr>
-        <p:txBody>
-          <a:bodyPr wrap="square" lIns="0" tIns="0" rIns="0" bIns="0" rtlCol="0" anchor="t"/>
-          <a:lstStyle/>
-          <a:p>
-            <a:pPr algn="l" indent="0" marL="0">
-              <a:lnSpc>
-                <a:spcPct val="112000"/>
-              </a:lnSpc>
-              <a:buNone/>
-            </a:pPr>
-            <a:r>
-              <a:rPr lang="en-US" sz="1060" b="1" dirty="0">
-                <a:solidFill>
-                  <a:srgbClr val="0B1220"/>
-                </a:solidFill>
-                <a:latin typeface="Inter" pitchFamily="34" charset="0"/>
-                <a:ea typeface="Inter" pitchFamily="34" charset="-122"/>
-                <a:cs typeface="Inter" pitchFamily="34" charset="-120"/>
-              </a:rPr>
-              <a:t>Nombres.</a:t>
-            </a:r>
-            <a:pPr algn="l" indent="0" marL="0">
-              <a:lnSpc>
-                <a:spcPct val="112000"/>
-              </a:lnSpc>
-              <a:buNone/>
-            </a:pPr>
-            <a:r>
-              <a:rPr lang="en-US" sz="1060" dirty="0">
-                <a:solidFill>
-                  <a:srgbClr val="0B1220"/>
-                </a:solidFill>
-                <a:latin typeface="Inter" pitchFamily="34" charset="0"/>
-                <a:ea typeface="Inter" pitchFamily="34" charset="-122"/>
-                <a:cs typeface="Inter" pitchFamily="34" charset="-120"/>
-              </a:rPr>
-              <a:t> 1,053 fuera de la convención: "Recurentes", "Recurrentess", "Softnactive", fecha "202600903".</a:t>
-            </a:r>
-            <a:endParaRPr lang="en-US" sz="1060" dirty="0"/>
-          </a:p>
-        </p:txBody>
-      </p:sp>
-      <p:sp>
-        <p:nvSpPr>
-          <p:cNvPr id="21" name="Shape 18"/>
-          <p:cNvSpPr/>
-          <p:nvPr/>
-        </p:nvSpPr>
-        <p:spPr>
-          <a:xfrm>
-            <a:off x="7764640" y="3081080"/>
-            <a:ext cx="3914948" cy="0"/>
-          </a:xfrm>
-          <a:prstGeom prst="line">
-            <a:avLst/>
-          </a:prstGeom>
-          <a:noFill/>
-          <a:ln w="9645">
-            <a:solidFill>
-              <a:srgbClr val="DDE2EA"/>
-            </a:solidFill>
-            <a:prstDash val="solid"/>
-          </a:ln>
-        </p:spPr>
-      </p:sp>
-      <p:sp>
-        <p:nvSpPr>
-          <p:cNvPr id="22" name="Shape 19"/>
-          <p:cNvSpPr/>
-          <p:nvPr/>
-        </p:nvSpPr>
-        <p:spPr>
-          <a:xfrm>
-            <a:off x="7764640" y="3171203"/>
-            <a:ext cx="207224" cy="207224"/>
-          </a:xfrm>
-          <a:prstGeom prst="ellipse">
-            <a:avLst/>
-          </a:prstGeom>
-          <a:solidFill>
-            <a:srgbClr val="E8EEFC"/>
-          </a:solidFill>
-          <a:ln/>
-        </p:spPr>
-      </p:sp>
-      <p:sp>
-        <p:nvSpPr>
-          <p:cNvPr id="23" name="Text 20"/>
-          <p:cNvSpPr txBox="1"/>
-          <p:nvPr/>
-        </p:nvSpPr>
-        <p:spPr>
-          <a:xfrm>
-            <a:off x="7764640" y="3171203"/>
-            <a:ext cx="231729" cy="207224"/>
-          </a:xfrm>
-          <a:prstGeom prst="rect">
-            <a:avLst/>
-          </a:prstGeom>
-          <a:noFill/>
-          <a:ln/>
-        </p:spPr>
-        <p:txBody>
-          <a:bodyPr wrap="square" lIns="0" tIns="0" rIns="0" bIns="0" rtlCol="0" anchor="ctr"/>
-          <a:lstStyle/>
-          <a:p>
-            <a:pPr algn="ctr" indent="0" marL="0">
-              <a:lnSpc>
-                <a:spcPct val="112000"/>
-              </a:lnSpc>
-              <a:buNone/>
-            </a:pPr>
-            <a:r>
-              <a:rPr lang="en-US" sz="910" b="1" dirty="0">
-                <a:solidFill>
-                  <a:srgbClr val="1F4FD8"/>
-                </a:solidFill>
-                <a:latin typeface="Inter" pitchFamily="34" charset="0"/>
-                <a:ea typeface="Inter" pitchFamily="34" charset="-122"/>
-                <a:cs typeface="Inter" pitchFamily="34" charset="-120"/>
-              </a:rPr>
-              <a:t>2</a:t>
-            </a:r>
-            <a:endParaRPr lang="en-US" sz="910" dirty="0"/>
-          </a:p>
-        </p:txBody>
-      </p:sp>
-      <p:sp>
-        <p:nvSpPr>
-          <p:cNvPr id="24" name="Text 21"/>
-          <p:cNvSpPr txBox="1"/>
-          <p:nvPr/>
-        </p:nvSpPr>
-        <p:spPr>
-          <a:xfrm>
-            <a:off x="8069372" y="3171203"/>
-            <a:ext cx="3736811" cy="543002"/>
-          </a:xfrm>
-          <a:prstGeom prst="rect">
-            <a:avLst/>
-          </a:prstGeom>
-          <a:noFill/>
-          <a:ln/>
-        </p:spPr>
-        <p:txBody>
-          <a:bodyPr wrap="square" lIns="0" tIns="0" rIns="0" bIns="0" rtlCol="0" anchor="t"/>
-          <a:lstStyle/>
-          <a:p>
-            <a:pPr algn="l" indent="0" marL="0">
-              <a:lnSpc>
-                <a:spcPct val="112000"/>
-              </a:lnSpc>
-              <a:buNone/>
-            </a:pPr>
-            <a:r>
-              <a:rPr lang="en-US" sz="1060" b="1" dirty="0">
-                <a:solidFill>
-                  <a:srgbClr val="0B1220"/>
-                </a:solidFill>
-                <a:latin typeface="Inter" pitchFamily="34" charset="0"/>
-                <a:ea typeface="Inter" pitchFamily="34" charset="-122"/>
-                <a:cs typeface="Inter" pitchFamily="34" charset="-120"/>
-              </a:rPr>
-              <a:t>Equipo y ticket.</a:t>
-            </a:r>
-            <a:pPr algn="l" indent="0" marL="0">
-              <a:lnSpc>
-                <a:spcPct val="112000"/>
-              </a:lnSpc>
-              <a:buNone/>
-            </a:pPr>
-            <a:r>
-              <a:rPr lang="en-US" sz="1060" dirty="0">
-                <a:solidFill>
-                  <a:srgbClr val="0B1220"/>
-                </a:solidFill>
-                <a:latin typeface="Inter" pitchFamily="34" charset="0"/>
-                <a:ea typeface="Inter" pitchFamily="34" charset="-122"/>
-                <a:cs typeface="Inter" pitchFamily="34" charset="-120"/>
-              </a:rPr>
-              <a:t> "Copy of Copy of Copy of Copy of Marketing" es un equipo; T0000 y B0000 sirven de ticket, y B0171 cubre 362.</a:t>
-            </a:r>
-            <a:endParaRPr lang="en-US" sz="1060" dirty="0"/>
-          </a:p>
-        </p:txBody>
-      </p:sp>
-      <p:sp>
-        <p:nvSpPr>
-          <p:cNvPr id="25" name="Shape 22"/>
-          <p:cNvSpPr/>
-          <p:nvPr/>
-        </p:nvSpPr>
-        <p:spPr>
-          <a:xfrm>
-            <a:off x="7764640" y="3792121"/>
-            <a:ext cx="3914948" cy="0"/>
-          </a:xfrm>
-          <a:prstGeom prst="line">
-            <a:avLst/>
-          </a:prstGeom>
-          <a:noFill/>
-          <a:ln w="9645">
-            <a:solidFill>
-              <a:srgbClr val="DDE2EA"/>
-            </a:solidFill>
-            <a:prstDash val="solid"/>
-          </a:ln>
-        </p:spPr>
-      </p:sp>
-      <p:sp>
-        <p:nvSpPr>
-          <p:cNvPr id="26" name="Shape 23"/>
-          <p:cNvSpPr/>
-          <p:nvPr/>
-        </p:nvSpPr>
-        <p:spPr>
-          <a:xfrm>
-            <a:off x="7764640" y="3882245"/>
-            <a:ext cx="207224" cy="207224"/>
-          </a:xfrm>
-          <a:prstGeom prst="ellipse">
-            <a:avLst/>
-          </a:prstGeom>
-          <a:solidFill>
-            <a:srgbClr val="E8EEFC"/>
-          </a:solidFill>
-          <a:ln/>
-        </p:spPr>
-      </p:sp>
-      <p:sp>
-        <p:nvSpPr>
           <p:cNvPr id="27" name="Text 24"/>
-          <p:cNvSpPr txBox="1"/>
-          <p:nvPr/>
-        </p:nvSpPr>
-        <p:spPr>
-          <a:xfrm>
-            <a:off x="7764640" y="3882245"/>
-            <a:ext cx="231729" cy="207224"/>
-          </a:xfrm>
-          <a:prstGeom prst="rect">
-            <a:avLst/>
-          </a:prstGeom>
-          <a:noFill/>
-          <a:ln/>
-        </p:spPr>
-        <p:txBody>
-          <a:bodyPr wrap="square" lIns="0" tIns="0" rIns="0" bIns="0" rtlCol="0" anchor="ctr"/>
-          <a:lstStyle/>
-          <a:p>
-            <a:pPr algn="ctr" indent="0" marL="0">
-              <a:lnSpc>
-                <a:spcPct val="112000"/>
-              </a:lnSpc>
-              <a:buNone/>
-            </a:pPr>
-            <a:r>
-              <a:rPr lang="en-US" sz="910" b="1" dirty="0">
-                <a:solidFill>
-                  <a:srgbClr val="1F4FD8"/>
-                </a:solidFill>
-                <a:latin typeface="Inter" pitchFamily="34" charset="0"/>
-                <a:ea typeface="Inter" pitchFamily="34" charset="-122"/>
-                <a:cs typeface="Inter" pitchFamily="34" charset="-120"/>
-              </a:rPr>
-              <a:t>3</a:t>
-            </a:r>
-            <a:endParaRPr lang="en-US" sz="910" dirty="0"/>
-          </a:p>
-        </p:txBody>
-      </p:sp>
-      <p:sp>
-        <p:nvSpPr>
-          <p:cNvPr id="28" name="Text 25"/>
-          <p:cNvSpPr txBox="1"/>
-          <p:nvPr/>
-        </p:nvSpPr>
-        <p:spPr>
-          <a:xfrm>
-            <a:off x="8069372" y="3882245"/>
-            <a:ext cx="3736811" cy="543002"/>
-          </a:xfrm>
-          <a:prstGeom prst="rect">
-            <a:avLst/>
-          </a:prstGeom>
-          <a:noFill/>
-          <a:ln/>
-        </p:spPr>
-        <p:txBody>
-          <a:bodyPr wrap="square" lIns="0" tIns="0" rIns="0" bIns="0" rtlCol="0" anchor="t"/>
-          <a:lstStyle/>
-          <a:p>
-            <a:pPr algn="l" indent="0" marL="0">
-              <a:lnSpc>
-                <a:spcPct val="112000"/>
-              </a:lnSpc>
-              <a:buNone/>
-            </a:pPr>
-            <a:r>
-              <a:rPr lang="en-US" sz="1060" b="1" dirty="0">
-                <a:solidFill>
-                  <a:srgbClr val="0B1220"/>
-                </a:solidFill>
-                <a:latin typeface="Inter" pitchFamily="34" charset="0"/>
-                <a:ea typeface="Inter" pitchFamily="34" charset="-122"/>
-                <a:cs typeface="Inter" pitchFamily="34" charset="-120"/>
-              </a:rPr>
-              <a:t>Copias.</a:t>
-            </a:r>
-            <a:pPr algn="l" indent="0" marL="0">
-              <a:lnSpc>
-                <a:spcPct val="112000"/>
-              </a:lnSpc>
-              <a:buNone/>
-            </a:pPr>
-            <a:r>
-              <a:rPr lang="en-US" sz="1060" dirty="0">
-                <a:solidFill>
-                  <a:srgbClr val="0B1220"/>
-                </a:solidFill>
-                <a:latin typeface="Inter" pitchFamily="34" charset="0"/>
-                <a:ea typeface="Inter" pitchFamily="34" charset="-122"/>
-                <a:cs typeface="Inter" pitchFamily="34" charset="-120"/>
-              </a:rPr>
-              <a:t> 63 % de lo que manda cada mes se creó ese mes: se arma una campaña nueva en vez de reusar la anterior.</a:t>
-            </a:r>
-            <a:endParaRPr lang="en-US" sz="1060" dirty="0"/>
-          </a:p>
-        </p:txBody>
-      </p:sp>
-      <p:sp>
-        <p:nvSpPr>
-          <p:cNvPr id="29" name="Shape 26"/>
-          <p:cNvSpPr/>
-          <p:nvPr/>
-        </p:nvSpPr>
-        <p:spPr>
-          <a:xfrm>
-            <a:off x="511956" y="5992160"/>
-            <a:ext cx="11167783" cy="352808"/>
-          </a:xfrm>
-          <a:prstGeom prst="rect">
-            <a:avLst/>
-          </a:prstGeom>
-          <a:solidFill>
-            <a:srgbClr val="E8EEFC"/>
-          </a:solidFill>
-          <a:ln/>
-        </p:spPr>
-      </p:sp>
-      <p:sp>
-        <p:nvSpPr>
-          <p:cNvPr id="30" name="Text 27"/>
           <p:cNvSpPr txBox="1"/>
           <p:nvPr/>
         </p:nvSpPr>
@@ -5411,14 +5381,14 @@
       </p:sp>
       <p:sp>
         <p:nvSpPr>
-          <p:cNvPr id="31" name="Text 28"/>
+          <p:cNvPr id="28" name="Text 25"/>
           <p:cNvSpPr txBox="1"/>
           <p:nvPr/>
         </p:nvSpPr>
         <p:spPr>
           <a:xfrm>
             <a:off x="1409876" y="6077461"/>
-            <a:ext cx="7019604" cy="182206"/>
+            <a:ext cx="5444646" cy="182206"/>
           </a:xfrm>
           <a:prstGeom prst="rect">
             <a:avLst/>
@@ -5445,7 +5415,7 @@
                 <a:ea typeface="Inter" pitchFamily="34" charset="-122"/>
                 <a:cs typeface="Inter" pitchFamily="34" charset="-120"/>
               </a:rPr>
-              <a:t>Sin nombre, equipo, ticket ni audiencia confiables, nadie puede saber qué manda Braze ni de quién es.</a:t>
+              <a:t>Cada promoción nueva debe nacer de algo que hizo la persona, no de una lista.</a:t>
             </a:r>
             <a:endParaRPr lang="en-US" sz="1100" dirty="0"/>
           </a:p>
@@ -5453,14 +5423,14 @@
       </p:sp>
       <p:sp>
         <p:nvSpPr>
-          <p:cNvPr id="32" name="Text 29"/>
+          <p:cNvPr id="29" name="Text 26"/>
           <p:cNvSpPr txBox="1"/>
           <p:nvPr/>
         </p:nvSpPr>
         <p:spPr>
           <a:xfrm>
             <a:off x="511956" y="6454684"/>
-            <a:ext cx="9230849" cy="135035"/>
+            <a:ext cx="9797281" cy="135035"/>
           </a:xfrm>
           <a:prstGeom prst="rect">
             <a:avLst/>
@@ -5487,7 +5457,7 @@
                 <a:ea typeface="Inter" pitchFamily="34" charset="-122"/>
                 <a:cs typeface="Inter" pitchFamily="34" charset="-120"/>
               </a:rPr>
-              <a:t>Fuente: Braze, catálogo de campañas y Canvas (E2), envíos por comunicación (E1), segmentos (E11), pasos de Canvas (E15) y grupos de control (E13), enero a septiembre 2026.</a:t>
+              <a:t>Fuente: Braze, envíos por campaña y canal, ene a sep 2026. Motivo inferido del nombre de la campaña. Quien hizo algo ya es más activo: sin grupo sin mensajes no se sabe cuánto vende.</a:t>
             </a:r>
             <a:endParaRPr lang="en-US" sz="840" dirty="0"/>
           </a:p>
@@ -5495,7 +5465,7 @@
       </p:sp>
       <p:sp>
         <p:nvSpPr>
-          <p:cNvPr id="33" name="Text 30"/>
+          <p:cNvPr id="30" name="Text 27"/>
           <p:cNvSpPr txBox="1"/>
           <p:nvPr/>
         </p:nvSpPr>
@@ -5603,7 +5573,7 @@
                 <a:ea typeface="Inter" pitchFamily="34" charset="-122"/>
                 <a:cs typeface="Inter" pitchFamily="34" charset="-120"/>
               </a:rPr>
-              <a:t>Le escribimos a quien no debería recibir promociones: congelados, dados de baja y quien pidió no recibirlas</a:t>
+              <a:t>Tres de cada diez comunicaciones que mandan no tienen equipo, ticket o nombre en regla: 36 % de los mensajes</a:t>
             </a:r>
             <a:endParaRPr lang="en-US" sz="2210" dirty="0"/>
           </a:p>
@@ -5617,54 +5587,174 @@
         </p:nvSpPr>
         <p:spPr>
           <a:xfrm>
-            <a:off x="511956" y="1166180"/>
-            <a:ext cx="11167783" cy="0"/>
-          </a:xfrm>
-          <a:prstGeom prst="line">
-            <a:avLst/>
-          </a:prstGeom>
-          <a:noFill/>
-          <a:ln w="9645">
-            <a:solidFill>
-              <a:srgbClr val="DDE2EA"/>
-            </a:solidFill>
-            <a:prstDash val="solid"/>
-          </a:ln>
-        </p:spPr>
-      </p:sp>
-      <p:sp>
-        <p:nvSpPr>
-          <p:cNvPr id="4" name="Shape 2"/>
+            <a:off x="511956" y="1161358"/>
+            <a:ext cx="2673112" cy="1214256"/>
+          </a:xfrm>
+          <a:prstGeom prst="rect">
+            <a:avLst/>
+          </a:prstGeom>
+          <a:solidFill>
+            <a:srgbClr val="F4F6F9"/>
+          </a:solidFill>
+          <a:ln/>
+        </p:spPr>
+      </p:sp>
+      <p:sp>
+        <p:nvSpPr>
+          <p:cNvPr id="4" name="Text 2"/>
+          <p:cNvSpPr txBox="1"/>
+          <p:nvPr/>
+        </p:nvSpPr>
+        <p:spPr>
+          <a:xfrm>
+            <a:off x="670350" y="1283130"/>
+            <a:ext cx="2445301" cy="414448"/>
+          </a:xfrm>
+          <a:prstGeom prst="rect">
+            <a:avLst/>
+          </a:prstGeom>
+          <a:noFill/>
+          <a:ln/>
+        </p:spPr>
+        <p:txBody>
+          <a:bodyPr wrap="square" lIns="0" tIns="0" rIns="0" bIns="0" rtlCol="0" anchor="t"/>
+          <a:lstStyle/>
+          <a:p>
+            <a:pPr algn="l" indent="0" marL="0">
+              <a:lnSpc>
+                <a:spcPct val="83000"/>
+              </a:lnSpc>
+              <a:buNone/>
+            </a:pPr>
+            <a:r>
+              <a:rPr lang="en-US" sz="3260" b="1" spc="-70" kern="0" dirty="0">
+                <a:solidFill>
+                  <a:srgbClr val="0B1220"/>
+                </a:solidFill>
+                <a:latin typeface="Inter" pitchFamily="34" charset="0"/>
+                <a:ea typeface="Inter" pitchFamily="34" charset="-122"/>
+                <a:cs typeface="Inter" pitchFamily="34" charset="-120"/>
+              </a:rPr>
+              <a:t>6,144</a:t>
+            </a:r>
+            <a:endParaRPr lang="en-US" sz="3260" dirty="0"/>
+          </a:p>
+        </p:txBody>
+      </p:sp>
+      <p:sp>
+        <p:nvSpPr>
+          <p:cNvPr id="5" name="Text 3"/>
+          <p:cNvSpPr txBox="1"/>
+          <p:nvPr/>
+        </p:nvSpPr>
+        <p:spPr>
+          <a:xfrm>
+            <a:off x="670350" y="1740228"/>
+            <a:ext cx="2445301" cy="342409"/>
+          </a:xfrm>
+          <a:prstGeom prst="rect">
+            <a:avLst/>
+          </a:prstGeom>
+          <a:noFill/>
+          <a:ln/>
+        </p:spPr>
+        <p:txBody>
+          <a:bodyPr wrap="square" lIns="0" tIns="0" rIns="0" bIns="0" rtlCol="0" anchor="t"/>
+          <a:lstStyle/>
+          <a:p>
+            <a:pPr algn="l" indent="0" marL="0">
+              <a:lnSpc>
+                <a:spcPct val="107000"/>
+              </a:lnSpc>
+              <a:buNone/>
+            </a:pPr>
+            <a:r>
+              <a:rPr lang="en-US" sz="1040" dirty="0">
+                <a:solidFill>
+                  <a:srgbClr val="0B1220"/>
+                </a:solidFill>
+                <a:latin typeface="Inter" pitchFamily="34" charset="0"/>
+                <a:ea typeface="Inter" pitchFamily="34" charset="-122"/>
+                <a:cs typeface="Inter" pitchFamily="34" charset="-120"/>
+              </a:rPr>
+              <a:t>comunicaciones guardadas; en septiembre solo 341 mandaron algo</a:t>
+            </a:r>
+            <a:endParaRPr lang="en-US" sz="1040" dirty="0"/>
+          </a:p>
+        </p:txBody>
+      </p:sp>
+      <p:sp>
+        <p:nvSpPr>
+          <p:cNvPr id="6" name="Shape 4"/>
           <p:cNvSpPr/>
           <p:nvPr/>
         </p:nvSpPr>
         <p:spPr>
           <a:xfrm>
-            <a:off x="511956" y="1798251"/>
-            <a:ext cx="11167783" cy="0"/>
-          </a:xfrm>
-          <a:prstGeom prst="line">
-            <a:avLst/>
-          </a:prstGeom>
-          <a:noFill/>
-          <a:ln w="9645">
-            <a:solidFill>
-              <a:srgbClr val="DDE2EA"/>
-            </a:solidFill>
-            <a:prstDash val="solid"/>
-          </a:ln>
-        </p:spPr>
-      </p:sp>
-      <p:sp>
-        <p:nvSpPr>
-          <p:cNvPr id="5" name="Text 3"/>
-          <p:cNvSpPr txBox="1"/>
-          <p:nvPr/>
-        </p:nvSpPr>
-        <p:spPr>
-          <a:xfrm>
-            <a:off x="511956" y="1256304"/>
-            <a:ext cx="3718649" cy="129760"/>
+            <a:off x="3343463" y="1161358"/>
+            <a:ext cx="2673112" cy="1214256"/>
+          </a:xfrm>
+          <a:prstGeom prst="rect">
+            <a:avLst/>
+          </a:prstGeom>
+          <a:solidFill>
+            <a:srgbClr val="F4F6F9"/>
+          </a:solidFill>
+          <a:ln/>
+        </p:spPr>
+      </p:sp>
+      <p:sp>
+        <p:nvSpPr>
+          <p:cNvPr id="7" name="Text 5"/>
+          <p:cNvSpPr txBox="1"/>
+          <p:nvPr/>
+        </p:nvSpPr>
+        <p:spPr>
+          <a:xfrm>
+            <a:off x="3501857" y="1283130"/>
+            <a:ext cx="2445301" cy="414448"/>
+          </a:xfrm>
+          <a:prstGeom prst="rect">
+            <a:avLst/>
+          </a:prstGeom>
+          <a:noFill/>
+          <a:ln/>
+        </p:spPr>
+        <p:txBody>
+          <a:bodyPr wrap="square" lIns="0" tIns="0" rIns="0" bIns="0" rtlCol="0" anchor="t"/>
+          <a:lstStyle/>
+          <a:p>
+            <a:pPr algn="l" indent="0" marL="0">
+              <a:lnSpc>
+                <a:spcPct val="83000"/>
+              </a:lnSpc>
+              <a:buNone/>
+            </a:pPr>
+            <a:r>
+              <a:rPr lang="en-US" sz="3260" b="1" spc="-70" kern="0" dirty="0">
+                <a:solidFill>
+                  <a:srgbClr val="0B1220"/>
+                </a:solidFill>
+                <a:latin typeface="Inter" pitchFamily="34" charset="0"/>
+                <a:ea typeface="Inter" pitchFamily="34" charset="-122"/>
+                <a:cs typeface="Inter" pitchFamily="34" charset="-120"/>
+              </a:rPr>
+              <a:t>183</a:t>
+            </a:r>
+            <a:endParaRPr lang="en-US" sz="3260" dirty="0"/>
+          </a:p>
+        </p:txBody>
+      </p:sp>
+      <p:sp>
+        <p:nvSpPr>
+          <p:cNvPr id="8" name="Text 6"/>
+          <p:cNvSpPr txBox="1"/>
+          <p:nvPr/>
+        </p:nvSpPr>
+        <p:spPr>
+          <a:xfrm>
+            <a:off x="3501857" y="1740228"/>
+            <a:ext cx="2445301" cy="342409"/>
           </a:xfrm>
           <a:prstGeom prst="rect">
             <a:avLst/>
@@ -5683,30 +5773,92 @@
               <a:buNone/>
             </a:pPr>
             <a:r>
-              <a:rPr lang="en-US" sz="790" b="1" spc="80" kern="0" dirty="0">
-                <a:solidFill>
-                  <a:srgbClr val="6B7484"/>
-                </a:solidFill>
-                <a:latin typeface="Inter" pitchFamily="34" charset="0"/>
-                <a:ea typeface="Inter" pitchFamily="34" charset="-122"/>
-                <a:cs typeface="Inter" pitchFamily="34" charset="-120"/>
-              </a:rPr>
-              <a:t>QUÉ SE MANDA</a:t>
-            </a:r>
-            <a:endParaRPr lang="en-US" sz="790" dirty="0"/>
-          </a:p>
-        </p:txBody>
-      </p:sp>
-      <p:sp>
-        <p:nvSpPr>
-          <p:cNvPr id="6" name="Text 4"/>
-          <p:cNvSpPr txBox="1"/>
-          <p:nvPr/>
-        </p:nvSpPr>
-        <p:spPr>
-          <a:xfrm>
-            <a:off x="511956" y="1410328"/>
-            <a:ext cx="3625511" cy="144680"/>
+              <a:rPr lang="en-US" sz="1040" dirty="0">
+                <a:solidFill>
+                  <a:srgbClr val="0B1220"/>
+                </a:solidFill>
+                <a:latin typeface="Inter" pitchFamily="34" charset="0"/>
+                <a:ea typeface="Inter" pitchFamily="34" charset="-122"/>
+                <a:cs typeface="Inter" pitchFamily="34" charset="-120"/>
+              </a:rPr>
+              <a:t>nombres distintos en el campo de equipo, para 5 equipos</a:t>
+            </a:r>
+            <a:endParaRPr lang="en-US" sz="1040" dirty="0"/>
+          </a:p>
+        </p:txBody>
+      </p:sp>
+      <p:sp>
+        <p:nvSpPr>
+          <p:cNvPr id="9" name="Shape 7"/>
+          <p:cNvSpPr/>
+          <p:nvPr/>
+        </p:nvSpPr>
+        <p:spPr>
+          <a:xfrm>
+            <a:off x="6174969" y="1161358"/>
+            <a:ext cx="2673112" cy="1214256"/>
+          </a:xfrm>
+          <a:prstGeom prst="rect">
+            <a:avLst/>
+          </a:prstGeom>
+          <a:solidFill>
+            <a:srgbClr val="F4F6F9"/>
+          </a:solidFill>
+          <a:ln/>
+        </p:spPr>
+      </p:sp>
+      <p:sp>
+        <p:nvSpPr>
+          <p:cNvPr id="10" name="Text 8"/>
+          <p:cNvSpPr txBox="1"/>
+          <p:nvPr/>
+        </p:nvSpPr>
+        <p:spPr>
+          <a:xfrm>
+            <a:off x="6333364" y="1283130"/>
+            <a:ext cx="2445301" cy="414448"/>
+          </a:xfrm>
+          <a:prstGeom prst="rect">
+            <a:avLst/>
+          </a:prstGeom>
+          <a:noFill/>
+          <a:ln/>
+        </p:spPr>
+        <p:txBody>
+          <a:bodyPr wrap="square" lIns="0" tIns="0" rIns="0" bIns="0" rtlCol="0" anchor="t"/>
+          <a:lstStyle/>
+          <a:p>
+            <a:pPr algn="l" indent="0" marL="0">
+              <a:lnSpc>
+                <a:spcPct val="83000"/>
+              </a:lnSpc>
+              <a:buNone/>
+            </a:pPr>
+            <a:r>
+              <a:rPr lang="en-US" sz="3260" b="1" spc="-70" kern="0" dirty="0">
+                <a:solidFill>
+                  <a:srgbClr val="0B1220"/>
+                </a:solidFill>
+                <a:latin typeface="Inter" pitchFamily="34" charset="0"/>
+                <a:ea typeface="Inter" pitchFamily="34" charset="-122"/>
+                <a:cs typeface="Inter" pitchFamily="34" charset="-120"/>
+              </a:rPr>
+              <a:t>731</a:t>
+            </a:r>
+            <a:endParaRPr lang="en-US" sz="3260" dirty="0"/>
+          </a:p>
+        </p:txBody>
+      </p:sp>
+      <p:sp>
+        <p:nvSpPr>
+          <p:cNvPr id="11" name="Text 9"/>
+          <p:cNvSpPr txBox="1"/>
+          <p:nvPr/>
+        </p:nvSpPr>
+        <p:spPr>
+          <a:xfrm>
+            <a:off x="6333364" y="1740228"/>
+            <a:ext cx="2445301" cy="513614"/>
           </a:xfrm>
           <a:prstGeom prst="rect">
             <a:avLst/>
@@ -5725,198 +5877,30 @@
               <a:buNone/>
             </a:pPr>
             <a:r>
-              <a:rPr lang="en-US" sz="900" dirty="0">
-                <a:solidFill>
-                  <a:srgbClr val="3B4556"/>
-                </a:solidFill>
-                <a:latin typeface="Inter" pitchFamily="34" charset="0"/>
-                <a:ea typeface="Inter" pitchFamily="34" charset="-122"/>
-                <a:cs typeface="Inter" pitchFamily="34" charset="-120"/>
-              </a:rPr>
-              <a:t>Promociones: Tasa 0, referidos, ofertas de KPay y de comercios.</a:t>
-            </a:r>
-            <a:endParaRPr lang="en-US" sz="900" dirty="0"/>
-          </a:p>
-        </p:txBody>
-      </p:sp>
-      <p:sp>
-        <p:nvSpPr>
-          <p:cNvPr id="7" name="Text 5"/>
-          <p:cNvSpPr txBox="1"/>
-          <p:nvPr/>
-        </p:nvSpPr>
-        <p:spPr>
-          <a:xfrm>
-            <a:off x="4299556" y="1256304"/>
-            <a:ext cx="3718649" cy="129760"/>
-          </a:xfrm>
-          <a:prstGeom prst="rect">
-            <a:avLst/>
-          </a:prstGeom>
-          <a:noFill/>
-          <a:ln/>
-        </p:spPr>
-        <p:txBody>
-          <a:bodyPr wrap="square" lIns="0" tIns="0" rIns="0" bIns="0" rtlCol="0" anchor="t"/>
-          <a:lstStyle/>
-          <a:p>
-            <a:pPr algn="l" indent="0" marL="0">
-              <a:lnSpc>
-                <a:spcPct val="107000"/>
-              </a:lnSpc>
-              <a:buNone/>
-            </a:pPr>
-            <a:r>
-              <a:rPr lang="en-US" sz="790" b="1" spc="80" kern="0" dirty="0">
-                <a:solidFill>
-                  <a:srgbClr val="6B7484"/>
-                </a:solidFill>
-                <a:latin typeface="Inter" pitchFamily="34" charset="0"/>
-                <a:ea typeface="Inter" pitchFamily="34" charset="-122"/>
-                <a:cs typeface="Inter" pitchFamily="34" charset="-120"/>
-              </a:rPr>
-              <a:t>QUIÉN</a:t>
-            </a:r>
-            <a:endParaRPr lang="en-US" sz="790" dirty="0"/>
-          </a:p>
-        </p:txBody>
-      </p:sp>
-      <p:sp>
-        <p:nvSpPr>
-          <p:cNvPr id="8" name="Text 6"/>
-          <p:cNvSpPr txBox="1"/>
-          <p:nvPr/>
-        </p:nvSpPr>
-        <p:spPr>
-          <a:xfrm>
-            <a:off x="4299556" y="1410328"/>
-            <a:ext cx="3456777" cy="293580"/>
-          </a:xfrm>
-          <a:prstGeom prst="rect">
-            <a:avLst/>
-          </a:prstGeom>
-          <a:noFill/>
-          <a:ln/>
-        </p:spPr>
-        <p:txBody>
-          <a:bodyPr wrap="square" lIns="0" tIns="0" rIns="0" bIns="0" rtlCol="0" anchor="t"/>
-          <a:lstStyle/>
-          <a:p>
-            <a:pPr algn="l" indent="0" marL="0">
-              <a:lnSpc>
-                <a:spcPct val="107000"/>
-              </a:lnSpc>
-              <a:buNone/>
-            </a:pPr>
-            <a:r>
-              <a:rPr lang="en-US" sz="900" dirty="0">
-                <a:solidFill>
-                  <a:srgbClr val="3B4556"/>
-                </a:solidFill>
-                <a:latin typeface="Inter" pitchFamily="34" charset="0"/>
-                <a:ea typeface="Inter" pitchFamily="34" charset="-122"/>
-                <a:cs typeface="Inter" pitchFamily="34" charset="-120"/>
-              </a:rPr>
-              <a:t>Todos los equipos; Marketing manda la mayor parte de lo que llega tras la baja.</a:t>
-            </a:r>
-            <a:endParaRPr lang="en-US" sz="900" dirty="0"/>
-          </a:p>
-        </p:txBody>
-      </p:sp>
-      <p:sp>
-        <p:nvSpPr>
-          <p:cNvPr id="9" name="Text 7"/>
-          <p:cNvSpPr txBox="1"/>
-          <p:nvPr/>
-        </p:nvSpPr>
-        <p:spPr>
-          <a:xfrm>
-            <a:off x="8087156" y="1256304"/>
-            <a:ext cx="3718649" cy="129760"/>
-          </a:xfrm>
-          <a:prstGeom prst="rect">
-            <a:avLst/>
-          </a:prstGeom>
-          <a:noFill/>
-          <a:ln/>
-        </p:spPr>
-        <p:txBody>
-          <a:bodyPr wrap="square" lIns="0" tIns="0" rIns="0" bIns="0" rtlCol="0" anchor="t"/>
-          <a:lstStyle/>
-          <a:p>
-            <a:pPr algn="l" indent="0" marL="0">
-              <a:lnSpc>
-                <a:spcPct val="107000"/>
-              </a:lnSpc>
-              <a:buNone/>
-            </a:pPr>
-            <a:r>
-              <a:rPr lang="en-US" sz="790" b="1" spc="80" kern="0" dirty="0">
-                <a:solidFill>
-                  <a:srgbClr val="6B7484"/>
-                </a:solidFill>
-                <a:latin typeface="Inter" pitchFamily="34" charset="0"/>
-                <a:ea typeface="Inter" pitchFamily="34" charset="-122"/>
-                <a:cs typeface="Inter" pitchFamily="34" charset="-120"/>
-              </a:rPr>
-              <a:t>A QUIÉN</a:t>
-            </a:r>
-            <a:endParaRPr lang="en-US" sz="790" dirty="0"/>
-          </a:p>
-        </p:txBody>
-      </p:sp>
-      <p:sp>
-        <p:nvSpPr>
-          <p:cNvPr id="10" name="Text 8"/>
-          <p:cNvSpPr txBox="1"/>
-          <p:nvPr/>
-        </p:nvSpPr>
-        <p:spPr>
-          <a:xfrm>
-            <a:off x="8087156" y="1410328"/>
-            <a:ext cx="3705610" cy="293580"/>
-          </a:xfrm>
-          <a:prstGeom prst="rect">
-            <a:avLst/>
-          </a:prstGeom>
-          <a:noFill/>
-          <a:ln/>
-        </p:spPr>
-        <p:txBody>
-          <a:bodyPr wrap="square" lIns="0" tIns="0" rIns="0" bIns="0" rtlCol="0" anchor="t"/>
-          <a:lstStyle/>
-          <a:p>
-            <a:pPr algn="l" indent="0" marL="0">
-              <a:lnSpc>
-                <a:spcPct val="107000"/>
-              </a:lnSpc>
-              <a:buNone/>
-            </a:pPr>
-            <a:r>
-              <a:rPr lang="en-US" sz="900" dirty="0">
-                <a:solidFill>
-                  <a:srgbClr val="3B4556"/>
-                </a:solidFill>
-                <a:latin typeface="Inter" pitchFamily="34" charset="0"/>
-                <a:ea typeface="Inter" pitchFamily="34" charset="-122"/>
-                <a:cs typeface="Inter" pitchFamily="34" charset="-120"/>
-              </a:rPr>
-              <a:t>Personas con KPay congelado, dados de baja, REUS, ARCO y lista negra.</a:t>
-            </a:r>
-            <a:endParaRPr lang="en-US" sz="900" dirty="0"/>
-          </a:p>
-        </p:txBody>
-      </p:sp>
-      <p:sp>
-        <p:nvSpPr>
-          <p:cNvPr id="11" name="Shape 9"/>
+              <a:rPr lang="en-US" sz="1040" dirty="0">
+                <a:solidFill>
+                  <a:srgbClr val="0B1220"/>
+                </a:solidFill>
+                <a:latin typeface="Inter" pitchFamily="34" charset="0"/>
+                <a:ea typeface="Inter" pitchFamily="34" charset="-122"/>
+                <a:cs typeface="Inter" pitchFamily="34" charset="-120"/>
+              </a:rPr>
+              <a:t>nombres de audiencia; 85 M mensajes con segmento "Not Tracked"</a:t>
+            </a:r>
+            <a:endParaRPr lang="en-US" sz="1040" dirty="0"/>
+          </a:p>
+        </p:txBody>
+      </p:sp>
+      <p:sp>
+        <p:nvSpPr>
+          <p:cNvPr id="12" name="Shape 10"/>
           <p:cNvSpPr/>
           <p:nvPr/>
         </p:nvSpPr>
         <p:spPr>
           <a:xfrm>
-            <a:off x="511956" y="1912789"/>
-            <a:ext cx="2106751" cy="1214256"/>
+            <a:off x="9006476" y="1161358"/>
+            <a:ext cx="2673263" cy="1214256"/>
           </a:xfrm>
           <a:prstGeom prst="rect">
             <a:avLst/>
@@ -5929,14 +5913,14 @@
       </p:sp>
       <p:sp>
         <p:nvSpPr>
-          <p:cNvPr id="12" name="Text 10"/>
-          <p:cNvSpPr txBox="1"/>
-          <p:nvPr/>
-        </p:nvSpPr>
-        <p:spPr>
-          <a:xfrm>
-            <a:off x="670350" y="2034561"/>
-            <a:ext cx="1861949" cy="414448"/>
+          <p:cNvPr id="13" name="Text 11"/>
+          <p:cNvSpPr txBox="1"/>
+          <p:nvPr/>
+        </p:nvSpPr>
+        <p:spPr>
+          <a:xfrm>
+            <a:off x="9164871" y="1283130"/>
+            <a:ext cx="2445457" cy="414448"/>
           </a:xfrm>
           <a:prstGeom prst="rect">
             <a:avLst/>
@@ -5963,7 +5947,7 @@
                 <a:ea typeface="Inter" pitchFamily="34" charset="-122"/>
                 <a:cs typeface="Inter" pitchFamily="34" charset="-120"/>
               </a:rPr>
-              <a:t>43.3 M</a:t>
+              <a:t>1 de 3,228</a:t>
             </a:r>
             <a:endParaRPr lang="en-US" sz="3260" dirty="0"/>
           </a:p>
@@ -5971,14 +5955,14 @@
       </p:sp>
       <p:sp>
         <p:nvSpPr>
-          <p:cNvPr id="13" name="Text 11"/>
-          <p:cNvSpPr txBox="1"/>
-          <p:nvPr/>
-        </p:nvSpPr>
-        <p:spPr>
-          <a:xfrm>
-            <a:off x="670350" y="2491660"/>
-            <a:ext cx="1861949" cy="513614"/>
+          <p:cNvPr id="14" name="Text 12"/>
+          <p:cNvSpPr txBox="1"/>
+          <p:nvPr/>
+        </p:nvSpPr>
+        <p:spPr>
+          <a:xfrm>
+            <a:off x="9164871" y="1740228"/>
+            <a:ext cx="2445457" cy="171205"/>
           </a:xfrm>
           <a:prstGeom prst="rect">
             <a:avLst/>
@@ -6005,7 +5989,7 @@
                 <a:ea typeface="Inter" pitchFamily="34" charset="-122"/>
                 <a:cs typeface="Inter" pitchFamily="34" charset="-120"/>
               </a:rPr>
-              <a:t>promociones a quien tiene KPay congelado y no puede comprar</a:t>
+              <a:t>Canvas con grupo de control real</a:t>
             </a:r>
             <a:endParaRPr lang="en-US" sz="1040" dirty="0"/>
           </a:p>
@@ -6013,95 +5997,33 @@
       </p:sp>
       <p:sp>
         <p:nvSpPr>
-          <p:cNvPr id="14" name="Shape 12"/>
-          <p:cNvSpPr/>
-          <p:nvPr/>
-        </p:nvSpPr>
-        <p:spPr>
-          <a:xfrm>
-            <a:off x="2777101" y="1912789"/>
-            <a:ext cx="2106901" cy="1214256"/>
-          </a:xfrm>
-          <a:prstGeom prst="rect">
-            <a:avLst/>
-          </a:prstGeom>
-          <a:solidFill>
-            <a:srgbClr val="E8EEFC"/>
-          </a:solidFill>
-          <a:ln/>
-        </p:spPr>
-      </p:sp>
-      <p:sp>
-        <p:nvSpPr>
           <p:cNvPr id="15" name="Text 13"/>
           <p:cNvSpPr txBox="1"/>
           <p:nvPr/>
         </p:nvSpPr>
         <p:spPr>
           <a:xfrm>
-            <a:off x="2935495" y="2034561"/>
-            <a:ext cx="1862104" cy="414448"/>
-          </a:xfrm>
-          <a:prstGeom prst="rect">
-            <a:avLst/>
-          </a:prstGeom>
-          <a:noFill/>
-          <a:ln/>
-        </p:spPr>
-        <p:txBody>
-          <a:bodyPr wrap="square" lIns="0" tIns="0" rIns="0" bIns="0" rtlCol="0" anchor="t"/>
-          <a:lstStyle/>
-          <a:p>
-            <a:pPr algn="l" indent="0" marL="0">
-              <a:lnSpc>
-                <a:spcPct val="83000"/>
-              </a:lnSpc>
-              <a:buNone/>
-            </a:pPr>
-            <a:r>
-              <a:rPr lang="en-US" sz="3260" b="1" spc="-70" kern="0" dirty="0">
-                <a:solidFill>
-                  <a:srgbClr val="1F4FD8"/>
-                </a:solidFill>
-                <a:latin typeface="Inter" pitchFamily="34" charset="0"/>
-                <a:ea typeface="Inter" pitchFamily="34" charset="-122"/>
-                <a:cs typeface="Inter" pitchFamily="34" charset="-120"/>
-              </a:rPr>
-              <a:t>9.8 M</a:t>
-            </a:r>
-            <a:endParaRPr lang="en-US" sz="3260" dirty="0"/>
-          </a:p>
-        </p:txBody>
-      </p:sp>
-      <p:sp>
-        <p:nvSpPr>
-          <p:cNvPr id="16" name="Text 14"/>
-          <p:cNvSpPr txBox="1"/>
-          <p:nvPr/>
-        </p:nvSpPr>
-        <p:spPr>
-          <a:xfrm>
-            <a:off x="2935495" y="2491660"/>
-            <a:ext cx="1862104" cy="513614"/>
-          </a:xfrm>
-          <a:prstGeom prst="rect">
-            <a:avLst/>
-          </a:prstGeom>
-          <a:noFill/>
-          <a:ln/>
-        </p:spPr>
-        <p:txBody>
-          <a:bodyPr wrap="square" lIns="0" tIns="0" rIns="0" bIns="0" rtlCol="0" anchor="t"/>
-          <a:lstStyle/>
-          <a:p>
-            <a:pPr algn="l" indent="0" marL="0">
-              <a:lnSpc>
-                <a:spcPct val="107000"/>
-              </a:lnSpc>
-              <a:buNone/>
-            </a:pPr>
-            <a:r>
-              <a:rPr lang="en-US" sz="1040" dirty="0">
+            <a:off x="511956" y="2546216"/>
+            <a:ext cx="7187252" cy="164573"/>
+          </a:xfrm>
+          <a:prstGeom prst="rect">
+            <a:avLst/>
+          </a:prstGeom>
+          <a:noFill/>
+          <a:ln/>
+        </p:spPr>
+        <p:txBody>
+          <a:bodyPr wrap="square" lIns="0" tIns="0" rIns="0" bIns="0" rtlCol="0" anchor="t"/>
+          <a:lstStyle/>
+          <a:p>
+            <a:pPr algn="l" indent="0" marL="0">
+              <a:lnSpc>
+                <a:spcPct val="112000"/>
+              </a:lnSpc>
+              <a:buNone/>
+            </a:pPr>
+            <a:r>
+              <a:rPr lang="en-US" sz="960" b="1" dirty="0">
                 <a:solidFill>
                   <a:srgbClr val="0B1220"/>
                 </a:solidFill>
@@ -6109,361 +6031,7 @@
                 <a:ea typeface="Inter" pitchFamily="34" charset="-122"/>
                 <a:cs typeface="Inter" pitchFamily="34" charset="-120"/>
               </a:rPr>
-              <a:t>WhatsApp a personas marcadas como baja de WhatsApp</a:t>
-            </a:r>
-            <a:endParaRPr lang="en-US" sz="1040" dirty="0"/>
-          </a:p>
-        </p:txBody>
-      </p:sp>
-      <p:sp>
-        <p:nvSpPr>
-          <p:cNvPr id="17" name="Shape 15"/>
-          <p:cNvSpPr/>
-          <p:nvPr/>
-        </p:nvSpPr>
-        <p:spPr>
-          <a:xfrm>
-            <a:off x="5042397" y="1912789"/>
-            <a:ext cx="2106751" cy="1214256"/>
-          </a:xfrm>
-          <a:prstGeom prst="rect">
-            <a:avLst/>
-          </a:prstGeom>
-          <a:solidFill>
-            <a:srgbClr val="E8EEFC"/>
-          </a:solidFill>
-          <a:ln/>
-        </p:spPr>
-      </p:sp>
-      <p:sp>
-        <p:nvSpPr>
-          <p:cNvPr id="18" name="Text 16"/>
-          <p:cNvSpPr txBox="1"/>
-          <p:nvPr/>
-        </p:nvSpPr>
-        <p:spPr>
-          <a:xfrm>
-            <a:off x="5200791" y="2034561"/>
-            <a:ext cx="1861949" cy="414448"/>
-          </a:xfrm>
-          <a:prstGeom prst="rect">
-            <a:avLst/>
-          </a:prstGeom>
-          <a:noFill/>
-          <a:ln/>
-        </p:spPr>
-        <p:txBody>
-          <a:bodyPr wrap="square" lIns="0" tIns="0" rIns="0" bIns="0" rtlCol="0" anchor="t"/>
-          <a:lstStyle/>
-          <a:p>
-            <a:pPr algn="l" indent="0" marL="0">
-              <a:lnSpc>
-                <a:spcPct val="83000"/>
-              </a:lnSpc>
-              <a:buNone/>
-            </a:pPr>
-            <a:r>
-              <a:rPr lang="en-US" sz="3260" b="1" spc="-70" kern="0" dirty="0">
-                <a:solidFill>
-                  <a:srgbClr val="1F4FD8"/>
-                </a:solidFill>
-                <a:latin typeface="Inter" pitchFamily="34" charset="0"/>
-                <a:ea typeface="Inter" pitchFamily="34" charset="-122"/>
-                <a:cs typeface="Inter" pitchFamily="34" charset="-120"/>
-              </a:rPr>
-              <a:t>249 mil</a:t>
-            </a:r>
-            <a:endParaRPr lang="en-US" sz="3260" dirty="0"/>
-          </a:p>
-        </p:txBody>
-      </p:sp>
-      <p:sp>
-        <p:nvSpPr>
-          <p:cNvPr id="19" name="Text 17"/>
-          <p:cNvSpPr txBox="1"/>
-          <p:nvPr/>
-        </p:nvSpPr>
-        <p:spPr>
-          <a:xfrm>
-            <a:off x="5200791" y="2491660"/>
-            <a:ext cx="1861949" cy="513614"/>
-          </a:xfrm>
-          <a:prstGeom prst="rect">
-            <a:avLst/>
-          </a:prstGeom>
-          <a:noFill/>
-          <a:ln/>
-        </p:spPr>
-        <p:txBody>
-          <a:bodyPr wrap="square" lIns="0" tIns="0" rIns="0" bIns="0" rtlCol="0" anchor="t"/>
-          <a:lstStyle/>
-          <a:p>
-            <a:pPr algn="l" indent="0" marL="0">
-              <a:lnSpc>
-                <a:spcPct val="107000"/>
-              </a:lnSpc>
-              <a:buNone/>
-            </a:pPr>
-            <a:r>
-              <a:rPr lang="en-US" sz="1040" dirty="0">
-                <a:solidFill>
-                  <a:srgbClr val="0B1220"/>
-                </a:solidFill>
-                <a:latin typeface="Inter" pitchFamily="34" charset="0"/>
-                <a:ea typeface="Inter" pitchFamily="34" charset="-122"/>
-                <a:cs typeface="Inter" pitchFamily="34" charset="-120"/>
-              </a:rPr>
-              <a:t>promociones a quien pidió no recibir publicidad (REUS o ARCO)</a:t>
-            </a:r>
-            <a:endParaRPr lang="en-US" sz="1040" dirty="0"/>
-          </a:p>
-        </p:txBody>
-      </p:sp>
-      <p:sp>
-        <p:nvSpPr>
-          <p:cNvPr id="20" name="Shape 18"/>
-          <p:cNvSpPr/>
-          <p:nvPr/>
-        </p:nvSpPr>
-        <p:spPr>
-          <a:xfrm>
-            <a:off x="7307542" y="1912789"/>
-            <a:ext cx="2106901" cy="1214256"/>
-          </a:xfrm>
-          <a:prstGeom prst="rect">
-            <a:avLst/>
-          </a:prstGeom>
-          <a:solidFill>
-            <a:srgbClr val="E8EEFC"/>
-          </a:solidFill>
-          <a:ln/>
-        </p:spPr>
-      </p:sp>
-      <p:sp>
-        <p:nvSpPr>
-          <p:cNvPr id="21" name="Text 19"/>
-          <p:cNvSpPr txBox="1"/>
-          <p:nvPr/>
-        </p:nvSpPr>
-        <p:spPr>
-          <a:xfrm>
-            <a:off x="7465936" y="2034561"/>
-            <a:ext cx="1862104" cy="414448"/>
-          </a:xfrm>
-          <a:prstGeom prst="rect">
-            <a:avLst/>
-          </a:prstGeom>
-          <a:noFill/>
-          <a:ln/>
-        </p:spPr>
-        <p:txBody>
-          <a:bodyPr wrap="square" lIns="0" tIns="0" rIns="0" bIns="0" rtlCol="0" anchor="t"/>
-          <a:lstStyle/>
-          <a:p>
-            <a:pPr algn="l" indent="0" marL="0">
-              <a:lnSpc>
-                <a:spcPct val="83000"/>
-              </a:lnSpc>
-              <a:buNone/>
-            </a:pPr>
-            <a:r>
-              <a:rPr lang="en-US" sz="3260" b="1" spc="-70" kern="0" dirty="0">
-                <a:solidFill>
-                  <a:srgbClr val="1F4FD8"/>
-                </a:solidFill>
-                <a:latin typeface="Inter" pitchFamily="34" charset="0"/>
-                <a:ea typeface="Inter" pitchFamily="34" charset="-122"/>
-                <a:cs typeface="Inter" pitchFamily="34" charset="-120"/>
-              </a:rPr>
-              <a:t>146 mil</a:t>
-            </a:r>
-            <a:endParaRPr lang="en-US" sz="3260" dirty="0"/>
-          </a:p>
-        </p:txBody>
-      </p:sp>
-      <p:sp>
-        <p:nvSpPr>
-          <p:cNvPr id="22" name="Text 20"/>
-          <p:cNvSpPr txBox="1"/>
-          <p:nvPr/>
-        </p:nvSpPr>
-        <p:spPr>
-          <a:xfrm>
-            <a:off x="7465936" y="2491660"/>
-            <a:ext cx="1862104" cy="342409"/>
-          </a:xfrm>
-          <a:prstGeom prst="rect">
-            <a:avLst/>
-          </a:prstGeom>
-          <a:noFill/>
-          <a:ln/>
-        </p:spPr>
-        <p:txBody>
-          <a:bodyPr wrap="square" lIns="0" tIns="0" rIns="0" bIns="0" rtlCol="0" anchor="t"/>
-          <a:lstStyle/>
-          <a:p>
-            <a:pPr algn="l" indent="0" marL="0">
-              <a:lnSpc>
-                <a:spcPct val="107000"/>
-              </a:lnSpc>
-              <a:buNone/>
-            </a:pPr>
-            <a:r>
-              <a:rPr lang="en-US" sz="1040" dirty="0">
-                <a:solidFill>
-                  <a:srgbClr val="0B1220"/>
-                </a:solidFill>
-                <a:latin typeface="Inter" pitchFamily="34" charset="0"/>
-                <a:ea typeface="Inter" pitchFamily="34" charset="-122"/>
-                <a:cs typeface="Inter" pitchFamily="34" charset="-120"/>
-              </a:rPr>
-              <a:t>promociones a personas en lista negra</a:t>
-            </a:r>
-            <a:endParaRPr lang="en-US" sz="1040" dirty="0"/>
-          </a:p>
-        </p:txBody>
-      </p:sp>
-      <p:sp>
-        <p:nvSpPr>
-          <p:cNvPr id="23" name="Shape 21"/>
-          <p:cNvSpPr/>
-          <p:nvPr/>
-        </p:nvSpPr>
-        <p:spPr>
-          <a:xfrm>
-            <a:off x="9572838" y="1912789"/>
-            <a:ext cx="2106751" cy="1214256"/>
-          </a:xfrm>
-          <a:prstGeom prst="rect">
-            <a:avLst/>
-          </a:prstGeom>
-          <a:solidFill>
-            <a:srgbClr val="E8EEFC"/>
-          </a:solidFill>
-          <a:ln/>
-        </p:spPr>
-      </p:sp>
-      <p:sp>
-        <p:nvSpPr>
-          <p:cNvPr id="24" name="Text 22"/>
-          <p:cNvSpPr txBox="1"/>
-          <p:nvPr/>
-        </p:nvSpPr>
-        <p:spPr>
-          <a:xfrm>
-            <a:off x="9731232" y="2034561"/>
-            <a:ext cx="1861949" cy="414448"/>
-          </a:xfrm>
-          <a:prstGeom prst="rect">
-            <a:avLst/>
-          </a:prstGeom>
-          <a:noFill/>
-          <a:ln/>
-        </p:spPr>
-        <p:txBody>
-          <a:bodyPr wrap="square" lIns="0" tIns="0" rIns="0" bIns="0" rtlCol="0" anchor="t"/>
-          <a:lstStyle/>
-          <a:p>
-            <a:pPr algn="l" indent="0" marL="0">
-              <a:lnSpc>
-                <a:spcPct val="83000"/>
-              </a:lnSpc>
-              <a:buNone/>
-            </a:pPr>
-            <a:r>
-              <a:rPr lang="en-US" sz="3260" b="1" spc="-70" kern="0" dirty="0">
-                <a:solidFill>
-                  <a:srgbClr val="1F4FD8"/>
-                </a:solidFill>
-                <a:latin typeface="Inter" pitchFamily="34" charset="0"/>
-                <a:ea typeface="Inter" pitchFamily="34" charset="-122"/>
-                <a:cs typeface="Inter" pitchFamily="34" charset="-120"/>
-              </a:rPr>
-              <a:t>79 mil</a:t>
-            </a:r>
-            <a:endParaRPr lang="en-US" sz="3260" dirty="0"/>
-          </a:p>
-        </p:txBody>
-      </p:sp>
-      <p:sp>
-        <p:nvSpPr>
-          <p:cNvPr id="25" name="Text 23"/>
-          <p:cNvSpPr txBox="1"/>
-          <p:nvPr/>
-        </p:nvSpPr>
-        <p:spPr>
-          <a:xfrm>
-            <a:off x="9731232" y="2491660"/>
-            <a:ext cx="1861949" cy="342409"/>
-          </a:xfrm>
-          <a:prstGeom prst="rect">
-            <a:avLst/>
-          </a:prstGeom>
-          <a:noFill/>
-          <a:ln/>
-        </p:spPr>
-        <p:txBody>
-          <a:bodyPr wrap="square" lIns="0" tIns="0" rIns="0" bIns="0" rtlCol="0" anchor="t"/>
-          <a:lstStyle/>
-          <a:p>
-            <a:pPr algn="l" indent="0" marL="0">
-              <a:lnSpc>
-                <a:spcPct val="107000"/>
-              </a:lnSpc>
-              <a:buNone/>
-            </a:pPr>
-            <a:r>
-              <a:rPr lang="en-US" sz="1040" dirty="0">
-                <a:solidFill>
-                  <a:srgbClr val="0B1220"/>
-                </a:solidFill>
-                <a:latin typeface="Inter" pitchFamily="34" charset="0"/>
-                <a:ea typeface="Inter" pitchFamily="34" charset="-122"/>
-                <a:cs typeface="Inter" pitchFamily="34" charset="-120"/>
-              </a:rPr>
-              <a:t>promociones a quien ya se dio de baja del correo</a:t>
-            </a:r>
-            <a:endParaRPr lang="en-US" sz="1040" dirty="0"/>
-          </a:p>
-        </p:txBody>
-      </p:sp>
-      <p:sp>
-        <p:nvSpPr>
-          <p:cNvPr id="26" name="Text 24"/>
-          <p:cNvSpPr txBox="1"/>
-          <p:nvPr/>
-        </p:nvSpPr>
-        <p:spPr>
-          <a:xfrm>
-            <a:off x="511956" y="3297647"/>
-            <a:ext cx="6963101" cy="164573"/>
-          </a:xfrm>
-          <a:prstGeom prst="rect">
-            <a:avLst/>
-          </a:prstGeom>
-          <a:noFill/>
-          <a:ln/>
-        </p:spPr>
-        <p:txBody>
-          <a:bodyPr wrap="square" lIns="0" tIns="0" rIns="0" bIns="0" rtlCol="0" anchor="t"/>
-          <a:lstStyle/>
-          <a:p>
-            <a:pPr algn="l" indent="0" marL="0">
-              <a:lnSpc>
-                <a:spcPct val="112000"/>
-              </a:lnSpc>
-              <a:buNone/>
-            </a:pPr>
-            <a:r>
-              <a:rPr lang="en-US" sz="960" b="1" dirty="0">
-                <a:solidFill>
-                  <a:srgbClr val="0B1220"/>
-                </a:solidFill>
-                <a:latin typeface="Inter" pitchFamily="34" charset="0"/>
-                <a:ea typeface="Inter" pitchFamily="34" charset="-122"/>
-                <a:cs typeface="Inter" pitchFamily="34" charset="-120"/>
-              </a:rPr>
-              <a:t>502 campañas mandaron promociones a quien no debía recibirlas; las 10 primeras suman solo 24 %</a:t>
+              <a:t>Cada punto es una comunicación que mandó algo en 2026, por problema de orden</a:t>
             </a:r>
             <a:endParaRPr lang="en-US" sz="960" dirty="0"/>
           </a:p>
@@ -6471,7 +6039,7 @@
       </p:sp>
       <p:pic>
         <p:nvPicPr>
-          <p:cNvPr id="27" name="Image 0" descr="preencoded.png">    </p:cNvPr>
+          <p:cNvPr id="16" name="Image 0" descr="preencoded.png">    </p:cNvPr>
           <p:cNvPicPr>
             <a:picLocks noChangeAspect="1"/>
           </p:cNvPicPr>
@@ -6485,8 +6053,8 @@
         </p:blipFill>
         <p:spPr>
           <a:xfrm>
-            <a:off x="511956" y="3523107"/>
-            <a:ext cx="6742235" cy="2380889"/>
+            <a:off x="511956" y="2771676"/>
+            <a:ext cx="6959858" cy="2930522"/>
           </a:xfrm>
           <a:prstGeom prst="rect">
             <a:avLst/>
@@ -6495,14 +6063,14 @@
       </p:pic>
       <p:sp>
         <p:nvSpPr>
-          <p:cNvPr id="28" name="Shape 25"/>
+          <p:cNvPr id="17" name="Shape 14"/>
           <p:cNvSpPr/>
           <p:nvPr/>
         </p:nvSpPr>
         <p:spPr>
           <a:xfrm>
-            <a:off x="7547017" y="3302470"/>
-            <a:ext cx="4132722" cy="0"/>
+            <a:off x="7764640" y="2551039"/>
+            <a:ext cx="3914948" cy="0"/>
           </a:xfrm>
           <a:prstGeom prst="line">
             <a:avLst/>
@@ -6518,13 +6086,13 @@
       </p:sp>
       <p:sp>
         <p:nvSpPr>
-          <p:cNvPr id="29" name="Shape 26"/>
+          <p:cNvPr id="18" name="Shape 15"/>
           <p:cNvSpPr/>
           <p:nvPr/>
         </p:nvSpPr>
         <p:spPr>
           <a:xfrm>
-            <a:off x="7547017" y="3392594"/>
+            <a:off x="7764640" y="2641162"/>
             <a:ext cx="207224" cy="207224"/>
           </a:xfrm>
           <a:prstGeom prst="ellipse">
@@ -6538,13 +6106,13 @@
       </p:sp>
       <p:sp>
         <p:nvSpPr>
-          <p:cNvPr id="30" name="Text 27"/>
-          <p:cNvSpPr txBox="1"/>
-          <p:nvPr/>
-        </p:nvSpPr>
-        <p:spPr>
-          <a:xfrm>
-            <a:off x="7547017" y="3392594"/>
+          <p:cNvPr id="19" name="Text 16"/>
+          <p:cNvSpPr txBox="1"/>
+          <p:nvPr/>
+        </p:nvSpPr>
+        <p:spPr>
+          <a:xfrm>
+            <a:off x="7764640" y="2641162"/>
             <a:ext cx="231729" cy="207224"/>
           </a:xfrm>
           <a:prstGeom prst="rect">
@@ -6580,14 +6148,14 @@
       </p:sp>
       <p:sp>
         <p:nvSpPr>
-          <p:cNvPr id="31" name="Text 28"/>
-          <p:cNvSpPr txBox="1"/>
-          <p:nvPr/>
-        </p:nvSpPr>
-        <p:spPr>
-          <a:xfrm>
-            <a:off x="7851750" y="3392594"/>
-            <a:ext cx="3961117" cy="543002"/>
+          <p:cNvPr id="20" name="Text 17"/>
+          <p:cNvSpPr txBox="1"/>
+          <p:nvPr/>
+        </p:nvSpPr>
+        <p:spPr>
+          <a:xfrm>
+            <a:off x="8069372" y="2641162"/>
+            <a:ext cx="3736811" cy="362001"/>
           </a:xfrm>
           <a:prstGeom prst="rect">
             <a:avLst/>
@@ -6614,7 +6182,7 @@
                 <a:ea typeface="Inter" pitchFamily="34" charset="-122"/>
                 <a:cs typeface="Inter" pitchFamily="34" charset="-120"/>
               </a:rPr>
-              <a:t>KPay congelado.</a:t>
+              <a:t>Nombres.</a:t>
             </a:r>
             <a:pPr algn="l" indent="0" marL="0">
               <a:lnSpc>
@@ -6631,7 +6199,7 @@
                 <a:ea typeface="Inter" pitchFamily="34" charset="-122"/>
                 <a:cs typeface="Inter" pitchFamily="34" charset="-120"/>
               </a:rPr>
-              <a:t> Su línea de KPay está bloqueada y no puede comprar; 30.1 M de esas promociones ofrecían justo KPay.</a:t>
+              <a:t> 1,053 fuera de la convención: "Recurentes", "Recurrentess", "Softnactive", fecha "202600903".</a:t>
             </a:r>
             <a:endParaRPr lang="en-US" sz="1060" dirty="0"/>
           </a:p>
@@ -6639,14 +6207,14 @@
       </p:sp>
       <p:sp>
         <p:nvSpPr>
-          <p:cNvPr id="32" name="Shape 29"/>
+          <p:cNvPr id="21" name="Shape 18"/>
           <p:cNvSpPr/>
           <p:nvPr/>
         </p:nvSpPr>
         <p:spPr>
           <a:xfrm>
-            <a:off x="7547017" y="4013512"/>
-            <a:ext cx="4132722" cy="0"/>
+            <a:off x="7764640" y="3081080"/>
+            <a:ext cx="3914948" cy="0"/>
           </a:xfrm>
           <a:prstGeom prst="line">
             <a:avLst/>
@@ -6662,13 +6230,13 @@
       </p:sp>
       <p:sp>
         <p:nvSpPr>
-          <p:cNvPr id="33" name="Shape 30"/>
+          <p:cNvPr id="22" name="Shape 19"/>
           <p:cNvSpPr/>
           <p:nvPr/>
         </p:nvSpPr>
         <p:spPr>
           <a:xfrm>
-            <a:off x="7547017" y="4103635"/>
+            <a:off x="7764640" y="3171203"/>
             <a:ext cx="207224" cy="207224"/>
           </a:xfrm>
           <a:prstGeom prst="ellipse">
@@ -6682,13 +6250,13 @@
       </p:sp>
       <p:sp>
         <p:nvSpPr>
-          <p:cNvPr id="34" name="Text 31"/>
-          <p:cNvSpPr txBox="1"/>
-          <p:nvPr/>
-        </p:nvSpPr>
-        <p:spPr>
-          <a:xfrm>
-            <a:off x="7547017" y="4103635"/>
+          <p:cNvPr id="23" name="Text 20"/>
+          <p:cNvSpPr txBox="1"/>
+          <p:nvPr/>
+        </p:nvSpPr>
+        <p:spPr>
+          <a:xfrm>
+            <a:off x="7764640" y="3171203"/>
             <a:ext cx="231729" cy="207224"/>
           </a:xfrm>
           <a:prstGeom prst="rect">
@@ -6724,14 +6292,14 @@
       </p:sp>
       <p:sp>
         <p:nvSpPr>
-          <p:cNvPr id="35" name="Text 32"/>
-          <p:cNvSpPr txBox="1"/>
-          <p:nvPr/>
-        </p:nvSpPr>
-        <p:spPr>
-          <a:xfrm>
-            <a:off x="7851750" y="4103635"/>
-            <a:ext cx="3961117" cy="543002"/>
+          <p:cNvPr id="24" name="Text 21"/>
+          <p:cNvSpPr txBox="1"/>
+          <p:nvPr/>
+        </p:nvSpPr>
+        <p:spPr>
+          <a:xfrm>
+            <a:off x="8069372" y="3171203"/>
+            <a:ext cx="3736811" cy="543002"/>
           </a:xfrm>
           <a:prstGeom prst="rect">
             <a:avLst/>
@@ -6758,7 +6326,7 @@
                 <a:ea typeface="Inter" pitchFamily="34" charset="-122"/>
                 <a:cs typeface="Inter" pitchFamily="34" charset="-120"/>
               </a:rPr>
-              <a:t>REUS o ARCO.</a:t>
+              <a:t>Equipo y ticket.</a:t>
             </a:r>
             <a:pPr algn="l" indent="0" marL="0">
               <a:lnSpc>
@@ -6775,7 +6343,7 @@
                 <a:ea typeface="Inter" pitchFamily="34" charset="-122"/>
                 <a:cs typeface="Inter" pitchFamily="34" charset="-120"/>
               </a:rPr>
-              <a:t> REUS: registro de CONDUSEF para no recibir publicidad. ARCO: pidió cancelar u oponerse al uso de sus datos.</a:t>
+              <a:t> "Copy of Copy of Copy of Copy of Marketing" es un equipo; T0000 y B0000 sirven de ticket, y B0171 cubre 362.</a:t>
             </a:r>
             <a:endParaRPr lang="en-US" sz="1060" dirty="0"/>
           </a:p>
@@ -6783,14 +6351,14 @@
       </p:sp>
       <p:sp>
         <p:nvSpPr>
-          <p:cNvPr id="36" name="Shape 33"/>
+          <p:cNvPr id="25" name="Shape 22"/>
           <p:cNvSpPr/>
           <p:nvPr/>
         </p:nvSpPr>
         <p:spPr>
           <a:xfrm>
-            <a:off x="7547017" y="4724553"/>
-            <a:ext cx="4132722" cy="0"/>
+            <a:off x="7764640" y="3792121"/>
+            <a:ext cx="3914948" cy="0"/>
           </a:xfrm>
           <a:prstGeom prst="line">
             <a:avLst/>
@@ -6806,13 +6374,13 @@
       </p:sp>
       <p:sp>
         <p:nvSpPr>
-          <p:cNvPr id="37" name="Shape 34"/>
+          <p:cNvPr id="26" name="Shape 23"/>
           <p:cNvSpPr/>
           <p:nvPr/>
         </p:nvSpPr>
         <p:spPr>
           <a:xfrm>
-            <a:off x="7547017" y="4814677"/>
+            <a:off x="7764640" y="3882245"/>
             <a:ext cx="207224" cy="207224"/>
           </a:xfrm>
           <a:prstGeom prst="ellipse">
@@ -6826,13 +6394,13 @@
       </p:sp>
       <p:sp>
         <p:nvSpPr>
-          <p:cNvPr id="38" name="Text 35"/>
-          <p:cNvSpPr txBox="1"/>
-          <p:nvPr/>
-        </p:nvSpPr>
-        <p:spPr>
-          <a:xfrm>
-            <a:off x="7547017" y="4814677"/>
+          <p:cNvPr id="27" name="Text 24"/>
+          <p:cNvSpPr txBox="1"/>
+          <p:nvPr/>
+        </p:nvSpPr>
+        <p:spPr>
+          <a:xfrm>
+            <a:off x="7764640" y="3882245"/>
             <a:ext cx="231729" cy="207224"/>
           </a:xfrm>
           <a:prstGeom prst="rect">
@@ -6868,14 +6436,14 @@
       </p:sp>
       <p:sp>
         <p:nvSpPr>
-          <p:cNvPr id="39" name="Text 36"/>
-          <p:cNvSpPr txBox="1"/>
-          <p:nvPr/>
-        </p:nvSpPr>
-        <p:spPr>
-          <a:xfrm>
-            <a:off x="7851750" y="4814677"/>
-            <a:ext cx="3961117" cy="362001"/>
+          <p:cNvPr id="28" name="Text 25"/>
+          <p:cNvSpPr txBox="1"/>
+          <p:nvPr/>
+        </p:nvSpPr>
+        <p:spPr>
+          <a:xfrm>
+            <a:off x="8069372" y="3882245"/>
+            <a:ext cx="3736811" cy="543002"/>
           </a:xfrm>
           <a:prstGeom prst="rect">
             <a:avLst/>
@@ -6902,7 +6470,7 @@
                 <a:ea typeface="Inter" pitchFamily="34" charset="-122"/>
                 <a:cs typeface="Inter" pitchFamily="34" charset="-120"/>
               </a:rPr>
-              <a:t>Baja de correo.</a:t>
+              <a:t>Copias.</a:t>
             </a:r>
             <a:pPr algn="l" indent="0" marL="0">
               <a:lnSpc>
@@ -6919,7 +6487,7 @@
                 <a:ea typeface="Inter" pitchFamily="34" charset="-122"/>
                 <a:cs typeface="Inter" pitchFamily="34" charset="-120"/>
               </a:rPr>
-              <a:t> De 79 mil promociones a quien ya se dio de baja, 58 mil son de Marketing; la mayor, rescate de Tasa 0.</a:t>
+              <a:t> 63 % de lo que manda cada mes se creó ese mes: se arma una campaña nueva en vez de reusar la anterior.</a:t>
             </a:r>
             <a:endParaRPr lang="en-US" sz="1060" dirty="0"/>
           </a:p>
@@ -6927,7 +6495,7 @@
       </p:sp>
       <p:sp>
         <p:nvSpPr>
-          <p:cNvPr id="40" name="Shape 37"/>
+          <p:cNvPr id="29" name="Shape 26"/>
           <p:cNvSpPr/>
           <p:nvPr/>
         </p:nvSpPr>
@@ -6947,7 +6515,7 @@
       </p:sp>
       <p:sp>
         <p:nvSpPr>
-          <p:cNvPr id="41" name="Text 38"/>
+          <p:cNvPr id="30" name="Text 27"/>
           <p:cNvSpPr txBox="1"/>
           <p:nvPr/>
         </p:nvSpPr>
@@ -6989,14 +6557,14 @@
       </p:sp>
       <p:sp>
         <p:nvSpPr>
-          <p:cNvPr id="42" name="Text 39"/>
+          <p:cNvPr id="31" name="Text 28"/>
           <p:cNvSpPr txBox="1"/>
           <p:nvPr/>
         </p:nvSpPr>
         <p:spPr>
           <a:xfrm>
             <a:off x="1409876" y="6077461"/>
-            <a:ext cx="6421971" cy="182206"/>
+            <a:ext cx="7019604" cy="182206"/>
           </a:xfrm>
           <a:prstGeom prst="rect">
             <a:avLst/>
@@ -7023,7 +6591,7 @@
                 <a:ea typeface="Inter" pitchFamily="34" charset="-122"/>
                 <a:cs typeface="Inter" pitchFamily="34" charset="-120"/>
               </a:rPr>
-              <a:t>Es riesgo legal y de marca, no de una campaña: ninguna exclusión es común a toda la cuenta.</a:t>
+              <a:t>Sin nombre, equipo, ticket ni audiencia confiables, nadie puede saber qué manda Braze ni de quién es.</a:t>
             </a:r>
             <a:endParaRPr lang="en-US" sz="1100" dirty="0"/>
           </a:p>
@@ -7031,14 +6599,14 @@
       </p:sp>
       <p:sp>
         <p:nvSpPr>
-          <p:cNvPr id="43" name="Text 40"/>
+          <p:cNvPr id="32" name="Text 29"/>
           <p:cNvSpPr txBox="1"/>
           <p:nvPr/>
         </p:nvSpPr>
         <p:spPr>
           <a:xfrm>
             <a:off x="511956" y="6454684"/>
-            <a:ext cx="6847765" cy="135035"/>
+            <a:ext cx="9230849" cy="135035"/>
           </a:xfrm>
           <a:prstGeom prst="rect">
             <a:avLst/>
@@ -7065,7 +6633,7 @@
                 <a:ea typeface="Inter" pitchFamily="34" charset="-122"/>
                 <a:cs typeface="Inter" pitchFamily="34" charset="-120"/>
               </a:rPr>
-              <a:t>Fuente: Braze, envíos por comunicación (E1), banderas de contacto (E7a, E17) y envíos tras la baja (E5b), enero a septiembre 2026.</a:t>
+              <a:t>Fuente: Braze, catálogo de campañas y Canvas (E2), envíos por comunicación (E1), segmentos (E11), pasos de Canvas (E15) y grupos de control (E13), enero a septiembre 2026.</a:t>
             </a:r>
             <a:endParaRPr lang="en-US" sz="840" dirty="0"/>
           </a:p>
@@ -7073,7 +6641,7 @@
       </p:sp>
       <p:sp>
         <p:nvSpPr>
-          <p:cNvPr id="44" name="Text 41"/>
+          <p:cNvPr id="33" name="Text 30"/>
           <p:cNvSpPr txBox="1"/>
           <p:nvPr/>
         </p:nvSpPr>
@@ -7181,7 +6749,7 @@
                 <a:ea typeface="Inter" pitchFamily="34" charset="-122"/>
                 <a:cs typeface="Inter" pitchFamily="34" charset="-120"/>
               </a:rPr>
-              <a:t>Qué lo explica: escribimos por lo que queremos vender, cada equipo por su cuenta y sin medir</a:t>
+              <a:t>Le escribimos a quien no debería recibir promociones: congelados, dados de baja y quien pidió no recibirlas</a:t>
             </a:r>
             <a:endParaRPr lang="en-US" sz="2210" dirty="0"/>
           </a:p>
@@ -7195,320 +6763,8 @@
         </p:nvSpPr>
         <p:spPr>
           <a:xfrm>
-            <a:off x="511956" y="1161358"/>
-            <a:ext cx="3527477" cy="1398573"/>
-          </a:xfrm>
-          <a:prstGeom prst="rect">
-            <a:avLst/>
-          </a:prstGeom>
-          <a:solidFill>
-            <a:srgbClr val="F4F6F9"/>
-          </a:solidFill>
-          <a:ln/>
-        </p:spPr>
-      </p:sp>
-      <p:sp>
-        <p:nvSpPr>
-          <p:cNvPr id="4" name="Text 2"/>
-          <p:cNvSpPr txBox="1"/>
-          <p:nvPr/>
-        </p:nvSpPr>
-        <p:spPr>
-          <a:xfrm>
-            <a:off x="694765" y="1356374"/>
-            <a:ext cx="3275003" cy="512107"/>
-          </a:xfrm>
-          <a:prstGeom prst="rect">
-            <a:avLst/>
-          </a:prstGeom>
-          <a:noFill/>
-          <a:ln/>
-        </p:spPr>
-        <p:txBody>
-          <a:bodyPr wrap="square" lIns="0" tIns="0" rIns="0" bIns="0" rtlCol="0" anchor="t"/>
-          <a:lstStyle/>
-          <a:p>
-            <a:pPr algn="l" indent="0" marL="0">
-              <a:lnSpc>
-                <a:spcPct val="83000"/>
-              </a:lnSpc>
-              <a:buNone/>
-            </a:pPr>
-            <a:r>
-              <a:rPr lang="en-US" sz="4030" b="1" spc="-80" kern="0" dirty="0">
-                <a:solidFill>
-                  <a:srgbClr val="0B1220"/>
-                </a:solidFill>
-                <a:latin typeface="Inter" pitchFamily="34" charset="0"/>
-                <a:ea typeface="Inter" pitchFamily="34" charset="-122"/>
-                <a:cs typeface="Inter" pitchFamily="34" charset="-120"/>
-              </a:rPr>
-              <a:t>73 %</a:t>
-            </a:r>
-            <a:endParaRPr lang="en-US" sz="4030" dirty="0"/>
-          </a:p>
-        </p:txBody>
-      </p:sp>
-      <p:sp>
-        <p:nvSpPr>
-          <p:cNvPr id="5" name="Text 3"/>
-          <p:cNvSpPr txBox="1"/>
-          <p:nvPr/>
-        </p:nvSpPr>
-        <p:spPr>
-          <a:xfrm>
-            <a:off x="694765" y="1953782"/>
-            <a:ext cx="3275003" cy="411132"/>
-          </a:xfrm>
-          <a:prstGeom prst="rect">
-            <a:avLst/>
-          </a:prstGeom>
-          <a:noFill/>
-          <a:ln/>
-        </p:spPr>
-        <p:txBody>
-          <a:bodyPr wrap="square" lIns="0" tIns="0" rIns="0" bIns="0" rtlCol="0" anchor="t"/>
-          <a:lstStyle/>
-          <a:p>
-            <a:pPr algn="l" indent="0" marL="0">
-              <a:lnSpc>
-                <a:spcPct val="112000"/>
-              </a:lnSpc>
-              <a:buNone/>
-            </a:pPr>
-            <a:r>
-              <a:rPr lang="en-US" sz="1200" dirty="0">
-                <a:solidFill>
-                  <a:srgbClr val="0B1220"/>
-                </a:solidFill>
-                <a:latin typeface="Inter" pitchFamily="34" charset="0"/>
-                <a:ea typeface="Inter" pitchFamily="34" charset="-122"/>
-                <a:cs typeface="Inter" pitchFamily="34" charset="-120"/>
-              </a:rPr>
-              <a:t>de las personas no respondió a nada en nueve meses</a:t>
-            </a:r>
-            <a:endParaRPr lang="en-US" sz="1200" dirty="0"/>
-          </a:p>
-        </p:txBody>
-      </p:sp>
-      <p:sp>
-        <p:nvSpPr>
-          <p:cNvPr id="6" name="Shape 4"/>
-          <p:cNvSpPr/>
-          <p:nvPr/>
-        </p:nvSpPr>
-        <p:spPr>
-          <a:xfrm>
-            <a:off x="4331958" y="1161358"/>
-            <a:ext cx="3527628" cy="1398573"/>
-          </a:xfrm>
-          <a:prstGeom prst="rect">
-            <a:avLst/>
-          </a:prstGeom>
-          <a:solidFill>
-            <a:srgbClr val="F4F6F9"/>
-          </a:solidFill>
-          <a:ln/>
-        </p:spPr>
-      </p:sp>
-      <p:sp>
-        <p:nvSpPr>
-          <p:cNvPr id="7" name="Text 5"/>
-          <p:cNvSpPr txBox="1"/>
-          <p:nvPr/>
-        </p:nvSpPr>
-        <p:spPr>
-          <a:xfrm>
-            <a:off x="4514767" y="1356374"/>
-            <a:ext cx="3275158" cy="512107"/>
-          </a:xfrm>
-          <a:prstGeom prst="rect">
-            <a:avLst/>
-          </a:prstGeom>
-          <a:noFill/>
-          <a:ln/>
-        </p:spPr>
-        <p:txBody>
-          <a:bodyPr wrap="square" lIns="0" tIns="0" rIns="0" bIns="0" rtlCol="0" anchor="t"/>
-          <a:lstStyle/>
-          <a:p>
-            <a:pPr algn="l" indent="0" marL="0">
-              <a:lnSpc>
-                <a:spcPct val="83000"/>
-              </a:lnSpc>
-              <a:buNone/>
-            </a:pPr>
-            <a:r>
-              <a:rPr lang="en-US" sz="4030" b="1" spc="-80" kern="0" dirty="0">
-                <a:solidFill>
-                  <a:srgbClr val="0B1220"/>
-                </a:solidFill>
-                <a:latin typeface="Inter" pitchFamily="34" charset="0"/>
-                <a:ea typeface="Inter" pitchFamily="34" charset="-122"/>
-                <a:cs typeface="Inter" pitchFamily="34" charset="-120"/>
-              </a:rPr>
-              <a:t>2.3 M</a:t>
-            </a:r>
-            <a:endParaRPr lang="en-US" sz="4030" dirty="0"/>
-          </a:p>
-        </p:txBody>
-      </p:sp>
-      <p:sp>
-        <p:nvSpPr>
-          <p:cNvPr id="8" name="Text 6"/>
-          <p:cNvSpPr txBox="1"/>
-          <p:nvPr/>
-        </p:nvSpPr>
-        <p:spPr>
-          <a:xfrm>
-            <a:off x="4514767" y="1953782"/>
-            <a:ext cx="3275158" cy="411132"/>
-          </a:xfrm>
-          <a:prstGeom prst="rect">
-            <a:avLst/>
-          </a:prstGeom>
-          <a:noFill/>
-          <a:ln/>
-        </p:spPr>
-        <p:txBody>
-          <a:bodyPr wrap="square" lIns="0" tIns="0" rIns="0" bIns="0" rtlCol="0" anchor="t"/>
-          <a:lstStyle/>
-          <a:p>
-            <a:pPr algn="l" indent="0" marL="0">
-              <a:lnSpc>
-                <a:spcPct val="112000"/>
-              </a:lnSpc>
-              <a:buNone/>
-            </a:pPr>
-            <a:r>
-              <a:rPr lang="en-US" sz="1200" dirty="0">
-                <a:solidFill>
-                  <a:srgbClr val="0B1220"/>
-                </a:solidFill>
-                <a:latin typeface="Inter" pitchFamily="34" charset="0"/>
-                <a:ea typeface="Inter" pitchFamily="34" charset="-122"/>
-                <a:cs typeface="Inter" pitchFamily="34" charset="-120"/>
-              </a:rPr>
-              <a:t>personas al mes con tres o más campañas el mismo día</a:t>
-            </a:r>
-            <a:endParaRPr lang="en-US" sz="1200" dirty="0"/>
-          </a:p>
-        </p:txBody>
-      </p:sp>
-      <p:sp>
-        <p:nvSpPr>
-          <p:cNvPr id="9" name="Shape 7"/>
-          <p:cNvSpPr/>
-          <p:nvPr/>
-        </p:nvSpPr>
-        <p:spPr>
-          <a:xfrm>
-            <a:off x="8152111" y="1161358"/>
-            <a:ext cx="3527477" cy="1398573"/>
-          </a:xfrm>
-          <a:prstGeom prst="rect">
-            <a:avLst/>
-          </a:prstGeom>
-          <a:solidFill>
-            <a:srgbClr val="E8EEFC"/>
-          </a:solidFill>
-          <a:ln/>
-        </p:spPr>
-      </p:sp>
-      <p:sp>
-        <p:nvSpPr>
-          <p:cNvPr id="10" name="Text 8"/>
-          <p:cNvSpPr txBox="1"/>
-          <p:nvPr/>
-        </p:nvSpPr>
-        <p:spPr>
-          <a:xfrm>
-            <a:off x="8334920" y="1356374"/>
-            <a:ext cx="3275003" cy="512107"/>
-          </a:xfrm>
-          <a:prstGeom prst="rect">
-            <a:avLst/>
-          </a:prstGeom>
-          <a:noFill/>
-          <a:ln/>
-        </p:spPr>
-        <p:txBody>
-          <a:bodyPr wrap="square" lIns="0" tIns="0" rIns="0" bIns="0" rtlCol="0" anchor="t"/>
-          <a:lstStyle/>
-          <a:p>
-            <a:pPr algn="l" indent="0" marL="0">
-              <a:lnSpc>
-                <a:spcPct val="83000"/>
-              </a:lnSpc>
-              <a:buNone/>
-            </a:pPr>
-            <a:r>
-              <a:rPr lang="en-US" sz="4030" b="1" spc="-80" kern="0" dirty="0">
-                <a:solidFill>
-                  <a:srgbClr val="1F4FD8"/>
-                </a:solidFill>
-                <a:latin typeface="Inter" pitchFamily="34" charset="0"/>
-                <a:ea typeface="Inter" pitchFamily="34" charset="-122"/>
-                <a:cs typeface="Inter" pitchFamily="34" charset="-120"/>
-              </a:rPr>
-              <a:t>1 de 3,228</a:t>
-            </a:r>
-            <a:endParaRPr lang="en-US" sz="4030" dirty="0"/>
-          </a:p>
-        </p:txBody>
-      </p:sp>
-      <p:sp>
-        <p:nvSpPr>
-          <p:cNvPr id="11" name="Text 9"/>
-          <p:cNvSpPr txBox="1"/>
-          <p:nvPr/>
-        </p:nvSpPr>
-        <p:spPr>
-          <a:xfrm>
-            <a:off x="8334920" y="1953782"/>
-            <a:ext cx="3275003" cy="205566"/>
-          </a:xfrm>
-          <a:prstGeom prst="rect">
-            <a:avLst/>
-          </a:prstGeom>
-          <a:noFill/>
-          <a:ln/>
-        </p:spPr>
-        <p:txBody>
-          <a:bodyPr wrap="square" lIns="0" tIns="0" rIns="0" bIns="0" rtlCol="0" anchor="t"/>
-          <a:lstStyle/>
-          <a:p>
-            <a:pPr algn="l" indent="0" marL="0">
-              <a:lnSpc>
-                <a:spcPct val="112000"/>
-              </a:lnSpc>
-              <a:buNone/>
-            </a:pPr>
-            <a:r>
-              <a:rPr lang="en-US" sz="1200" dirty="0">
-                <a:solidFill>
-                  <a:srgbClr val="0B1220"/>
-                </a:solidFill>
-                <a:latin typeface="Inter" pitchFamily="34" charset="0"/>
-                <a:ea typeface="Inter" pitchFamily="34" charset="-122"/>
-                <a:cs typeface="Inter" pitchFamily="34" charset="-120"/>
-              </a:rPr>
-              <a:t>Canvas tiene un grupo de control real</a:t>
-            </a:r>
-            <a:endParaRPr lang="en-US" sz="1200" dirty="0"/>
-          </a:p>
-        </p:txBody>
-      </p:sp>
-      <p:sp>
-        <p:nvSpPr>
-          <p:cNvPr id="12" name="Shape 10"/>
-          <p:cNvSpPr/>
-          <p:nvPr/>
-        </p:nvSpPr>
-        <p:spPr>
-          <a:xfrm>
-            <a:off x="511956" y="2784184"/>
-            <a:ext cx="3527477" cy="0"/>
+            <a:off x="511956" y="1166180"/>
+            <a:ext cx="11167783" cy="0"/>
           </a:xfrm>
           <a:prstGeom prst="line">
             <a:avLst/>
@@ -7524,135 +6780,14 @@
       </p:sp>
       <p:sp>
         <p:nvSpPr>
-          <p:cNvPr id="13" name="Shape 11"/>
+          <p:cNvPr id="4" name="Shape 2"/>
           <p:cNvSpPr/>
           <p:nvPr/>
         </p:nvSpPr>
         <p:spPr>
           <a:xfrm>
-            <a:off x="511956" y="2922987"/>
-            <a:ext cx="231639" cy="231639"/>
-          </a:xfrm>
-          <a:prstGeom prst="ellipse">
-            <a:avLst/>
-          </a:prstGeom>
-          <a:solidFill>
-            <a:srgbClr val="E8EEFC"/>
-          </a:solidFill>
-          <a:ln/>
-        </p:spPr>
-      </p:sp>
-      <p:sp>
-        <p:nvSpPr>
-          <p:cNvPr id="14" name="Text 12"/>
-          <p:cNvSpPr txBox="1"/>
-          <p:nvPr/>
-        </p:nvSpPr>
-        <p:spPr>
-          <a:xfrm>
-            <a:off x="511956" y="2922987"/>
-            <a:ext cx="256876" cy="231639"/>
-          </a:xfrm>
-          <a:prstGeom prst="rect">
-            <a:avLst/>
-          </a:prstGeom>
-          <a:noFill/>
-          <a:ln/>
-        </p:spPr>
-        <p:txBody>
-          <a:bodyPr wrap="square" lIns="0" tIns="0" rIns="0" bIns="0" rtlCol="0" anchor="ctr"/>
-          <a:lstStyle/>
-          <a:p>
-            <a:pPr algn="ctr" indent="0" marL="0">
-              <a:lnSpc>
-                <a:spcPct val="112000"/>
-              </a:lnSpc>
-              <a:buNone/>
-            </a:pPr>
-            <a:r>
-              <a:rPr lang="en-US" sz="960" b="1" dirty="0">
-                <a:solidFill>
-                  <a:srgbClr val="1F4FD8"/>
-                </a:solidFill>
-                <a:latin typeface="Inter" pitchFamily="34" charset="0"/>
-                <a:ea typeface="Inter" pitchFamily="34" charset="-122"/>
-                <a:cs typeface="Inter" pitchFamily="34" charset="-120"/>
-              </a:rPr>
-              <a:t>1</a:t>
-            </a:r>
-            <a:endParaRPr lang="en-US" sz="960" dirty="0"/>
-          </a:p>
-        </p:txBody>
-      </p:sp>
-      <p:sp>
-        <p:nvSpPr>
-          <p:cNvPr id="15" name="Text 13"/>
-          <p:cNvSpPr txBox="1"/>
-          <p:nvPr/>
-        </p:nvSpPr>
-        <p:spPr>
-          <a:xfrm>
-            <a:off x="853310" y="2922987"/>
-            <a:ext cx="3299995" cy="1109213"/>
-          </a:xfrm>
-          <a:prstGeom prst="rect">
-            <a:avLst/>
-          </a:prstGeom>
-          <a:noFill/>
-          <a:ln/>
-        </p:spPr>
-        <p:txBody>
-          <a:bodyPr wrap="square" lIns="0" tIns="0" rIns="0" bIns="0" rtlCol="0" anchor="t"/>
-          <a:lstStyle/>
-          <a:p>
-            <a:pPr algn="l" indent="0" marL="0">
-              <a:lnSpc>
-                <a:spcPct val="116000"/>
-              </a:lnSpc>
-              <a:buNone/>
-            </a:pPr>
-            <a:r>
-              <a:rPr lang="en-US" sz="1250" b="1" dirty="0">
-                <a:solidFill>
-                  <a:srgbClr val="0B1220"/>
-                </a:solidFill>
-                <a:latin typeface="Inter" pitchFamily="34" charset="0"/>
-                <a:ea typeface="Inter" pitchFamily="34" charset="-122"/>
-                <a:cs typeface="Inter" pitchFamily="34" charset="-120"/>
-              </a:rPr>
-              <a:t>Escribimos por lo que queremos vender.</a:t>
-            </a:r>
-            <a:pPr algn="l" indent="0" marL="0">
-              <a:lnSpc>
-                <a:spcPct val="116000"/>
-              </a:lnSpc>
-              <a:buNone/>
-            </a:pPr>
-            <a:r>
-              <a:rPr lang="en-US" sz="1250" dirty="0">
-                <a:solidFill>
-                  <a:srgbClr val="0B1220"/>
-                </a:solidFill>
-                <a:latin typeface="Inter" pitchFamily="34" charset="0"/>
-                <a:ea typeface="Inter" pitchFamily="34" charset="-122"/>
-                <a:cs typeface="Inter" pitchFamily="34" charset="-120"/>
-              </a:rPr>
-              <a:t> Las promociones salen a listas por etapa, no por lo que la persona hizo, y le seguimos escribiendo a quien no responde.</a:t>
-            </a:r>
-            <a:endParaRPr lang="en-US" sz="1250" dirty="0"/>
-          </a:p>
-        </p:txBody>
-      </p:sp>
-      <p:sp>
-        <p:nvSpPr>
-          <p:cNvPr id="16" name="Shape 14"/>
-          <p:cNvSpPr/>
-          <p:nvPr/>
-        </p:nvSpPr>
-        <p:spPr>
-          <a:xfrm>
-            <a:off x="4331958" y="2784184"/>
-            <a:ext cx="3527628" cy="0"/>
+            <a:off x="511956" y="1798251"/>
+            <a:ext cx="11167783" cy="0"/>
           </a:xfrm>
           <a:prstGeom prst="line">
             <a:avLst/>
@@ -7668,16 +6803,268 @@
       </p:sp>
       <p:sp>
         <p:nvSpPr>
-          <p:cNvPr id="17" name="Shape 15"/>
+          <p:cNvPr id="5" name="Text 3"/>
+          <p:cNvSpPr txBox="1"/>
+          <p:nvPr/>
+        </p:nvSpPr>
+        <p:spPr>
+          <a:xfrm>
+            <a:off x="511956" y="1256304"/>
+            <a:ext cx="3718649" cy="129760"/>
+          </a:xfrm>
+          <a:prstGeom prst="rect">
+            <a:avLst/>
+          </a:prstGeom>
+          <a:noFill/>
+          <a:ln/>
+        </p:spPr>
+        <p:txBody>
+          <a:bodyPr wrap="square" lIns="0" tIns="0" rIns="0" bIns="0" rtlCol="0" anchor="t"/>
+          <a:lstStyle/>
+          <a:p>
+            <a:pPr algn="l" indent="0" marL="0">
+              <a:lnSpc>
+                <a:spcPct val="107000"/>
+              </a:lnSpc>
+              <a:buNone/>
+            </a:pPr>
+            <a:r>
+              <a:rPr lang="en-US" sz="790" b="1" spc="80" kern="0" dirty="0">
+                <a:solidFill>
+                  <a:srgbClr val="6B7484"/>
+                </a:solidFill>
+                <a:latin typeface="Inter" pitchFamily="34" charset="0"/>
+                <a:ea typeface="Inter" pitchFamily="34" charset="-122"/>
+                <a:cs typeface="Inter" pitchFamily="34" charset="-120"/>
+              </a:rPr>
+              <a:t>QUÉ SE MANDA</a:t>
+            </a:r>
+            <a:endParaRPr lang="en-US" sz="790" dirty="0"/>
+          </a:p>
+        </p:txBody>
+      </p:sp>
+      <p:sp>
+        <p:nvSpPr>
+          <p:cNvPr id="6" name="Text 4"/>
+          <p:cNvSpPr txBox="1"/>
+          <p:nvPr/>
+        </p:nvSpPr>
+        <p:spPr>
+          <a:xfrm>
+            <a:off x="511956" y="1410328"/>
+            <a:ext cx="3625511" cy="144680"/>
+          </a:xfrm>
+          <a:prstGeom prst="rect">
+            <a:avLst/>
+          </a:prstGeom>
+          <a:noFill/>
+          <a:ln/>
+        </p:spPr>
+        <p:txBody>
+          <a:bodyPr wrap="square" lIns="0" tIns="0" rIns="0" bIns="0" rtlCol="0" anchor="t"/>
+          <a:lstStyle/>
+          <a:p>
+            <a:pPr algn="l" indent="0" marL="0">
+              <a:lnSpc>
+                <a:spcPct val="107000"/>
+              </a:lnSpc>
+              <a:buNone/>
+            </a:pPr>
+            <a:r>
+              <a:rPr lang="en-US" sz="900" dirty="0">
+                <a:solidFill>
+                  <a:srgbClr val="3B4556"/>
+                </a:solidFill>
+                <a:latin typeface="Inter" pitchFamily="34" charset="0"/>
+                <a:ea typeface="Inter" pitchFamily="34" charset="-122"/>
+                <a:cs typeface="Inter" pitchFamily="34" charset="-120"/>
+              </a:rPr>
+              <a:t>Promociones: Tasa 0, referidos, ofertas de KPay y de comercios.</a:t>
+            </a:r>
+            <a:endParaRPr lang="en-US" sz="900" dirty="0"/>
+          </a:p>
+        </p:txBody>
+      </p:sp>
+      <p:sp>
+        <p:nvSpPr>
+          <p:cNvPr id="7" name="Text 5"/>
+          <p:cNvSpPr txBox="1"/>
+          <p:nvPr/>
+        </p:nvSpPr>
+        <p:spPr>
+          <a:xfrm>
+            <a:off x="4299556" y="1256304"/>
+            <a:ext cx="3718649" cy="129760"/>
+          </a:xfrm>
+          <a:prstGeom prst="rect">
+            <a:avLst/>
+          </a:prstGeom>
+          <a:noFill/>
+          <a:ln/>
+        </p:spPr>
+        <p:txBody>
+          <a:bodyPr wrap="square" lIns="0" tIns="0" rIns="0" bIns="0" rtlCol="0" anchor="t"/>
+          <a:lstStyle/>
+          <a:p>
+            <a:pPr algn="l" indent="0" marL="0">
+              <a:lnSpc>
+                <a:spcPct val="107000"/>
+              </a:lnSpc>
+              <a:buNone/>
+            </a:pPr>
+            <a:r>
+              <a:rPr lang="en-US" sz="790" b="1" spc="80" kern="0" dirty="0">
+                <a:solidFill>
+                  <a:srgbClr val="6B7484"/>
+                </a:solidFill>
+                <a:latin typeface="Inter" pitchFamily="34" charset="0"/>
+                <a:ea typeface="Inter" pitchFamily="34" charset="-122"/>
+                <a:cs typeface="Inter" pitchFamily="34" charset="-120"/>
+              </a:rPr>
+              <a:t>QUIÉN</a:t>
+            </a:r>
+            <a:endParaRPr lang="en-US" sz="790" dirty="0"/>
+          </a:p>
+        </p:txBody>
+      </p:sp>
+      <p:sp>
+        <p:nvSpPr>
+          <p:cNvPr id="8" name="Text 6"/>
+          <p:cNvSpPr txBox="1"/>
+          <p:nvPr/>
+        </p:nvSpPr>
+        <p:spPr>
+          <a:xfrm>
+            <a:off x="4299556" y="1410328"/>
+            <a:ext cx="3456777" cy="293580"/>
+          </a:xfrm>
+          <a:prstGeom prst="rect">
+            <a:avLst/>
+          </a:prstGeom>
+          <a:noFill/>
+          <a:ln/>
+        </p:spPr>
+        <p:txBody>
+          <a:bodyPr wrap="square" lIns="0" tIns="0" rIns="0" bIns="0" rtlCol="0" anchor="t"/>
+          <a:lstStyle/>
+          <a:p>
+            <a:pPr algn="l" indent="0" marL="0">
+              <a:lnSpc>
+                <a:spcPct val="107000"/>
+              </a:lnSpc>
+              <a:buNone/>
+            </a:pPr>
+            <a:r>
+              <a:rPr lang="en-US" sz="900" dirty="0">
+                <a:solidFill>
+                  <a:srgbClr val="3B4556"/>
+                </a:solidFill>
+                <a:latin typeface="Inter" pitchFamily="34" charset="0"/>
+                <a:ea typeface="Inter" pitchFamily="34" charset="-122"/>
+                <a:cs typeface="Inter" pitchFamily="34" charset="-120"/>
+              </a:rPr>
+              <a:t>Todos los equipos; Marketing manda la mayor parte de lo que llega tras la baja.</a:t>
+            </a:r>
+            <a:endParaRPr lang="en-US" sz="900" dirty="0"/>
+          </a:p>
+        </p:txBody>
+      </p:sp>
+      <p:sp>
+        <p:nvSpPr>
+          <p:cNvPr id="9" name="Text 7"/>
+          <p:cNvSpPr txBox="1"/>
+          <p:nvPr/>
+        </p:nvSpPr>
+        <p:spPr>
+          <a:xfrm>
+            <a:off x="8087156" y="1256304"/>
+            <a:ext cx="3718649" cy="129760"/>
+          </a:xfrm>
+          <a:prstGeom prst="rect">
+            <a:avLst/>
+          </a:prstGeom>
+          <a:noFill/>
+          <a:ln/>
+        </p:spPr>
+        <p:txBody>
+          <a:bodyPr wrap="square" lIns="0" tIns="0" rIns="0" bIns="0" rtlCol="0" anchor="t"/>
+          <a:lstStyle/>
+          <a:p>
+            <a:pPr algn="l" indent="0" marL="0">
+              <a:lnSpc>
+                <a:spcPct val="107000"/>
+              </a:lnSpc>
+              <a:buNone/>
+            </a:pPr>
+            <a:r>
+              <a:rPr lang="en-US" sz="790" b="1" spc="80" kern="0" dirty="0">
+                <a:solidFill>
+                  <a:srgbClr val="6B7484"/>
+                </a:solidFill>
+                <a:latin typeface="Inter" pitchFamily="34" charset="0"/>
+                <a:ea typeface="Inter" pitchFamily="34" charset="-122"/>
+                <a:cs typeface="Inter" pitchFamily="34" charset="-120"/>
+              </a:rPr>
+              <a:t>A QUIÉN</a:t>
+            </a:r>
+            <a:endParaRPr lang="en-US" sz="790" dirty="0"/>
+          </a:p>
+        </p:txBody>
+      </p:sp>
+      <p:sp>
+        <p:nvSpPr>
+          <p:cNvPr id="10" name="Text 8"/>
+          <p:cNvSpPr txBox="1"/>
+          <p:nvPr/>
+        </p:nvSpPr>
+        <p:spPr>
+          <a:xfrm>
+            <a:off x="8087156" y="1410328"/>
+            <a:ext cx="3705610" cy="293580"/>
+          </a:xfrm>
+          <a:prstGeom prst="rect">
+            <a:avLst/>
+          </a:prstGeom>
+          <a:noFill/>
+          <a:ln/>
+        </p:spPr>
+        <p:txBody>
+          <a:bodyPr wrap="square" lIns="0" tIns="0" rIns="0" bIns="0" rtlCol="0" anchor="t"/>
+          <a:lstStyle/>
+          <a:p>
+            <a:pPr algn="l" indent="0" marL="0">
+              <a:lnSpc>
+                <a:spcPct val="107000"/>
+              </a:lnSpc>
+              <a:buNone/>
+            </a:pPr>
+            <a:r>
+              <a:rPr lang="en-US" sz="900" dirty="0">
+                <a:solidFill>
+                  <a:srgbClr val="3B4556"/>
+                </a:solidFill>
+                <a:latin typeface="Inter" pitchFamily="34" charset="0"/>
+                <a:ea typeface="Inter" pitchFamily="34" charset="-122"/>
+                <a:cs typeface="Inter" pitchFamily="34" charset="-120"/>
+              </a:rPr>
+              <a:t>Personas con KPay congelado, dados de baja, REUS, ARCO y lista negra.</a:t>
+            </a:r>
+            <a:endParaRPr lang="en-US" sz="900" dirty="0"/>
+          </a:p>
+        </p:txBody>
+      </p:sp>
+      <p:sp>
+        <p:nvSpPr>
+          <p:cNvPr id="11" name="Shape 9"/>
           <p:cNvSpPr/>
           <p:nvPr/>
         </p:nvSpPr>
         <p:spPr>
           <a:xfrm>
-            <a:off x="4331958" y="2922987"/>
-            <a:ext cx="231639" cy="231639"/>
-          </a:xfrm>
-          <a:prstGeom prst="ellipse">
+            <a:off x="511956" y="1912789"/>
+            <a:ext cx="2106751" cy="1214256"/>
+          </a:xfrm>
+          <a:prstGeom prst="rect">
             <a:avLst/>
           </a:prstGeom>
           <a:solidFill>
@@ -7688,33 +7075,241 @@
       </p:sp>
       <p:sp>
         <p:nvSpPr>
+          <p:cNvPr id="12" name="Text 10"/>
+          <p:cNvSpPr txBox="1"/>
+          <p:nvPr/>
+        </p:nvSpPr>
+        <p:spPr>
+          <a:xfrm>
+            <a:off x="670350" y="2034561"/>
+            <a:ext cx="1861949" cy="414448"/>
+          </a:xfrm>
+          <a:prstGeom prst="rect">
+            <a:avLst/>
+          </a:prstGeom>
+          <a:noFill/>
+          <a:ln/>
+        </p:spPr>
+        <p:txBody>
+          <a:bodyPr wrap="square" lIns="0" tIns="0" rIns="0" bIns="0" rtlCol="0" anchor="t"/>
+          <a:lstStyle/>
+          <a:p>
+            <a:pPr algn="l" indent="0" marL="0">
+              <a:lnSpc>
+                <a:spcPct val="83000"/>
+              </a:lnSpc>
+              <a:buNone/>
+            </a:pPr>
+            <a:r>
+              <a:rPr lang="en-US" sz="3260" b="1" spc="-70" kern="0" dirty="0">
+                <a:solidFill>
+                  <a:srgbClr val="1F4FD8"/>
+                </a:solidFill>
+                <a:latin typeface="Inter" pitchFamily="34" charset="0"/>
+                <a:ea typeface="Inter" pitchFamily="34" charset="-122"/>
+                <a:cs typeface="Inter" pitchFamily="34" charset="-120"/>
+              </a:rPr>
+              <a:t>43.3 M</a:t>
+            </a:r>
+            <a:endParaRPr lang="en-US" sz="3260" dirty="0"/>
+          </a:p>
+        </p:txBody>
+      </p:sp>
+      <p:sp>
+        <p:nvSpPr>
+          <p:cNvPr id="13" name="Text 11"/>
+          <p:cNvSpPr txBox="1"/>
+          <p:nvPr/>
+        </p:nvSpPr>
+        <p:spPr>
+          <a:xfrm>
+            <a:off x="670350" y="2491660"/>
+            <a:ext cx="1861949" cy="513614"/>
+          </a:xfrm>
+          <a:prstGeom prst="rect">
+            <a:avLst/>
+          </a:prstGeom>
+          <a:noFill/>
+          <a:ln/>
+        </p:spPr>
+        <p:txBody>
+          <a:bodyPr wrap="square" lIns="0" tIns="0" rIns="0" bIns="0" rtlCol="0" anchor="t"/>
+          <a:lstStyle/>
+          <a:p>
+            <a:pPr algn="l" indent="0" marL="0">
+              <a:lnSpc>
+                <a:spcPct val="107000"/>
+              </a:lnSpc>
+              <a:buNone/>
+            </a:pPr>
+            <a:r>
+              <a:rPr lang="en-US" sz="1040" dirty="0">
+                <a:solidFill>
+                  <a:srgbClr val="0B1220"/>
+                </a:solidFill>
+                <a:latin typeface="Inter" pitchFamily="34" charset="0"/>
+                <a:ea typeface="Inter" pitchFamily="34" charset="-122"/>
+                <a:cs typeface="Inter" pitchFamily="34" charset="-120"/>
+              </a:rPr>
+              <a:t>promociones a quien tiene KPay congelado y no puede comprar</a:t>
+            </a:r>
+            <a:endParaRPr lang="en-US" sz="1040" dirty="0"/>
+          </a:p>
+        </p:txBody>
+      </p:sp>
+      <p:sp>
+        <p:nvSpPr>
+          <p:cNvPr id="14" name="Shape 12"/>
+          <p:cNvSpPr/>
+          <p:nvPr/>
+        </p:nvSpPr>
+        <p:spPr>
+          <a:xfrm>
+            <a:off x="2777101" y="1912789"/>
+            <a:ext cx="2106901" cy="1214256"/>
+          </a:xfrm>
+          <a:prstGeom prst="rect">
+            <a:avLst/>
+          </a:prstGeom>
+          <a:solidFill>
+            <a:srgbClr val="E8EEFC"/>
+          </a:solidFill>
+          <a:ln/>
+        </p:spPr>
+      </p:sp>
+      <p:sp>
+        <p:nvSpPr>
+          <p:cNvPr id="15" name="Text 13"/>
+          <p:cNvSpPr txBox="1"/>
+          <p:nvPr/>
+        </p:nvSpPr>
+        <p:spPr>
+          <a:xfrm>
+            <a:off x="2935495" y="2034561"/>
+            <a:ext cx="1862104" cy="414448"/>
+          </a:xfrm>
+          <a:prstGeom prst="rect">
+            <a:avLst/>
+          </a:prstGeom>
+          <a:noFill/>
+          <a:ln/>
+        </p:spPr>
+        <p:txBody>
+          <a:bodyPr wrap="square" lIns="0" tIns="0" rIns="0" bIns="0" rtlCol="0" anchor="t"/>
+          <a:lstStyle/>
+          <a:p>
+            <a:pPr algn="l" indent="0" marL="0">
+              <a:lnSpc>
+                <a:spcPct val="83000"/>
+              </a:lnSpc>
+              <a:buNone/>
+            </a:pPr>
+            <a:r>
+              <a:rPr lang="en-US" sz="3260" b="1" spc="-70" kern="0" dirty="0">
+                <a:solidFill>
+                  <a:srgbClr val="1F4FD8"/>
+                </a:solidFill>
+                <a:latin typeface="Inter" pitchFamily="34" charset="0"/>
+                <a:ea typeface="Inter" pitchFamily="34" charset="-122"/>
+                <a:cs typeface="Inter" pitchFamily="34" charset="-120"/>
+              </a:rPr>
+              <a:t>9.8 M</a:t>
+            </a:r>
+            <a:endParaRPr lang="en-US" sz="3260" dirty="0"/>
+          </a:p>
+        </p:txBody>
+      </p:sp>
+      <p:sp>
+        <p:nvSpPr>
+          <p:cNvPr id="16" name="Text 14"/>
+          <p:cNvSpPr txBox="1"/>
+          <p:nvPr/>
+        </p:nvSpPr>
+        <p:spPr>
+          <a:xfrm>
+            <a:off x="2935495" y="2491660"/>
+            <a:ext cx="1862104" cy="513614"/>
+          </a:xfrm>
+          <a:prstGeom prst="rect">
+            <a:avLst/>
+          </a:prstGeom>
+          <a:noFill/>
+          <a:ln/>
+        </p:spPr>
+        <p:txBody>
+          <a:bodyPr wrap="square" lIns="0" tIns="0" rIns="0" bIns="0" rtlCol="0" anchor="t"/>
+          <a:lstStyle/>
+          <a:p>
+            <a:pPr algn="l" indent="0" marL="0">
+              <a:lnSpc>
+                <a:spcPct val="107000"/>
+              </a:lnSpc>
+              <a:buNone/>
+            </a:pPr>
+            <a:r>
+              <a:rPr lang="en-US" sz="1040" dirty="0">
+                <a:solidFill>
+                  <a:srgbClr val="0B1220"/>
+                </a:solidFill>
+                <a:latin typeface="Inter" pitchFamily="34" charset="0"/>
+                <a:ea typeface="Inter" pitchFamily="34" charset="-122"/>
+                <a:cs typeface="Inter" pitchFamily="34" charset="-120"/>
+              </a:rPr>
+              <a:t>WhatsApp a personas marcadas como baja de WhatsApp</a:t>
+            </a:r>
+            <a:endParaRPr lang="en-US" sz="1040" dirty="0"/>
+          </a:p>
+        </p:txBody>
+      </p:sp>
+      <p:sp>
+        <p:nvSpPr>
+          <p:cNvPr id="17" name="Shape 15"/>
+          <p:cNvSpPr/>
+          <p:nvPr/>
+        </p:nvSpPr>
+        <p:spPr>
+          <a:xfrm>
+            <a:off x="5042397" y="1912789"/>
+            <a:ext cx="2106751" cy="1214256"/>
+          </a:xfrm>
+          <a:prstGeom prst="rect">
+            <a:avLst/>
+          </a:prstGeom>
+          <a:solidFill>
+            <a:srgbClr val="E8EEFC"/>
+          </a:solidFill>
+          <a:ln/>
+        </p:spPr>
+      </p:sp>
+      <p:sp>
+        <p:nvSpPr>
           <p:cNvPr id="18" name="Text 16"/>
           <p:cNvSpPr txBox="1"/>
           <p:nvPr/>
         </p:nvSpPr>
         <p:spPr>
           <a:xfrm>
-            <a:off x="4331958" y="2922987"/>
-            <a:ext cx="256876" cy="231639"/>
-          </a:xfrm>
-          <a:prstGeom prst="rect">
-            <a:avLst/>
-          </a:prstGeom>
-          <a:noFill/>
-          <a:ln/>
-        </p:spPr>
-        <p:txBody>
-          <a:bodyPr wrap="square" lIns="0" tIns="0" rIns="0" bIns="0" rtlCol="0" anchor="ctr"/>
-          <a:lstStyle/>
-          <a:p>
-            <a:pPr algn="ctr" indent="0" marL="0">
-              <a:lnSpc>
-                <a:spcPct val="112000"/>
-              </a:lnSpc>
-              <a:buNone/>
-            </a:pPr>
-            <a:r>
-              <a:rPr lang="en-US" sz="960" b="1" dirty="0">
+            <a:off x="5200791" y="2034561"/>
+            <a:ext cx="1861949" cy="414448"/>
+          </a:xfrm>
+          <a:prstGeom prst="rect">
+            <a:avLst/>
+          </a:prstGeom>
+          <a:noFill/>
+          <a:ln/>
+        </p:spPr>
+        <p:txBody>
+          <a:bodyPr wrap="square" lIns="0" tIns="0" rIns="0" bIns="0" rtlCol="0" anchor="t"/>
+          <a:lstStyle/>
+          <a:p>
+            <a:pPr algn="l" indent="0" marL="0">
+              <a:lnSpc>
+                <a:spcPct val="83000"/>
+              </a:lnSpc>
+              <a:buNone/>
+            </a:pPr>
+            <a:r>
+              <a:rPr lang="en-US" sz="3260" b="1" spc="-70" kern="0" dirty="0">
                 <a:solidFill>
                   <a:srgbClr val="1F4FD8"/>
                 </a:solidFill>
@@ -7722,9 +7317,9 @@
                 <a:ea typeface="Inter" pitchFamily="34" charset="-122"/>
                 <a:cs typeface="Inter" pitchFamily="34" charset="-120"/>
               </a:rPr>
-              <a:t>2</a:t>
-            </a:r>
-            <a:endParaRPr lang="en-US" sz="960" dirty="0"/>
+              <a:t>249 mil</a:t>
+            </a:r>
+            <a:endParaRPr lang="en-US" sz="3260" dirty="0"/>
           </a:p>
         </p:txBody>
       </p:sp>
@@ -7736,27 +7331,27 @@
         </p:nvSpPr>
         <p:spPr>
           <a:xfrm>
-            <a:off x="4673312" y="2922987"/>
-            <a:ext cx="3300150" cy="1109213"/>
-          </a:xfrm>
-          <a:prstGeom prst="rect">
-            <a:avLst/>
-          </a:prstGeom>
-          <a:noFill/>
-          <a:ln/>
-        </p:spPr>
-        <p:txBody>
-          <a:bodyPr wrap="square" lIns="0" tIns="0" rIns="0" bIns="0" rtlCol="0" anchor="t"/>
-          <a:lstStyle/>
-          <a:p>
-            <a:pPr algn="l" indent="0" marL="0">
-              <a:lnSpc>
-                <a:spcPct val="116000"/>
-              </a:lnSpc>
-              <a:buNone/>
-            </a:pPr>
-            <a:r>
-              <a:rPr lang="en-US" sz="1250" b="1" dirty="0">
+            <a:off x="5200791" y="2491660"/>
+            <a:ext cx="1861949" cy="513614"/>
+          </a:xfrm>
+          <a:prstGeom prst="rect">
+            <a:avLst/>
+          </a:prstGeom>
+          <a:noFill/>
+          <a:ln/>
+        </p:spPr>
+        <p:txBody>
+          <a:bodyPr wrap="square" lIns="0" tIns="0" rIns="0" bIns="0" rtlCol="0" anchor="t"/>
+          <a:lstStyle/>
+          <a:p>
+            <a:pPr algn="l" indent="0" marL="0">
+              <a:lnSpc>
+                <a:spcPct val="107000"/>
+              </a:lnSpc>
+              <a:buNone/>
+            </a:pPr>
+            <a:r>
+              <a:rPr lang="en-US" sz="1040" dirty="0">
                 <a:solidFill>
                   <a:srgbClr val="0B1220"/>
                 </a:solidFill>
@@ -7764,26 +7359,9 @@
                 <a:ea typeface="Inter" pitchFamily="34" charset="-122"/>
                 <a:cs typeface="Inter" pitchFamily="34" charset="-120"/>
               </a:rPr>
-              <a:t>Cada equipo decide solo.</a:t>
-            </a:r>
-            <a:pPr algn="l" indent="0" marL="0">
-              <a:lnSpc>
-                <a:spcPct val="116000"/>
-              </a:lnSpc>
-              <a:buNone/>
-            </a:pPr>
-            <a:r>
-              <a:rPr lang="en-US" sz="1250" dirty="0">
-                <a:solidFill>
-                  <a:srgbClr val="0B1220"/>
-                </a:solidFill>
-                <a:latin typeface="Inter" pitchFamily="34" charset="0"/>
-                <a:ea typeface="Inter" pitchFamily="34" charset="-122"/>
-                <a:cs typeface="Inter" pitchFamily="34" charset="-120"/>
-              </a:rPr>
-              <a:t> No hay límite de mensajes por persona ni calendario común: Marketing, Product Growth y Sales le escriben a la misma gente el mismo día.</a:t>
-            </a:r>
-            <a:endParaRPr lang="en-US" sz="1250" dirty="0"/>
+              <a:t>promociones a quien pidió no recibir publicidad (REUS o ARCO)</a:t>
+            </a:r>
+            <a:endParaRPr lang="en-US" sz="1040" dirty="0"/>
           </a:p>
         </p:txBody>
       </p:sp>
@@ -7795,8 +7373,282 @@
         </p:nvSpPr>
         <p:spPr>
           <a:xfrm>
-            <a:off x="8152111" y="2784184"/>
-            <a:ext cx="3527477" cy="0"/>
+            <a:off x="7307542" y="1912789"/>
+            <a:ext cx="2106901" cy="1214256"/>
+          </a:xfrm>
+          <a:prstGeom prst="rect">
+            <a:avLst/>
+          </a:prstGeom>
+          <a:solidFill>
+            <a:srgbClr val="E8EEFC"/>
+          </a:solidFill>
+          <a:ln/>
+        </p:spPr>
+      </p:sp>
+      <p:sp>
+        <p:nvSpPr>
+          <p:cNvPr id="21" name="Text 19"/>
+          <p:cNvSpPr txBox="1"/>
+          <p:nvPr/>
+        </p:nvSpPr>
+        <p:spPr>
+          <a:xfrm>
+            <a:off x="7465936" y="2034561"/>
+            <a:ext cx="1862104" cy="414448"/>
+          </a:xfrm>
+          <a:prstGeom prst="rect">
+            <a:avLst/>
+          </a:prstGeom>
+          <a:noFill/>
+          <a:ln/>
+        </p:spPr>
+        <p:txBody>
+          <a:bodyPr wrap="square" lIns="0" tIns="0" rIns="0" bIns="0" rtlCol="0" anchor="t"/>
+          <a:lstStyle/>
+          <a:p>
+            <a:pPr algn="l" indent="0" marL="0">
+              <a:lnSpc>
+                <a:spcPct val="83000"/>
+              </a:lnSpc>
+              <a:buNone/>
+            </a:pPr>
+            <a:r>
+              <a:rPr lang="en-US" sz="3260" b="1" spc="-70" kern="0" dirty="0">
+                <a:solidFill>
+                  <a:srgbClr val="1F4FD8"/>
+                </a:solidFill>
+                <a:latin typeface="Inter" pitchFamily="34" charset="0"/>
+                <a:ea typeface="Inter" pitchFamily="34" charset="-122"/>
+                <a:cs typeface="Inter" pitchFamily="34" charset="-120"/>
+              </a:rPr>
+              <a:t>146 mil</a:t>
+            </a:r>
+            <a:endParaRPr lang="en-US" sz="3260" dirty="0"/>
+          </a:p>
+        </p:txBody>
+      </p:sp>
+      <p:sp>
+        <p:nvSpPr>
+          <p:cNvPr id="22" name="Text 20"/>
+          <p:cNvSpPr txBox="1"/>
+          <p:nvPr/>
+        </p:nvSpPr>
+        <p:spPr>
+          <a:xfrm>
+            <a:off x="7465936" y="2491660"/>
+            <a:ext cx="1862104" cy="342409"/>
+          </a:xfrm>
+          <a:prstGeom prst="rect">
+            <a:avLst/>
+          </a:prstGeom>
+          <a:noFill/>
+          <a:ln/>
+        </p:spPr>
+        <p:txBody>
+          <a:bodyPr wrap="square" lIns="0" tIns="0" rIns="0" bIns="0" rtlCol="0" anchor="t"/>
+          <a:lstStyle/>
+          <a:p>
+            <a:pPr algn="l" indent="0" marL="0">
+              <a:lnSpc>
+                <a:spcPct val="107000"/>
+              </a:lnSpc>
+              <a:buNone/>
+            </a:pPr>
+            <a:r>
+              <a:rPr lang="en-US" sz="1040" dirty="0">
+                <a:solidFill>
+                  <a:srgbClr val="0B1220"/>
+                </a:solidFill>
+                <a:latin typeface="Inter" pitchFamily="34" charset="0"/>
+                <a:ea typeface="Inter" pitchFamily="34" charset="-122"/>
+                <a:cs typeface="Inter" pitchFamily="34" charset="-120"/>
+              </a:rPr>
+              <a:t>promociones a personas en lista negra</a:t>
+            </a:r>
+            <a:endParaRPr lang="en-US" sz="1040" dirty="0"/>
+          </a:p>
+        </p:txBody>
+      </p:sp>
+      <p:sp>
+        <p:nvSpPr>
+          <p:cNvPr id="23" name="Shape 21"/>
+          <p:cNvSpPr/>
+          <p:nvPr/>
+        </p:nvSpPr>
+        <p:spPr>
+          <a:xfrm>
+            <a:off x="9572838" y="1912789"/>
+            <a:ext cx="2106751" cy="1214256"/>
+          </a:xfrm>
+          <a:prstGeom prst="rect">
+            <a:avLst/>
+          </a:prstGeom>
+          <a:solidFill>
+            <a:srgbClr val="E8EEFC"/>
+          </a:solidFill>
+          <a:ln/>
+        </p:spPr>
+      </p:sp>
+      <p:sp>
+        <p:nvSpPr>
+          <p:cNvPr id="24" name="Text 22"/>
+          <p:cNvSpPr txBox="1"/>
+          <p:nvPr/>
+        </p:nvSpPr>
+        <p:spPr>
+          <a:xfrm>
+            <a:off x="9731232" y="2034561"/>
+            <a:ext cx="1861949" cy="414448"/>
+          </a:xfrm>
+          <a:prstGeom prst="rect">
+            <a:avLst/>
+          </a:prstGeom>
+          <a:noFill/>
+          <a:ln/>
+        </p:spPr>
+        <p:txBody>
+          <a:bodyPr wrap="square" lIns="0" tIns="0" rIns="0" bIns="0" rtlCol="0" anchor="t"/>
+          <a:lstStyle/>
+          <a:p>
+            <a:pPr algn="l" indent="0" marL="0">
+              <a:lnSpc>
+                <a:spcPct val="83000"/>
+              </a:lnSpc>
+              <a:buNone/>
+            </a:pPr>
+            <a:r>
+              <a:rPr lang="en-US" sz="3260" b="1" spc="-70" kern="0" dirty="0">
+                <a:solidFill>
+                  <a:srgbClr val="1F4FD8"/>
+                </a:solidFill>
+                <a:latin typeface="Inter" pitchFamily="34" charset="0"/>
+                <a:ea typeface="Inter" pitchFamily="34" charset="-122"/>
+                <a:cs typeface="Inter" pitchFamily="34" charset="-120"/>
+              </a:rPr>
+              <a:t>79 mil</a:t>
+            </a:r>
+            <a:endParaRPr lang="en-US" sz="3260" dirty="0"/>
+          </a:p>
+        </p:txBody>
+      </p:sp>
+      <p:sp>
+        <p:nvSpPr>
+          <p:cNvPr id="25" name="Text 23"/>
+          <p:cNvSpPr txBox="1"/>
+          <p:nvPr/>
+        </p:nvSpPr>
+        <p:spPr>
+          <a:xfrm>
+            <a:off x="9731232" y="2491660"/>
+            <a:ext cx="1861949" cy="342409"/>
+          </a:xfrm>
+          <a:prstGeom prst="rect">
+            <a:avLst/>
+          </a:prstGeom>
+          <a:noFill/>
+          <a:ln/>
+        </p:spPr>
+        <p:txBody>
+          <a:bodyPr wrap="square" lIns="0" tIns="0" rIns="0" bIns="0" rtlCol="0" anchor="t"/>
+          <a:lstStyle/>
+          <a:p>
+            <a:pPr algn="l" indent="0" marL="0">
+              <a:lnSpc>
+                <a:spcPct val="107000"/>
+              </a:lnSpc>
+              <a:buNone/>
+            </a:pPr>
+            <a:r>
+              <a:rPr lang="en-US" sz="1040" dirty="0">
+                <a:solidFill>
+                  <a:srgbClr val="0B1220"/>
+                </a:solidFill>
+                <a:latin typeface="Inter" pitchFamily="34" charset="0"/>
+                <a:ea typeface="Inter" pitchFamily="34" charset="-122"/>
+                <a:cs typeface="Inter" pitchFamily="34" charset="-120"/>
+              </a:rPr>
+              <a:t>promociones a quien ya se dio de baja del correo</a:t>
+            </a:r>
+            <a:endParaRPr lang="en-US" sz="1040" dirty="0"/>
+          </a:p>
+        </p:txBody>
+      </p:sp>
+      <p:sp>
+        <p:nvSpPr>
+          <p:cNvPr id="26" name="Text 24"/>
+          <p:cNvSpPr txBox="1"/>
+          <p:nvPr/>
+        </p:nvSpPr>
+        <p:spPr>
+          <a:xfrm>
+            <a:off x="511956" y="3297647"/>
+            <a:ext cx="6963101" cy="164573"/>
+          </a:xfrm>
+          <a:prstGeom prst="rect">
+            <a:avLst/>
+          </a:prstGeom>
+          <a:noFill/>
+          <a:ln/>
+        </p:spPr>
+        <p:txBody>
+          <a:bodyPr wrap="square" lIns="0" tIns="0" rIns="0" bIns="0" rtlCol="0" anchor="t"/>
+          <a:lstStyle/>
+          <a:p>
+            <a:pPr algn="l" indent="0" marL="0">
+              <a:lnSpc>
+                <a:spcPct val="112000"/>
+              </a:lnSpc>
+              <a:buNone/>
+            </a:pPr>
+            <a:r>
+              <a:rPr lang="en-US" sz="960" b="1" dirty="0">
+                <a:solidFill>
+                  <a:srgbClr val="0B1220"/>
+                </a:solidFill>
+                <a:latin typeface="Inter" pitchFamily="34" charset="0"/>
+                <a:ea typeface="Inter" pitchFamily="34" charset="-122"/>
+                <a:cs typeface="Inter" pitchFamily="34" charset="-120"/>
+              </a:rPr>
+              <a:t>502 campañas mandaron promociones a quien no debía recibirlas; las 10 primeras suman solo 24 %</a:t>
+            </a:r>
+            <a:endParaRPr lang="en-US" sz="960" dirty="0"/>
+          </a:p>
+        </p:txBody>
+      </p:sp>
+      <p:pic>
+        <p:nvPicPr>
+          <p:cNvPr id="27" name="Image 0" descr="preencoded.png">    </p:cNvPr>
+          <p:cNvPicPr>
+            <a:picLocks noChangeAspect="1"/>
+          </p:cNvPicPr>
+          <p:nvPr/>
+        </p:nvPicPr>
+        <p:blipFill>
+          <a:blip r:embed="rId1"/>
+          <a:stretch>
+            <a:fillRect/>
+          </a:stretch>
+        </p:blipFill>
+        <p:spPr>
+          <a:xfrm>
+            <a:off x="511956" y="3523107"/>
+            <a:ext cx="6742235" cy="2380889"/>
+          </a:xfrm>
+          <a:prstGeom prst="rect">
+            <a:avLst/>
+          </a:prstGeom>
+        </p:spPr>
+      </p:pic>
+      <p:sp>
+        <p:nvSpPr>
+          <p:cNvPr id="28" name="Shape 25"/>
+          <p:cNvSpPr/>
+          <p:nvPr/>
+        </p:nvSpPr>
+        <p:spPr>
+          <a:xfrm>
+            <a:off x="7547017" y="3302470"/>
+            <a:ext cx="4132722" cy="0"/>
           </a:xfrm>
           <a:prstGeom prst="line">
             <a:avLst/>
@@ -7812,14 +7664,14 @@
       </p:sp>
       <p:sp>
         <p:nvSpPr>
-          <p:cNvPr id="21" name="Shape 19"/>
+          <p:cNvPr id="29" name="Shape 26"/>
           <p:cNvSpPr/>
           <p:nvPr/>
         </p:nvSpPr>
         <p:spPr>
           <a:xfrm>
-            <a:off x="8152111" y="2922987"/>
-            <a:ext cx="231639" cy="231639"/>
+            <a:off x="7547017" y="3392594"/>
+            <a:ext cx="207224" cy="207224"/>
           </a:xfrm>
           <a:prstGeom prst="ellipse">
             <a:avLst/>
@@ -7832,14 +7684,14 @@
       </p:sp>
       <p:sp>
         <p:nvSpPr>
-          <p:cNvPr id="22" name="Text 20"/>
-          <p:cNvSpPr txBox="1"/>
-          <p:nvPr/>
-        </p:nvSpPr>
-        <p:spPr>
-          <a:xfrm>
-            <a:off x="8152111" y="2922987"/>
-            <a:ext cx="256876" cy="231639"/>
+          <p:cNvPr id="30" name="Text 27"/>
+          <p:cNvSpPr txBox="1"/>
+          <p:nvPr/>
+        </p:nvSpPr>
+        <p:spPr>
+          <a:xfrm>
+            <a:off x="7547017" y="3392594"/>
+            <a:ext cx="231729" cy="207224"/>
           </a:xfrm>
           <a:prstGeom prst="rect">
             <a:avLst/>
@@ -7858,7 +7710,7 @@
               <a:buNone/>
             </a:pPr>
             <a:r>
-              <a:rPr lang="en-US" sz="960" b="1" dirty="0">
+              <a:rPr lang="en-US" sz="910" b="1" dirty="0">
                 <a:solidFill>
                   <a:srgbClr val="1F4FD8"/>
                 </a:solidFill>
@@ -7866,41 +7718,41 @@
                 <a:ea typeface="Inter" pitchFamily="34" charset="-122"/>
                 <a:cs typeface="Inter" pitchFamily="34" charset="-120"/>
               </a:rPr>
-              <a:t>3</a:t>
-            </a:r>
-            <a:endParaRPr lang="en-US" sz="960" dirty="0"/>
-          </a:p>
-        </p:txBody>
-      </p:sp>
-      <p:sp>
-        <p:nvSpPr>
-          <p:cNvPr id="23" name="Text 21"/>
-          <p:cNvSpPr txBox="1"/>
-          <p:nvPr/>
-        </p:nvSpPr>
-        <p:spPr>
-          <a:xfrm>
-            <a:off x="8493465" y="2922987"/>
-            <a:ext cx="3299995" cy="1109213"/>
-          </a:xfrm>
-          <a:prstGeom prst="rect">
-            <a:avLst/>
-          </a:prstGeom>
-          <a:noFill/>
-          <a:ln/>
-        </p:spPr>
-        <p:txBody>
-          <a:bodyPr wrap="square" lIns="0" tIns="0" rIns="0" bIns="0" rtlCol="0" anchor="t"/>
-          <a:lstStyle/>
-          <a:p>
-            <a:pPr algn="l" indent="0" marL="0">
-              <a:lnSpc>
-                <a:spcPct val="116000"/>
-              </a:lnSpc>
-              <a:buNone/>
-            </a:pPr>
-            <a:r>
-              <a:rPr lang="en-US" sz="1250" b="1" dirty="0">
+              <a:t>1</a:t>
+            </a:r>
+            <a:endParaRPr lang="en-US" sz="910" dirty="0"/>
+          </a:p>
+        </p:txBody>
+      </p:sp>
+      <p:sp>
+        <p:nvSpPr>
+          <p:cNvPr id="31" name="Text 28"/>
+          <p:cNvSpPr txBox="1"/>
+          <p:nvPr/>
+        </p:nvSpPr>
+        <p:spPr>
+          <a:xfrm>
+            <a:off x="7851750" y="3392594"/>
+            <a:ext cx="3961117" cy="543002"/>
+          </a:xfrm>
+          <a:prstGeom prst="rect">
+            <a:avLst/>
+          </a:prstGeom>
+          <a:noFill/>
+          <a:ln/>
+        </p:spPr>
+        <p:txBody>
+          <a:bodyPr wrap="square" lIns="0" tIns="0" rIns="0" bIns="0" rtlCol="0" anchor="t"/>
+          <a:lstStyle/>
+          <a:p>
+            <a:pPr algn="l" indent="0" marL="0">
+              <a:lnSpc>
+                <a:spcPct val="112000"/>
+              </a:lnSpc>
+              <a:buNone/>
+            </a:pPr>
+            <a:r>
+              <a:rPr lang="en-US" sz="1060" b="1" dirty="0">
                 <a:solidFill>
                   <a:srgbClr val="0B1220"/>
                 </a:solidFill>
@@ -7908,16 +7760,16 @@
                 <a:ea typeface="Inter" pitchFamily="34" charset="-122"/>
                 <a:cs typeface="Inter" pitchFamily="34" charset="-120"/>
               </a:rPr>
-              <a:t>Nadie compara volumen contra respuesta.</a:t>
-            </a:r>
-            <a:pPr algn="l" indent="0" marL="0">
-              <a:lnSpc>
-                <a:spcPct val="116000"/>
-              </a:lnSpc>
-              <a:buNone/>
-            </a:pPr>
-            <a:r>
-              <a:rPr lang="en-US" sz="1250" dirty="0">
+              <a:t>KPay congelado.</a:t>
+            </a:r>
+            <a:pPr algn="l" indent="0" marL="0">
+              <a:lnSpc>
+                <a:spcPct val="112000"/>
+              </a:lnSpc>
+              <a:buNone/>
+            </a:pPr>
+            <a:r>
+              <a:rPr lang="en-US" sz="1060" dirty="0">
                 <a:solidFill>
                   <a:srgbClr val="0B1220"/>
                 </a:solidFill>
@@ -7925,24 +7777,47 @@
                 <a:ea typeface="Inter" pitchFamily="34" charset="-122"/>
                 <a:cs typeface="Inter" pitchFamily="34" charset="-120"/>
               </a:rPr>
-              <a:t> Copiar una campaña cada mes es más fácil que medirla: 4 de cada 10 mensajes salen de campañas debajo del mínimo.</a:t>
-            </a:r>
-            <a:endParaRPr lang="en-US" sz="1250" dirty="0"/>
-          </a:p>
-        </p:txBody>
-      </p:sp>
-      <p:sp>
-        <p:nvSpPr>
-          <p:cNvPr id="24" name="Shape 22"/>
+              <a:t> Su línea de KPay está bloqueada y no puede comprar; 30.1 M de esas promociones ofrecían justo KPay.</a:t>
+            </a:r>
+            <a:endParaRPr lang="en-US" sz="1060" dirty="0"/>
+          </a:p>
+        </p:txBody>
+      </p:sp>
+      <p:sp>
+        <p:nvSpPr>
+          <p:cNvPr id="32" name="Shape 29"/>
           <p:cNvSpPr/>
           <p:nvPr/>
         </p:nvSpPr>
         <p:spPr>
           <a:xfrm>
-            <a:off x="511956" y="5992160"/>
-            <a:ext cx="11167783" cy="352808"/>
-          </a:xfrm>
-          <a:prstGeom prst="rect">
+            <a:off x="7547017" y="4013512"/>
+            <a:ext cx="4132722" cy="0"/>
+          </a:xfrm>
+          <a:prstGeom prst="line">
+            <a:avLst/>
+          </a:prstGeom>
+          <a:noFill/>
+          <a:ln w="9645">
+            <a:solidFill>
+              <a:srgbClr val="DDE2EA"/>
+            </a:solidFill>
+            <a:prstDash val="solid"/>
+          </a:ln>
+        </p:spPr>
+      </p:sp>
+      <p:sp>
+        <p:nvSpPr>
+          <p:cNvPr id="33" name="Shape 30"/>
+          <p:cNvSpPr/>
+          <p:nvPr/>
+        </p:nvSpPr>
+        <p:spPr>
+          <a:xfrm>
+            <a:off x="7547017" y="4103635"/>
+            <a:ext cx="207224" cy="207224"/>
+          </a:xfrm>
+          <a:prstGeom prst="ellipse">
             <a:avLst/>
           </a:prstGeom>
           <a:solidFill>
@@ -7953,7 +7828,272 @@
       </p:sp>
       <p:sp>
         <p:nvSpPr>
-          <p:cNvPr id="25" name="Text 23"/>
+          <p:cNvPr id="34" name="Text 31"/>
+          <p:cNvSpPr txBox="1"/>
+          <p:nvPr/>
+        </p:nvSpPr>
+        <p:spPr>
+          <a:xfrm>
+            <a:off x="7547017" y="4103635"/>
+            <a:ext cx="231729" cy="207224"/>
+          </a:xfrm>
+          <a:prstGeom prst="rect">
+            <a:avLst/>
+          </a:prstGeom>
+          <a:noFill/>
+          <a:ln/>
+        </p:spPr>
+        <p:txBody>
+          <a:bodyPr wrap="square" lIns="0" tIns="0" rIns="0" bIns="0" rtlCol="0" anchor="ctr"/>
+          <a:lstStyle/>
+          <a:p>
+            <a:pPr algn="ctr" indent="0" marL="0">
+              <a:lnSpc>
+                <a:spcPct val="112000"/>
+              </a:lnSpc>
+              <a:buNone/>
+            </a:pPr>
+            <a:r>
+              <a:rPr lang="en-US" sz="910" b="1" dirty="0">
+                <a:solidFill>
+                  <a:srgbClr val="1F4FD8"/>
+                </a:solidFill>
+                <a:latin typeface="Inter" pitchFamily="34" charset="0"/>
+                <a:ea typeface="Inter" pitchFamily="34" charset="-122"/>
+                <a:cs typeface="Inter" pitchFamily="34" charset="-120"/>
+              </a:rPr>
+              <a:t>2</a:t>
+            </a:r>
+            <a:endParaRPr lang="en-US" sz="910" dirty="0"/>
+          </a:p>
+        </p:txBody>
+      </p:sp>
+      <p:sp>
+        <p:nvSpPr>
+          <p:cNvPr id="35" name="Text 32"/>
+          <p:cNvSpPr txBox="1"/>
+          <p:nvPr/>
+        </p:nvSpPr>
+        <p:spPr>
+          <a:xfrm>
+            <a:off x="7851750" y="4103635"/>
+            <a:ext cx="3961117" cy="543002"/>
+          </a:xfrm>
+          <a:prstGeom prst="rect">
+            <a:avLst/>
+          </a:prstGeom>
+          <a:noFill/>
+          <a:ln/>
+        </p:spPr>
+        <p:txBody>
+          <a:bodyPr wrap="square" lIns="0" tIns="0" rIns="0" bIns="0" rtlCol="0" anchor="t"/>
+          <a:lstStyle/>
+          <a:p>
+            <a:pPr algn="l" indent="0" marL="0">
+              <a:lnSpc>
+                <a:spcPct val="112000"/>
+              </a:lnSpc>
+              <a:buNone/>
+            </a:pPr>
+            <a:r>
+              <a:rPr lang="en-US" sz="1060" b="1" dirty="0">
+                <a:solidFill>
+                  <a:srgbClr val="0B1220"/>
+                </a:solidFill>
+                <a:latin typeface="Inter" pitchFamily="34" charset="0"/>
+                <a:ea typeface="Inter" pitchFamily="34" charset="-122"/>
+                <a:cs typeface="Inter" pitchFamily="34" charset="-120"/>
+              </a:rPr>
+              <a:t>REUS o ARCO.</a:t>
+            </a:r>
+            <a:pPr algn="l" indent="0" marL="0">
+              <a:lnSpc>
+                <a:spcPct val="112000"/>
+              </a:lnSpc>
+              <a:buNone/>
+            </a:pPr>
+            <a:r>
+              <a:rPr lang="en-US" sz="1060" dirty="0">
+                <a:solidFill>
+                  <a:srgbClr val="0B1220"/>
+                </a:solidFill>
+                <a:latin typeface="Inter" pitchFamily="34" charset="0"/>
+                <a:ea typeface="Inter" pitchFamily="34" charset="-122"/>
+                <a:cs typeface="Inter" pitchFamily="34" charset="-120"/>
+              </a:rPr>
+              <a:t> REUS: registro de CONDUSEF para no recibir publicidad. ARCO: pidió cancelar u oponerse al uso de sus datos.</a:t>
+            </a:r>
+            <a:endParaRPr lang="en-US" sz="1060" dirty="0"/>
+          </a:p>
+        </p:txBody>
+      </p:sp>
+      <p:sp>
+        <p:nvSpPr>
+          <p:cNvPr id="36" name="Shape 33"/>
+          <p:cNvSpPr/>
+          <p:nvPr/>
+        </p:nvSpPr>
+        <p:spPr>
+          <a:xfrm>
+            <a:off x="7547017" y="4724553"/>
+            <a:ext cx="4132722" cy="0"/>
+          </a:xfrm>
+          <a:prstGeom prst="line">
+            <a:avLst/>
+          </a:prstGeom>
+          <a:noFill/>
+          <a:ln w="9645">
+            <a:solidFill>
+              <a:srgbClr val="DDE2EA"/>
+            </a:solidFill>
+            <a:prstDash val="solid"/>
+          </a:ln>
+        </p:spPr>
+      </p:sp>
+      <p:sp>
+        <p:nvSpPr>
+          <p:cNvPr id="37" name="Shape 34"/>
+          <p:cNvSpPr/>
+          <p:nvPr/>
+        </p:nvSpPr>
+        <p:spPr>
+          <a:xfrm>
+            <a:off x="7547017" y="4814677"/>
+            <a:ext cx="207224" cy="207224"/>
+          </a:xfrm>
+          <a:prstGeom prst="ellipse">
+            <a:avLst/>
+          </a:prstGeom>
+          <a:solidFill>
+            <a:srgbClr val="E8EEFC"/>
+          </a:solidFill>
+          <a:ln/>
+        </p:spPr>
+      </p:sp>
+      <p:sp>
+        <p:nvSpPr>
+          <p:cNvPr id="38" name="Text 35"/>
+          <p:cNvSpPr txBox="1"/>
+          <p:nvPr/>
+        </p:nvSpPr>
+        <p:spPr>
+          <a:xfrm>
+            <a:off x="7547017" y="4814677"/>
+            <a:ext cx="231729" cy="207224"/>
+          </a:xfrm>
+          <a:prstGeom prst="rect">
+            <a:avLst/>
+          </a:prstGeom>
+          <a:noFill/>
+          <a:ln/>
+        </p:spPr>
+        <p:txBody>
+          <a:bodyPr wrap="square" lIns="0" tIns="0" rIns="0" bIns="0" rtlCol="0" anchor="ctr"/>
+          <a:lstStyle/>
+          <a:p>
+            <a:pPr algn="ctr" indent="0" marL="0">
+              <a:lnSpc>
+                <a:spcPct val="112000"/>
+              </a:lnSpc>
+              <a:buNone/>
+            </a:pPr>
+            <a:r>
+              <a:rPr lang="en-US" sz="910" b="1" dirty="0">
+                <a:solidFill>
+                  <a:srgbClr val="1F4FD8"/>
+                </a:solidFill>
+                <a:latin typeface="Inter" pitchFamily="34" charset="0"/>
+                <a:ea typeface="Inter" pitchFamily="34" charset="-122"/>
+                <a:cs typeface="Inter" pitchFamily="34" charset="-120"/>
+              </a:rPr>
+              <a:t>3</a:t>
+            </a:r>
+            <a:endParaRPr lang="en-US" sz="910" dirty="0"/>
+          </a:p>
+        </p:txBody>
+      </p:sp>
+      <p:sp>
+        <p:nvSpPr>
+          <p:cNvPr id="39" name="Text 36"/>
+          <p:cNvSpPr txBox="1"/>
+          <p:nvPr/>
+        </p:nvSpPr>
+        <p:spPr>
+          <a:xfrm>
+            <a:off x="7851750" y="4814677"/>
+            <a:ext cx="3961117" cy="362001"/>
+          </a:xfrm>
+          <a:prstGeom prst="rect">
+            <a:avLst/>
+          </a:prstGeom>
+          <a:noFill/>
+          <a:ln/>
+        </p:spPr>
+        <p:txBody>
+          <a:bodyPr wrap="square" lIns="0" tIns="0" rIns="0" bIns="0" rtlCol="0" anchor="t"/>
+          <a:lstStyle/>
+          <a:p>
+            <a:pPr algn="l" indent="0" marL="0">
+              <a:lnSpc>
+                <a:spcPct val="112000"/>
+              </a:lnSpc>
+              <a:buNone/>
+            </a:pPr>
+            <a:r>
+              <a:rPr lang="en-US" sz="1060" b="1" dirty="0">
+                <a:solidFill>
+                  <a:srgbClr val="0B1220"/>
+                </a:solidFill>
+                <a:latin typeface="Inter" pitchFamily="34" charset="0"/>
+                <a:ea typeface="Inter" pitchFamily="34" charset="-122"/>
+                <a:cs typeface="Inter" pitchFamily="34" charset="-120"/>
+              </a:rPr>
+              <a:t>Baja de correo.</a:t>
+            </a:r>
+            <a:pPr algn="l" indent="0" marL="0">
+              <a:lnSpc>
+                <a:spcPct val="112000"/>
+              </a:lnSpc>
+              <a:buNone/>
+            </a:pPr>
+            <a:r>
+              <a:rPr lang="en-US" sz="1060" dirty="0">
+                <a:solidFill>
+                  <a:srgbClr val="0B1220"/>
+                </a:solidFill>
+                <a:latin typeface="Inter" pitchFamily="34" charset="0"/>
+                <a:ea typeface="Inter" pitchFamily="34" charset="-122"/>
+                <a:cs typeface="Inter" pitchFamily="34" charset="-120"/>
+              </a:rPr>
+              <a:t> De 79 mil promociones a quien ya se dio de baja, 58 mil son de Marketing; la mayor, rescate de Tasa 0.</a:t>
+            </a:r>
+            <a:endParaRPr lang="en-US" sz="1060" dirty="0"/>
+          </a:p>
+        </p:txBody>
+      </p:sp>
+      <p:sp>
+        <p:nvSpPr>
+          <p:cNvPr id="40" name="Shape 37"/>
+          <p:cNvSpPr/>
+          <p:nvPr/>
+        </p:nvSpPr>
+        <p:spPr>
+          <a:xfrm>
+            <a:off x="511956" y="5992160"/>
+            <a:ext cx="11167783" cy="352808"/>
+          </a:xfrm>
+          <a:prstGeom prst="rect">
+            <a:avLst/>
+          </a:prstGeom>
+          <a:solidFill>
+            <a:srgbClr val="E8EEFC"/>
+          </a:solidFill>
+          <a:ln/>
+        </p:spPr>
+      </p:sp>
+      <p:sp>
+        <p:nvSpPr>
+          <p:cNvPr id="41" name="Text 38"/>
           <p:cNvSpPr txBox="1"/>
           <p:nvPr/>
         </p:nvSpPr>
@@ -7995,6 +8135,1012 @@
       </p:sp>
       <p:sp>
         <p:nvSpPr>
+          <p:cNvPr id="42" name="Text 39"/>
+          <p:cNvSpPr txBox="1"/>
+          <p:nvPr/>
+        </p:nvSpPr>
+        <p:spPr>
+          <a:xfrm>
+            <a:off x="1409876" y="6077461"/>
+            <a:ext cx="6421971" cy="182206"/>
+          </a:xfrm>
+          <a:prstGeom prst="rect">
+            <a:avLst/>
+          </a:prstGeom>
+          <a:noFill/>
+          <a:ln/>
+        </p:spPr>
+        <p:txBody>
+          <a:bodyPr wrap="square" lIns="0" tIns="0" rIns="0" bIns="0" rtlCol="0" anchor="t"/>
+          <a:lstStyle/>
+          <a:p>
+            <a:pPr algn="l" indent="0" marL="0">
+              <a:lnSpc>
+                <a:spcPct val="107000"/>
+              </a:lnSpc>
+              <a:buNone/>
+            </a:pPr>
+            <a:r>
+              <a:rPr lang="en-US" sz="1100" dirty="0">
+                <a:solidFill>
+                  <a:srgbClr val="0B1220"/>
+                </a:solidFill>
+                <a:latin typeface="Inter" pitchFamily="34" charset="0"/>
+                <a:ea typeface="Inter" pitchFamily="34" charset="-122"/>
+                <a:cs typeface="Inter" pitchFamily="34" charset="-120"/>
+              </a:rPr>
+              <a:t>Es riesgo legal y de marca, no de una campaña: ninguna exclusión es común a toda la cuenta.</a:t>
+            </a:r>
+            <a:endParaRPr lang="en-US" sz="1100" dirty="0"/>
+          </a:p>
+        </p:txBody>
+      </p:sp>
+      <p:sp>
+        <p:nvSpPr>
+          <p:cNvPr id="43" name="Text 40"/>
+          <p:cNvSpPr txBox="1"/>
+          <p:nvPr/>
+        </p:nvSpPr>
+        <p:spPr>
+          <a:xfrm>
+            <a:off x="511956" y="6454684"/>
+            <a:ext cx="6847765" cy="135035"/>
+          </a:xfrm>
+          <a:prstGeom prst="rect">
+            <a:avLst/>
+          </a:prstGeom>
+          <a:noFill/>
+          <a:ln/>
+        </p:spPr>
+        <p:txBody>
+          <a:bodyPr wrap="square" lIns="0" tIns="0" rIns="0" bIns="0" rtlCol="0" anchor="t"/>
+          <a:lstStyle/>
+          <a:p>
+            <a:pPr algn="l" indent="0" marL="0">
+              <a:lnSpc>
+                <a:spcPct val="99000"/>
+              </a:lnSpc>
+              <a:buNone/>
+            </a:pPr>
+            <a:r>
+              <a:rPr lang="en-US" sz="840" dirty="0">
+                <a:solidFill>
+                  <a:srgbClr val="6B7484"/>
+                </a:solidFill>
+                <a:latin typeface="Inter" pitchFamily="34" charset="0"/>
+                <a:ea typeface="Inter" pitchFamily="34" charset="-122"/>
+                <a:cs typeface="Inter" pitchFamily="34" charset="-120"/>
+              </a:rPr>
+              <a:t>Fuente: Braze, envíos por comunicación (E1), banderas de contacto (E7a, E17) y envíos tras la baja (E5b), enero a septiembre 2026.</a:t>
+            </a:r>
+            <a:endParaRPr lang="en-US" sz="840" dirty="0"/>
+          </a:p>
+        </p:txBody>
+      </p:sp>
+      <p:sp>
+        <p:nvSpPr>
+          <p:cNvPr id="44" name="Text 41"/>
+          <p:cNvSpPr txBox="1"/>
+          <p:nvPr/>
+        </p:nvSpPr>
+        <p:spPr>
+          <a:xfrm>
+            <a:off x="11566859" y="6454684"/>
+            <a:ext cx="134555" cy="135035"/>
+          </a:xfrm>
+          <a:prstGeom prst="rect">
+            <a:avLst/>
+          </a:prstGeom>
+          <a:noFill/>
+          <a:ln/>
+        </p:spPr>
+        <p:txBody>
+          <a:bodyPr wrap="square" lIns="0" tIns="0" rIns="0" bIns="0" rtlCol="0" anchor="t"/>
+          <a:lstStyle/>
+          <a:p>
+            <a:pPr algn="l" indent="0" marL="0">
+              <a:lnSpc>
+                <a:spcPct val="99000"/>
+              </a:lnSpc>
+              <a:buNone/>
+            </a:pPr>
+            <a:r>
+              <a:rPr lang="en-US" sz="840" dirty="0">
+                <a:solidFill>
+                  <a:srgbClr val="6B7484"/>
+                </a:solidFill>
+                <a:latin typeface="Inter" pitchFamily="34" charset="0"/>
+                <a:ea typeface="Inter" pitchFamily="34" charset="-122"/>
+                <a:cs typeface="Inter" pitchFamily="34" charset="-120"/>
+              </a:rPr>
+              <a:t>14</a:t>
+            </a:r>
+            <a:endParaRPr lang="en-US" sz="840" dirty="0"/>
+          </a:p>
+        </p:txBody>
+      </p:sp>
+    </p:spTree>
+  </p:cSld>
+  <p:clrMapOvr>
+    <a:masterClrMapping/>
+  </p:clrMapOvr>
+</p:sld>
+</file>
+
+<file path=ppt/slides/slide15.xml><?xml version="1.0" encoding="utf-8"?>
+<p:sld xmlns:a="http://schemas.openxmlformats.org/drawingml/2006/main" xmlns:r="http://schemas.openxmlformats.org/officeDocument/2006/relationships" xmlns:p="http://schemas.openxmlformats.org/presentationml/2006/main">
+  <p:cSld name="Slide 15">
+    <p:bg>
+      <p:bgPr>
+        <a:solidFill>
+          <a:srgbClr val="FFFFFF"/>
+        </a:solidFill>
+      </p:bgPr>
+    </p:bg>
+    <p:spTree>
+      <p:nvGrpSpPr>
+        <p:cNvPr id="1" name=""/>
+        <p:cNvGrpSpPr/>
+        <p:nvPr/>
+      </p:nvGrpSpPr>
+      <p:grpSpPr>
+        <a:xfrm>
+          <a:off x="0" y="0"/>
+          <a:ext cx="0" cy="0"/>
+          <a:chOff x="0" y="0"/>
+          <a:chExt cx="0" cy="0"/>
+        </a:xfrm>
+      </p:grpSpPr>
+      <p:sp>
+        <p:nvSpPr>
+          <p:cNvPr id="2" name="Text 0"/>
+          <p:cNvSpPr txBox="1"/>
+          <p:nvPr/>
+        </p:nvSpPr>
+        <p:spPr>
+          <a:xfrm>
+            <a:off x="511956" y="390033"/>
+            <a:ext cx="11521105" cy="661609"/>
+          </a:xfrm>
+          <a:prstGeom prst="rect">
+            <a:avLst/>
+          </a:prstGeom>
+          <a:noFill/>
+          <a:ln/>
+        </p:spPr>
+        <p:txBody>
+          <a:bodyPr wrap="square" lIns="0" tIns="0" rIns="0" bIns="0" rtlCol="0" anchor="t"/>
+          <a:lstStyle/>
+          <a:p>
+            <a:pPr algn="l" indent="0" marL="0">
+              <a:lnSpc>
+                <a:spcPct val="98000"/>
+              </a:lnSpc>
+              <a:buNone/>
+            </a:pPr>
+            <a:r>
+              <a:rPr lang="en-US" sz="2210" b="1" spc="-30" kern="0" dirty="0">
+                <a:solidFill>
+                  <a:srgbClr val="0B1220"/>
+                </a:solidFill>
+                <a:latin typeface="Inter" pitchFamily="34" charset="0"/>
+                <a:ea typeface="Inter" pitchFamily="34" charset="-122"/>
+                <a:cs typeface="Inter" pitchFamily="34" charset="-120"/>
+              </a:rPr>
+              <a:t>Qué lo explica: escribimos por lo que queremos vender, cada equipo por su cuenta y sin medir</a:t>
+            </a:r>
+            <a:endParaRPr lang="en-US" sz="2210" dirty="0"/>
+          </a:p>
+        </p:txBody>
+      </p:sp>
+      <p:sp>
+        <p:nvSpPr>
+          <p:cNvPr id="3" name="Shape 1"/>
+          <p:cNvSpPr/>
+          <p:nvPr/>
+        </p:nvSpPr>
+        <p:spPr>
+          <a:xfrm>
+            <a:off x="511956" y="1161358"/>
+            <a:ext cx="3527477" cy="1398573"/>
+          </a:xfrm>
+          <a:prstGeom prst="rect">
+            <a:avLst/>
+          </a:prstGeom>
+          <a:solidFill>
+            <a:srgbClr val="F4F6F9"/>
+          </a:solidFill>
+          <a:ln/>
+        </p:spPr>
+      </p:sp>
+      <p:sp>
+        <p:nvSpPr>
+          <p:cNvPr id="4" name="Text 2"/>
+          <p:cNvSpPr txBox="1"/>
+          <p:nvPr/>
+        </p:nvSpPr>
+        <p:spPr>
+          <a:xfrm>
+            <a:off x="694765" y="1356374"/>
+            <a:ext cx="3275003" cy="512107"/>
+          </a:xfrm>
+          <a:prstGeom prst="rect">
+            <a:avLst/>
+          </a:prstGeom>
+          <a:noFill/>
+          <a:ln/>
+        </p:spPr>
+        <p:txBody>
+          <a:bodyPr wrap="square" lIns="0" tIns="0" rIns="0" bIns="0" rtlCol="0" anchor="t"/>
+          <a:lstStyle/>
+          <a:p>
+            <a:pPr algn="l" indent="0" marL="0">
+              <a:lnSpc>
+                <a:spcPct val="83000"/>
+              </a:lnSpc>
+              <a:buNone/>
+            </a:pPr>
+            <a:r>
+              <a:rPr lang="en-US" sz="4030" b="1" spc="-80" kern="0" dirty="0">
+                <a:solidFill>
+                  <a:srgbClr val="0B1220"/>
+                </a:solidFill>
+                <a:latin typeface="Inter" pitchFamily="34" charset="0"/>
+                <a:ea typeface="Inter" pitchFamily="34" charset="-122"/>
+                <a:cs typeface="Inter" pitchFamily="34" charset="-120"/>
+              </a:rPr>
+              <a:t>73 %</a:t>
+            </a:r>
+            <a:endParaRPr lang="en-US" sz="4030" dirty="0"/>
+          </a:p>
+        </p:txBody>
+      </p:sp>
+      <p:sp>
+        <p:nvSpPr>
+          <p:cNvPr id="5" name="Text 3"/>
+          <p:cNvSpPr txBox="1"/>
+          <p:nvPr/>
+        </p:nvSpPr>
+        <p:spPr>
+          <a:xfrm>
+            <a:off x="694765" y="1953782"/>
+            <a:ext cx="3275003" cy="411132"/>
+          </a:xfrm>
+          <a:prstGeom prst="rect">
+            <a:avLst/>
+          </a:prstGeom>
+          <a:noFill/>
+          <a:ln/>
+        </p:spPr>
+        <p:txBody>
+          <a:bodyPr wrap="square" lIns="0" tIns="0" rIns="0" bIns="0" rtlCol="0" anchor="t"/>
+          <a:lstStyle/>
+          <a:p>
+            <a:pPr algn="l" indent="0" marL="0">
+              <a:lnSpc>
+                <a:spcPct val="112000"/>
+              </a:lnSpc>
+              <a:buNone/>
+            </a:pPr>
+            <a:r>
+              <a:rPr lang="en-US" sz="1200" dirty="0">
+                <a:solidFill>
+                  <a:srgbClr val="0B1220"/>
+                </a:solidFill>
+                <a:latin typeface="Inter" pitchFamily="34" charset="0"/>
+                <a:ea typeface="Inter" pitchFamily="34" charset="-122"/>
+                <a:cs typeface="Inter" pitchFamily="34" charset="-120"/>
+              </a:rPr>
+              <a:t>de las personas no respondió a nada en nueve meses</a:t>
+            </a:r>
+            <a:endParaRPr lang="en-US" sz="1200" dirty="0"/>
+          </a:p>
+        </p:txBody>
+      </p:sp>
+      <p:sp>
+        <p:nvSpPr>
+          <p:cNvPr id="6" name="Shape 4"/>
+          <p:cNvSpPr/>
+          <p:nvPr/>
+        </p:nvSpPr>
+        <p:spPr>
+          <a:xfrm>
+            <a:off x="4331958" y="1161358"/>
+            <a:ext cx="3527628" cy="1398573"/>
+          </a:xfrm>
+          <a:prstGeom prst="rect">
+            <a:avLst/>
+          </a:prstGeom>
+          <a:solidFill>
+            <a:srgbClr val="F4F6F9"/>
+          </a:solidFill>
+          <a:ln/>
+        </p:spPr>
+      </p:sp>
+      <p:sp>
+        <p:nvSpPr>
+          <p:cNvPr id="7" name="Text 5"/>
+          <p:cNvSpPr txBox="1"/>
+          <p:nvPr/>
+        </p:nvSpPr>
+        <p:spPr>
+          <a:xfrm>
+            <a:off x="4514767" y="1356374"/>
+            <a:ext cx="3275158" cy="512107"/>
+          </a:xfrm>
+          <a:prstGeom prst="rect">
+            <a:avLst/>
+          </a:prstGeom>
+          <a:noFill/>
+          <a:ln/>
+        </p:spPr>
+        <p:txBody>
+          <a:bodyPr wrap="square" lIns="0" tIns="0" rIns="0" bIns="0" rtlCol="0" anchor="t"/>
+          <a:lstStyle/>
+          <a:p>
+            <a:pPr algn="l" indent="0" marL="0">
+              <a:lnSpc>
+                <a:spcPct val="83000"/>
+              </a:lnSpc>
+              <a:buNone/>
+            </a:pPr>
+            <a:r>
+              <a:rPr lang="en-US" sz="4030" b="1" spc="-80" kern="0" dirty="0">
+                <a:solidFill>
+                  <a:srgbClr val="0B1220"/>
+                </a:solidFill>
+                <a:latin typeface="Inter" pitchFamily="34" charset="0"/>
+                <a:ea typeface="Inter" pitchFamily="34" charset="-122"/>
+                <a:cs typeface="Inter" pitchFamily="34" charset="-120"/>
+              </a:rPr>
+              <a:t>2.3 M</a:t>
+            </a:r>
+            <a:endParaRPr lang="en-US" sz="4030" dirty="0"/>
+          </a:p>
+        </p:txBody>
+      </p:sp>
+      <p:sp>
+        <p:nvSpPr>
+          <p:cNvPr id="8" name="Text 6"/>
+          <p:cNvSpPr txBox="1"/>
+          <p:nvPr/>
+        </p:nvSpPr>
+        <p:spPr>
+          <a:xfrm>
+            <a:off x="4514767" y="1953782"/>
+            <a:ext cx="3275158" cy="411132"/>
+          </a:xfrm>
+          <a:prstGeom prst="rect">
+            <a:avLst/>
+          </a:prstGeom>
+          <a:noFill/>
+          <a:ln/>
+        </p:spPr>
+        <p:txBody>
+          <a:bodyPr wrap="square" lIns="0" tIns="0" rIns="0" bIns="0" rtlCol="0" anchor="t"/>
+          <a:lstStyle/>
+          <a:p>
+            <a:pPr algn="l" indent="0" marL="0">
+              <a:lnSpc>
+                <a:spcPct val="112000"/>
+              </a:lnSpc>
+              <a:buNone/>
+            </a:pPr>
+            <a:r>
+              <a:rPr lang="en-US" sz="1200" dirty="0">
+                <a:solidFill>
+                  <a:srgbClr val="0B1220"/>
+                </a:solidFill>
+                <a:latin typeface="Inter" pitchFamily="34" charset="0"/>
+                <a:ea typeface="Inter" pitchFamily="34" charset="-122"/>
+                <a:cs typeface="Inter" pitchFamily="34" charset="-120"/>
+              </a:rPr>
+              <a:t>personas al mes con tres o más campañas el mismo día</a:t>
+            </a:r>
+            <a:endParaRPr lang="en-US" sz="1200" dirty="0"/>
+          </a:p>
+        </p:txBody>
+      </p:sp>
+      <p:sp>
+        <p:nvSpPr>
+          <p:cNvPr id="9" name="Shape 7"/>
+          <p:cNvSpPr/>
+          <p:nvPr/>
+        </p:nvSpPr>
+        <p:spPr>
+          <a:xfrm>
+            <a:off x="8152111" y="1161358"/>
+            <a:ext cx="3527477" cy="1398573"/>
+          </a:xfrm>
+          <a:prstGeom prst="rect">
+            <a:avLst/>
+          </a:prstGeom>
+          <a:solidFill>
+            <a:srgbClr val="E8EEFC"/>
+          </a:solidFill>
+          <a:ln/>
+        </p:spPr>
+      </p:sp>
+      <p:sp>
+        <p:nvSpPr>
+          <p:cNvPr id="10" name="Text 8"/>
+          <p:cNvSpPr txBox="1"/>
+          <p:nvPr/>
+        </p:nvSpPr>
+        <p:spPr>
+          <a:xfrm>
+            <a:off x="8334920" y="1356374"/>
+            <a:ext cx="3275003" cy="512107"/>
+          </a:xfrm>
+          <a:prstGeom prst="rect">
+            <a:avLst/>
+          </a:prstGeom>
+          <a:noFill/>
+          <a:ln/>
+        </p:spPr>
+        <p:txBody>
+          <a:bodyPr wrap="square" lIns="0" tIns="0" rIns="0" bIns="0" rtlCol="0" anchor="t"/>
+          <a:lstStyle/>
+          <a:p>
+            <a:pPr algn="l" indent="0" marL="0">
+              <a:lnSpc>
+                <a:spcPct val="83000"/>
+              </a:lnSpc>
+              <a:buNone/>
+            </a:pPr>
+            <a:r>
+              <a:rPr lang="en-US" sz="4030" b="1" spc="-80" kern="0" dirty="0">
+                <a:solidFill>
+                  <a:srgbClr val="1F4FD8"/>
+                </a:solidFill>
+                <a:latin typeface="Inter" pitchFamily="34" charset="0"/>
+                <a:ea typeface="Inter" pitchFamily="34" charset="-122"/>
+                <a:cs typeface="Inter" pitchFamily="34" charset="-120"/>
+              </a:rPr>
+              <a:t>1 de 3,228</a:t>
+            </a:r>
+            <a:endParaRPr lang="en-US" sz="4030" dirty="0"/>
+          </a:p>
+        </p:txBody>
+      </p:sp>
+      <p:sp>
+        <p:nvSpPr>
+          <p:cNvPr id="11" name="Text 9"/>
+          <p:cNvSpPr txBox="1"/>
+          <p:nvPr/>
+        </p:nvSpPr>
+        <p:spPr>
+          <a:xfrm>
+            <a:off x="8334920" y="1953782"/>
+            <a:ext cx="3275003" cy="205566"/>
+          </a:xfrm>
+          <a:prstGeom prst="rect">
+            <a:avLst/>
+          </a:prstGeom>
+          <a:noFill/>
+          <a:ln/>
+        </p:spPr>
+        <p:txBody>
+          <a:bodyPr wrap="square" lIns="0" tIns="0" rIns="0" bIns="0" rtlCol="0" anchor="t"/>
+          <a:lstStyle/>
+          <a:p>
+            <a:pPr algn="l" indent="0" marL="0">
+              <a:lnSpc>
+                <a:spcPct val="112000"/>
+              </a:lnSpc>
+              <a:buNone/>
+            </a:pPr>
+            <a:r>
+              <a:rPr lang="en-US" sz="1200" dirty="0">
+                <a:solidFill>
+                  <a:srgbClr val="0B1220"/>
+                </a:solidFill>
+                <a:latin typeface="Inter" pitchFamily="34" charset="0"/>
+                <a:ea typeface="Inter" pitchFamily="34" charset="-122"/>
+                <a:cs typeface="Inter" pitchFamily="34" charset="-120"/>
+              </a:rPr>
+              <a:t>Canvas tiene un grupo de control real</a:t>
+            </a:r>
+            <a:endParaRPr lang="en-US" sz="1200" dirty="0"/>
+          </a:p>
+        </p:txBody>
+      </p:sp>
+      <p:sp>
+        <p:nvSpPr>
+          <p:cNvPr id="12" name="Shape 10"/>
+          <p:cNvSpPr/>
+          <p:nvPr/>
+        </p:nvSpPr>
+        <p:spPr>
+          <a:xfrm>
+            <a:off x="511956" y="2784184"/>
+            <a:ext cx="3527477" cy="0"/>
+          </a:xfrm>
+          <a:prstGeom prst="line">
+            <a:avLst/>
+          </a:prstGeom>
+          <a:noFill/>
+          <a:ln w="9645">
+            <a:solidFill>
+              <a:srgbClr val="DDE2EA"/>
+            </a:solidFill>
+            <a:prstDash val="solid"/>
+          </a:ln>
+        </p:spPr>
+      </p:sp>
+      <p:sp>
+        <p:nvSpPr>
+          <p:cNvPr id="13" name="Shape 11"/>
+          <p:cNvSpPr/>
+          <p:nvPr/>
+        </p:nvSpPr>
+        <p:spPr>
+          <a:xfrm>
+            <a:off x="511956" y="2922987"/>
+            <a:ext cx="231639" cy="231639"/>
+          </a:xfrm>
+          <a:prstGeom prst="ellipse">
+            <a:avLst/>
+          </a:prstGeom>
+          <a:solidFill>
+            <a:srgbClr val="E8EEFC"/>
+          </a:solidFill>
+          <a:ln/>
+        </p:spPr>
+      </p:sp>
+      <p:sp>
+        <p:nvSpPr>
+          <p:cNvPr id="14" name="Text 12"/>
+          <p:cNvSpPr txBox="1"/>
+          <p:nvPr/>
+        </p:nvSpPr>
+        <p:spPr>
+          <a:xfrm>
+            <a:off x="511956" y="2922987"/>
+            <a:ext cx="256876" cy="231639"/>
+          </a:xfrm>
+          <a:prstGeom prst="rect">
+            <a:avLst/>
+          </a:prstGeom>
+          <a:noFill/>
+          <a:ln/>
+        </p:spPr>
+        <p:txBody>
+          <a:bodyPr wrap="square" lIns="0" tIns="0" rIns="0" bIns="0" rtlCol="0" anchor="ctr"/>
+          <a:lstStyle/>
+          <a:p>
+            <a:pPr algn="ctr" indent="0" marL="0">
+              <a:lnSpc>
+                <a:spcPct val="112000"/>
+              </a:lnSpc>
+              <a:buNone/>
+            </a:pPr>
+            <a:r>
+              <a:rPr lang="en-US" sz="960" b="1" dirty="0">
+                <a:solidFill>
+                  <a:srgbClr val="1F4FD8"/>
+                </a:solidFill>
+                <a:latin typeface="Inter" pitchFamily="34" charset="0"/>
+                <a:ea typeface="Inter" pitchFamily="34" charset="-122"/>
+                <a:cs typeface="Inter" pitchFamily="34" charset="-120"/>
+              </a:rPr>
+              <a:t>1</a:t>
+            </a:r>
+            <a:endParaRPr lang="en-US" sz="960" dirty="0"/>
+          </a:p>
+        </p:txBody>
+      </p:sp>
+      <p:sp>
+        <p:nvSpPr>
+          <p:cNvPr id="15" name="Text 13"/>
+          <p:cNvSpPr txBox="1"/>
+          <p:nvPr/>
+        </p:nvSpPr>
+        <p:spPr>
+          <a:xfrm>
+            <a:off x="853310" y="2922987"/>
+            <a:ext cx="3299995" cy="1109213"/>
+          </a:xfrm>
+          <a:prstGeom prst="rect">
+            <a:avLst/>
+          </a:prstGeom>
+          <a:noFill/>
+          <a:ln/>
+        </p:spPr>
+        <p:txBody>
+          <a:bodyPr wrap="square" lIns="0" tIns="0" rIns="0" bIns="0" rtlCol="0" anchor="t"/>
+          <a:lstStyle/>
+          <a:p>
+            <a:pPr algn="l" indent="0" marL="0">
+              <a:lnSpc>
+                <a:spcPct val="116000"/>
+              </a:lnSpc>
+              <a:buNone/>
+            </a:pPr>
+            <a:r>
+              <a:rPr lang="en-US" sz="1250" b="1" dirty="0">
+                <a:solidFill>
+                  <a:srgbClr val="0B1220"/>
+                </a:solidFill>
+                <a:latin typeface="Inter" pitchFamily="34" charset="0"/>
+                <a:ea typeface="Inter" pitchFamily="34" charset="-122"/>
+                <a:cs typeface="Inter" pitchFamily="34" charset="-120"/>
+              </a:rPr>
+              <a:t>Escribimos por lo que queremos vender.</a:t>
+            </a:r>
+            <a:pPr algn="l" indent="0" marL="0">
+              <a:lnSpc>
+                <a:spcPct val="116000"/>
+              </a:lnSpc>
+              <a:buNone/>
+            </a:pPr>
+            <a:r>
+              <a:rPr lang="en-US" sz="1250" dirty="0">
+                <a:solidFill>
+                  <a:srgbClr val="0B1220"/>
+                </a:solidFill>
+                <a:latin typeface="Inter" pitchFamily="34" charset="0"/>
+                <a:ea typeface="Inter" pitchFamily="34" charset="-122"/>
+                <a:cs typeface="Inter" pitchFamily="34" charset="-120"/>
+              </a:rPr>
+              <a:t> Las promociones salen a listas por etapa, no por lo que la persona hizo, y le seguimos escribiendo a quien no responde.</a:t>
+            </a:r>
+            <a:endParaRPr lang="en-US" sz="1250" dirty="0"/>
+          </a:p>
+        </p:txBody>
+      </p:sp>
+      <p:sp>
+        <p:nvSpPr>
+          <p:cNvPr id="16" name="Shape 14"/>
+          <p:cNvSpPr/>
+          <p:nvPr/>
+        </p:nvSpPr>
+        <p:spPr>
+          <a:xfrm>
+            <a:off x="4331958" y="2784184"/>
+            <a:ext cx="3527628" cy="0"/>
+          </a:xfrm>
+          <a:prstGeom prst="line">
+            <a:avLst/>
+          </a:prstGeom>
+          <a:noFill/>
+          <a:ln w="9645">
+            <a:solidFill>
+              <a:srgbClr val="DDE2EA"/>
+            </a:solidFill>
+            <a:prstDash val="solid"/>
+          </a:ln>
+        </p:spPr>
+      </p:sp>
+      <p:sp>
+        <p:nvSpPr>
+          <p:cNvPr id="17" name="Shape 15"/>
+          <p:cNvSpPr/>
+          <p:nvPr/>
+        </p:nvSpPr>
+        <p:spPr>
+          <a:xfrm>
+            <a:off x="4331958" y="2922987"/>
+            <a:ext cx="231639" cy="231639"/>
+          </a:xfrm>
+          <a:prstGeom prst="ellipse">
+            <a:avLst/>
+          </a:prstGeom>
+          <a:solidFill>
+            <a:srgbClr val="E8EEFC"/>
+          </a:solidFill>
+          <a:ln/>
+        </p:spPr>
+      </p:sp>
+      <p:sp>
+        <p:nvSpPr>
+          <p:cNvPr id="18" name="Text 16"/>
+          <p:cNvSpPr txBox="1"/>
+          <p:nvPr/>
+        </p:nvSpPr>
+        <p:spPr>
+          <a:xfrm>
+            <a:off x="4331958" y="2922987"/>
+            <a:ext cx="256876" cy="231639"/>
+          </a:xfrm>
+          <a:prstGeom prst="rect">
+            <a:avLst/>
+          </a:prstGeom>
+          <a:noFill/>
+          <a:ln/>
+        </p:spPr>
+        <p:txBody>
+          <a:bodyPr wrap="square" lIns="0" tIns="0" rIns="0" bIns="0" rtlCol="0" anchor="ctr"/>
+          <a:lstStyle/>
+          <a:p>
+            <a:pPr algn="ctr" indent="0" marL="0">
+              <a:lnSpc>
+                <a:spcPct val="112000"/>
+              </a:lnSpc>
+              <a:buNone/>
+            </a:pPr>
+            <a:r>
+              <a:rPr lang="en-US" sz="960" b="1" dirty="0">
+                <a:solidFill>
+                  <a:srgbClr val="1F4FD8"/>
+                </a:solidFill>
+                <a:latin typeface="Inter" pitchFamily="34" charset="0"/>
+                <a:ea typeface="Inter" pitchFamily="34" charset="-122"/>
+                <a:cs typeface="Inter" pitchFamily="34" charset="-120"/>
+              </a:rPr>
+              <a:t>2</a:t>
+            </a:r>
+            <a:endParaRPr lang="en-US" sz="960" dirty="0"/>
+          </a:p>
+        </p:txBody>
+      </p:sp>
+      <p:sp>
+        <p:nvSpPr>
+          <p:cNvPr id="19" name="Text 17"/>
+          <p:cNvSpPr txBox="1"/>
+          <p:nvPr/>
+        </p:nvSpPr>
+        <p:spPr>
+          <a:xfrm>
+            <a:off x="4673312" y="2922987"/>
+            <a:ext cx="3300150" cy="1109213"/>
+          </a:xfrm>
+          <a:prstGeom prst="rect">
+            <a:avLst/>
+          </a:prstGeom>
+          <a:noFill/>
+          <a:ln/>
+        </p:spPr>
+        <p:txBody>
+          <a:bodyPr wrap="square" lIns="0" tIns="0" rIns="0" bIns="0" rtlCol="0" anchor="t"/>
+          <a:lstStyle/>
+          <a:p>
+            <a:pPr algn="l" indent="0" marL="0">
+              <a:lnSpc>
+                <a:spcPct val="116000"/>
+              </a:lnSpc>
+              <a:buNone/>
+            </a:pPr>
+            <a:r>
+              <a:rPr lang="en-US" sz="1250" b="1" dirty="0">
+                <a:solidFill>
+                  <a:srgbClr val="0B1220"/>
+                </a:solidFill>
+                <a:latin typeface="Inter" pitchFamily="34" charset="0"/>
+                <a:ea typeface="Inter" pitchFamily="34" charset="-122"/>
+                <a:cs typeface="Inter" pitchFamily="34" charset="-120"/>
+              </a:rPr>
+              <a:t>Cada equipo decide solo.</a:t>
+            </a:r>
+            <a:pPr algn="l" indent="0" marL="0">
+              <a:lnSpc>
+                <a:spcPct val="116000"/>
+              </a:lnSpc>
+              <a:buNone/>
+            </a:pPr>
+            <a:r>
+              <a:rPr lang="en-US" sz="1250" dirty="0">
+                <a:solidFill>
+                  <a:srgbClr val="0B1220"/>
+                </a:solidFill>
+                <a:latin typeface="Inter" pitchFamily="34" charset="0"/>
+                <a:ea typeface="Inter" pitchFamily="34" charset="-122"/>
+                <a:cs typeface="Inter" pitchFamily="34" charset="-120"/>
+              </a:rPr>
+              <a:t> No hay límite de mensajes por persona ni calendario común: Marketing, Product Growth y Sales le escriben a la misma gente el mismo día.</a:t>
+            </a:r>
+            <a:endParaRPr lang="en-US" sz="1250" dirty="0"/>
+          </a:p>
+        </p:txBody>
+      </p:sp>
+      <p:sp>
+        <p:nvSpPr>
+          <p:cNvPr id="20" name="Shape 18"/>
+          <p:cNvSpPr/>
+          <p:nvPr/>
+        </p:nvSpPr>
+        <p:spPr>
+          <a:xfrm>
+            <a:off x="8152111" y="2784184"/>
+            <a:ext cx="3527477" cy="0"/>
+          </a:xfrm>
+          <a:prstGeom prst="line">
+            <a:avLst/>
+          </a:prstGeom>
+          <a:noFill/>
+          <a:ln w="9645">
+            <a:solidFill>
+              <a:srgbClr val="DDE2EA"/>
+            </a:solidFill>
+            <a:prstDash val="solid"/>
+          </a:ln>
+        </p:spPr>
+      </p:sp>
+      <p:sp>
+        <p:nvSpPr>
+          <p:cNvPr id="21" name="Shape 19"/>
+          <p:cNvSpPr/>
+          <p:nvPr/>
+        </p:nvSpPr>
+        <p:spPr>
+          <a:xfrm>
+            <a:off x="8152111" y="2922987"/>
+            <a:ext cx="231639" cy="231639"/>
+          </a:xfrm>
+          <a:prstGeom prst="ellipse">
+            <a:avLst/>
+          </a:prstGeom>
+          <a:solidFill>
+            <a:srgbClr val="E8EEFC"/>
+          </a:solidFill>
+          <a:ln/>
+        </p:spPr>
+      </p:sp>
+      <p:sp>
+        <p:nvSpPr>
+          <p:cNvPr id="22" name="Text 20"/>
+          <p:cNvSpPr txBox="1"/>
+          <p:nvPr/>
+        </p:nvSpPr>
+        <p:spPr>
+          <a:xfrm>
+            <a:off x="8152111" y="2922987"/>
+            <a:ext cx="256876" cy="231639"/>
+          </a:xfrm>
+          <a:prstGeom prst="rect">
+            <a:avLst/>
+          </a:prstGeom>
+          <a:noFill/>
+          <a:ln/>
+        </p:spPr>
+        <p:txBody>
+          <a:bodyPr wrap="square" lIns="0" tIns="0" rIns="0" bIns="0" rtlCol="0" anchor="ctr"/>
+          <a:lstStyle/>
+          <a:p>
+            <a:pPr algn="ctr" indent="0" marL="0">
+              <a:lnSpc>
+                <a:spcPct val="112000"/>
+              </a:lnSpc>
+              <a:buNone/>
+            </a:pPr>
+            <a:r>
+              <a:rPr lang="en-US" sz="960" b="1" dirty="0">
+                <a:solidFill>
+                  <a:srgbClr val="1F4FD8"/>
+                </a:solidFill>
+                <a:latin typeface="Inter" pitchFamily="34" charset="0"/>
+                <a:ea typeface="Inter" pitchFamily="34" charset="-122"/>
+                <a:cs typeface="Inter" pitchFamily="34" charset="-120"/>
+              </a:rPr>
+              <a:t>3</a:t>
+            </a:r>
+            <a:endParaRPr lang="en-US" sz="960" dirty="0"/>
+          </a:p>
+        </p:txBody>
+      </p:sp>
+      <p:sp>
+        <p:nvSpPr>
+          <p:cNvPr id="23" name="Text 21"/>
+          <p:cNvSpPr txBox="1"/>
+          <p:nvPr/>
+        </p:nvSpPr>
+        <p:spPr>
+          <a:xfrm>
+            <a:off x="8493465" y="2922987"/>
+            <a:ext cx="3299995" cy="1109213"/>
+          </a:xfrm>
+          <a:prstGeom prst="rect">
+            <a:avLst/>
+          </a:prstGeom>
+          <a:noFill/>
+          <a:ln/>
+        </p:spPr>
+        <p:txBody>
+          <a:bodyPr wrap="square" lIns="0" tIns="0" rIns="0" bIns="0" rtlCol="0" anchor="t"/>
+          <a:lstStyle/>
+          <a:p>
+            <a:pPr algn="l" indent="0" marL="0">
+              <a:lnSpc>
+                <a:spcPct val="116000"/>
+              </a:lnSpc>
+              <a:buNone/>
+            </a:pPr>
+            <a:r>
+              <a:rPr lang="en-US" sz="1250" b="1" dirty="0">
+                <a:solidFill>
+                  <a:srgbClr val="0B1220"/>
+                </a:solidFill>
+                <a:latin typeface="Inter" pitchFamily="34" charset="0"/>
+                <a:ea typeface="Inter" pitchFamily="34" charset="-122"/>
+                <a:cs typeface="Inter" pitchFamily="34" charset="-120"/>
+              </a:rPr>
+              <a:t>Nadie compara volumen contra respuesta.</a:t>
+            </a:r>
+            <a:pPr algn="l" indent="0" marL="0">
+              <a:lnSpc>
+                <a:spcPct val="116000"/>
+              </a:lnSpc>
+              <a:buNone/>
+            </a:pPr>
+            <a:r>
+              <a:rPr lang="en-US" sz="1250" dirty="0">
+                <a:solidFill>
+                  <a:srgbClr val="0B1220"/>
+                </a:solidFill>
+                <a:latin typeface="Inter" pitchFamily="34" charset="0"/>
+                <a:ea typeface="Inter" pitchFamily="34" charset="-122"/>
+                <a:cs typeface="Inter" pitchFamily="34" charset="-120"/>
+              </a:rPr>
+              <a:t> Copiar una campaña cada mes es más fácil que medirla: 4 de cada 10 mensajes salen de campañas debajo del mínimo.</a:t>
+            </a:r>
+            <a:endParaRPr lang="en-US" sz="1250" dirty="0"/>
+          </a:p>
+        </p:txBody>
+      </p:sp>
+      <p:sp>
+        <p:nvSpPr>
+          <p:cNvPr id="24" name="Shape 22"/>
+          <p:cNvSpPr/>
+          <p:nvPr/>
+        </p:nvSpPr>
+        <p:spPr>
+          <a:xfrm>
+            <a:off x="511956" y="5992160"/>
+            <a:ext cx="11167783" cy="352808"/>
+          </a:xfrm>
+          <a:prstGeom prst="rect">
+            <a:avLst/>
+          </a:prstGeom>
+          <a:solidFill>
+            <a:srgbClr val="E8EEFC"/>
+          </a:solidFill>
+          <a:ln/>
+        </p:spPr>
+      </p:sp>
+      <p:sp>
+        <p:nvSpPr>
+          <p:cNvPr id="25" name="Text 23"/>
+          <p:cNvSpPr txBox="1"/>
+          <p:nvPr/>
+        </p:nvSpPr>
+        <p:spPr>
+          <a:xfrm>
+            <a:off x="670350" y="6116043"/>
+            <a:ext cx="616853" cy="134733"/>
+          </a:xfrm>
+          <a:prstGeom prst="rect">
+            <a:avLst/>
+          </a:prstGeom>
+          <a:noFill/>
+          <a:ln/>
+        </p:spPr>
+        <p:txBody>
+          <a:bodyPr wrap="square" lIns="0" tIns="0" rIns="0" bIns="0" rtlCol="0" anchor="t"/>
+          <a:lstStyle/>
+          <a:p>
+            <a:pPr algn="l" indent="0" marL="0">
+              <a:lnSpc>
+                <a:spcPct val="107000"/>
+              </a:lnSpc>
+              <a:buNone/>
+            </a:pPr>
+            <a:r>
+              <a:rPr lang="en-US" sz="820" b="1" spc="100" kern="0" dirty="0">
+                <a:solidFill>
+                  <a:srgbClr val="1F4FD8"/>
+                </a:solidFill>
+                <a:latin typeface="Inter" pitchFamily="34" charset="0"/>
+                <a:ea typeface="Inter" pitchFamily="34" charset="-122"/>
+                <a:cs typeface="Inter" pitchFamily="34" charset="-120"/>
+              </a:rPr>
+              <a:t>SO WHAT</a:t>
+            </a:r>
+            <a:endParaRPr lang="en-US" sz="820" dirty="0"/>
+          </a:p>
+        </p:txBody>
+      </p:sp>
+      <p:sp>
+        <p:nvSpPr>
           <p:cNvPr id="26" name="Text 24"/>
           <p:cNvSpPr txBox="1"/>
           <p:nvPr/>
@@ -8085,8 +9231,8 @@
         </p:nvSpPr>
         <p:spPr>
           <a:xfrm>
-            <a:off x="11566859" y="6454684"/>
-            <a:ext cx="134555" cy="135035"/>
+            <a:off x="11572435" y="6454684"/>
+            <a:ext cx="128811" cy="135035"/>
           </a:xfrm>
           <a:prstGeom prst="rect">
             <a:avLst/>
@@ -8113,7 +9259,7 @@
                 <a:ea typeface="Inter" pitchFamily="34" charset="-122"/>
                 <a:cs typeface="Inter" pitchFamily="34" charset="-120"/>
               </a:rPr>
-              <a:t>14</a:t>
+              <a:t>15</a:t>
             </a:r>
             <a:endParaRPr lang="en-US" sz="840" dirty="0"/>
           </a:p>
@@ -9701,313 +10847,15 @@
                 <a:ea typeface="Inter" pitchFamily="34" charset="-122"/>
                 <a:cs typeface="Inter" pitchFamily="34" charset="-120"/>
               </a:rPr>
-              <a:t>Después de junio mandamos menos, pero cada mil mensajes hoy traen 54 respuestas; en enero traían 84</a:t>
+              <a:t>Visto desde el teléfono de la persona, así se sienten nuestros mensajes: tres casos reales</a:t>
             </a:r>
             <a:endParaRPr lang="en-US" sz="2210" dirty="0"/>
-          </a:p>
-        </p:txBody>
-      </p:sp>
-      <p:sp>
-        <p:nvSpPr>
-          <p:cNvPr id="3" name="Shape 1"/>
-          <p:cNvSpPr/>
-          <p:nvPr/>
-        </p:nvSpPr>
-        <p:spPr>
-          <a:xfrm>
-            <a:off x="511956" y="1166180"/>
-            <a:ext cx="11167783" cy="0"/>
-          </a:xfrm>
-          <a:prstGeom prst="line">
-            <a:avLst/>
-          </a:prstGeom>
-          <a:noFill/>
-          <a:ln w="9645">
-            <a:solidFill>
-              <a:srgbClr val="DDE2EA"/>
-            </a:solidFill>
-            <a:prstDash val="solid"/>
-          </a:ln>
-        </p:spPr>
-      </p:sp>
-      <p:sp>
-        <p:nvSpPr>
-          <p:cNvPr id="4" name="Shape 2"/>
-          <p:cNvSpPr/>
-          <p:nvPr/>
-        </p:nvSpPr>
-        <p:spPr>
-          <a:xfrm>
-            <a:off x="511956" y="1798251"/>
-            <a:ext cx="11167783" cy="0"/>
-          </a:xfrm>
-          <a:prstGeom prst="line">
-            <a:avLst/>
-          </a:prstGeom>
-          <a:noFill/>
-          <a:ln w="9645">
-            <a:solidFill>
-              <a:srgbClr val="DDE2EA"/>
-            </a:solidFill>
-            <a:prstDash val="solid"/>
-          </a:ln>
-        </p:spPr>
-      </p:sp>
-      <p:sp>
-        <p:nvSpPr>
-          <p:cNvPr id="5" name="Text 3"/>
-          <p:cNvSpPr txBox="1"/>
-          <p:nvPr/>
-        </p:nvSpPr>
-        <p:spPr>
-          <a:xfrm>
-            <a:off x="511956" y="1256304"/>
-            <a:ext cx="3718649" cy="129760"/>
-          </a:xfrm>
-          <a:prstGeom prst="rect">
-            <a:avLst/>
-          </a:prstGeom>
-          <a:noFill/>
-          <a:ln/>
-        </p:spPr>
-        <p:txBody>
-          <a:bodyPr wrap="square" lIns="0" tIns="0" rIns="0" bIns="0" rtlCol="0" anchor="t"/>
-          <a:lstStyle/>
-          <a:p>
-            <a:pPr algn="l" indent="0" marL="0">
-              <a:lnSpc>
-                <a:spcPct val="107000"/>
-              </a:lnSpc>
-              <a:buNone/>
-            </a:pPr>
-            <a:r>
-              <a:rPr lang="en-US" sz="790" b="1" spc="80" kern="0" dirty="0">
-                <a:solidFill>
-                  <a:srgbClr val="6B7484"/>
-                </a:solidFill>
-                <a:latin typeface="Inter" pitchFamily="34" charset="0"/>
-                <a:ea typeface="Inter" pitchFamily="34" charset="-122"/>
-                <a:cs typeface="Inter" pitchFamily="34" charset="-120"/>
-              </a:rPr>
-              <a:t>QUÉ SE MANDA</a:t>
-            </a:r>
-            <a:endParaRPr lang="en-US" sz="790" dirty="0"/>
-          </a:p>
-        </p:txBody>
-      </p:sp>
-      <p:sp>
-        <p:nvSpPr>
-          <p:cNvPr id="6" name="Text 4"/>
-          <p:cNvSpPr txBox="1"/>
-          <p:nvPr/>
-        </p:nvSpPr>
-        <p:spPr>
-          <a:xfrm>
-            <a:off x="511956" y="1410328"/>
-            <a:ext cx="3706696" cy="293580"/>
-          </a:xfrm>
-          <a:prstGeom prst="rect">
-            <a:avLst/>
-          </a:prstGeom>
-          <a:noFill/>
-          <a:ln/>
-        </p:spPr>
-        <p:txBody>
-          <a:bodyPr wrap="square" lIns="0" tIns="0" rIns="0" bIns="0" rtlCol="0" anchor="t"/>
-          <a:lstStyle/>
-          <a:p>
-            <a:pPr algn="l" indent="0" marL="0">
-              <a:lnSpc>
-                <a:spcPct val="107000"/>
-              </a:lnSpc>
-              <a:buNone/>
-            </a:pPr>
-            <a:r>
-              <a:rPr lang="en-US" sz="900" dirty="0">
-                <a:solidFill>
-                  <a:srgbClr val="3B4556"/>
-                </a:solidFill>
-                <a:latin typeface="Inter" pitchFamily="34" charset="0"/>
-                <a:ea typeface="Inter" pitchFamily="34" charset="-122"/>
-                <a:cs typeface="Inter" pitchFamily="34" charset="-120"/>
-              </a:rPr>
-              <a:t>Junio: lanzamiento de BillPay y push de Mundial, Comercio del día y Anota y Gana.</a:t>
-            </a:r>
-            <a:endParaRPr lang="en-US" sz="900" dirty="0"/>
-          </a:p>
-        </p:txBody>
-      </p:sp>
-      <p:sp>
-        <p:nvSpPr>
-          <p:cNvPr id="7" name="Text 5"/>
-          <p:cNvSpPr txBox="1"/>
-          <p:nvPr/>
-        </p:nvSpPr>
-        <p:spPr>
-          <a:xfrm>
-            <a:off x="4299556" y="1256304"/>
-            <a:ext cx="3718649" cy="129760"/>
-          </a:xfrm>
-          <a:prstGeom prst="rect">
-            <a:avLst/>
-          </a:prstGeom>
-          <a:noFill/>
-          <a:ln/>
-        </p:spPr>
-        <p:txBody>
-          <a:bodyPr wrap="square" lIns="0" tIns="0" rIns="0" bIns="0" rtlCol="0" anchor="t"/>
-          <a:lstStyle/>
-          <a:p>
-            <a:pPr algn="l" indent="0" marL="0">
-              <a:lnSpc>
-                <a:spcPct val="107000"/>
-              </a:lnSpc>
-              <a:buNone/>
-            </a:pPr>
-            <a:r>
-              <a:rPr lang="en-US" sz="790" b="1" spc="80" kern="0" dirty="0">
-                <a:solidFill>
-                  <a:srgbClr val="6B7484"/>
-                </a:solidFill>
-                <a:latin typeface="Inter" pitchFamily="34" charset="0"/>
-                <a:ea typeface="Inter" pitchFamily="34" charset="-122"/>
-                <a:cs typeface="Inter" pitchFamily="34" charset="-120"/>
-              </a:rPr>
-              <a:t>QUIÉN</a:t>
-            </a:r>
-            <a:endParaRPr lang="en-US" sz="790" dirty="0"/>
-          </a:p>
-        </p:txBody>
-      </p:sp>
-      <p:sp>
-        <p:nvSpPr>
-          <p:cNvPr id="8" name="Text 6"/>
-          <p:cNvSpPr txBox="1"/>
-          <p:nvPr/>
-        </p:nvSpPr>
-        <p:spPr>
-          <a:xfrm>
-            <a:off x="4299556" y="1410328"/>
-            <a:ext cx="3556745" cy="293580"/>
-          </a:xfrm>
-          <a:prstGeom prst="rect">
-            <a:avLst/>
-          </a:prstGeom>
-          <a:noFill/>
-          <a:ln/>
-        </p:spPr>
-        <p:txBody>
-          <a:bodyPr wrap="square" lIns="0" tIns="0" rIns="0" bIns="0" rtlCol="0" anchor="t"/>
-          <a:lstStyle/>
-          <a:p>
-            <a:pPr algn="l" indent="0" marL="0">
-              <a:lnSpc>
-                <a:spcPct val="107000"/>
-              </a:lnSpc>
-              <a:buNone/>
-            </a:pPr>
-            <a:r>
-              <a:rPr lang="en-US" sz="900" dirty="0">
-                <a:solidFill>
-                  <a:srgbClr val="3B4556"/>
-                </a:solidFill>
-                <a:latin typeface="Inter" pitchFamily="34" charset="0"/>
-                <a:ea typeface="Inter" pitchFamily="34" charset="-122"/>
-                <a:cs typeface="Inter" pitchFamily="34" charset="-120"/>
-              </a:rPr>
-              <a:t>En junio contra enero, Marketing sumó 28 M mensajes y Others 25 M.</a:t>
-            </a:r>
-            <a:endParaRPr lang="en-US" sz="900" dirty="0"/>
-          </a:p>
-        </p:txBody>
-      </p:sp>
-      <p:sp>
-        <p:nvSpPr>
-          <p:cNvPr id="9" name="Text 7"/>
-          <p:cNvSpPr txBox="1"/>
-          <p:nvPr/>
-        </p:nvSpPr>
-        <p:spPr>
-          <a:xfrm>
-            <a:off x="8087156" y="1256304"/>
-            <a:ext cx="3718649" cy="129760"/>
-          </a:xfrm>
-          <a:prstGeom prst="rect">
-            <a:avLst/>
-          </a:prstGeom>
-          <a:noFill/>
-          <a:ln/>
-        </p:spPr>
-        <p:txBody>
-          <a:bodyPr wrap="square" lIns="0" tIns="0" rIns="0" bIns="0" rtlCol="0" anchor="t"/>
-          <a:lstStyle/>
-          <a:p>
-            <a:pPr algn="l" indent="0" marL="0">
-              <a:lnSpc>
-                <a:spcPct val="107000"/>
-              </a:lnSpc>
-              <a:buNone/>
-            </a:pPr>
-            <a:r>
-              <a:rPr lang="en-US" sz="790" b="1" spc="80" kern="0" dirty="0">
-                <a:solidFill>
-                  <a:srgbClr val="6B7484"/>
-                </a:solidFill>
-                <a:latin typeface="Inter" pitchFamily="34" charset="0"/>
-                <a:ea typeface="Inter" pitchFamily="34" charset="-122"/>
-                <a:cs typeface="Inter" pitchFamily="34" charset="-120"/>
-              </a:rPr>
-              <a:t>A QUIÉN</a:t>
-            </a:r>
-            <a:endParaRPr lang="en-US" sz="790" dirty="0"/>
-          </a:p>
-        </p:txBody>
-      </p:sp>
-      <p:sp>
-        <p:nvSpPr>
-          <p:cNvPr id="10" name="Text 8"/>
-          <p:cNvSpPr txBox="1"/>
-          <p:nvPr/>
-        </p:nvSpPr>
-        <p:spPr>
-          <a:xfrm>
-            <a:off x="8087156" y="1410328"/>
-            <a:ext cx="3393443" cy="144680"/>
-          </a:xfrm>
-          <a:prstGeom prst="rect">
-            <a:avLst/>
-          </a:prstGeom>
-          <a:noFill/>
-          <a:ln/>
-        </p:spPr>
-        <p:txBody>
-          <a:bodyPr wrap="square" lIns="0" tIns="0" rIns="0" bIns="0" rtlCol="0" anchor="t"/>
-          <a:lstStyle/>
-          <a:p>
-            <a:pPr algn="l" indent="0" marL="0">
-              <a:lnSpc>
-                <a:spcPct val="107000"/>
-              </a:lnSpc>
-              <a:buNone/>
-            </a:pPr>
-            <a:r>
-              <a:rPr lang="en-US" sz="900" dirty="0">
-                <a:solidFill>
-                  <a:srgbClr val="3B4556"/>
-                </a:solidFill>
-                <a:latin typeface="Inter" pitchFamily="34" charset="0"/>
-                <a:ea typeface="Inter" pitchFamily="34" charset="-122"/>
-                <a:cs typeface="Inter" pitchFamily="34" charset="-120"/>
-              </a:rPr>
-              <a:t>Casi toda la base: el correo de BillPay llegó a 16 M personas.</a:t>
-            </a:r>
-            <a:endParaRPr lang="en-US" sz="900" dirty="0"/>
           </a:p>
         </p:txBody>
       </p:sp>
       <p:pic>
         <p:nvPicPr>
-          <p:cNvPr id="11" name="Image 0" descr="preencoded.png">    </p:cNvPr>
+          <p:cNvPr id="3" name="Image 0" descr="preencoded.png">    </p:cNvPr>
           <p:cNvPicPr>
             <a:picLocks noChangeAspect="1"/>
           </p:cNvPicPr>
@@ -10021,8 +10869,8 @@
         </p:blipFill>
         <p:spPr>
           <a:xfrm>
-            <a:off x="511956" y="1912789"/>
-            <a:ext cx="7289909" cy="3969656"/>
+            <a:off x="511956" y="1234451"/>
+            <a:ext cx="1775042" cy="3372851"/>
           </a:xfrm>
           <a:prstGeom prst="rect">
             <a:avLst/>
@@ -10031,58 +10879,568 @@
       </p:pic>
       <p:sp>
         <p:nvSpPr>
-          <p:cNvPr id="12" name="Text 9"/>
-          <p:cNvSpPr txBox="1"/>
-          <p:nvPr/>
-        </p:nvSpPr>
-        <p:spPr>
-          <a:xfrm>
-            <a:off x="8094390" y="1912789"/>
-            <a:ext cx="3711198" cy="115744"/>
-          </a:xfrm>
-          <a:prstGeom prst="rect">
-            <a:avLst/>
-          </a:prstGeom>
-          <a:noFill/>
-          <a:ln/>
-        </p:spPr>
-        <p:txBody>
-          <a:bodyPr wrap="square" lIns="0" tIns="0" rIns="0" bIns="0" rtlCol="0" anchor="t"/>
-          <a:lstStyle/>
-          <a:p>
-            <a:pPr algn="l" indent="0" marL="0">
-              <a:lnSpc>
-                <a:spcPct val="99000"/>
-              </a:lnSpc>
-              <a:buNone/>
-            </a:pPr>
-            <a:r>
-              <a:rPr lang="en-US" sz="790" b="1" spc="80" kern="0" dirty="0">
-                <a:solidFill>
-                  <a:srgbClr val="6B7484"/>
-                </a:solidFill>
-                <a:latin typeface="Inter" pitchFamily="34" charset="0"/>
-                <a:ea typeface="Inter" pitchFamily="34" charset="-122"/>
-                <a:cs typeface="Inter" pitchFamily="34" charset="-120"/>
-              </a:rPr>
-              <a:t>QUÉ DICE LA GRÁFICA</a:t>
-            </a:r>
-            <a:endParaRPr lang="en-US" sz="790" dirty="0"/>
-          </a:p>
-        </p:txBody>
-      </p:sp>
-      <p:sp>
-        <p:nvSpPr>
-          <p:cNvPr id="13" name="Shape 10"/>
+          <p:cNvPr id="4" name="Text 1"/>
+          <p:cNvSpPr txBox="1"/>
+          <p:nvPr/>
+        </p:nvSpPr>
+        <p:spPr>
+          <a:xfrm>
+            <a:off x="2433336" y="1234451"/>
+            <a:ext cx="1706098" cy="279715"/>
+          </a:xfrm>
+          <a:prstGeom prst="rect">
+            <a:avLst/>
+          </a:prstGeom>
+          <a:noFill/>
+          <a:ln/>
+        </p:spPr>
+        <p:txBody>
+          <a:bodyPr wrap="square" lIns="0" tIns="0" rIns="0" bIns="0" rtlCol="0" anchor="t"/>
+          <a:lstStyle/>
+          <a:p>
+            <a:pPr algn="l" indent="0" marL="0">
+              <a:lnSpc>
+                <a:spcPct val="112000"/>
+              </a:lnSpc>
+              <a:buNone/>
+            </a:pPr>
+            <a:r>
+              <a:rPr lang="en-US" sz="820" b="1" spc="80" kern="0" dirty="0">
+                <a:solidFill>
+                  <a:srgbClr val="1F4FD8"/>
+                </a:solidFill>
+                <a:latin typeface="Inter" pitchFamily="34" charset="0"/>
+                <a:ea typeface="Inter" pitchFamily="34" charset="-122"/>
+                <a:cs typeface="Inter" pitchFamily="34" charset="-120"/>
+              </a:rPr>
+              <a:t>QUIEN SE ACABA DE REGISTRAR</a:t>
+            </a:r>
+            <a:endParaRPr lang="en-US" sz="820" dirty="0"/>
+          </a:p>
+        </p:txBody>
+      </p:sp>
+      <p:sp>
+        <p:nvSpPr>
+          <p:cNvPr id="5" name="Text 2"/>
+          <p:cNvSpPr txBox="1"/>
+          <p:nvPr/>
+        </p:nvSpPr>
+        <p:spPr>
+          <a:xfrm>
+            <a:off x="2433336" y="1575052"/>
+            <a:ext cx="1706098" cy="877725"/>
+          </a:xfrm>
+          <a:prstGeom prst="rect">
+            <a:avLst/>
+          </a:prstGeom>
+          <a:noFill/>
+          <a:ln/>
+        </p:spPr>
+        <p:txBody>
+          <a:bodyPr wrap="square" lIns="0" tIns="0" rIns="0" bIns="0" rtlCol="0" anchor="t"/>
+          <a:lstStyle/>
+          <a:p>
+            <a:pPr algn="l" indent="0" marL="0">
+              <a:lnSpc>
+                <a:spcPct val="83000"/>
+              </a:lnSpc>
+              <a:buNone/>
+            </a:pPr>
+            <a:r>
+              <a:rPr lang="en-US" sz="3460" b="1" spc="-70" kern="0" dirty="0">
+                <a:solidFill>
+                  <a:srgbClr val="0B1220"/>
+                </a:solidFill>
+                <a:latin typeface="Inter" pitchFamily="34" charset="0"/>
+                <a:ea typeface="Inter" pitchFamily="34" charset="-122"/>
+                <a:cs typeface="Inter" pitchFamily="34" charset="-120"/>
+              </a:rPr>
+              <a:t>10 correos</a:t>
+            </a:r>
+            <a:endParaRPr lang="en-US" sz="3460" dirty="0"/>
+          </a:p>
+        </p:txBody>
+      </p:sp>
+      <p:sp>
+        <p:nvSpPr>
+          <p:cNvPr id="6" name="Text 3"/>
+          <p:cNvSpPr txBox="1"/>
+          <p:nvPr/>
+        </p:nvSpPr>
+        <p:spPr>
+          <a:xfrm>
+            <a:off x="2433336" y="2513663"/>
+            <a:ext cx="1706098" cy="348739"/>
+          </a:xfrm>
+          <a:prstGeom prst="rect">
+            <a:avLst/>
+          </a:prstGeom>
+          <a:noFill/>
+          <a:ln/>
+        </p:spPr>
+        <p:txBody>
+          <a:bodyPr wrap="square" lIns="0" tIns="0" rIns="0" bIns="0" rtlCol="0" anchor="t"/>
+          <a:lstStyle/>
+          <a:p>
+            <a:pPr algn="l" indent="0" marL="0">
+              <a:lnSpc>
+                <a:spcPct val="107000"/>
+              </a:lnSpc>
+              <a:buNone/>
+            </a:pPr>
+            <a:r>
+              <a:rPr lang="en-US" sz="1060" b="1" dirty="0">
+                <a:solidFill>
+                  <a:srgbClr val="0B1220"/>
+                </a:solidFill>
+                <a:latin typeface="Inter" pitchFamily="34" charset="0"/>
+                <a:ea typeface="Inter" pitchFamily="34" charset="-122"/>
+                <a:cs typeface="Inter" pitchFamily="34" charset="-120"/>
+              </a:rPr>
+              <a:t>antes de darse de baja, hacia el día 5</a:t>
+            </a:r>
+            <a:endParaRPr lang="en-US" sz="1060" dirty="0"/>
+          </a:p>
+        </p:txBody>
+      </p:sp>
+      <p:sp>
+        <p:nvSpPr>
+          <p:cNvPr id="7" name="Text 4"/>
+          <p:cNvSpPr txBox="1"/>
+          <p:nvPr/>
+        </p:nvSpPr>
+        <p:spPr>
+          <a:xfrm>
+            <a:off x="2433336" y="2923288"/>
+            <a:ext cx="1706098" cy="1218476"/>
+          </a:xfrm>
+          <a:prstGeom prst="rect">
+            <a:avLst/>
+          </a:prstGeom>
+          <a:noFill/>
+          <a:ln/>
+        </p:spPr>
+        <p:txBody>
+          <a:bodyPr wrap="square" lIns="0" tIns="0" rIns="0" bIns="0" rtlCol="0" anchor="t"/>
+          <a:lstStyle/>
+          <a:p>
+            <a:pPr algn="l" indent="0" marL="0">
+              <a:lnSpc>
+                <a:spcPct val="116000"/>
+              </a:lnSpc>
+              <a:buNone/>
+            </a:pPr>
+            <a:r>
+              <a:rPr lang="en-US" sz="980" dirty="0">
+                <a:solidFill>
+                  <a:srgbClr val="3B4556"/>
+                </a:solidFill>
+                <a:latin typeface="Inter" pitchFamily="34" charset="0"/>
+                <a:ea typeface="Inter" pitchFamily="34" charset="-122"/>
+                <a:cs typeface="Inter" pitchFamily="34" charset="-120"/>
+              </a:rPr>
+              <a:t>70 mil nuevos se dieron de baja de nuestros correos, típicamente al día 5 y con 10 correos. La mitad, con el recordatorio de registro, que llega casi 6 veces al mes.</a:t>
+            </a:r>
+            <a:endParaRPr lang="en-US" sz="980" dirty="0"/>
+          </a:p>
+        </p:txBody>
+      </p:sp>
+      <p:pic>
+        <p:nvPicPr>
+          <p:cNvPr id="8" name="Image 1" descr="preencoded.png">    </p:cNvPr>
+          <p:cNvPicPr>
+            <a:picLocks noChangeAspect="1"/>
+          </p:cNvPicPr>
+          <p:nvPr/>
+        </p:nvPicPr>
+        <p:blipFill>
+          <a:blip r:embed="rId2"/>
+          <a:stretch>
+            <a:fillRect/>
+          </a:stretch>
+        </p:blipFill>
+        <p:spPr>
+          <a:xfrm>
+            <a:off x="4315682" y="1234451"/>
+            <a:ext cx="1775042" cy="3372851"/>
+          </a:xfrm>
+          <a:prstGeom prst="rect">
+            <a:avLst/>
+          </a:prstGeom>
+        </p:spPr>
+      </p:pic>
+      <p:sp>
+        <p:nvSpPr>
+          <p:cNvPr id="9" name="Text 5"/>
+          <p:cNvSpPr txBox="1"/>
+          <p:nvPr/>
+        </p:nvSpPr>
+        <p:spPr>
+          <a:xfrm>
+            <a:off x="6237061" y="1234451"/>
+            <a:ext cx="1706098" cy="279715"/>
+          </a:xfrm>
+          <a:prstGeom prst="rect">
+            <a:avLst/>
+          </a:prstGeom>
+          <a:noFill/>
+          <a:ln/>
+        </p:spPr>
+        <p:txBody>
+          <a:bodyPr wrap="square" lIns="0" tIns="0" rIns="0" bIns="0" rtlCol="0" anchor="t"/>
+          <a:lstStyle/>
+          <a:p>
+            <a:pPr algn="l" indent="0" marL="0">
+              <a:lnSpc>
+                <a:spcPct val="112000"/>
+              </a:lnSpc>
+              <a:buNone/>
+            </a:pPr>
+            <a:r>
+              <a:rPr lang="en-US" sz="820" b="1" spc="80" kern="0" dirty="0">
+                <a:solidFill>
+                  <a:srgbClr val="1F4FD8"/>
+                </a:solidFill>
+                <a:latin typeface="Inter" pitchFamily="34" charset="0"/>
+                <a:ea typeface="Inter" pitchFamily="34" charset="-122"/>
+                <a:cs typeface="Inter" pitchFamily="34" charset="-120"/>
+              </a:rPr>
+              <a:t>NUESTRO CLIENTE MÁS ACTIVO</a:t>
+            </a:r>
+            <a:endParaRPr lang="en-US" sz="820" dirty="0"/>
+          </a:p>
+        </p:txBody>
+      </p:sp>
+      <p:sp>
+        <p:nvSpPr>
+          <p:cNvPr id="10" name="Text 6"/>
+          <p:cNvSpPr txBox="1"/>
+          <p:nvPr/>
+        </p:nvSpPr>
+        <p:spPr>
+          <a:xfrm>
+            <a:off x="6237061" y="1575052"/>
+            <a:ext cx="1706098" cy="438862"/>
+          </a:xfrm>
+          <a:prstGeom prst="rect">
+            <a:avLst/>
+          </a:prstGeom>
+          <a:noFill/>
+          <a:ln/>
+        </p:spPr>
+        <p:txBody>
+          <a:bodyPr wrap="square" lIns="0" tIns="0" rIns="0" bIns="0" rtlCol="0" anchor="t"/>
+          <a:lstStyle/>
+          <a:p>
+            <a:pPr algn="l" indent="0" marL="0">
+              <a:lnSpc>
+                <a:spcPct val="83000"/>
+              </a:lnSpc>
+              <a:buNone/>
+            </a:pPr>
+            <a:r>
+              <a:rPr lang="en-US" sz="3460" b="1" spc="-70" kern="0" dirty="0">
+                <a:solidFill>
+                  <a:srgbClr val="0B1220"/>
+                </a:solidFill>
+                <a:latin typeface="Inter" pitchFamily="34" charset="0"/>
+                <a:ea typeface="Inter" pitchFamily="34" charset="-122"/>
+                <a:cs typeface="Inter" pitchFamily="34" charset="-120"/>
+              </a:rPr>
+              <a:t>2 al día</a:t>
+            </a:r>
+            <a:endParaRPr lang="en-US" sz="3460" dirty="0"/>
+          </a:p>
+        </p:txBody>
+      </p:sp>
+      <p:sp>
+        <p:nvSpPr>
+          <p:cNvPr id="11" name="Text 7"/>
+          <p:cNvSpPr txBox="1"/>
+          <p:nvPr/>
+        </p:nvSpPr>
+        <p:spPr>
+          <a:xfrm>
+            <a:off x="6237061" y="2074801"/>
+            <a:ext cx="1706098" cy="174369"/>
+          </a:xfrm>
+          <a:prstGeom prst="rect">
+            <a:avLst/>
+          </a:prstGeom>
+          <a:noFill/>
+          <a:ln/>
+        </p:spPr>
+        <p:txBody>
+          <a:bodyPr wrap="square" lIns="0" tIns="0" rIns="0" bIns="0" rtlCol="0" anchor="t"/>
+          <a:lstStyle/>
+          <a:p>
+            <a:pPr algn="l" indent="0" marL="0">
+              <a:lnSpc>
+                <a:spcPct val="107000"/>
+              </a:lnSpc>
+              <a:buNone/>
+            </a:pPr>
+            <a:r>
+              <a:rPr lang="en-US" sz="1060" b="1" dirty="0">
+                <a:solidFill>
+                  <a:srgbClr val="0B1220"/>
+                </a:solidFill>
+                <a:latin typeface="Inter" pitchFamily="34" charset="0"/>
+                <a:ea typeface="Inter" pitchFamily="34" charset="-122"/>
+                <a:cs typeface="Inter" pitchFamily="34" charset="-120"/>
+              </a:rPr>
+              <a:t>en 210 de los 273 días</a:t>
+            </a:r>
+            <a:endParaRPr lang="en-US" sz="1060" dirty="0"/>
+          </a:p>
+        </p:txBody>
+      </p:sp>
+      <p:sp>
+        <p:nvSpPr>
+          <p:cNvPr id="12" name="Text 8"/>
+          <p:cNvSpPr txBox="1"/>
+          <p:nvPr/>
+        </p:nvSpPr>
+        <p:spPr>
+          <a:xfrm>
+            <a:off x="6237061" y="2310056"/>
+            <a:ext cx="1706098" cy="1392544"/>
+          </a:xfrm>
+          <a:prstGeom prst="rect">
+            <a:avLst/>
+          </a:prstGeom>
+          <a:noFill/>
+          <a:ln/>
+        </p:spPr>
+        <p:txBody>
+          <a:bodyPr wrap="square" lIns="0" tIns="0" rIns="0" bIns="0" rtlCol="0" anchor="t"/>
+          <a:lstStyle/>
+          <a:p>
+            <a:pPr algn="l" indent="0" marL="0">
+              <a:lnSpc>
+                <a:spcPct val="116000"/>
+              </a:lnSpc>
+              <a:buNone/>
+            </a:pPr>
+            <a:r>
+              <a:rPr lang="en-US" sz="980" dirty="0">
+                <a:solidFill>
+                  <a:srgbClr val="3B4556"/>
+                </a:solidFill>
+                <a:latin typeface="Inter" pitchFamily="34" charset="0"/>
+                <a:ea typeface="Inter" pitchFamily="34" charset="-122"/>
+                <a:cs typeface="Inter" pitchFamily="34" charset="-120"/>
+              </a:rPr>
+              <a:t>339 mil personas (1.7 % de la base) recibieron 482 mensajes cada una en nueve meses. Cuando a alguien le llegan tres campañas el mismo día, Marketing está en 63 % de esos días.</a:t>
+            </a:r>
+            <a:endParaRPr lang="en-US" sz="980" dirty="0"/>
+          </a:p>
+        </p:txBody>
+      </p:sp>
+      <p:pic>
+        <p:nvPicPr>
+          <p:cNvPr id="13" name="Image 2" descr="preencoded.png">    </p:cNvPr>
+          <p:cNvPicPr>
+            <a:picLocks noChangeAspect="1"/>
+          </p:cNvPicPr>
+          <p:nvPr/>
+        </p:nvPicPr>
+        <p:blipFill>
+          <a:blip r:embed="rId3"/>
+          <a:stretch>
+            <a:fillRect/>
+          </a:stretch>
+        </p:blipFill>
+        <p:spPr>
+          <a:xfrm>
+            <a:off x="8119558" y="1234451"/>
+            <a:ext cx="1775042" cy="3372851"/>
+          </a:xfrm>
+          <a:prstGeom prst="rect">
+            <a:avLst/>
+          </a:prstGeom>
+        </p:spPr>
+      </p:pic>
+      <p:sp>
+        <p:nvSpPr>
+          <p:cNvPr id="14" name="Text 9"/>
+          <p:cNvSpPr txBox="1"/>
+          <p:nvPr/>
+        </p:nvSpPr>
+        <p:spPr>
+          <a:xfrm>
+            <a:off x="10040938" y="1234451"/>
+            <a:ext cx="1706098" cy="279715"/>
+          </a:xfrm>
+          <a:prstGeom prst="rect">
+            <a:avLst/>
+          </a:prstGeom>
+          <a:noFill/>
+          <a:ln/>
+        </p:spPr>
+        <p:txBody>
+          <a:bodyPr wrap="square" lIns="0" tIns="0" rIns="0" bIns="0" rtlCol="0" anchor="t"/>
+          <a:lstStyle/>
+          <a:p>
+            <a:pPr algn="l" indent="0" marL="0">
+              <a:lnSpc>
+                <a:spcPct val="112000"/>
+              </a:lnSpc>
+              <a:buNone/>
+            </a:pPr>
+            <a:r>
+              <a:rPr lang="en-US" sz="820" b="1" spc="80" kern="0" dirty="0">
+                <a:solidFill>
+                  <a:srgbClr val="1F4FD8"/>
+                </a:solidFill>
+                <a:latin typeface="Inter" pitchFamily="34" charset="0"/>
+                <a:ea typeface="Inter" pitchFamily="34" charset="-122"/>
+                <a:cs typeface="Inter" pitchFamily="34" charset="-120"/>
+              </a:rPr>
+              <a:t>QUIEN YA NOS DIJO QUE NO</a:t>
+            </a:r>
+            <a:endParaRPr lang="en-US" sz="820" dirty="0"/>
+          </a:p>
+        </p:txBody>
+      </p:sp>
+      <p:sp>
+        <p:nvSpPr>
+          <p:cNvPr id="15" name="Text 10"/>
+          <p:cNvSpPr txBox="1"/>
+          <p:nvPr/>
+        </p:nvSpPr>
+        <p:spPr>
+          <a:xfrm>
+            <a:off x="10040938" y="1575052"/>
+            <a:ext cx="1706098" cy="438862"/>
+          </a:xfrm>
+          <a:prstGeom prst="rect">
+            <a:avLst/>
+          </a:prstGeom>
+          <a:noFill/>
+          <a:ln/>
+        </p:spPr>
+        <p:txBody>
+          <a:bodyPr wrap="square" lIns="0" tIns="0" rIns="0" bIns="0" rtlCol="0" anchor="t"/>
+          <a:lstStyle/>
+          <a:p>
+            <a:pPr algn="l" indent="0" marL="0">
+              <a:lnSpc>
+                <a:spcPct val="83000"/>
+              </a:lnSpc>
+              <a:buNone/>
+            </a:pPr>
+            <a:r>
+              <a:rPr lang="en-US" sz="3460" b="1" spc="-70" kern="0" dirty="0">
+                <a:solidFill>
+                  <a:srgbClr val="0B1220"/>
+                </a:solidFill>
+                <a:latin typeface="Inter" pitchFamily="34" charset="0"/>
+                <a:ea typeface="Inter" pitchFamily="34" charset="-122"/>
+                <a:cs typeface="Inter" pitchFamily="34" charset="-120"/>
+              </a:rPr>
+              <a:t>58 mil</a:t>
+            </a:r>
+            <a:endParaRPr lang="en-US" sz="3460" dirty="0"/>
+          </a:p>
+        </p:txBody>
+      </p:sp>
+      <p:sp>
+        <p:nvSpPr>
+          <p:cNvPr id="16" name="Text 11"/>
+          <p:cNvSpPr txBox="1"/>
+          <p:nvPr/>
+        </p:nvSpPr>
+        <p:spPr>
+          <a:xfrm>
+            <a:off x="10040938" y="2074801"/>
+            <a:ext cx="1706098" cy="523108"/>
+          </a:xfrm>
+          <a:prstGeom prst="rect">
+            <a:avLst/>
+          </a:prstGeom>
+          <a:noFill/>
+          <a:ln/>
+        </p:spPr>
+        <p:txBody>
+          <a:bodyPr wrap="square" lIns="0" tIns="0" rIns="0" bIns="0" rtlCol="0" anchor="t"/>
+          <a:lstStyle/>
+          <a:p>
+            <a:pPr algn="l" indent="0" marL="0">
+              <a:lnSpc>
+                <a:spcPct val="107000"/>
+              </a:lnSpc>
+              <a:buNone/>
+            </a:pPr>
+            <a:r>
+              <a:rPr lang="en-US" sz="1060" b="1" dirty="0">
+                <a:solidFill>
+                  <a:srgbClr val="0B1220"/>
+                </a:solidFill>
+                <a:latin typeface="Inter" pitchFamily="34" charset="0"/>
+                <a:ea typeface="Inter" pitchFamily="34" charset="-122"/>
+                <a:cs typeface="Inter" pitchFamily="34" charset="-120"/>
+              </a:rPr>
+              <a:t>promociones nuestras después de darse de baja</a:t>
+            </a:r>
+            <a:endParaRPr lang="en-US" sz="1060" dirty="0"/>
+          </a:p>
+        </p:txBody>
+      </p:sp>
+      <p:sp>
+        <p:nvSpPr>
+          <p:cNvPr id="17" name="Text 12"/>
+          <p:cNvSpPr txBox="1"/>
+          <p:nvPr/>
+        </p:nvSpPr>
+        <p:spPr>
+          <a:xfrm>
+            <a:off x="10040938" y="2658795"/>
+            <a:ext cx="1706098" cy="1218476"/>
+          </a:xfrm>
+          <a:prstGeom prst="rect">
+            <a:avLst/>
+          </a:prstGeom>
+          <a:noFill/>
+          <a:ln/>
+        </p:spPr>
+        <p:txBody>
+          <a:bodyPr wrap="square" lIns="0" tIns="0" rIns="0" bIns="0" rtlCol="0" anchor="t"/>
+          <a:lstStyle/>
+          <a:p>
+            <a:pPr algn="l" indent="0" marL="0">
+              <a:lnSpc>
+                <a:spcPct val="116000"/>
+              </a:lnSpc>
+              <a:buNone/>
+            </a:pPr>
+            <a:r>
+              <a:rPr lang="en-US" sz="980" dirty="0">
+                <a:solidFill>
+                  <a:srgbClr val="3B4556"/>
+                </a:solidFill>
+                <a:latin typeface="Inter" pitchFamily="34" charset="0"/>
+                <a:ea typeface="Inter" pitchFamily="34" charset="-122"/>
+                <a:cs typeface="Inter" pitchFamily="34" charset="-120"/>
+              </a:rPr>
+              <a:t>45 mil personas dadas de baja recibieron 79 mil promociones; 58 mil eran de Marketing. El recordatorio de verificación les siguió llegando nueve meses.</a:t>
+            </a:r>
+            <a:endParaRPr lang="en-US" sz="980" dirty="0"/>
+          </a:p>
+        </p:txBody>
+      </p:sp>
+      <p:sp>
+        <p:nvSpPr>
+          <p:cNvPr id="18" name="Shape 13"/>
           <p:cNvSpPr/>
           <p:nvPr/>
         </p:nvSpPr>
         <p:spPr>
           <a:xfrm>
-            <a:off x="8094390" y="2126026"/>
-            <a:ext cx="164573" cy="164573"/>
-          </a:xfrm>
-          <a:prstGeom prst="ellipse">
+            <a:off x="511956" y="4850997"/>
+            <a:ext cx="11167783" cy="408570"/>
+          </a:xfrm>
+          <a:prstGeom prst="rect">
             <a:avLst/>
           </a:prstGeom>
           <a:solidFill>
@@ -10093,30 +11451,33 @@
       </p:sp>
       <p:sp>
         <p:nvSpPr>
-          <p:cNvPr id="14" name="Text 11"/>
-          <p:cNvSpPr txBox="1"/>
-          <p:nvPr/>
-        </p:nvSpPr>
-        <p:spPr>
-          <a:xfrm>
-            <a:off x="8094390" y="2126026"/>
-            <a:ext cx="164573" cy="164573"/>
-          </a:xfrm>
-          <a:prstGeom prst="rect">
-            <a:avLst/>
-          </a:prstGeom>
-          <a:noFill/>
-          <a:ln/>
-        </p:spPr>
-        <p:txBody>
-          <a:bodyPr wrap="square" lIns="0" tIns="0" rIns="0" bIns="0" rtlCol="0" anchor="ctr"/>
-          <a:lstStyle/>
-          <a:p>
-            <a:pPr algn="ctr" indent="0" marL="0">
-              <a:buNone/>
-            </a:pPr>
-            <a:r>
-              <a:rPr lang="en-US" sz="768" b="1" dirty="0">
+          <p:cNvPr id="19" name="Text 14"/>
+          <p:cNvSpPr txBox="1"/>
+          <p:nvPr/>
+        </p:nvSpPr>
+        <p:spPr>
+          <a:xfrm>
+            <a:off x="670350" y="4999294"/>
+            <a:ext cx="692605" cy="139857"/>
+          </a:xfrm>
+          <a:prstGeom prst="rect">
+            <a:avLst/>
+          </a:prstGeom>
+          <a:noFill/>
+          <a:ln/>
+        </p:spPr>
+        <p:txBody>
+          <a:bodyPr wrap="square" lIns="0" tIns="0" rIns="0" bIns="0" rtlCol="0" anchor="t"/>
+          <a:lstStyle/>
+          <a:p>
+            <a:pPr algn="l" indent="0" marL="0">
+              <a:lnSpc>
+                <a:spcPct val="112000"/>
+              </a:lnSpc>
+              <a:buNone/>
+            </a:pPr>
+            <a:r>
+              <a:rPr lang="en-US" sz="820" b="1" spc="100" kern="0" dirty="0">
                 <a:solidFill>
                   <a:srgbClr val="1F4FD8"/>
                 </a:solidFill>
@@ -10124,328 +11485,83 @@
                 <a:ea typeface="Inter" pitchFamily="34" charset="-122"/>
                 <a:cs typeface="Inter" pitchFamily="34" charset="-120"/>
               </a:rPr>
-              <a:t>1</a:t>
-            </a:r>
-            <a:endParaRPr lang="en-US" sz="768" dirty="0"/>
-          </a:p>
-        </p:txBody>
-      </p:sp>
-      <p:sp>
-        <p:nvSpPr>
-          <p:cNvPr id="15" name="Text 12"/>
-          <p:cNvSpPr txBox="1"/>
-          <p:nvPr/>
-        </p:nvSpPr>
-        <p:spPr>
-          <a:xfrm>
-            <a:off x="8338224" y="2113834"/>
-            <a:ext cx="3460049" cy="315282"/>
-          </a:xfrm>
-          <a:prstGeom prst="rect">
-            <a:avLst/>
-          </a:prstGeom>
-          <a:noFill/>
-          <a:ln/>
-        </p:spPr>
-        <p:txBody>
-          <a:bodyPr wrap="square" lIns="0" tIns="0" rIns="0" bIns="0" rtlCol="0" anchor="t"/>
-          <a:lstStyle/>
-          <a:p>
-            <a:pPr algn="l" indent="0" marL="0">
-              <a:lnSpc>
-                <a:spcPct val="109000"/>
-              </a:lnSpc>
-              <a:buNone/>
-            </a:pPr>
-            <a:r>
-              <a:rPr lang="en-US" sz="940" dirty="0">
-                <a:solidFill>
-                  <a:srgbClr val="3B4556"/>
-                </a:solidFill>
-                <a:latin typeface="Inter" pitchFamily="34" charset="0"/>
-                <a:ea typeface="Inter" pitchFamily="34" charset="-122"/>
-                <a:cs typeface="Inter" pitchFamily="34" charset="-120"/>
-              </a:rPr>
-              <a:t>Septiembre mandó 66 M mensajes, casi como enero (59 M), pero trajo 54 respuestas por cada mil contra 84.</a:t>
-            </a:r>
-            <a:endParaRPr lang="en-US" sz="940" dirty="0"/>
-          </a:p>
-        </p:txBody>
-      </p:sp>
-      <p:sp>
-        <p:nvSpPr>
-          <p:cNvPr id="16" name="Shape 13"/>
-          <p:cNvSpPr/>
-          <p:nvPr/>
-        </p:nvSpPr>
-        <p:spPr>
-          <a:xfrm>
-            <a:off x="8094390" y="2514401"/>
-            <a:ext cx="164573" cy="164573"/>
-          </a:xfrm>
-          <a:prstGeom prst="ellipse">
-            <a:avLst/>
-          </a:prstGeom>
-          <a:solidFill>
-            <a:srgbClr val="E8EEFC"/>
-          </a:solidFill>
-          <a:ln/>
-        </p:spPr>
-      </p:sp>
-      <p:sp>
-        <p:nvSpPr>
-          <p:cNvPr id="17" name="Text 14"/>
-          <p:cNvSpPr txBox="1"/>
-          <p:nvPr/>
-        </p:nvSpPr>
-        <p:spPr>
-          <a:xfrm>
-            <a:off x="8094390" y="2514401"/>
-            <a:ext cx="164573" cy="164573"/>
-          </a:xfrm>
-          <a:prstGeom prst="rect">
-            <a:avLst/>
-          </a:prstGeom>
-          <a:noFill/>
-          <a:ln/>
-        </p:spPr>
-        <p:txBody>
-          <a:bodyPr wrap="square" lIns="0" tIns="0" rIns="0" bIns="0" rtlCol="0" anchor="ctr"/>
-          <a:lstStyle/>
-          <a:p>
-            <a:pPr algn="ctr" indent="0" marL="0">
-              <a:buNone/>
-            </a:pPr>
-            <a:r>
-              <a:rPr lang="en-US" sz="768" b="1" dirty="0">
-                <a:solidFill>
-                  <a:srgbClr val="1F4FD8"/>
-                </a:solidFill>
-                <a:latin typeface="Inter" pitchFamily="34" charset="0"/>
-                <a:ea typeface="Inter" pitchFamily="34" charset="-122"/>
-                <a:cs typeface="Inter" pitchFamily="34" charset="-120"/>
-              </a:rPr>
-              <a:t>2</a:t>
-            </a:r>
-            <a:endParaRPr lang="en-US" sz="768" dirty="0"/>
-          </a:p>
-        </p:txBody>
-      </p:sp>
-      <p:sp>
-        <p:nvSpPr>
-          <p:cNvPr id="18" name="Text 15"/>
-          <p:cNvSpPr txBox="1"/>
-          <p:nvPr/>
-        </p:nvSpPr>
-        <p:spPr>
-          <a:xfrm>
-            <a:off x="8338224" y="2502209"/>
-            <a:ext cx="3460049" cy="315282"/>
-          </a:xfrm>
-          <a:prstGeom prst="rect">
-            <a:avLst/>
-          </a:prstGeom>
-          <a:noFill/>
-          <a:ln/>
-        </p:spPr>
-        <p:txBody>
-          <a:bodyPr wrap="square" lIns="0" tIns="0" rIns="0" bIns="0" rtlCol="0" anchor="t"/>
-          <a:lstStyle/>
-          <a:p>
-            <a:pPr algn="l" indent="0" marL="0">
-              <a:lnSpc>
-                <a:spcPct val="109000"/>
-              </a:lnSpc>
-              <a:buNone/>
-            </a:pPr>
-            <a:r>
-              <a:rPr lang="en-US" sz="940" dirty="0">
-                <a:solidFill>
-                  <a:srgbClr val="3B4556"/>
-                </a:solidFill>
-                <a:latin typeface="Inter" pitchFamily="34" charset="0"/>
-                <a:ea typeface="Inter" pitchFamily="34" charset="-122"/>
-                <a:cs typeface="Inter" pitchFamily="34" charset="-120"/>
-              </a:rPr>
-              <a:t>Junio fue el pico: 109 M mensajes. Después mandamos menos y la respuesta quedó en 61, 56 y 54 por mil.</a:t>
-            </a:r>
-            <a:endParaRPr lang="en-US" sz="940" dirty="0"/>
-          </a:p>
-        </p:txBody>
-      </p:sp>
-      <p:sp>
-        <p:nvSpPr>
-          <p:cNvPr id="19" name="Shape 16"/>
-          <p:cNvSpPr/>
-          <p:nvPr/>
-        </p:nvSpPr>
-        <p:spPr>
-          <a:xfrm>
-            <a:off x="8094390" y="2902776"/>
-            <a:ext cx="164573" cy="164573"/>
-          </a:xfrm>
-          <a:prstGeom prst="ellipse">
-            <a:avLst/>
-          </a:prstGeom>
-          <a:solidFill>
-            <a:srgbClr val="E8EEFC"/>
-          </a:solidFill>
-          <a:ln/>
-        </p:spPr>
-      </p:sp>
-      <p:sp>
-        <p:nvSpPr>
-          <p:cNvPr id="20" name="Text 17"/>
-          <p:cNvSpPr txBox="1"/>
-          <p:nvPr/>
-        </p:nvSpPr>
-        <p:spPr>
-          <a:xfrm>
-            <a:off x="8094390" y="2902776"/>
-            <a:ext cx="164573" cy="164573"/>
-          </a:xfrm>
-          <a:prstGeom prst="rect">
-            <a:avLst/>
-          </a:prstGeom>
-          <a:noFill/>
-          <a:ln/>
-        </p:spPr>
-        <p:txBody>
-          <a:bodyPr wrap="square" lIns="0" tIns="0" rIns="0" bIns="0" rtlCol="0" anchor="ctr"/>
-          <a:lstStyle/>
-          <a:p>
-            <a:pPr algn="ctr" indent="0" marL="0">
-              <a:buNone/>
-            </a:pPr>
-            <a:r>
-              <a:rPr lang="en-US" sz="768" b="1" dirty="0">
-                <a:solidFill>
-                  <a:srgbClr val="1F4FD8"/>
-                </a:solidFill>
-                <a:latin typeface="Inter" pitchFamily="34" charset="0"/>
-                <a:ea typeface="Inter" pitchFamily="34" charset="-122"/>
-                <a:cs typeface="Inter" pitchFamily="34" charset="-120"/>
-              </a:rPr>
-              <a:t>3</a:t>
-            </a:r>
-            <a:endParaRPr lang="en-US" sz="768" dirty="0"/>
-          </a:p>
-        </p:txBody>
-      </p:sp>
-      <p:sp>
-        <p:nvSpPr>
-          <p:cNvPr id="21" name="Text 18"/>
-          <p:cNvSpPr txBox="1"/>
-          <p:nvPr/>
-        </p:nvSpPr>
-        <p:spPr>
-          <a:xfrm>
-            <a:off x="8338224" y="2890584"/>
-            <a:ext cx="3460049" cy="472923"/>
-          </a:xfrm>
-          <a:prstGeom prst="rect">
-            <a:avLst/>
-          </a:prstGeom>
-          <a:noFill/>
-          <a:ln/>
-        </p:spPr>
-        <p:txBody>
-          <a:bodyPr wrap="square" lIns="0" tIns="0" rIns="0" bIns="0" rtlCol="0" anchor="t"/>
-          <a:lstStyle/>
-          <a:p>
-            <a:pPr algn="l" indent="0" marL="0">
-              <a:lnSpc>
-                <a:spcPct val="109000"/>
-              </a:lnSpc>
-              <a:buNone/>
-            </a:pPr>
-            <a:r>
-              <a:rPr lang="en-US" sz="940" dirty="0">
-                <a:solidFill>
-                  <a:srgbClr val="3B4556"/>
-                </a:solidFill>
-                <a:latin typeface="Inter" pitchFamily="34" charset="0"/>
-                <a:ea typeface="Inter" pitchFamily="34" charset="-122"/>
-                <a:cs typeface="Inter" pitchFamily="34" charset="-120"/>
-              </a:rPr>
-              <a:t>WhatsApp, que sí se lee, bajó de 10 % a 5 % de los mensajes; push, que casi no se abre, subió de 27 % a 37 %.</a:t>
-            </a:r>
-            <a:endParaRPr lang="en-US" sz="940" dirty="0"/>
-          </a:p>
-        </p:txBody>
-      </p:sp>
-      <p:sp>
-        <p:nvSpPr>
-          <p:cNvPr id="22" name="Shape 19"/>
-          <p:cNvSpPr/>
-          <p:nvPr/>
-        </p:nvSpPr>
-        <p:spPr>
-          <a:xfrm>
-            <a:off x="8094390" y="3448808"/>
-            <a:ext cx="3585349" cy="596503"/>
-          </a:xfrm>
-          <a:prstGeom prst="rect">
-            <a:avLst/>
-          </a:prstGeom>
-          <a:solidFill>
-            <a:srgbClr val="F4F6F9"/>
-          </a:solidFill>
-          <a:ln/>
-        </p:spPr>
-      </p:sp>
-      <p:sp>
-        <p:nvSpPr>
-          <p:cNvPr id="23" name="Shape 20"/>
-          <p:cNvSpPr/>
-          <p:nvPr/>
-        </p:nvSpPr>
-        <p:spPr>
-          <a:xfrm>
-            <a:off x="8108858" y="3448808"/>
-            <a:ext cx="0" cy="596503"/>
-          </a:xfrm>
-          <a:prstGeom prst="line">
-            <a:avLst/>
-          </a:prstGeom>
-          <a:noFill/>
-          <a:ln w="28936">
-            <a:solidFill>
-              <a:srgbClr val="0B1220"/>
-            </a:solidFill>
-            <a:prstDash val="solid"/>
-          </a:ln>
-        </p:spPr>
-      </p:sp>
-      <p:sp>
-        <p:nvSpPr>
-          <p:cNvPr id="24" name="Text 21"/>
-          <p:cNvSpPr txBox="1"/>
-          <p:nvPr/>
-        </p:nvSpPr>
-        <p:spPr>
-          <a:xfrm>
-            <a:off x="8233041" y="3509694"/>
-            <a:ext cx="3455380" cy="130513"/>
-          </a:xfrm>
-          <a:prstGeom prst="rect">
-            <a:avLst/>
-          </a:prstGeom>
-          <a:noFill/>
-          <a:ln/>
-        </p:spPr>
-        <p:txBody>
-          <a:bodyPr wrap="square" lIns="0" tIns="0" rIns="0" bIns="0" rtlCol="0" anchor="t"/>
-          <a:lstStyle/>
-          <a:p>
-            <a:pPr algn="l" indent="0" marL="0">
-              <a:lnSpc>
-                <a:spcPct val="111000"/>
-              </a:lnSpc>
-              <a:buNone/>
-            </a:pPr>
-            <a:r>
-              <a:rPr lang="en-US" sz="770" b="1" spc="80" kern="0" dirty="0">
+              <a:t>Y ADEMÁS</a:t>
+            </a:r>
+            <a:endParaRPr lang="en-US" sz="820" dirty="0"/>
+          </a:p>
+        </p:txBody>
+      </p:sp>
+      <p:sp>
+        <p:nvSpPr>
+          <p:cNvPr id="20" name="Text 15"/>
+          <p:cNvSpPr txBox="1"/>
+          <p:nvPr/>
+        </p:nvSpPr>
+        <p:spPr>
+          <a:xfrm>
+            <a:off x="1483421" y="4960713"/>
+            <a:ext cx="9972380" cy="189139"/>
+          </a:xfrm>
+          <a:prstGeom prst="rect">
+            <a:avLst/>
+          </a:prstGeom>
+          <a:noFill/>
+          <a:ln/>
+        </p:spPr>
+        <p:txBody>
+          <a:bodyPr wrap="square" lIns="0" tIns="0" rIns="0" bIns="0" rtlCol="0" anchor="t"/>
+          <a:lstStyle/>
+          <a:p>
+            <a:pPr algn="l" indent="0" marL="0">
+              <a:lnSpc>
+                <a:spcPct val="112000"/>
+              </a:lnSpc>
+              <a:buNone/>
+            </a:pPr>
+            <a:r>
+              <a:rPr lang="en-US" sz="1100" dirty="0">
+                <a:solidFill>
+                  <a:srgbClr val="0B1220"/>
+                </a:solidFill>
+                <a:latin typeface="Inter" pitchFamily="34" charset="0"/>
+                <a:ea typeface="Inter" pitchFamily="34" charset="-122"/>
+                <a:cs typeface="Inter" pitchFamily="34" charset="-120"/>
+              </a:rPr>
+              <a:t>59 % de los mensajes va por un canal al que esa persona nunca respondió: correos a quien solo lee WhatsApp, push a quien nunca abre un push.</a:t>
+            </a:r>
+            <a:endParaRPr lang="en-US" sz="1100" dirty="0"/>
+          </a:p>
+        </p:txBody>
+      </p:sp>
+      <p:sp>
+        <p:nvSpPr>
+          <p:cNvPr id="21" name="Text 16"/>
+          <p:cNvSpPr txBox="1"/>
+          <p:nvPr/>
+        </p:nvSpPr>
+        <p:spPr>
+          <a:xfrm>
+            <a:off x="511956" y="6454684"/>
+            <a:ext cx="9906097" cy="135035"/>
+          </a:xfrm>
+          <a:prstGeom prst="rect">
+            <a:avLst/>
+          </a:prstGeom>
+          <a:noFill/>
+          <a:ln/>
+        </p:spPr>
+        <p:txBody>
+          <a:bodyPr wrap="square" lIns="0" tIns="0" rIns="0" bIns="0" rtlCol="0" anchor="t"/>
+          <a:lstStyle/>
+          <a:p>
+            <a:pPr algn="l" indent="0" marL="0">
+              <a:lnSpc>
+                <a:spcPct val="99000"/>
+              </a:lnSpc>
+              <a:buNone/>
+            </a:pPr>
+            <a:r>
+              <a:rPr lang="en-US" sz="840" dirty="0">
                 <a:solidFill>
                   <a:srgbClr val="6B7484"/>
                 </a:solidFill>
@@ -10453,195 +11569,7 @@
                 <a:ea typeface="Inter" pitchFamily="34" charset="-122"/>
                 <a:cs typeface="Inter" pitchFamily="34" charset="-120"/>
               </a:rPr>
-              <a:t>CAUSA RAÍZ</a:t>
-            </a:r>
-            <a:endParaRPr lang="en-US" sz="770" dirty="0"/>
-          </a:p>
-        </p:txBody>
-      </p:sp>
-      <p:sp>
-        <p:nvSpPr>
-          <p:cNvPr id="25" name="Text 22"/>
-          <p:cNvSpPr txBox="1"/>
-          <p:nvPr/>
-        </p:nvSpPr>
-        <p:spPr>
-          <a:xfrm>
-            <a:off x="8233041" y="3670650"/>
-            <a:ext cx="3265534" cy="301567"/>
-          </a:xfrm>
-          <a:prstGeom prst="rect">
-            <a:avLst/>
-          </a:prstGeom>
-          <a:noFill/>
-          <a:ln/>
-        </p:spPr>
-        <p:txBody>
-          <a:bodyPr wrap="square" lIns="0" tIns="0" rIns="0" bIns="0" rtlCol="0" anchor="t"/>
-          <a:lstStyle/>
-          <a:p>
-            <a:pPr algn="l" indent="0" marL="0">
-              <a:lnSpc>
-                <a:spcPct val="111000"/>
-              </a:lnSpc>
-              <a:buNone/>
-            </a:pPr>
-            <a:r>
-              <a:rPr lang="en-US" sz="920" dirty="0">
-                <a:solidFill>
-                  <a:srgbClr val="0B1220"/>
-                </a:solidFill>
-                <a:latin typeface="Inter" pitchFamily="34" charset="0"/>
-                <a:ea typeface="Inter" pitchFamily="34" charset="-122"/>
-                <a:cs typeface="Inter" pitchFamily="34" charset="-120"/>
-              </a:rPr>
-              <a:t>Escribimos a toda la base por push y correo, sin límite de mensajes por persona ni calendario entre equipos.</a:t>
-            </a:r>
-            <a:endParaRPr lang="en-US" sz="920" dirty="0"/>
-          </a:p>
-        </p:txBody>
-      </p:sp>
-      <p:sp>
-        <p:nvSpPr>
-          <p:cNvPr id="26" name="Shape 23"/>
-          <p:cNvSpPr/>
-          <p:nvPr/>
-        </p:nvSpPr>
-        <p:spPr>
-          <a:xfrm>
-            <a:off x="511956" y="5992160"/>
-            <a:ext cx="11167783" cy="352808"/>
-          </a:xfrm>
-          <a:prstGeom prst="rect">
-            <a:avLst/>
-          </a:prstGeom>
-          <a:solidFill>
-            <a:srgbClr val="E8EEFC"/>
-          </a:solidFill>
-          <a:ln/>
-        </p:spPr>
-      </p:sp>
-      <p:sp>
-        <p:nvSpPr>
-          <p:cNvPr id="27" name="Text 24"/>
-          <p:cNvSpPr txBox="1"/>
-          <p:nvPr/>
-        </p:nvSpPr>
-        <p:spPr>
-          <a:xfrm>
-            <a:off x="670350" y="6116043"/>
-            <a:ext cx="616853" cy="134733"/>
-          </a:xfrm>
-          <a:prstGeom prst="rect">
-            <a:avLst/>
-          </a:prstGeom>
-          <a:noFill/>
-          <a:ln/>
-        </p:spPr>
-        <p:txBody>
-          <a:bodyPr wrap="square" lIns="0" tIns="0" rIns="0" bIns="0" rtlCol="0" anchor="t"/>
-          <a:lstStyle/>
-          <a:p>
-            <a:pPr algn="l" indent="0" marL="0">
-              <a:lnSpc>
-                <a:spcPct val="107000"/>
-              </a:lnSpc>
-              <a:buNone/>
-            </a:pPr>
-            <a:r>
-              <a:rPr lang="en-US" sz="820" b="1" spc="100" kern="0" dirty="0">
-                <a:solidFill>
-                  <a:srgbClr val="1F4FD8"/>
-                </a:solidFill>
-                <a:latin typeface="Inter" pitchFamily="34" charset="0"/>
-                <a:ea typeface="Inter" pitchFamily="34" charset="-122"/>
-                <a:cs typeface="Inter" pitchFamily="34" charset="-120"/>
-              </a:rPr>
-              <a:t>SO WHAT</a:t>
-            </a:r>
-            <a:endParaRPr lang="en-US" sz="820" dirty="0"/>
-          </a:p>
-        </p:txBody>
-      </p:sp>
-      <p:sp>
-        <p:nvSpPr>
-          <p:cNvPr id="28" name="Text 25"/>
-          <p:cNvSpPr txBox="1"/>
-          <p:nvPr/>
-        </p:nvSpPr>
-        <p:spPr>
-          <a:xfrm>
-            <a:off x="1409876" y="6077461"/>
-            <a:ext cx="6666147" cy="182206"/>
-          </a:xfrm>
-          <a:prstGeom prst="rect">
-            <a:avLst/>
-          </a:prstGeom>
-          <a:noFill/>
-          <a:ln/>
-        </p:spPr>
-        <p:txBody>
-          <a:bodyPr wrap="square" lIns="0" tIns="0" rIns="0" bIns="0" rtlCol="0" anchor="t"/>
-          <a:lstStyle/>
-          <a:p>
-            <a:pPr algn="l" indent="0" marL="0">
-              <a:lnSpc>
-                <a:spcPct val="107000"/>
-              </a:lnSpc>
-              <a:buNone/>
-            </a:pPr>
-            <a:r>
-              <a:rPr lang="en-US" sz="1100" dirty="0">
-                <a:solidFill>
-                  <a:srgbClr val="0B1220"/>
-                </a:solidFill>
-                <a:latin typeface="Inter" pitchFamily="34" charset="0"/>
-                <a:ea typeface="Inter" pitchFamily="34" charset="-122"/>
-                <a:cs typeface="Inter" pitchFamily="34" charset="-120"/>
-              </a:rPr>
-              <a:t>Mandar menos no basta: hay que escribir a quien responde, por su canal y con un límite semanal.</a:t>
-            </a:r>
-            <a:endParaRPr lang="en-US" sz="1100" dirty="0"/>
-          </a:p>
-        </p:txBody>
-      </p:sp>
-      <p:sp>
-        <p:nvSpPr>
-          <p:cNvPr id="29" name="Text 26"/>
-          <p:cNvSpPr txBox="1"/>
-          <p:nvPr/>
-        </p:nvSpPr>
-        <p:spPr>
-          <a:xfrm>
-            <a:off x="511956" y="6454684"/>
-            <a:ext cx="9652762" cy="135035"/>
-          </a:xfrm>
-          <a:prstGeom prst="rect">
-            <a:avLst/>
-          </a:prstGeom>
-          <a:noFill/>
-          <a:ln/>
-        </p:spPr>
-        <p:txBody>
-          <a:bodyPr wrap="square" lIns="0" tIns="0" rIns="0" bIns="0" rtlCol="0" anchor="t"/>
-          <a:lstStyle/>
-          <a:p>
-            <a:pPr algn="l" indent="0" marL="0">
-              <a:lnSpc>
-                <a:spcPct val="99000"/>
-              </a:lnSpc>
-              <a:buNone/>
-            </a:pPr>
-            <a:r>
-              <a:rPr lang="en-US" sz="840" dirty="0">
-                <a:solidFill>
-                  <a:srgbClr val="6B7484"/>
-                </a:solidFill>
-                <a:latin typeface="Inter" pitchFamily="34" charset="0"/>
-                <a:ea typeface="Inter" pitchFamily="34" charset="-122"/>
-                <a:cs typeface="Inter" pitchFamily="34" charset="-120"/>
-              </a:rPr>
-              <a:t>Fuente: Braze, envíos por comunicación, mes y canal, enero a septiembre 2026. Respuesta = clic de correo, apertura de push, lectura de WhatsApp y clic in-app, por cada mil enviados.</a:t>
+              <a:t>Fuente: Braze, enero a septiembre 2026 (deck v6, láminas 8, 18, 24, 35, 52 y 63). Pantallas ilustrativas; las cifras son reales. 58 mil = promociones de Marketing a personas ya dadas de baja.</a:t>
             </a:r>
             <a:endParaRPr lang="en-US" sz="840" dirty="0"/>
           </a:p>
@@ -10649,7 +11577,7 @@
       </p:sp>
       <p:sp>
         <p:nvSpPr>
-          <p:cNvPr id="30" name="Text 27"/>
+          <p:cNvPr id="22" name="Text 17"/>
           <p:cNvSpPr txBox="1"/>
           <p:nvPr/>
         </p:nvSpPr>
@@ -10757,7 +11685,7 @@
                 <a:ea typeface="Inter" pitchFamily="34" charset="-122"/>
                 <a:cs typeface="Inter" pitchFamily="34" charset="-120"/>
               </a:rPr>
-              <a:t>Marketing gana con el recordatorio de registro y gasta la mitad de su dinero en Tasa 0 que casi no convierte</a:t>
+              <a:t>Después de junio mandamos menos, pero cada mil mensajes hoy traen 54 respuestas; en enero traían 84</a:t>
             </a:r>
             <a:endParaRPr lang="en-US" sz="2210" dirty="0"/>
           </a:p>
@@ -10860,7 +11788,7 @@
         <p:spPr>
           <a:xfrm>
             <a:off x="511956" y="1410328"/>
-            <a:ext cx="3324521" cy="293580"/>
+            <a:ext cx="3706696" cy="293580"/>
           </a:xfrm>
           <a:prstGeom prst="rect">
             <a:avLst/>
@@ -10887,7 +11815,7 @@
                 <a:ea typeface="Inter" pitchFamily="34" charset="-122"/>
                 <a:cs typeface="Inter" pitchFamily="34" charset="-120"/>
               </a:rPr>
-              <a:t>Tasa 0 y rescate de leads, referidos, promociones de KPay, recordatorio de registro.</a:t>
+              <a:t>Junio: lanzamiento de BillPay y push de Mundial, Comercio del día y Anota y Gana.</a:t>
             </a:r>
             <a:endParaRPr lang="en-US" sz="900" dirty="0"/>
           </a:p>
@@ -10944,7 +11872,7 @@
         <p:spPr>
           <a:xfrm>
             <a:off x="4299556" y="1410328"/>
-            <a:ext cx="3694278" cy="293580"/>
+            <a:ext cx="3556745" cy="293580"/>
           </a:xfrm>
           <a:prstGeom prst="rect">
             <a:avLst/>
@@ -10971,7 +11899,7 @@
                 <a:ea typeface="Inter" pitchFamily="34" charset="-122"/>
                 <a:cs typeface="Inter" pitchFamily="34" charset="-120"/>
               </a:rPr>
-              <a:t>Marketing: 351 campañas por canal, 259 M mensajes (39 %), 27.2 M MXN (47 %).</a:t>
+              <a:t>En junio contra enero, Marketing sumó 28 M mensajes y Others 25 M.</a:t>
             </a:r>
             <a:endParaRPr lang="en-US" sz="900" dirty="0"/>
           </a:p>
@@ -11028,7 +11956,7 @@
         <p:spPr>
           <a:xfrm>
             <a:off x="8087156" y="1410328"/>
-            <a:ext cx="3336008" cy="293580"/>
+            <a:ext cx="3393443" cy="144680"/>
           </a:xfrm>
           <a:prstGeom prst="rect">
             <a:avLst/>
@@ -11055,7 +11983,7 @@
                 <a:ea typeface="Inter" pitchFamily="34" charset="-122"/>
                 <a:cs typeface="Inter" pitchFamily="34" charset="-120"/>
               </a:rPr>
-              <a:t>Leads 28 %, leads fríos 25 %, clientes 19 %, dormidos 7 %, registro a medias 7 %.</a:t>
+              <a:t>Casi toda la base: el correo de BillPay llegó a 16 M personas.</a:t>
             </a:r>
             <a:endParaRPr lang="en-US" sz="900" dirty="0"/>
           </a:p>
@@ -11078,7 +12006,7 @@
         <p:spPr>
           <a:xfrm>
             <a:off x="511956" y="1912789"/>
-            <a:ext cx="7121417" cy="3834621"/>
+            <a:ext cx="7289909" cy="3969656"/>
           </a:xfrm>
           <a:prstGeom prst="rect">
             <a:avLst/>
@@ -11195,7 +12123,7 @@
         <p:spPr>
           <a:xfrm>
             <a:off x="8338224" y="2113834"/>
-            <a:ext cx="3460049" cy="472923"/>
+            <a:ext cx="3460049" cy="315282"/>
           </a:xfrm>
           <a:prstGeom prst="rect">
             <a:avLst/>
@@ -11222,7 +12150,7 @@
                 <a:ea typeface="Inter" pitchFamily="34" charset="-122"/>
                 <a:cs typeface="Inter" pitchFamily="34" charset="-120"/>
               </a:rPr>
-              <a:t>Recordatorio de Veriff: 3.04 % de clic en 9.7 M correos y 5.83 % en push, a 21 MXN por préstamo de Cash otorgado.</a:t>
+              <a:t>Septiembre mandó 66 M mensajes, casi como enero (59 M), pero trajo 54 respuestas por cada mil contra 84.</a:t>
             </a:r>
             <a:endParaRPr lang="en-US" sz="940" dirty="0"/>
           </a:p>
@@ -11236,7 +12164,7 @@
         </p:nvSpPr>
         <p:spPr>
           <a:xfrm>
-            <a:off x="8094390" y="2672042"/>
+            <a:off x="8094390" y="2514401"/>
             <a:ext cx="164573" cy="164573"/>
           </a:xfrm>
           <a:prstGeom prst="ellipse">
@@ -11256,7 +12184,7 @@
         </p:nvSpPr>
         <p:spPr>
           <a:xfrm>
-            <a:off x="8094390" y="2672042"/>
+            <a:off x="8094390" y="2514401"/>
             <a:ext cx="164573" cy="164573"/>
           </a:xfrm>
           <a:prstGeom prst="rect">
@@ -11295,8 +12223,8 @@
         </p:nvSpPr>
         <p:spPr>
           <a:xfrm>
-            <a:off x="8338224" y="2659850"/>
-            <a:ext cx="3460049" cy="472923"/>
+            <a:off x="8338224" y="2502209"/>
+            <a:ext cx="3460049" cy="315282"/>
           </a:xfrm>
           <a:prstGeom prst="rect">
             <a:avLst/>
@@ -11323,7 +12251,7 @@
                 <a:ea typeface="Inter" pitchFamily="34" charset="-122"/>
                 <a:cs typeface="Inter" pitchFamily="34" charset="-120"/>
               </a:rPr>
-              <a:t>Tasa 0 a leads: 51 % de su gasto (13.6 M MXN). Su WhatsApp se lee, pero cuesta 694 a 844 MXN por préstamo.</a:t>
+              <a:t>Junio fue el pico: 109 M mensajes. Después mandamos menos y la respuesta quedó en 61, 56 y 54 por mil.</a:t>
             </a:r>
             <a:endParaRPr lang="en-US" sz="940" dirty="0"/>
           </a:p>
@@ -11337,7 +12265,7 @@
         </p:nvSpPr>
         <p:spPr>
           <a:xfrm>
-            <a:off x="8094390" y="3218058"/>
+            <a:off x="8094390" y="2902776"/>
             <a:ext cx="164573" cy="164573"/>
           </a:xfrm>
           <a:prstGeom prst="ellipse">
@@ -11357,7 +12285,7 @@
         </p:nvSpPr>
         <p:spPr>
           <a:xfrm>
-            <a:off x="8094390" y="3218058"/>
+            <a:off x="8094390" y="2902776"/>
             <a:ext cx="164573" cy="164573"/>
           </a:xfrm>
           <a:prstGeom prst="rect">
@@ -11396,8 +12324,8 @@
         </p:nvSpPr>
         <p:spPr>
           <a:xfrm>
-            <a:off x="8338224" y="3205866"/>
-            <a:ext cx="3460049" cy="315282"/>
+            <a:off x="8338224" y="2890584"/>
+            <a:ext cx="3460049" cy="472923"/>
           </a:xfrm>
           <a:prstGeom prst="rect">
             <a:avLst/>
@@ -11424,7 +12352,7 @@
                 <a:ea typeface="Inter" pitchFamily="34" charset="-122"/>
                 <a:cs typeface="Inter" pitchFamily="34" charset="-120"/>
               </a:rPr>
-              <a:t>Pierde suscriptores: 5.9 bajas por cada mil correos, más del doble que el resto de los equipos (2.6).</a:t>
+              <a:t>WhatsApp, que sí se lee, bajó de 10 % a 5 % de los mensajes; push, que casi no se abre, subió de 27 % a 37 %.</a:t>
             </a:r>
             <a:endParaRPr lang="en-US" sz="940" dirty="0"/>
           </a:p>
@@ -11438,7 +12366,7 @@
         </p:nvSpPr>
         <p:spPr>
           <a:xfrm>
-            <a:off x="8094390" y="3606449"/>
+            <a:off x="8094390" y="3448808"/>
             <a:ext cx="3585349" cy="596503"/>
           </a:xfrm>
           <a:prstGeom prst="rect">
@@ -11458,7 +12386,7 @@
         </p:nvSpPr>
         <p:spPr>
           <a:xfrm>
-            <a:off x="8108858" y="3606449"/>
+            <a:off x="8108858" y="3448808"/>
             <a:ext cx="0" cy="596503"/>
           </a:xfrm>
           <a:prstGeom prst="line">
@@ -11481,7 +12409,7 @@
         </p:nvSpPr>
         <p:spPr>
           <a:xfrm>
-            <a:off x="8233041" y="3667335"/>
+            <a:off x="8233041" y="3509694"/>
             <a:ext cx="3455380" cy="130513"/>
           </a:xfrm>
           <a:prstGeom prst="rect">
@@ -11523,8 +12451,8 @@
         </p:nvSpPr>
         <p:spPr>
           <a:xfrm>
-            <a:off x="8233041" y="3828291"/>
-            <a:ext cx="3411139" cy="301567"/>
+            <a:off x="8233041" y="3670650"/>
+            <a:ext cx="3265534" cy="301567"/>
           </a:xfrm>
           <a:prstGeom prst="rect">
             <a:avLst/>
@@ -11551,7 +12479,7 @@
                 <a:ea typeface="Inter" pitchFamily="34" charset="-122"/>
                 <a:cs typeface="Inter" pitchFamily="34" charset="-120"/>
               </a:rPr>
-              <a:t>Mide si el mensaje se lee, no cuánto cuesta cada préstamo: el WhatsApp a leads fríos se lee y sigue saliendo.</a:t>
+              <a:t>Escribimos a toda la base por push y correo, sin límite de mensajes por persona ni calendario entre equipos.</a:t>
             </a:r>
             <a:endParaRPr lang="en-US" sz="920" dirty="0"/>
           </a:p>
@@ -11565,7 +12493,7 @@
         </p:nvSpPr>
         <p:spPr>
           <a:xfrm>
-            <a:off x="511956" y="5857126"/>
+            <a:off x="511956" y="5992160"/>
             <a:ext cx="11167783" cy="352808"/>
           </a:xfrm>
           <a:prstGeom prst="rect">
@@ -11585,7 +12513,7 @@
         </p:nvSpPr>
         <p:spPr>
           <a:xfrm>
-            <a:off x="670350" y="5981008"/>
+            <a:off x="670350" y="6116043"/>
             <a:ext cx="616853" cy="134733"/>
           </a:xfrm>
           <a:prstGeom prst="rect">
@@ -11627,8 +12555,8 @@
         </p:nvSpPr>
         <p:spPr>
           <a:xfrm>
-            <a:off x="1409876" y="5942427"/>
-            <a:ext cx="6818737" cy="182206"/>
+            <a:off x="1409876" y="6077461"/>
+            <a:ext cx="6666147" cy="182206"/>
           </a:xfrm>
           <a:prstGeom prst="rect">
             <a:avLst/>
@@ -11655,7 +12583,7 @@
                 <a:ea typeface="Inter" pitchFamily="34" charset="-122"/>
                 <a:cs typeface="Inter" pitchFamily="34" charset="-120"/>
               </a:rPr>
-              <a:t>Mover el gasto de WhatsApp a leads fríos hacia el recordatorio de registro y los referidos a clientes.</a:t>
+              <a:t>Mandar menos no basta: hay que escribir a quien responde, por su canal y con un límite semanal.</a:t>
             </a:r>
             <a:endParaRPr lang="en-US" sz="1100" dirty="0"/>
           </a:p>
@@ -11669,8 +12597,8 @@
         </p:nvSpPr>
         <p:spPr>
           <a:xfrm>
-            <a:off x="511956" y="6319649"/>
-            <a:ext cx="11198693" cy="270069"/>
+            <a:off x="511956" y="6454684"/>
+            <a:ext cx="9652762" cy="135035"/>
           </a:xfrm>
           <a:prstGeom prst="rect">
             <a:avLst/>
@@ -11697,7 +12625,7 @@
                 <a:ea typeface="Inter" pitchFamily="34" charset="-122"/>
                 <a:cs typeface="Inter" pitchFamily="34" charset="-120"/>
               </a:rPr>
-              <a:t>Fuente: Braze, envíos por campaña, mes y canal, enero a septiembre 2026; campañas con 50 mil o más entregados. Costo por préstamo de Cash otorgado en 7 días, repartido entre los mensajes del día; no mide KPay.</a:t>
+              <a:t>Fuente: Braze, envíos por comunicación, mes y canal, enero a septiembre 2026. Respuesta = clic de correo, apertura de push, lectura de WhatsApp y clic in-app, por cada mil enviados.</a:t>
             </a:r>
             <a:endParaRPr lang="en-US" sz="840" dirty="0"/>
           </a:p>
@@ -11711,8 +12639,8 @@
         </p:nvSpPr>
         <p:spPr>
           <a:xfrm>
-            <a:off x="11610413" y="6319649"/>
-            <a:ext cx="89694" cy="270069"/>
+            <a:off x="11610413" y="6454684"/>
+            <a:ext cx="89694" cy="135035"/>
           </a:xfrm>
           <a:prstGeom prst="rect">
             <a:avLst/>
@@ -11813,7 +12741,7 @@
                 <a:ea typeface="Inter" pitchFamily="34" charset="-122"/>
                 <a:cs typeface="Inter" pitchFamily="34" charset="-120"/>
               </a:rPr>
-              <a:t>WhatsApp paga con clientes activos y referidos; con bases frías cada conversión cuesta 13 veces más</a:t>
+              <a:t>Marketing gana con el recordatorio de registro y gasta la mitad de su dinero en Tasa 0 que casi no convierte</a:t>
             </a:r>
             <a:endParaRPr lang="en-US" sz="2210" dirty="0"/>
           </a:p>
@@ -11916,7 +12844,7 @@
         <p:spPr>
           <a:xfrm>
             <a:off x="511956" y="1410328"/>
-            <a:ext cx="3214464" cy="293580"/>
+            <a:ext cx="3324521" cy="293580"/>
           </a:xfrm>
           <a:prstGeom prst="rect">
             <a:avLst/>
@@ -11943,7 +12871,7 @@
                 <a:ea typeface="Inter" pitchFamily="34" charset="-122"/>
                 <a:cs typeface="Inter" pitchFamily="34" charset="-120"/>
               </a:rPr>
-              <a:t>Referidos y recordatorios a clientes; rescates de Tasa 0 y descuentos a bases frías.</a:t>
+              <a:t>Tasa 0 y rescate de leads, referidos, promociones de KPay, recordatorio de registro.</a:t>
             </a:r>
             <a:endParaRPr lang="en-US" sz="900" dirty="0"/>
           </a:p>
@@ -12000,7 +12928,7 @@
         <p:spPr>
           <a:xfrm>
             <a:off x="4299556" y="1410328"/>
-            <a:ext cx="3332127" cy="293580"/>
+            <a:ext cx="3694278" cy="293580"/>
           </a:xfrm>
           <a:prstGeom prst="rect">
             <a:avLst/>
@@ -12027,7 +12955,7 @@
                 <a:ea typeface="Inter" pitchFamily="34" charset="-122"/>
                 <a:cs typeface="Inter" pitchFamily="34" charset="-120"/>
               </a:rPr>
-              <a:t>Marketing y Product Growth en las dos puntas; Sales solo a clientes y leads de KPay.</a:t>
+              <a:t>Marketing: 351 campañas por canal, 259 M mensajes (39 %), 27.2 M MXN (47 %).</a:t>
             </a:r>
             <a:endParaRPr lang="en-US" sz="900" dirty="0"/>
           </a:p>
@@ -12084,7 +13012,7 @@
         <p:spPr>
           <a:xfrm>
             <a:off x="8087156" y="1410328"/>
-            <a:ext cx="3572268" cy="293580"/>
+            <a:ext cx="3336008" cy="293580"/>
           </a:xfrm>
           <a:prstGeom prst="rect">
             <a:avLst/>
@@ -12111,7 +13039,7 @@
                 <a:ea typeface="Inter" pitchFamily="34" charset="-122"/>
                 <a:cs typeface="Inter" pitchFamily="34" charset="-120"/>
               </a:rPr>
-              <a:t>Bases frías: ex clientes (dormants, inactivos, churn) y leads que nunca activaron.</a:t>
+              <a:t>Leads 28 %, leads fríos 25 %, clientes 19 %, dormidos 7 %, registro a medias 7 %.</a:t>
             </a:r>
             <a:endParaRPr lang="en-US" sz="900" dirty="0"/>
           </a:p>
@@ -12278,7 +13206,7 @@
                 <a:ea typeface="Inter" pitchFamily="34" charset="-122"/>
                 <a:cs typeface="Inter" pitchFamily="34" charset="-120"/>
               </a:rPr>
-              <a:t>48 MXN por conversión con activos y 629 con bases frías (11 y 69 por solicitud); ahí va 48 % del WhatsApp (19.7 M MXN).</a:t>
+              <a:t>Recordatorio de Veriff: 3.04 % de clic en 9.7 M correos y 5.83 % en push, a 21 MXN por préstamo de Cash otorgado.</a:t>
             </a:r>
             <a:endParaRPr lang="en-US" sz="940" dirty="0"/>
           </a:p>
@@ -12352,7 +13280,7 @@
         <p:spPr>
           <a:xfrm>
             <a:off x="8338224" y="2659850"/>
-            <a:ext cx="3460049" cy="315282"/>
+            <a:ext cx="3460049" cy="472923"/>
           </a:xfrm>
           <a:prstGeom prst="rect">
             <a:avLst/>
@@ -12379,7 +13307,7 @@
                 <a:ea typeface="Inter" pitchFamily="34" charset="-122"/>
                 <a:cs typeface="Inter" pitchFamily="34" charset="-120"/>
               </a:rPr>
-              <a:t>A ex clientes el correo sale más barato: 74 contra 468 MXN por conversión y 13 contra 74 por solicitud.</a:t>
+              <a:t>Tasa 0 a leads: 51 % de su gasto (13.6 M MXN). Su WhatsApp se lee, pero cuesta 694 a 844 MXN por préstamo.</a:t>
             </a:r>
             <a:endParaRPr lang="en-US" sz="940" dirty="0"/>
           </a:p>
@@ -12393,7 +13321,7 @@
         </p:nvSpPr>
         <p:spPr>
           <a:xfrm>
-            <a:off x="8094390" y="3060417"/>
+            <a:off x="8094390" y="3218058"/>
             <a:ext cx="164573" cy="164573"/>
           </a:xfrm>
           <a:prstGeom prst="ellipse">
@@ -12413,7 +13341,7 @@
         </p:nvSpPr>
         <p:spPr>
           <a:xfrm>
-            <a:off x="8094390" y="3060417"/>
+            <a:off x="8094390" y="3218058"/>
             <a:ext cx="164573" cy="164573"/>
           </a:xfrm>
           <a:prstGeom prst="rect">
@@ -12452,7 +13380,7 @@
         </p:nvSpPr>
         <p:spPr>
           <a:xfrm>
-            <a:off x="8338224" y="3048225"/>
+            <a:off x="8338224" y="3205866"/>
             <a:ext cx="3460049" cy="315282"/>
           </a:xfrm>
           <a:prstGeom prst="rect">
@@ -12480,7 +13408,7 @@
                 <a:ea typeface="Inter" pitchFamily="34" charset="-122"/>
                 <a:cs typeface="Inter" pitchFamily="34" charset="-120"/>
               </a:rPr>
-              <a:t>De julio a septiembre, 2.2 M MXN de WhatsApp llegaron a quien no leyó ninguno en 90 días.</a:t>
+              <a:t>Pierde suscriptores: 5.9 bajas por cada mil correos, más del doble que el resto de los equipos (2.6).</a:t>
             </a:r>
             <a:endParaRPr lang="en-US" sz="940" dirty="0"/>
           </a:p>
@@ -12494,8 +13422,8 @@
         </p:nvSpPr>
         <p:spPr>
           <a:xfrm>
-            <a:off x="8094390" y="3448808"/>
-            <a:ext cx="3585349" cy="753391"/>
+            <a:off x="8094390" y="3606449"/>
+            <a:ext cx="3585349" cy="596503"/>
           </a:xfrm>
           <a:prstGeom prst="rect">
             <a:avLst/>
@@ -12514,8 +13442,8 @@
         </p:nvSpPr>
         <p:spPr>
           <a:xfrm>
-            <a:off x="8108858" y="3448808"/>
-            <a:ext cx="0" cy="753391"/>
+            <a:off x="8108858" y="3606449"/>
+            <a:ext cx="0" cy="596503"/>
           </a:xfrm>
           <a:prstGeom prst="line">
             <a:avLst/>
@@ -12537,7 +13465,7 @@
         </p:nvSpPr>
         <p:spPr>
           <a:xfrm>
-            <a:off x="8233041" y="3509694"/>
+            <a:off x="8233041" y="3667335"/>
             <a:ext cx="3455380" cy="130513"/>
           </a:xfrm>
           <a:prstGeom prst="rect">
@@ -12579,8 +13507,8 @@
         </p:nvSpPr>
         <p:spPr>
           <a:xfrm>
-            <a:off x="8233041" y="3670650"/>
-            <a:ext cx="3353394" cy="458455"/>
+            <a:off x="8233041" y="3828291"/>
+            <a:ext cx="3411139" cy="301567"/>
           </a:xfrm>
           <a:prstGeom prst="rect">
             <a:avLst/>
@@ -12607,7 +13535,7 @@
                 <a:ea typeface="Inter" pitchFamily="34" charset="-122"/>
                 <a:cs typeface="Inter" pitchFamily="34" charset="-120"/>
               </a:rPr>
-              <a:t>WhatsApp se usa para buscar en volumen a quien ya no lo lee: no hay regla de lectura reciente ni presupuesto con límite.</a:t>
+              <a:t>Mide si el mensaje se lee, no cuánto cuesta cada préstamo: el WhatsApp a leads fríos se lee y sigue saliendo.</a:t>
             </a:r>
             <a:endParaRPr lang="en-US" sz="920" dirty="0"/>
           </a:p>
@@ -12684,7 +13612,7 @@
         <p:spPr>
           <a:xfrm>
             <a:off x="1409876" y="5942427"/>
-            <a:ext cx="7284892" cy="182206"/>
+            <a:ext cx="6818737" cy="182206"/>
           </a:xfrm>
           <a:prstGeom prst="rect">
             <a:avLst/>
@@ -12711,7 +13639,7 @@
                 <a:ea typeface="Inter" pitchFamily="34" charset="-122"/>
                 <a:cs typeface="Inter" pitchFamily="34" charset="-120"/>
               </a:rPr>
-              <a:t>A ex clientes, primero correo y app; WhatsApp solo a quien lo leyó en 90 días, con límite y grupo sin envío.</a:t>
+              <a:t>Mover el gasto de WhatsApp a leads fríos hacia el recordatorio de registro y los referidos a clientes.</a:t>
             </a:r>
             <a:endParaRPr lang="en-US" sz="1100" dirty="0"/>
           </a:p>
@@ -12753,7 +13681,7 @@
                 <a:ea typeface="Inter" pitchFamily="34" charset="-122"/>
                 <a:cs typeface="Inter" pitchFamily="34" charset="-120"/>
               </a:rPr>
-              <a:t>Fuente: Braze, envíos por campaña, mes y canal, ene a sep 2026; E9b. 132 campañas con 50 mil MXN o más. Conversión: préstamo otorgado en 7 días, repartido; solicitud: solicitudes registradas. 19.7 M MXN: lámina 50.</a:t>
+              <a:t>Fuente: Braze, envíos por campaña, mes y canal, enero a septiembre 2026; campañas con 50 mil o más entregados. Costo por préstamo de Cash otorgado en 7 días, repartido entre los mensajes del día; no mide KPay.</a:t>
             </a:r>
             <a:endParaRPr lang="en-US" sz="840" dirty="0"/>
           </a:p>
@@ -12869,7 +13797,7 @@
                 <a:ea typeface="Inter" pitchFamily="34" charset="-122"/>
                 <a:cs typeface="Inter" pitchFamily="34" charset="-120"/>
               </a:rPr>
-              <a:t>La mitad del push va en campañas que casi nadie abre, y dos terceras partes de ese push son de Marketing</a:t>
+              <a:t>WhatsApp paga con clientes activos y referidos; con bases frías cada conversión cuesta 13 veces más</a:t>
             </a:r>
             <a:endParaRPr lang="en-US" sz="2210" dirty="0"/>
           </a:p>
@@ -12972,7 +13900,7 @@
         <p:spPr>
           <a:xfrm>
             <a:off x="511956" y="1410328"/>
-            <a:ext cx="3392667" cy="144680"/>
+            <a:ext cx="3214464" cy="293580"/>
           </a:xfrm>
           <a:prstGeom prst="rect">
             <a:avLst/>
@@ -12999,7 +13927,7 @@
                 <a:ea typeface="Inter" pitchFamily="34" charset="-122"/>
                 <a:cs typeface="Inter" pitchFamily="34" charset="-120"/>
               </a:rPr>
-              <a:t>Tasa 0, lanzamientos, rescates de fin de semana y referidos.</a:t>
+              <a:t>Referidos y recordatorios a clientes; rescates de Tasa 0 y descuentos a bases frías.</a:t>
             </a:r>
             <a:endParaRPr lang="en-US" sz="900" dirty="0"/>
           </a:p>
@@ -13056,7 +13984,7 @@
         <p:spPr>
           <a:xfrm>
             <a:off x="4299556" y="1410328"/>
-            <a:ext cx="3593534" cy="293580"/>
+            <a:ext cx="3332127" cy="293580"/>
           </a:xfrm>
           <a:prstGeom prst="rect">
             <a:avLst/>
@@ -13083,7 +14011,7 @@
                 <a:ea typeface="Inter" pitchFamily="34" charset="-122"/>
                 <a:cs typeface="Inter" pitchFamily="34" charset="-120"/>
               </a:rPr>
-              <a:t>Marketing pone 92 M de los 141 M push que abre menos de 1 de cada 100.</a:t>
+              <a:t>Marketing y Product Growth en las dos puntas; Sales solo a clientes y leads de KPay.</a:t>
             </a:r>
             <a:endParaRPr lang="en-US" sz="900" dirty="0"/>
           </a:p>
@@ -13140,7 +14068,7 @@
         <p:spPr>
           <a:xfrm>
             <a:off x="8087156" y="1410328"/>
-            <a:ext cx="3694744" cy="144680"/>
+            <a:ext cx="3572268" cy="293580"/>
           </a:xfrm>
           <a:prstGeom prst="rect">
             <a:avLst/>
@@ -13167,7 +14095,7 @@
                 <a:ea typeface="Inter" pitchFamily="34" charset="-122"/>
                 <a:cs typeface="Inter" pitchFamily="34" charset="-120"/>
               </a:rPr>
-              <a:t>Leads (83 % de su push abre menos de 1 %) y bases frías (75 %).</a:t>
+              <a:t>Bases frías: ex clientes (dormants, inactivos, churn) y leads que nunca activaron.</a:t>
             </a:r>
             <a:endParaRPr lang="en-US" sz="900" dirty="0"/>
           </a:p>
@@ -13190,7 +14118,7 @@
         <p:spPr>
           <a:xfrm>
             <a:off x="511956" y="1912789"/>
-            <a:ext cx="7289909" cy="3969656"/>
+            <a:ext cx="7121417" cy="3834621"/>
           </a:xfrm>
           <a:prstGeom prst="rect">
             <a:avLst/>
@@ -13307,7 +14235,7 @@
         <p:spPr>
           <a:xfrm>
             <a:off x="8338224" y="2113834"/>
-            <a:ext cx="3460049" cy="315282"/>
+            <a:ext cx="3460049" cy="472923"/>
           </a:xfrm>
           <a:prstGeom prst="rect">
             <a:avLst/>
@@ -13334,7 +14262,7 @@
                 <a:ea typeface="Inter" pitchFamily="34" charset="-122"/>
                 <a:cs typeface="Inter" pitchFamily="34" charset="-120"/>
               </a:rPr>
-              <a:t>141 M de 251 M push (56 %) van en campañas que abre menos de 1 de cada 100 personas.</a:t>
+              <a:t>48 MXN por conversión con activos y 629 con bases frías (11 y 69 por solicitud); ahí va 48 % del WhatsApp (19.7 M MXN).</a:t>
             </a:r>
             <a:endParaRPr lang="en-US" sz="940" dirty="0"/>
           </a:p>
@@ -13348,7 +14276,7 @@
         </p:nvSpPr>
         <p:spPr>
           <a:xfrm>
-            <a:off x="8094390" y="2514401"/>
+            <a:off x="8094390" y="2672042"/>
             <a:ext cx="164573" cy="164573"/>
           </a:xfrm>
           <a:prstGeom prst="ellipse">
@@ -13368,7 +14296,7 @@
         </p:nvSpPr>
         <p:spPr>
           <a:xfrm>
-            <a:off x="8094390" y="2514401"/>
+            <a:off x="8094390" y="2672042"/>
             <a:ext cx="164573" cy="164573"/>
           </a:xfrm>
           <a:prstGeom prst="rect">
@@ -13407,7 +14335,7 @@
         </p:nvSpPr>
         <p:spPr>
           <a:xfrm>
-            <a:off x="8338224" y="2502209"/>
+            <a:off x="8338224" y="2659850"/>
             <a:ext cx="3460049" cy="315282"/>
           </a:xfrm>
           <a:prstGeom prst="rect">
@@ -13435,7 +14363,7 @@
                 <a:ea typeface="Inter" pitchFamily="34" charset="-122"/>
                 <a:cs typeface="Inter" pitchFamily="34" charset="-120"/>
               </a:rPr>
-              <a:t>Rescate de fin de semana a leads de Marketing: 13.4 M push y 0.76 % de apertura.</a:t>
+              <a:t>A ex clientes el correo sale más barato: 74 contra 468 MXN por conversión y 13 contra 74 por solicitud.</a:t>
             </a:r>
             <a:endParaRPr lang="en-US" sz="940" dirty="0"/>
           </a:p>
@@ -13449,7 +14377,7 @@
         </p:nvSpPr>
         <p:spPr>
           <a:xfrm>
-            <a:off x="8094390" y="2902776"/>
+            <a:off x="8094390" y="3060417"/>
             <a:ext cx="164573" cy="164573"/>
           </a:xfrm>
           <a:prstGeom prst="ellipse">
@@ -13469,7 +14397,7 @@
         </p:nvSpPr>
         <p:spPr>
           <a:xfrm>
-            <a:off x="8094390" y="2902776"/>
+            <a:off x="8094390" y="3060417"/>
             <a:ext cx="164573" cy="164573"/>
           </a:xfrm>
           <a:prstGeom prst="rect">
@@ -13508,7 +14436,7 @@
         </p:nvSpPr>
         <p:spPr>
           <a:xfrm>
-            <a:off x="8338224" y="2890584"/>
+            <a:off x="8338224" y="3048225"/>
             <a:ext cx="3460049" cy="315282"/>
           </a:xfrm>
           <a:prstGeom prst="rect">
@@ -13536,7 +14464,7 @@
                 <a:ea typeface="Inter" pitchFamily="34" charset="-122"/>
                 <a:cs typeface="Inter" pitchFamily="34" charset="-120"/>
               </a:rPr>
-              <a:t>Sí se abren los que la persona espera: pago recibido 14 %, Installments a activos 11 %.</a:t>
+              <a:t>De julio a septiembre, 2.2 M MXN de WhatsApp llegaron a quien no leyó ninguno en 90 días.</a:t>
             </a:r>
             <a:endParaRPr lang="en-US" sz="940" dirty="0"/>
           </a:p>
@@ -13550,8 +14478,8 @@
         </p:nvSpPr>
         <p:spPr>
           <a:xfrm>
-            <a:off x="8094390" y="3291167"/>
-            <a:ext cx="3585349" cy="596503"/>
+            <a:off x="8094390" y="3448808"/>
+            <a:ext cx="3585349" cy="753391"/>
           </a:xfrm>
           <a:prstGeom prst="rect">
             <a:avLst/>
@@ -13570,8 +14498,8 @@
         </p:nvSpPr>
         <p:spPr>
           <a:xfrm>
-            <a:off x="8108858" y="3291167"/>
-            <a:ext cx="0" cy="596503"/>
+            <a:off x="8108858" y="3448808"/>
+            <a:ext cx="0" cy="753391"/>
           </a:xfrm>
           <a:prstGeom prst="line">
             <a:avLst/>
@@ -13593,7 +14521,7 @@
         </p:nvSpPr>
         <p:spPr>
           <a:xfrm>
-            <a:off x="8233041" y="3352053"/>
+            <a:off x="8233041" y="3509694"/>
             <a:ext cx="3455380" cy="130513"/>
           </a:xfrm>
           <a:prstGeom prst="rect">
@@ -13635,8 +14563,8 @@
         </p:nvSpPr>
         <p:spPr>
           <a:xfrm>
-            <a:off x="8233041" y="3513009"/>
-            <a:ext cx="3424955" cy="301567"/>
+            <a:off x="8233041" y="3670650"/>
+            <a:ext cx="3353394" cy="458455"/>
           </a:xfrm>
           <a:prstGeom prst="rect">
             <a:avLst/>
@@ -13663,7 +14591,7 @@
                 <a:ea typeface="Inter" pitchFamily="34" charset="-122"/>
                 <a:cs typeface="Inter" pitchFamily="34" charset="-120"/>
               </a:rPr>
-              <a:t>El push se usa para mandar ofertas a toda la lista porque no cuesta, sin ver si esa persona abrió uno en meses.</a:t>
+              <a:t>WhatsApp se usa para buscar en volumen a quien ya no lo lee: no hay regla de lectura reciente ni presupuesto con límite.</a:t>
             </a:r>
             <a:endParaRPr lang="en-US" sz="920" dirty="0"/>
           </a:p>
@@ -13677,7 +14605,7 @@
         </p:nvSpPr>
         <p:spPr>
           <a:xfrm>
-            <a:off x="511956" y="5992160"/>
+            <a:off x="511956" y="5857126"/>
             <a:ext cx="11167783" cy="352808"/>
           </a:xfrm>
           <a:prstGeom prst="rect">
@@ -13697,7 +14625,7 @@
         </p:nvSpPr>
         <p:spPr>
           <a:xfrm>
-            <a:off x="670350" y="6116043"/>
+            <a:off x="670350" y="5981008"/>
             <a:ext cx="616853" cy="134733"/>
           </a:xfrm>
           <a:prstGeom prst="rect">
@@ -13739,8 +14667,8 @@
         </p:nvSpPr>
         <p:spPr>
           <a:xfrm>
-            <a:off x="1409876" y="6077461"/>
-            <a:ext cx="6751678" cy="182206"/>
+            <a:off x="1409876" y="5942427"/>
+            <a:ext cx="7284892" cy="182206"/>
           </a:xfrm>
           <a:prstGeom prst="rect">
             <a:avLst/>
@@ -13767,7 +14695,7 @@
                 <a:ea typeface="Inter" pitchFamily="34" charset="-122"/>
                 <a:cs typeface="Inter" pitchFamily="34" charset="-120"/>
               </a:rPr>
-              <a:t>Push solo a quien abrió uno en 60 días y con una razón para esa persona; para el resto, otro canal.</a:t>
+              <a:t>A ex clientes, primero correo y app; WhatsApp solo a quien lo leyó en 90 días, con límite y grupo sin envío.</a:t>
             </a:r>
             <a:endParaRPr lang="en-US" sz="1100" dirty="0"/>
           </a:p>
@@ -13781,8 +14709,8 @@
         </p:nvSpPr>
         <p:spPr>
           <a:xfrm>
-            <a:off x="511956" y="6454684"/>
-            <a:ext cx="8658052" cy="135035"/>
+            <a:off x="511956" y="6319649"/>
+            <a:ext cx="11201642" cy="270069"/>
           </a:xfrm>
           <a:prstGeom prst="rect">
             <a:avLst/>
@@ -13809,7 +14737,7 @@
                 <a:ea typeface="Inter" pitchFamily="34" charset="-122"/>
                 <a:cs typeface="Inter" pitchFamily="34" charset="-120"/>
               </a:rPr>
-              <a:t>Fuente: Braze, envíos por campaña, mes y canal, enero a septiembre 2026. Apertura directa sobre enviados. 322 campañas con 100 mil o más push (97 % del canal).</a:t>
+              <a:t>Fuente: Braze, envíos por campaña, mes y canal, ene a sep 2026; E9b. 132 campañas con 50 mil MXN o más. Conversión: préstamo otorgado en 7 días, repartido; solicitud: solicitudes registradas. 19.7 M MXN: lámina 50.</a:t>
             </a:r>
             <a:endParaRPr lang="en-US" sz="840" dirty="0"/>
           </a:p>
@@ -13823,8 +14751,8 @@
         </p:nvSpPr>
         <p:spPr>
           <a:xfrm>
-            <a:off x="11613277" y="6454684"/>
-            <a:ext cx="86744" cy="135035"/>
+            <a:off x="11613277" y="6319649"/>
+            <a:ext cx="86744" cy="270069"/>
           </a:xfrm>
           <a:prstGeom prst="rect">
             <a:avLst/>
@@ -13925,7 +14853,7 @@
                 <a:ea typeface="Inter" pitchFamily="34" charset="-122"/>
                 <a:cs typeface="Inter" pitchFamily="34" charset="-120"/>
               </a:rPr>
-              <a:t>Cada mes hasta 2.3 M personas reciben tres o más campañas el mismo día, casi siempre con Marketing</a:t>
+              <a:t>La mitad del push va en campañas que casi nadie abre, y dos terceras partes de ese push son de Marketing</a:t>
             </a:r>
             <a:endParaRPr lang="en-US" sz="2210" dirty="0"/>
           </a:p>
@@ -14028,7 +14956,7 @@
         <p:spPr>
           <a:xfrm>
             <a:off x="511956" y="1410328"/>
-            <a:ext cx="3703281" cy="293580"/>
+            <a:ext cx="3392667" cy="144680"/>
           </a:xfrm>
           <a:prstGeom prst="rect">
             <a:avLst/>
@@ -14055,7 +14983,7 @@
                 <a:ea typeface="Inter" pitchFamily="34" charset="-122"/>
                 <a:cs typeface="Inter" pitchFamily="34" charset="-120"/>
               </a:rPr>
-              <a:t>Hot Sale, Comercio del día, BillPay, Anota y Gana, Mundial, Día del Padre y Tasa 0</a:t>
+              <a:t>Tasa 0, lanzamientos, rescates de fin de semana y referidos.</a:t>
             </a:r>
             <a:endParaRPr lang="en-US" sz="900" dirty="0"/>
           </a:p>
@@ -14112,7 +15040,7 @@
         <p:spPr>
           <a:xfrm>
             <a:off x="4299556" y="1410328"/>
-            <a:ext cx="3533150" cy="293580"/>
+            <a:ext cx="3593534" cy="293580"/>
           </a:xfrm>
           <a:prstGeom prst="rect">
             <a:avLst/>
@@ -14139,7 +15067,7 @@
                 <a:ea typeface="Inter" pitchFamily="34" charset="-122"/>
                 <a:cs typeface="Inter" pitchFamily="34" charset="-120"/>
               </a:rPr>
-              <a:t>Marketing, Sales, Product Growth y Others (NewProducts, QA); Collections no aparece</a:t>
+              <a:t>Marketing pone 92 M de los 141 M push que abre menos de 1 de cada 100.</a:t>
             </a:r>
             <a:endParaRPr lang="en-US" sz="900" dirty="0"/>
           </a:p>
@@ -14196,7 +15124,7 @@
         <p:spPr>
           <a:xfrm>
             <a:off x="8087156" y="1410328"/>
-            <a:ext cx="3387079" cy="144680"/>
+            <a:ext cx="3694744" cy="144680"/>
           </a:xfrm>
           <a:prstGeom prst="rect">
             <a:avLst/>
@@ -14223,7 +15151,7 @@
                 <a:ea typeface="Inter" pitchFamily="34" charset="-122"/>
                 <a:cs typeface="Inter" pitchFamily="34" charset="-120"/>
               </a:rPr>
-              <a:t>Recurrentes y activos de KPay, leads y envíos a toda la base</a:t>
+              <a:t>Leads (83 % de su push abre menos de 1 %) y bases frías (75 %).</a:t>
             </a:r>
             <a:endParaRPr lang="en-US" sz="900" dirty="0"/>
           </a:p>
@@ -14390,7 +15318,7 @@
                 <a:ea typeface="Inter" pitchFamily="34" charset="-122"/>
                 <a:cs typeface="Inter" pitchFamily="34" charset="-120"/>
               </a:rPr>
-              <a:t>2.26 M personas tuvieron en junio al menos un día con tres o más campañas; 1.30 M en enero.</a:t>
+              <a:t>141 M de 251 M push (56 %) van en campañas que abre menos de 1 de cada 100 personas.</a:t>
             </a:r>
             <a:endParaRPr lang="en-US" sz="940" dirty="0"/>
           </a:p>
@@ -14491,7 +15419,7 @@
                 <a:ea typeface="Inter" pitchFamily="34" charset="-122"/>
                 <a:cs typeface="Inter" pitchFamily="34" charset="-120"/>
               </a:rPr>
-              <a:t>Esos días son 9 % de las personas-día y llevan 24 % de los mensajes.</a:t>
+              <a:t>Rescate de fin de semana a leads de Marketing: 13.4 M push y 0.76 % de apertura.</a:t>
             </a:r>
             <a:endParaRPr lang="en-US" sz="940" dirty="0"/>
           </a:p>
@@ -14592,7 +15520,7 @@
                 <a:ea typeface="Inter" pitchFamily="34" charset="-122"/>
                 <a:cs typeface="Inter" pitchFamily="34" charset="-120"/>
               </a:rPr>
-              <a:t>Marketing está en 63 % de los choques promocionales; Sales en 41 % y Product Growth en 25 %.</a:t>
+              <a:t>Sí se abren los que la persona espera: pago recibido 14 %, Installments a activos 11 %.</a:t>
             </a:r>
             <a:endParaRPr lang="en-US" sz="940" dirty="0"/>
           </a:p>
@@ -14692,7 +15620,7 @@
         <p:spPr>
           <a:xfrm>
             <a:off x="8233041" y="3513009"/>
-            <a:ext cx="3444824" cy="301567"/>
+            <a:ext cx="3424955" cy="301567"/>
           </a:xfrm>
           <a:prstGeom prst="rect">
             <a:avLst/>
@@ -14719,7 +15647,7 @@
                 <a:ea typeface="Inter" pitchFamily="34" charset="-122"/>
                 <a:cs typeface="Inter" pitchFamily="34" charset="-120"/>
               </a:rPr>
-              <a:t>Nadie administra el calendario y el límite global de mensajes por persona de Braze está apagado.</a:t>
+              <a:t>El push se usa para mandar ofertas a toda la lista porque no cuesta, sin ver si esa persona abrió uno en meses.</a:t>
             </a:r>
             <a:endParaRPr lang="en-US" sz="920" dirty="0"/>
           </a:p>
@@ -14796,7 +15724,7 @@
         <p:spPr>
           <a:xfrm>
             <a:off x="1409876" y="6077461"/>
-            <a:ext cx="5340021" cy="182206"/>
+            <a:ext cx="6751678" cy="182206"/>
           </a:xfrm>
           <a:prstGeom prst="rect">
             <a:avLst/>
@@ -14823,7 +15751,7 @@
                 <a:ea typeface="Inter" pitchFamily="34" charset="-122"/>
                 <a:cs typeface="Inter" pitchFamily="34" charset="-120"/>
               </a:rPr>
-              <a:t>Hace falta un límite de mensajes por persona al día y un dueño del calendario.</a:t>
+              <a:t>Push solo a quien abrió uno en 60 días y con una razón para esa persona; para el resto, otro canal.</a:t>
             </a:r>
             <a:endParaRPr lang="en-US" sz="1100" dirty="0"/>
           </a:p>
@@ -14838,7 +15766,7 @@
         <p:spPr>
           <a:xfrm>
             <a:off x="511956" y="6454684"/>
-            <a:ext cx="10287962" cy="135035"/>
+            <a:ext cx="8658052" cy="135035"/>
           </a:xfrm>
           <a:prstGeom prst="rect">
             <a:avLst/>
@@ -14865,7 +15793,7 @@
                 <a:ea typeface="Inter" pitchFamily="34" charset="-122"/>
                 <a:cs typeface="Inter" pitchFamily="34" charset="-120"/>
               </a:rPr>
-              <a:t>Fuente: Braze, enero a septiembre 2026. Personas por mes: E6a. Parejas: E6b, 1,000 pares más frecuentes (muestra, no universo); promocional = nombre con ticket y equipo distinto de Collections.</a:t>
+              <a:t>Fuente: Braze, envíos por campaña, mes y canal, enero a septiembre 2026. Apertura directa sobre enviados. 322 campañas con 100 mil o más push (97 % del canal).</a:t>
             </a:r>
             <a:endParaRPr lang="en-US" sz="840" dirty="0"/>
           </a:p>
@@ -14981,7 +15909,7 @@
                 <a:ea typeface="Inter" pitchFamily="34" charset="-122"/>
                 <a:cs typeface="Inter" pitchFamily="34" charset="-120"/>
               </a:rPr>
-              <a:t>Marketing pierde a los usuarios nuevos en días; Product Growth pierde a la base vieja en meses</a:t>
+              <a:t>Cada mes hasta 2.3 M personas reciben tres o más campañas el mismo día, casi siempre con Marketing</a:t>
             </a:r>
             <a:endParaRPr lang="en-US" sz="2210" dirty="0"/>
           </a:p>
@@ -15084,7 +16012,7 @@
         <p:spPr>
           <a:xfrm>
             <a:off x="511956" y="1410328"/>
-            <a:ext cx="3652521" cy="293580"/>
+            <a:ext cx="3703281" cy="293580"/>
           </a:xfrm>
           <a:prstGeom prst="rect">
             <a:avLst/>
@@ -15111,7 +16039,7 @@
                 <a:ea typeface="Inter" pitchFamily="34" charset="-122"/>
                 <a:cs typeface="Inter" pitchFamily="34" charset="-120"/>
               </a:rPr>
-              <a:t>Nuevos: recordatorio de registro, Tasa 0, BillPay. Base vieja: Tasa 0, referidos.</a:t>
+              <a:t>Hot Sale, Comercio del día, BillPay, Anota y Gana, Mundial, Día del Padre y Tasa 0</a:t>
             </a:r>
             <a:endParaRPr lang="en-US" sz="900" dirty="0"/>
           </a:p>
@@ -15168,7 +16096,7 @@
         <p:spPr>
           <a:xfrm>
             <a:off x="4299556" y="1410328"/>
-            <a:ext cx="3690242" cy="144680"/>
+            <a:ext cx="3533150" cy="293580"/>
           </a:xfrm>
           <a:prstGeom prst="rect">
             <a:avLst/>
@@ -15195,7 +16123,7 @@
                 <a:ea typeface="Inter" pitchFamily="34" charset="-122"/>
                 <a:cs typeface="Inter" pitchFamily="34" charset="-120"/>
               </a:rPr>
-              <a:t>Marketing y Product Growth; Others por un solo correo de BillPay.</a:t>
+              <a:t>Marketing, Sales, Product Growth y Others (NewProducts, QA); Collections no aparece</a:t>
             </a:r>
             <a:endParaRPr lang="en-US" sz="900" dirty="0"/>
           </a:p>
@@ -15252,7 +16180,7 @@
         <p:spPr>
           <a:xfrm>
             <a:off x="8087156" y="1410328"/>
-            <a:ext cx="3687137" cy="293580"/>
+            <a:ext cx="3387079" cy="144680"/>
           </a:xfrm>
           <a:prstGeom prst="rect">
             <a:avLst/>
@@ -15279,7 +16207,7 @@
                 <a:ea typeface="Inter" pitchFamily="34" charset="-122"/>
                 <a:cs typeface="Inter" pitchFamily="34" charset="-120"/>
               </a:rPr>
-              <a:t>Nuevos: primer correo desde febrero (158.5 mil bajas). Base vieja: enero (242.3 mil).</a:t>
+              <a:t>Recurrentes y activos de KPay, leads y envíos a toda la base</a:t>
             </a:r>
             <a:endParaRPr lang="en-US" sz="900" dirty="0"/>
           </a:p>
@@ -15446,7 +16374,7 @@
                 <a:ea typeface="Inter" pitchFamily="34" charset="-122"/>
                 <a:cs typeface="Inter" pitchFamily="34" charset="-120"/>
               </a:rPr>
-              <a:t>Nuevos: Marketing pierde 70 mil en 5 días con 10 correos; la mitad con el recordatorio de registro.</a:t>
+              <a:t>2.26 M personas tuvieron en junio al menos un día con tres o más campañas; 1.30 M en enero.</a:t>
             </a:r>
             <a:endParaRPr lang="en-US" sz="940" dirty="0"/>
           </a:p>
@@ -15547,7 +16475,7 @@
                 <a:ea typeface="Inter" pitchFamily="34" charset="-122"/>
                 <a:cs typeface="Inter" pitchFamily="34" charset="-120"/>
               </a:rPr>
-              <a:t>Base vieja: Product Growth pierde 87.5 mil en 128 días con 31 correos, unos dos por semana.</a:t>
+              <a:t>Esos días son 9 % de las personas-día y llevan 24 % de los mensajes.</a:t>
             </a:r>
             <a:endParaRPr lang="en-US" sz="940" dirty="0"/>
           </a:p>
@@ -15648,7 +16576,7 @@
                 <a:ea typeface="Inter" pitchFamily="34" charset="-122"/>
                 <a:cs typeface="Inter" pitchFamily="34" charset="-120"/>
               </a:rPr>
-              <a:t>El lanzamiento de BillPay se llevó 49 mil nuevos con un solo correo: casi un tercio de sus bajas.</a:t>
+              <a:t>Marketing está en 63 % de los choques promocionales; Sales en 41 % y Product Growth en 25 %.</a:t>
             </a:r>
             <a:endParaRPr lang="en-US" sz="940" dirty="0"/>
           </a:p>
@@ -15663,7 +16591,7 @@
         <p:spPr>
           <a:xfrm>
             <a:off x="8094390" y="3291167"/>
-            <a:ext cx="3585349" cy="753391"/>
+            <a:ext cx="3585349" cy="596503"/>
           </a:xfrm>
           <a:prstGeom prst="rect">
             <a:avLst/>
@@ -15683,7 +16611,7 @@
         <p:spPr>
           <a:xfrm>
             <a:off x="8108858" y="3291167"/>
-            <a:ext cx="0" cy="753391"/>
+            <a:ext cx="0" cy="596503"/>
           </a:xfrm>
           <a:prstGeom prst="line">
             <a:avLst/>
@@ -15748,7 +16676,7 @@
         <p:spPr>
           <a:xfrm>
             <a:off x="8233041" y="3513009"/>
-            <a:ext cx="3270501" cy="458455"/>
+            <a:ext cx="3444824" cy="301567"/>
           </a:xfrm>
           <a:prstGeom prst="rect">
             <a:avLst/>
@@ -15775,7 +16703,7 @@
                 <a:ea typeface="Inter" pitchFamily="34" charset="-122"/>
                 <a:cs typeface="Inter" pitchFamily="34" charset="-120"/>
               </a:rPr>
-              <a:t>Marketing junta recordatorios diarios sobre el recién llegado; Product Growth repite ofertas de crédito durante meses.</a:t>
+              <a:t>Nadie administra el calendario y el límite global de mensajes por persona de Braze está apagado.</a:t>
             </a:r>
             <a:endParaRPr lang="en-US" sz="920" dirty="0"/>
           </a:p>
@@ -15852,7 +16780,7 @@
         <p:spPr>
           <a:xfrm>
             <a:off x="1409876" y="6077461"/>
-            <a:ext cx="6716441" cy="182206"/>
+            <a:ext cx="5340021" cy="182206"/>
           </a:xfrm>
           <a:prstGeom prst="rect">
             <a:avLst/>
@@ -15879,7 +16807,7 @@
                 <a:ea typeface="Inter" pitchFamily="34" charset="-122"/>
                 <a:cs typeface="Inter" pitchFamily="34" charset="-120"/>
               </a:rPr>
-              <a:t>Nuevo: un correo al día y tres la primera semana. Base vieja: menos ofertas de crédito no pedidas.</a:t>
+              <a:t>Hace falta un límite de mensajes por persona al día y un dueño del calendario.</a:t>
             </a:r>
             <a:endParaRPr lang="en-US" sz="1100" dirty="0"/>
           </a:p>
@@ -15894,7 +16822,7 @@
         <p:spPr>
           <a:xfrm>
             <a:off x="511956" y="6454684"/>
-            <a:ext cx="8349300" cy="135035"/>
+            <a:ext cx="10287962" cy="135035"/>
           </a:xfrm>
           <a:prstGeom prst="rect">
             <a:avLst/>
@@ -15921,7 +16849,7 @@
                 <a:ea typeface="Inter" pitchFamily="34" charset="-122"/>
                 <a:cs typeface="Inter" pitchFamily="34" charset="-120"/>
               </a:rPr>
-              <a:t>Fuente: Braze, días y correos hasta la baja (E8 v3) por campaña que llegó ese día; 400.8 mil bajas, enero a septiembre 2026. Días: mediana; correos: promedio.</a:t>
+              <a:t>Fuente: Braze, enero a septiembre 2026. Personas por mes: E6a. Parejas: E6b, 1,000 pares más frecuentes (muestra, no universo); promocional = nombre con ticket y equipo distinto de Collections.</a:t>
             </a:r>
             <a:endParaRPr lang="en-US" sz="840" dirty="0"/>
           </a:p>
@@ -16037,7 +16965,7 @@
                 <a:ea typeface="Inter" pitchFamily="34" charset="-122"/>
                 <a:cs typeface="Inter" pitchFamily="34" charset="-120"/>
               </a:rPr>
-              <a:t>A quien se dio de baja le siguen llegando promociones de Tasa 0 y referidos, casi todas de Marketing</a:t>
+              <a:t>Marketing pierde a los usuarios nuevos en días; Product Growth pierde a la base vieja en meses</a:t>
             </a:r>
             <a:endParaRPr lang="en-US" sz="2210" dirty="0"/>
           </a:p>
@@ -16140,7 +17068,7 @@
         <p:spPr>
           <a:xfrm>
             <a:off x="511956" y="1410328"/>
-            <a:ext cx="3486891" cy="293580"/>
+            <a:ext cx="3652521" cy="293580"/>
           </a:xfrm>
           <a:prstGeom prst="rect">
             <a:avLst/>
@@ -16167,7 +17095,7 @@
                 <a:ea typeface="Inter" pitchFamily="34" charset="-122"/>
                 <a:cs typeface="Inter" pitchFamily="34" charset="-120"/>
               </a:rPr>
-              <a:t>Correo promocional: Tasa 0, newsletters, referidos, cupones y recordatorio de registro</a:t>
+              <a:t>Nuevos: recordatorio de registro, Tasa 0, BillPay. Base vieja: Tasa 0, referidos.</a:t>
             </a:r>
             <a:endParaRPr lang="en-US" sz="900" dirty="0"/>
           </a:p>
@@ -16224,7 +17152,7 @@
         <p:spPr>
           <a:xfrm>
             <a:off x="4299556" y="1410328"/>
-            <a:ext cx="3195836" cy="144680"/>
+            <a:ext cx="3690242" cy="144680"/>
           </a:xfrm>
           <a:prstGeom prst="rect">
             <a:avLst/>
@@ -16251,7 +17179,7 @@
                 <a:ea typeface="Inter" pitchFamily="34" charset="-122"/>
                 <a:cs typeface="Inter" pitchFamily="34" charset="-120"/>
               </a:rPr>
-              <a:t>Marketing (58 de 79 mil), Product Growth, Sales y Others</a:t>
+              <a:t>Marketing y Product Growth; Others por un solo correo de BillPay.</a:t>
             </a:r>
             <a:endParaRPr lang="en-US" sz="900" dirty="0"/>
           </a:p>
@@ -16308,7 +17236,7 @@
         <p:spPr>
           <a:xfrm>
             <a:off x="8087156" y="1410328"/>
-            <a:ext cx="3246130" cy="144680"/>
+            <a:ext cx="3687137" cy="293580"/>
           </a:xfrm>
           <a:prstGeom prst="rect">
             <a:avLst/>
@@ -16335,7 +17263,7 @@
                 <a:ea typeface="Inter" pitchFamily="34" charset="-122"/>
                 <a:cs typeface="Inter" pitchFamily="34" charset="-120"/>
               </a:rPr>
-              <a:t>45 mil personas que ya se habían dado de baja del correo</a:t>
+              <a:t>Nuevos: primer correo desde febrero (158.5 mil bajas). Base vieja: enero (242.3 mil).</a:t>
             </a:r>
             <a:endParaRPr lang="en-US" sz="900" dirty="0"/>
           </a:p>
@@ -16502,7 +17430,7 @@
                 <a:ea typeface="Inter" pitchFamily="34" charset="-122"/>
                 <a:cs typeface="Inter" pitchFamily="34" charset="-120"/>
               </a:rPr>
-              <a:t>94 % de lo que llega tras la baja es cobranza y avisos de pago: eso sí procede.</a:t>
+              <a:t>Nuevos: Marketing pierde 70 mil en 5 días con 10 correos; la mitad con el recordatorio de registro.</a:t>
             </a:r>
             <a:endParaRPr lang="en-US" sz="940" dirty="0"/>
           </a:p>
@@ -16603,7 +17531,7 @@
                 <a:ea typeface="Inter" pitchFamily="34" charset="-122"/>
                 <a:cs typeface="Inter" pitchFamily="34" charset="-120"/>
               </a:rPr>
-              <a:t>79 mil promociones; la mayor, rescate con Tasa 0 a leads rezagados (Marketing), 13.9 mil.</a:t>
+              <a:t>Base vieja: Product Growth pierde 87.5 mil en 128 días con 31 correos, unos dos por semana.</a:t>
             </a:r>
             <a:endParaRPr lang="en-US" sz="940" dirty="0"/>
           </a:p>
@@ -16704,7 +17632,7 @@
                 <a:ea typeface="Inter" pitchFamily="34" charset="-122"/>
                 <a:cs typeface="Inter" pitchFamily="34" charset="-120"/>
               </a:rPr>
-              <a:t>El recordatorio de Veriff siguió llegando nueve meses seguidos a quien ya se había dado de baja.</a:t>
+              <a:t>El lanzamiento de BillPay se llevó 49 mil nuevos con un solo correo: casi un tercio de sus bajas.</a:t>
             </a:r>
             <a:endParaRPr lang="en-US" sz="940" dirty="0"/>
           </a:p>
@@ -16719,7 +17647,7 @@
         <p:spPr>
           <a:xfrm>
             <a:off x="8094390" y="3291167"/>
-            <a:ext cx="3585349" cy="596503"/>
+            <a:ext cx="3585349" cy="753391"/>
           </a:xfrm>
           <a:prstGeom prst="rect">
             <a:avLst/>
@@ -16739,7 +17667,7 @@
         <p:spPr>
           <a:xfrm>
             <a:off x="8108858" y="3291167"/>
-            <a:ext cx="0" cy="596503"/>
+            <a:ext cx="0" cy="753391"/>
           </a:xfrm>
           <a:prstGeom prst="line">
             <a:avLst/>
@@ -16804,7 +17732,7 @@
         <p:spPr>
           <a:xfrm>
             <a:off x="8233041" y="3513009"/>
-            <a:ext cx="3452120" cy="301567"/>
+            <a:ext cx="3270501" cy="458455"/>
           </a:xfrm>
           <a:prstGeom prst="rect">
             <a:avLst/>
@@ -16831,7 +17759,7 @@
                 <a:ea typeface="Inter" pitchFamily="34" charset="-122"/>
                 <a:cs typeface="Inter" pitchFamily="34" charset="-120"/>
               </a:rPr>
-              <a:t>El filtro de suscripción está en la entrada del Canvas y no en cada paso de correo (lo más probable).</a:t>
+              <a:t>Marketing junta recordatorios diarios sobre el recién llegado; Product Growth repite ofertas de crédito durante meses.</a:t>
             </a:r>
             <a:endParaRPr lang="en-US" sz="920" dirty="0"/>
           </a:p>
@@ -16908,7 +17836,7 @@
         <p:spPr>
           <a:xfrm>
             <a:off x="1409876" y="6077461"/>
-            <a:ext cx="6946026" cy="182206"/>
+            <a:ext cx="6716441" cy="182206"/>
           </a:xfrm>
           <a:prstGeom prst="rect">
             <a:avLst/>
@@ -16935,7 +17863,7 @@
                 <a:ea typeface="Inter" pitchFamily="34" charset="-122"/>
                 <a:cs typeface="Inter" pitchFamily="34" charset="-120"/>
               </a:rPr>
-              <a:t>Ajuste de configuración, no de negocio: filtro de suscripción en cada paso de correo, en una semana.</a:t>
+              <a:t>Nuevo: un correo al día y tres la primera semana. Base vieja: menos ofertas de crédito no pedidas.</a:t>
             </a:r>
             <a:endParaRPr lang="en-US" sz="1100" dirty="0"/>
           </a:p>
@@ -16950,7 +17878,7 @@
         <p:spPr>
           <a:xfrm>
             <a:off x="511956" y="6454684"/>
-            <a:ext cx="8943364" cy="135035"/>
+            <a:ext cx="8349300" cy="135035"/>
           </a:xfrm>
           <a:prstGeom prst="rect">
             <a:avLst/>
@@ -16977,7 +17905,7 @@
                 <a:ea typeface="Inter" pitchFamily="34" charset="-122"/>
                 <a:cs typeface="Inter" pitchFamily="34" charset="-120"/>
               </a:rPr>
-              <a:t>Fuente: Braze E5b (correos después de la baja), enero a septiembre 2026; tipo de mensaje del catálogo de campañas (muestra C). Cada punto es un Canvas con su fecha.</a:t>
+              <a:t>Fuente: Braze, días y correos hasta la baja (E8 v3) por campaña que llegó ese día; 400.8 mil bajas, enero a septiembre 2026. Días: mediana; correos: promedio.</a:t>
             </a:r>
             <a:endParaRPr lang="en-US" sz="840" dirty="0"/>
           </a:p>

--- a/braze-analysis/deck/v6/marketing/DECK_marketing.pptx
+++ b/braze-analysis/deck/v6/marketing/DECK_marketing.pptx
@@ -121,7 +121,7 @@
   <p:extLst>
     <p:ext uri="{521415D9-36F7-43E2-AB2F-B90AF26B5E84}">
       <p14:sectionLst xmlns:p14="http://schemas.microsoft.com/office/powerpoint/2010/main">
-        <p14:section name="Inicio" id="{9ed9d948-b8e3-76d5-6a96-2a0294e6a1b6}">
+        <p14:section name="Inicio" id="{7c664dc1-3743-8b88-25b4-d2ec0fa60e18}">
           <p14:sldIdLst>
             <p14:sldId id="256"/>
             <p14:sldId id="257"/>
@@ -6031,7 +6031,7 @@
                 <a:ea typeface="Inter" pitchFamily="34" charset="-122"/>
                 <a:cs typeface="Inter" pitchFamily="34" charset="-120"/>
               </a:rPr>
-              <a:t>Cada punto es una comunicación que mandó algo en 2026, por problema de orden</a:t>
+              <a:t>Las 13 campañas con más versiones: casi cada mes se estrena una copia nueva</a:t>
             </a:r>
             <a:endParaRPr lang="en-US" sz="960" dirty="0"/>
           </a:p>
@@ -6054,7 +6054,7 @@
         <p:spPr>
           <a:xfrm>
             <a:off x="511956" y="2771676"/>
-            <a:ext cx="6959858" cy="2930522"/>
+            <a:ext cx="6960009" cy="2979804"/>
           </a:xfrm>
           <a:prstGeom prst="rect">
             <a:avLst/>
@@ -7609,7 +7609,7 @@
                 <a:ea typeface="Inter" pitchFamily="34" charset="-122"/>
                 <a:cs typeface="Inter" pitchFamily="34" charset="-120"/>
               </a:rPr>
-              <a:t>502 campañas mandaron promociones a quien no debía recibirlas; las 10 primeras suman solo 24 %</a:t>
+              <a:t>Las 30 campañas que más promociones mandaron a quien no debía: 44 % de lo que mandaron 502</a:t>
             </a:r>
             <a:endParaRPr lang="en-US" sz="960" dirty="0"/>
           </a:p>
@@ -7632,7 +7632,7 @@
         <p:spPr>
           <a:xfrm>
             <a:off x="511956" y="3523107"/>
-            <a:ext cx="6742235" cy="2380889"/>
+            <a:ext cx="6742235" cy="2486234"/>
           </a:xfrm>
           <a:prstGeom prst="rect">
             <a:avLst/>
@@ -9985,7 +9985,7 @@
                 <a:ea typeface="Inter" pitchFamily="34" charset="-122"/>
                 <a:cs typeface="Inter" pitchFamily="34" charset="-120"/>
               </a:rPr>
-              <a:t>Cada punto es una campaña con 20 mil MXN o más: gasto contra MXN por conversión</a:t>
+              <a:t>Campañas de Marketing de la que más gasta a la que menos: gasto contra conversiones acumuladas</a:t>
             </a:r>
             <a:endParaRPr lang="en-US" sz="960" dirty="0"/>
           </a:p>
@@ -10153,7 +10153,7 @@
                 <a:ea typeface="Inter" pitchFamily="34" charset="-122"/>
                 <a:cs typeface="Inter" pitchFamily="34" charset="-120"/>
               </a:rPr>
-              <a:t> La campaña típica de Marketing paga 128 MXN por conversión; la del resto, 34. Gastar más no la abarata (R² 0.03).</a:t>
+              <a:t> Cinco campañas son 46 % del gasto de Marketing y traen 23 % de sus conversiones; la mayor, Tasa 0 a rezagados.</a:t>
             </a:r>
             <a:endParaRPr lang="en-US" sz="1060" dirty="0"/>
           </a:p>
